--- a/08_submission/VK26-IITI-HT-0050_Stage2_Dermasense.pptx
+++ b/08_submission/VK26-IITI-HT-0050_Stage2_Dermasense.pptx
@@ -9,22 +9,13 @@
   </p:notesMasterIdLst>
   <p:sldIdLst>
     <p:sldId id="256" r:id="rId7"/>
-    <p:sldId id="257" r:id="rId8"/>
-    <p:sldId id="258" r:id="rId9"/>
     <p:sldId id="259" r:id="rId10"/>
-    <p:sldId id="260" r:id="rId11"/>
+    <p:sldId id="276" r:id="rId47"/>
     <p:sldId id="261" r:id="rId12"/>
-    <p:sldId id="262" r:id="rId13"/>
     <p:sldId id="263" r:id="rId14"/>
-    <p:sldId id="264" r:id="rId15"/>
     <p:sldId id="265" r:id="rId16"/>
-    <p:sldId id="266" r:id="rId17"/>
     <p:sldId id="267" r:id="rId18"/>
-    <p:sldId id="268" r:id="rId19"/>
-    <p:sldId id="269" r:id="rId20"/>
     <p:sldId id="270" r:id="rId21"/>
-    <p:sldId id="271" r:id="rId22"/>
-    <p:sldId id="272" r:id="rId23"/>
     <p:sldId id="273" r:id="rId24"/>
     <p:sldId id="274" r:id="rId25"/>
     <p:sldId id="275" r:id="rId26"/>
@@ -940,105 +931,6 @@
 </p:notes>
 </file>
 
-<file path=ppt/notesSlides/notesSlide11.xml><?xml version="1.0" encoding="utf-8"?>
-<p:notes xmlns:a="http://schemas.openxmlformats.org/drawingml/2006/main" xmlns:r="http://schemas.openxmlformats.org/officeDocument/2006/relationships" xmlns:mc="http://schemas.openxmlformats.org/markup-compatibility/2006" xmlns:mv="urn:schemas-microsoft-com:mac:vml" xmlns:p="http://schemas.openxmlformats.org/presentationml/2006/main" xmlns:c="http://schemas.openxmlformats.org/drawingml/2006/chart" xmlns:dgm="http://schemas.openxmlformats.org/drawingml/2006/diagram" xmlns:o="urn:schemas-microsoft-com:office:office" xmlns:v="urn:schemas-microsoft-com:vml" xmlns:pvml="urn:schemas-microsoft-com:office:powerpoint" xmlns:com="http://schemas.openxmlformats.org/drawingml/2006/compatibility" xmlns:p14="http://schemas.microsoft.com/office/powerpoint/2010/main" xmlns:p15="http://schemas.microsoft.com/office/powerpoint/2012/main" xmlns:ahyp="http://schemas.microsoft.com/office/drawing/2018/hyperlinkcolor" showMasterPhAnim="0" showMasterSp="0">
-  <p:cSld>
-    <p:spTree>
-      <p:nvGrpSpPr>
-        <p:cNvPr id="326" name="Shape 326"/>
-        <p:cNvGrpSpPr/>
-        <p:nvPr/>
-      </p:nvGrpSpPr>
-      <p:grpSpPr>
-        <a:xfrm>
-          <a:off x="0" y="0"/>
-          <a:ext cx="0" cy="0"/>
-          <a:chOff x="0" y="0"/>
-          <a:chExt cx="0" cy="0"/>
-        </a:xfrm>
-      </p:grpSpPr>
-      <p:sp>
-        <p:nvSpPr>
-          <p:cNvPr id="327" name="Google Shape;327;g3fb70659208_12_0:notes"/>
-          <p:cNvSpPr txBox="1"/>
-          <p:nvPr>
-            <p:ph idx="1" type="body"/>
-          </p:nvPr>
-        </p:nvSpPr>
-        <p:spPr>
-          <a:xfrm>
-            <a:off x="685800" y="4343400"/>
-            <a:ext cx="5486400" cy="4114800"/>
-          </a:xfrm>
-          <a:prstGeom prst="rect">
-            <a:avLst/>
-          </a:prstGeom>
-        </p:spPr>
-        <p:txBody>
-          <a:bodyPr anchorCtr="0" anchor="t" bIns="91425" lIns="91425" spcFirstLastPara="1" rIns="91425" wrap="square" tIns="91425">
-            <a:noAutofit/>
-          </a:bodyPr>
-          <a:lstStyle/>
-          <a:p>
-            <a:pPr indent="0" lvl="0" marL="0" rtl="0" algn="l">
-              <a:spcBef>
-                <a:spcPts val="0"/>
-              </a:spcBef>
-              <a:spcAft>
-                <a:spcPts val="0"/>
-              </a:spcAft>
-              <a:buNone/>
-            </a:pPr>
-            <a:r>
-              <a:t/>
-            </a:r>
-            <a:endParaRPr/>
-          </a:p>
-        </p:txBody>
-      </p:sp>
-      <p:sp>
-        <p:nvSpPr>
-          <p:cNvPr id="328" name="Google Shape;328;g3fb70659208_12_0:notes"/>
-          <p:cNvSpPr/>
-          <p:nvPr>
-            <p:ph idx="2" type="sldImg"/>
-          </p:nvPr>
-        </p:nvSpPr>
-        <p:spPr>
-          <a:xfrm>
-            <a:off x="1143225" y="685800"/>
-            <a:ext cx="4572225" cy="3429000"/>
-          </a:xfrm>
-          <a:custGeom>
-            <a:rect b="b" l="l" r="r" t="t"/>
-            <a:pathLst>
-              <a:path extrusionOk="0" h="120000" w="120000">
-                <a:moveTo>
-                  <a:pt x="0" y="0"/>
-                </a:moveTo>
-                <a:lnTo>
-                  <a:pt x="120000" y="0"/>
-                </a:lnTo>
-                <a:lnTo>
-                  <a:pt x="120000" y="120000"/>
-                </a:lnTo>
-                <a:lnTo>
-                  <a:pt x="0" y="120000"/>
-                </a:lnTo>
-                <a:close/>
-              </a:path>
-            </a:pathLst>
-          </a:custGeom>
-        </p:spPr>
-      </p:sp>
-    </p:spTree>
-  </p:cSld>
-  <p:clrMapOvr>
-    <a:masterClrMapping/>
-  </p:clrMapOvr>
-</p:notes>
-</file>
-
 <file path=ppt/notesSlides/notesSlide12.xml><?xml version="1.0" encoding="utf-8"?>
 <p:notes xmlns:a="http://schemas.openxmlformats.org/drawingml/2006/main" xmlns:r="http://schemas.openxmlformats.org/officeDocument/2006/relationships" xmlns:mc="http://schemas.openxmlformats.org/markup-compatibility/2006" xmlns:mv="urn:schemas-microsoft-com:mac:vml" xmlns:p="http://schemas.openxmlformats.org/presentationml/2006/main" xmlns:c="http://schemas.openxmlformats.org/drawingml/2006/chart" xmlns:dgm="http://schemas.openxmlformats.org/drawingml/2006/diagram" xmlns:o="urn:schemas-microsoft-com:office:office" xmlns:v="urn:schemas-microsoft-com:vml" xmlns:pvml="urn:schemas-microsoft-com:office:powerpoint" xmlns:com="http://schemas.openxmlformats.org/drawingml/2006/compatibility" xmlns:p14="http://schemas.microsoft.com/office/powerpoint/2010/main" xmlns:p15="http://schemas.microsoft.com/office/powerpoint/2012/main" xmlns:ahyp="http://schemas.microsoft.com/office/drawing/2018/hyperlinkcolor" showMasterPhAnim="0" showMasterSp="0">
   <p:cSld>
@@ -1098,204 +990,6 @@
       <p:sp>
         <p:nvSpPr>
           <p:cNvPr id="360" name="Google Shape;360;g3fb70659208_26_143:notes"/>
-          <p:cNvSpPr/>
-          <p:nvPr>
-            <p:ph idx="2" type="sldImg"/>
-          </p:nvPr>
-        </p:nvSpPr>
-        <p:spPr>
-          <a:xfrm>
-            <a:off x="1143225" y="685800"/>
-            <a:ext cx="4572225" cy="3429000"/>
-          </a:xfrm>
-          <a:custGeom>
-            <a:rect b="b" l="l" r="r" t="t"/>
-            <a:pathLst>
-              <a:path extrusionOk="0" h="120000" w="120000">
-                <a:moveTo>
-                  <a:pt x="0" y="0"/>
-                </a:moveTo>
-                <a:lnTo>
-                  <a:pt x="120000" y="0"/>
-                </a:lnTo>
-                <a:lnTo>
-                  <a:pt x="120000" y="120000"/>
-                </a:lnTo>
-                <a:lnTo>
-                  <a:pt x="0" y="120000"/>
-                </a:lnTo>
-                <a:close/>
-              </a:path>
-            </a:pathLst>
-          </a:custGeom>
-        </p:spPr>
-      </p:sp>
-    </p:spTree>
-  </p:cSld>
-  <p:clrMapOvr>
-    <a:masterClrMapping/>
-  </p:clrMapOvr>
-</p:notes>
-</file>
-
-<file path=ppt/notesSlides/notesSlide13.xml><?xml version="1.0" encoding="utf-8"?>
-<p:notes xmlns:a="http://schemas.openxmlformats.org/drawingml/2006/main" xmlns:r="http://schemas.openxmlformats.org/officeDocument/2006/relationships" xmlns:mc="http://schemas.openxmlformats.org/markup-compatibility/2006" xmlns:mv="urn:schemas-microsoft-com:mac:vml" xmlns:p="http://schemas.openxmlformats.org/presentationml/2006/main" xmlns:c="http://schemas.openxmlformats.org/drawingml/2006/chart" xmlns:dgm="http://schemas.openxmlformats.org/drawingml/2006/diagram" xmlns:o="urn:schemas-microsoft-com:office:office" xmlns:v="urn:schemas-microsoft-com:vml" xmlns:pvml="urn:schemas-microsoft-com:office:powerpoint" xmlns:com="http://schemas.openxmlformats.org/drawingml/2006/compatibility" xmlns:p14="http://schemas.microsoft.com/office/powerpoint/2010/main" xmlns:p15="http://schemas.microsoft.com/office/powerpoint/2012/main" xmlns:ahyp="http://schemas.microsoft.com/office/drawing/2018/hyperlinkcolor" showMasterPhAnim="0" showMasterSp="0">
-  <p:cSld>
-    <p:spTree>
-      <p:nvGrpSpPr>
-        <p:cNvPr id="383" name="Shape 383"/>
-        <p:cNvGrpSpPr/>
-        <p:nvPr/>
-      </p:nvGrpSpPr>
-      <p:grpSpPr>
-        <a:xfrm>
-          <a:off x="0" y="0"/>
-          <a:ext cx="0" cy="0"/>
-          <a:chOff x="0" y="0"/>
-          <a:chExt cx="0" cy="0"/>
-        </a:xfrm>
-      </p:grpSpPr>
-      <p:sp>
-        <p:nvSpPr>
-          <p:cNvPr id="384" name="Google Shape;384;g3fb70659208_0_20:notes"/>
-          <p:cNvSpPr txBox="1"/>
-          <p:nvPr>
-            <p:ph idx="1" type="body"/>
-          </p:nvPr>
-        </p:nvSpPr>
-        <p:spPr>
-          <a:xfrm>
-            <a:off x="685800" y="4343400"/>
-            <a:ext cx="5486400" cy="4114800"/>
-          </a:xfrm>
-          <a:prstGeom prst="rect">
-            <a:avLst/>
-          </a:prstGeom>
-        </p:spPr>
-        <p:txBody>
-          <a:bodyPr anchorCtr="0" anchor="t" bIns="91425" lIns="91425" spcFirstLastPara="1" rIns="91425" wrap="square" tIns="91425">
-            <a:noAutofit/>
-          </a:bodyPr>
-          <a:lstStyle/>
-          <a:p>
-            <a:pPr indent="0" lvl="0" marL="0" rtl="0" algn="l">
-              <a:spcBef>
-                <a:spcPts val="0"/>
-              </a:spcBef>
-              <a:spcAft>
-                <a:spcPts val="0"/>
-              </a:spcAft>
-              <a:buNone/>
-            </a:pPr>
-            <a:r>
-              <a:t/>
-            </a:r>
-            <a:endParaRPr/>
-          </a:p>
-        </p:txBody>
-      </p:sp>
-      <p:sp>
-        <p:nvSpPr>
-          <p:cNvPr id="385" name="Google Shape;385;g3fb70659208_0_20:notes"/>
-          <p:cNvSpPr/>
-          <p:nvPr>
-            <p:ph idx="2" type="sldImg"/>
-          </p:nvPr>
-        </p:nvSpPr>
-        <p:spPr>
-          <a:xfrm>
-            <a:off x="1143225" y="685800"/>
-            <a:ext cx="4572300" cy="3429000"/>
-          </a:xfrm>
-          <a:custGeom>
-            <a:rect b="b" l="l" r="r" t="t"/>
-            <a:pathLst>
-              <a:path extrusionOk="0" h="120000" w="120000">
-                <a:moveTo>
-                  <a:pt x="0" y="0"/>
-                </a:moveTo>
-                <a:lnTo>
-                  <a:pt x="120000" y="0"/>
-                </a:lnTo>
-                <a:lnTo>
-                  <a:pt x="120000" y="120000"/>
-                </a:lnTo>
-                <a:lnTo>
-                  <a:pt x="0" y="120000"/>
-                </a:lnTo>
-                <a:close/>
-              </a:path>
-            </a:pathLst>
-          </a:custGeom>
-        </p:spPr>
-      </p:sp>
-    </p:spTree>
-  </p:cSld>
-  <p:clrMapOvr>
-    <a:masterClrMapping/>
-  </p:clrMapOvr>
-</p:notes>
-</file>
-
-<file path=ppt/notesSlides/notesSlide14.xml><?xml version="1.0" encoding="utf-8"?>
-<p:notes xmlns:a="http://schemas.openxmlformats.org/drawingml/2006/main" xmlns:r="http://schemas.openxmlformats.org/officeDocument/2006/relationships" xmlns:mc="http://schemas.openxmlformats.org/markup-compatibility/2006" xmlns:mv="urn:schemas-microsoft-com:mac:vml" xmlns:p="http://schemas.openxmlformats.org/presentationml/2006/main" xmlns:c="http://schemas.openxmlformats.org/drawingml/2006/chart" xmlns:dgm="http://schemas.openxmlformats.org/drawingml/2006/diagram" xmlns:o="urn:schemas-microsoft-com:office:office" xmlns:v="urn:schemas-microsoft-com:vml" xmlns:pvml="urn:schemas-microsoft-com:office:powerpoint" xmlns:com="http://schemas.openxmlformats.org/drawingml/2006/compatibility" xmlns:p14="http://schemas.microsoft.com/office/powerpoint/2010/main" xmlns:p15="http://schemas.microsoft.com/office/powerpoint/2012/main" xmlns:ahyp="http://schemas.microsoft.com/office/drawing/2018/hyperlinkcolor" showMasterPhAnim="0" showMasterSp="0">
-  <p:cSld>
-    <p:spTree>
-      <p:nvGrpSpPr>
-        <p:cNvPr id="400" name="Shape 400"/>
-        <p:cNvGrpSpPr/>
-        <p:nvPr/>
-      </p:nvGrpSpPr>
-      <p:grpSpPr>
-        <a:xfrm>
-          <a:off x="0" y="0"/>
-          <a:ext cx="0" cy="0"/>
-          <a:chOff x="0" y="0"/>
-          <a:chExt cx="0" cy="0"/>
-        </a:xfrm>
-      </p:grpSpPr>
-      <p:sp>
-        <p:nvSpPr>
-          <p:cNvPr id="401" name="Google Shape;401;p7:notes"/>
-          <p:cNvSpPr txBox="1"/>
-          <p:nvPr>
-            <p:ph idx="1" type="body"/>
-          </p:nvPr>
-        </p:nvSpPr>
-        <p:spPr>
-          <a:xfrm>
-            <a:off x="685800" y="4343400"/>
-            <a:ext cx="5486400" cy="4114800"/>
-          </a:xfrm>
-          <a:prstGeom prst="rect">
-            <a:avLst/>
-          </a:prstGeom>
-        </p:spPr>
-        <p:txBody>
-          <a:bodyPr anchorCtr="0" anchor="t" bIns="91425" lIns="91425" spcFirstLastPara="1" rIns="91425" wrap="square" tIns="91425">
-            <a:noAutofit/>
-          </a:bodyPr>
-          <a:lstStyle/>
-          <a:p>
-            <a:pPr indent="0" lvl="0" marL="0" rtl="0" algn="l">
-              <a:spcBef>
-                <a:spcPts val="0"/>
-              </a:spcBef>
-              <a:spcAft>
-                <a:spcPts val="0"/>
-              </a:spcAft>
-              <a:buNone/>
-            </a:pPr>
-            <a:r>
-              <a:t/>
-            </a:r>
-            <a:endParaRPr/>
-          </a:p>
-        </p:txBody>
-      </p:sp>
-      <p:sp>
-        <p:nvSpPr>
-          <p:cNvPr id="402" name="Google Shape;402;p7:notes"/>
           <p:cNvSpPr/>
           <p:nvPr>
             <p:ph idx="2" type="sldImg"/>
@@ -1435,204 +1129,6 @@
 </p:notes>
 </file>
 
-<file path=ppt/notesSlides/notesSlide16.xml><?xml version="1.0" encoding="utf-8"?>
-<p:notes xmlns:a="http://schemas.openxmlformats.org/drawingml/2006/main" xmlns:r="http://schemas.openxmlformats.org/officeDocument/2006/relationships" xmlns:mc="http://schemas.openxmlformats.org/markup-compatibility/2006" xmlns:mv="urn:schemas-microsoft-com:mac:vml" xmlns:p="http://schemas.openxmlformats.org/presentationml/2006/main" xmlns:c="http://schemas.openxmlformats.org/drawingml/2006/chart" xmlns:dgm="http://schemas.openxmlformats.org/drawingml/2006/diagram" xmlns:o="urn:schemas-microsoft-com:office:office" xmlns:v="urn:schemas-microsoft-com:vml" xmlns:pvml="urn:schemas-microsoft-com:office:powerpoint" xmlns:com="http://schemas.openxmlformats.org/drawingml/2006/compatibility" xmlns:p14="http://schemas.microsoft.com/office/powerpoint/2010/main" xmlns:p15="http://schemas.microsoft.com/office/powerpoint/2012/main" xmlns:ahyp="http://schemas.microsoft.com/office/drawing/2018/hyperlinkcolor" showMasterPhAnim="0" showMasterSp="0">
-  <p:cSld>
-    <p:spTree>
-      <p:nvGrpSpPr>
-        <p:cNvPr id="449" name="Shape 449"/>
-        <p:cNvGrpSpPr/>
-        <p:nvPr/>
-      </p:nvGrpSpPr>
-      <p:grpSpPr>
-        <a:xfrm>
-          <a:off x="0" y="0"/>
-          <a:ext cx="0" cy="0"/>
-          <a:chOff x="0" y="0"/>
-          <a:chExt cx="0" cy="0"/>
-        </a:xfrm>
-      </p:grpSpPr>
-      <p:sp>
-        <p:nvSpPr>
-          <p:cNvPr id="450" name="Google Shape;450;p8:notes"/>
-          <p:cNvSpPr txBox="1"/>
-          <p:nvPr>
-            <p:ph idx="1" type="body"/>
-          </p:nvPr>
-        </p:nvSpPr>
-        <p:spPr>
-          <a:xfrm>
-            <a:off x="685800" y="4343400"/>
-            <a:ext cx="5486400" cy="4114800"/>
-          </a:xfrm>
-          <a:prstGeom prst="rect">
-            <a:avLst/>
-          </a:prstGeom>
-        </p:spPr>
-        <p:txBody>
-          <a:bodyPr anchorCtr="0" anchor="t" bIns="91425" lIns="91425" spcFirstLastPara="1" rIns="91425" wrap="square" tIns="91425">
-            <a:noAutofit/>
-          </a:bodyPr>
-          <a:lstStyle/>
-          <a:p>
-            <a:pPr indent="0" lvl="0" marL="0" rtl="0" algn="l">
-              <a:spcBef>
-                <a:spcPts val="0"/>
-              </a:spcBef>
-              <a:spcAft>
-                <a:spcPts val="0"/>
-              </a:spcAft>
-              <a:buNone/>
-            </a:pPr>
-            <a:r>
-              <a:t/>
-            </a:r>
-            <a:endParaRPr/>
-          </a:p>
-        </p:txBody>
-      </p:sp>
-      <p:sp>
-        <p:nvSpPr>
-          <p:cNvPr id="451" name="Google Shape;451;p8:notes"/>
-          <p:cNvSpPr/>
-          <p:nvPr>
-            <p:ph idx="2" type="sldImg"/>
-          </p:nvPr>
-        </p:nvSpPr>
-        <p:spPr>
-          <a:xfrm>
-            <a:off x="1143225" y="685800"/>
-            <a:ext cx="4572225" cy="3429000"/>
-          </a:xfrm>
-          <a:custGeom>
-            <a:rect b="b" l="l" r="r" t="t"/>
-            <a:pathLst>
-              <a:path extrusionOk="0" h="120000" w="120000">
-                <a:moveTo>
-                  <a:pt x="0" y="0"/>
-                </a:moveTo>
-                <a:lnTo>
-                  <a:pt x="120000" y="0"/>
-                </a:lnTo>
-                <a:lnTo>
-                  <a:pt x="120000" y="120000"/>
-                </a:lnTo>
-                <a:lnTo>
-                  <a:pt x="0" y="120000"/>
-                </a:lnTo>
-                <a:close/>
-              </a:path>
-            </a:pathLst>
-          </a:custGeom>
-        </p:spPr>
-      </p:sp>
-    </p:spTree>
-  </p:cSld>
-  <p:clrMapOvr>
-    <a:masterClrMapping/>
-  </p:clrMapOvr>
-</p:notes>
-</file>
-
-<file path=ppt/notesSlides/notesSlide17.xml><?xml version="1.0" encoding="utf-8"?>
-<p:notes xmlns:a="http://schemas.openxmlformats.org/drawingml/2006/main" xmlns:r="http://schemas.openxmlformats.org/officeDocument/2006/relationships" xmlns:mc="http://schemas.openxmlformats.org/markup-compatibility/2006" xmlns:mv="urn:schemas-microsoft-com:mac:vml" xmlns:p="http://schemas.openxmlformats.org/presentationml/2006/main" xmlns:c="http://schemas.openxmlformats.org/drawingml/2006/chart" xmlns:dgm="http://schemas.openxmlformats.org/drawingml/2006/diagram" xmlns:o="urn:schemas-microsoft-com:office:office" xmlns:v="urn:schemas-microsoft-com:vml" xmlns:pvml="urn:schemas-microsoft-com:office:powerpoint" xmlns:com="http://schemas.openxmlformats.org/drawingml/2006/compatibility" xmlns:p14="http://schemas.microsoft.com/office/powerpoint/2010/main" xmlns:p15="http://schemas.microsoft.com/office/powerpoint/2012/main" xmlns:ahyp="http://schemas.microsoft.com/office/drawing/2018/hyperlinkcolor" showMasterPhAnim="0" showMasterSp="0">
-  <p:cSld>
-    <p:spTree>
-      <p:nvGrpSpPr>
-        <p:cNvPr id="461" name="Shape 461"/>
-        <p:cNvGrpSpPr/>
-        <p:nvPr/>
-      </p:nvGrpSpPr>
-      <p:grpSpPr>
-        <a:xfrm>
-          <a:off x="0" y="0"/>
-          <a:ext cx="0" cy="0"/>
-          <a:chOff x="0" y="0"/>
-          <a:chExt cx="0" cy="0"/>
-        </a:xfrm>
-      </p:grpSpPr>
-      <p:sp>
-        <p:nvSpPr>
-          <p:cNvPr id="462" name="Google Shape;462;g3fb70659208_0_39:notes"/>
-          <p:cNvSpPr txBox="1"/>
-          <p:nvPr>
-            <p:ph idx="1" type="body"/>
-          </p:nvPr>
-        </p:nvSpPr>
-        <p:spPr>
-          <a:xfrm>
-            <a:off x="685800" y="4343400"/>
-            <a:ext cx="5486400" cy="4114800"/>
-          </a:xfrm>
-          <a:prstGeom prst="rect">
-            <a:avLst/>
-          </a:prstGeom>
-        </p:spPr>
-        <p:txBody>
-          <a:bodyPr anchorCtr="0" anchor="t" bIns="91425" lIns="91425" spcFirstLastPara="1" rIns="91425" wrap="square" tIns="91425">
-            <a:noAutofit/>
-          </a:bodyPr>
-          <a:lstStyle/>
-          <a:p>
-            <a:pPr indent="0" lvl="0" marL="0" rtl="0" algn="l">
-              <a:spcBef>
-                <a:spcPts val="0"/>
-              </a:spcBef>
-              <a:spcAft>
-                <a:spcPts val="0"/>
-              </a:spcAft>
-              <a:buNone/>
-            </a:pPr>
-            <a:r>
-              <a:t/>
-            </a:r>
-            <a:endParaRPr/>
-          </a:p>
-        </p:txBody>
-      </p:sp>
-      <p:sp>
-        <p:nvSpPr>
-          <p:cNvPr id="463" name="Google Shape;463;g3fb70659208_0_39:notes"/>
-          <p:cNvSpPr/>
-          <p:nvPr>
-            <p:ph idx="2" type="sldImg"/>
-          </p:nvPr>
-        </p:nvSpPr>
-        <p:spPr>
-          <a:xfrm>
-            <a:off x="1143225" y="685800"/>
-            <a:ext cx="4572300" cy="3429000"/>
-          </a:xfrm>
-          <a:custGeom>
-            <a:rect b="b" l="l" r="r" t="t"/>
-            <a:pathLst>
-              <a:path extrusionOk="0" h="120000" w="120000">
-                <a:moveTo>
-                  <a:pt x="0" y="0"/>
-                </a:moveTo>
-                <a:lnTo>
-                  <a:pt x="120000" y="0"/>
-                </a:lnTo>
-                <a:lnTo>
-                  <a:pt x="120000" y="120000"/>
-                </a:lnTo>
-                <a:lnTo>
-                  <a:pt x="0" y="120000"/>
-                </a:lnTo>
-                <a:close/>
-              </a:path>
-            </a:pathLst>
-          </a:custGeom>
-        </p:spPr>
-      </p:sp>
-    </p:spTree>
-  </p:cSld>
-  <p:clrMapOvr>
-    <a:masterClrMapping/>
-  </p:clrMapOvr>
-</p:notes>
-</file>
-
 <file path=ppt/notesSlides/notesSlide18.xml><?xml version="1.0" encoding="utf-8"?>
 <p:notes xmlns:a="http://schemas.openxmlformats.org/drawingml/2006/main" xmlns:r="http://schemas.openxmlformats.org/officeDocument/2006/relationships" xmlns:mc="http://schemas.openxmlformats.org/markup-compatibility/2006" xmlns:mv="urn:schemas-microsoft-com:mac:vml" xmlns:p="http://schemas.openxmlformats.org/presentationml/2006/main" xmlns:c="http://schemas.openxmlformats.org/drawingml/2006/chart" xmlns:dgm="http://schemas.openxmlformats.org/drawingml/2006/diagram" xmlns:o="urn:schemas-microsoft-com:office:office" xmlns:v="urn:schemas-microsoft-com:vml" xmlns:pvml="urn:schemas-microsoft-com:office:powerpoint" xmlns:com="http://schemas.openxmlformats.org/drawingml/2006/compatibility" xmlns:p14="http://schemas.microsoft.com/office/powerpoint/2010/main" xmlns:p15="http://schemas.microsoft.com/office/powerpoint/2012/main" xmlns:ahyp="http://schemas.microsoft.com/office/drawing/2018/hyperlinkcolor" showMasterPhAnim="0" showMasterSp="0">
   <p:cSld>
@@ -1831,105 +1327,6 @@
 </p:notes>
 </file>
 
-<file path=ppt/notesSlides/notesSlide2.xml><?xml version="1.0" encoding="utf-8"?>
-<p:notes xmlns:a="http://schemas.openxmlformats.org/drawingml/2006/main" xmlns:r="http://schemas.openxmlformats.org/officeDocument/2006/relationships" xmlns:mc="http://schemas.openxmlformats.org/markup-compatibility/2006" xmlns:mv="urn:schemas-microsoft-com:mac:vml" xmlns:p="http://schemas.openxmlformats.org/presentationml/2006/main" xmlns:c="http://schemas.openxmlformats.org/drawingml/2006/chart" xmlns:dgm="http://schemas.openxmlformats.org/drawingml/2006/diagram" xmlns:o="urn:schemas-microsoft-com:office:office" xmlns:v="urn:schemas-microsoft-com:vml" xmlns:pvml="urn:schemas-microsoft-com:office:powerpoint" xmlns:com="http://schemas.openxmlformats.org/drawingml/2006/compatibility" xmlns:p14="http://schemas.microsoft.com/office/powerpoint/2010/main" xmlns:p15="http://schemas.microsoft.com/office/powerpoint/2012/main" xmlns:ahyp="http://schemas.microsoft.com/office/drawing/2018/hyperlinkcolor" showMasterPhAnim="0" showMasterSp="0">
-  <p:cSld>
-    <p:spTree>
-      <p:nvGrpSpPr>
-        <p:cNvPr id="90" name="Shape 90"/>
-        <p:cNvGrpSpPr/>
-        <p:nvPr/>
-      </p:nvGrpSpPr>
-      <p:grpSpPr>
-        <a:xfrm>
-          <a:off x="0" y="0"/>
-          <a:ext cx="0" cy="0"/>
-          <a:chOff x="0" y="0"/>
-          <a:chExt cx="0" cy="0"/>
-        </a:xfrm>
-      </p:grpSpPr>
-      <p:sp>
-        <p:nvSpPr>
-          <p:cNvPr id="91" name="Google Shape;91;p3:notes"/>
-          <p:cNvSpPr txBox="1"/>
-          <p:nvPr>
-            <p:ph idx="1" type="body"/>
-          </p:nvPr>
-        </p:nvSpPr>
-        <p:spPr>
-          <a:xfrm>
-            <a:off x="685800" y="4343400"/>
-            <a:ext cx="5486400" cy="4114800"/>
-          </a:xfrm>
-          <a:prstGeom prst="rect">
-            <a:avLst/>
-          </a:prstGeom>
-        </p:spPr>
-        <p:txBody>
-          <a:bodyPr anchorCtr="0" anchor="t" bIns="91425" lIns="91425" spcFirstLastPara="1" rIns="91425" wrap="square" tIns="91425">
-            <a:noAutofit/>
-          </a:bodyPr>
-          <a:lstStyle/>
-          <a:p>
-            <a:pPr indent="0" lvl="0" marL="0" rtl="0" algn="l">
-              <a:spcBef>
-                <a:spcPts val="0"/>
-              </a:spcBef>
-              <a:spcAft>
-                <a:spcPts val="0"/>
-              </a:spcAft>
-              <a:buNone/>
-            </a:pPr>
-            <a:r>
-              <a:t/>
-            </a:r>
-            <a:endParaRPr/>
-          </a:p>
-        </p:txBody>
-      </p:sp>
-      <p:sp>
-        <p:nvSpPr>
-          <p:cNvPr id="92" name="Google Shape;92;p3:notes"/>
-          <p:cNvSpPr/>
-          <p:nvPr>
-            <p:ph idx="2" type="sldImg"/>
-          </p:nvPr>
-        </p:nvSpPr>
-        <p:spPr>
-          <a:xfrm>
-            <a:off x="1143225" y="685800"/>
-            <a:ext cx="4572225" cy="3429000"/>
-          </a:xfrm>
-          <a:custGeom>
-            <a:rect b="b" l="l" r="r" t="t"/>
-            <a:pathLst>
-              <a:path extrusionOk="0" h="120000" w="120000">
-                <a:moveTo>
-                  <a:pt x="0" y="0"/>
-                </a:moveTo>
-                <a:lnTo>
-                  <a:pt x="120000" y="0"/>
-                </a:lnTo>
-                <a:lnTo>
-                  <a:pt x="120000" y="120000"/>
-                </a:lnTo>
-                <a:lnTo>
-                  <a:pt x="0" y="120000"/>
-                </a:lnTo>
-                <a:close/>
-              </a:path>
-            </a:pathLst>
-          </a:custGeom>
-        </p:spPr>
-      </p:sp>
-    </p:spTree>
-  </p:cSld>
-  <p:clrMapOvr>
-    <a:masterClrMapping/>
-  </p:clrMapOvr>
-</p:notes>
-</file>
-
 <file path=ppt/notesSlides/notesSlide20.xml><?xml version="1.0" encoding="utf-8"?>
 <p:notes xmlns:a="http://schemas.openxmlformats.org/drawingml/2006/main" xmlns:r="http://schemas.openxmlformats.org/officeDocument/2006/relationships" xmlns:mc="http://schemas.openxmlformats.org/markup-compatibility/2006" xmlns:mv="urn:schemas-microsoft-com:mac:vml" xmlns:p="http://schemas.openxmlformats.org/presentationml/2006/main" xmlns:c="http://schemas.openxmlformats.org/drawingml/2006/chart" xmlns:dgm="http://schemas.openxmlformats.org/drawingml/2006/diagram" xmlns:o="urn:schemas-microsoft-com:office:office" xmlns:v="urn:schemas-microsoft-com:vml" xmlns:pvml="urn:schemas-microsoft-com:office:powerpoint" xmlns:com="http://schemas.openxmlformats.org/drawingml/2006/compatibility" xmlns:p14="http://schemas.microsoft.com/office/powerpoint/2010/main" xmlns:p15="http://schemas.microsoft.com/office/powerpoint/2012/main" xmlns:ahyp="http://schemas.microsoft.com/office/drawing/2018/hyperlinkcolor" showMasterPhAnim="0" showMasterSp="0">
   <p:cSld>
@@ -1998,105 +1395,6 @@
           <a:xfrm>
             <a:off x="1143225" y="685800"/>
             <a:ext cx="4572225" cy="3429000"/>
-          </a:xfrm>
-          <a:custGeom>
-            <a:rect b="b" l="l" r="r" t="t"/>
-            <a:pathLst>
-              <a:path extrusionOk="0" h="120000" w="120000">
-                <a:moveTo>
-                  <a:pt x="0" y="0"/>
-                </a:moveTo>
-                <a:lnTo>
-                  <a:pt x="120000" y="0"/>
-                </a:lnTo>
-                <a:lnTo>
-                  <a:pt x="120000" y="120000"/>
-                </a:lnTo>
-                <a:lnTo>
-                  <a:pt x="0" y="120000"/>
-                </a:lnTo>
-                <a:close/>
-              </a:path>
-            </a:pathLst>
-          </a:custGeom>
-        </p:spPr>
-      </p:sp>
-    </p:spTree>
-  </p:cSld>
-  <p:clrMapOvr>
-    <a:masterClrMapping/>
-  </p:clrMapOvr>
-</p:notes>
-</file>
-
-<file path=ppt/notesSlides/notesSlide3.xml><?xml version="1.0" encoding="utf-8"?>
-<p:notes xmlns:a="http://schemas.openxmlformats.org/drawingml/2006/main" xmlns:r="http://schemas.openxmlformats.org/officeDocument/2006/relationships" xmlns:mc="http://schemas.openxmlformats.org/markup-compatibility/2006" xmlns:mv="urn:schemas-microsoft-com:mac:vml" xmlns:p="http://schemas.openxmlformats.org/presentationml/2006/main" xmlns:c="http://schemas.openxmlformats.org/drawingml/2006/chart" xmlns:dgm="http://schemas.openxmlformats.org/drawingml/2006/diagram" xmlns:o="urn:schemas-microsoft-com:office:office" xmlns:v="urn:schemas-microsoft-com:vml" xmlns:pvml="urn:schemas-microsoft-com:office:powerpoint" xmlns:com="http://schemas.openxmlformats.org/drawingml/2006/compatibility" xmlns:p14="http://schemas.microsoft.com/office/powerpoint/2010/main" xmlns:p15="http://schemas.microsoft.com/office/powerpoint/2012/main" xmlns:ahyp="http://schemas.microsoft.com/office/drawing/2018/hyperlinkcolor" showMasterPhAnim="0" showMasterSp="0">
-  <p:cSld>
-    <p:spTree>
-      <p:nvGrpSpPr>
-        <p:cNvPr id="103" name="Shape 103"/>
-        <p:cNvGrpSpPr/>
-        <p:nvPr/>
-      </p:nvGrpSpPr>
-      <p:grpSpPr>
-        <a:xfrm>
-          <a:off x="0" y="0"/>
-          <a:ext cx="0" cy="0"/>
-          <a:chOff x="0" y="0"/>
-          <a:chExt cx="0" cy="0"/>
-        </a:xfrm>
-      </p:grpSpPr>
-      <p:sp>
-        <p:nvSpPr>
-          <p:cNvPr id="104" name="Google Shape;104;g3fb70659208_0_0:notes"/>
-          <p:cNvSpPr txBox="1"/>
-          <p:nvPr>
-            <p:ph idx="1" type="body"/>
-          </p:nvPr>
-        </p:nvSpPr>
-        <p:spPr>
-          <a:xfrm>
-            <a:off x="685800" y="4343400"/>
-            <a:ext cx="5486400" cy="4114800"/>
-          </a:xfrm>
-          <a:prstGeom prst="rect">
-            <a:avLst/>
-          </a:prstGeom>
-        </p:spPr>
-        <p:txBody>
-          <a:bodyPr anchorCtr="0" anchor="t" bIns="91425" lIns="91425" spcFirstLastPara="1" rIns="91425" wrap="square" tIns="91425">
-            <a:noAutofit/>
-          </a:bodyPr>
-          <a:lstStyle/>
-          <a:p>
-            <a:pPr indent="0" lvl="0" marL="0" rtl="0" algn="l">
-              <a:spcBef>
-                <a:spcPts val="0"/>
-              </a:spcBef>
-              <a:spcAft>
-                <a:spcPts val="0"/>
-              </a:spcAft>
-              <a:buNone/>
-            </a:pPr>
-            <a:r>
-              <a:t/>
-            </a:r>
-            <a:endParaRPr/>
-          </a:p>
-        </p:txBody>
-      </p:sp>
-      <p:sp>
-        <p:nvSpPr>
-          <p:cNvPr id="105" name="Google Shape;105;g3fb70659208_0_0:notes"/>
-          <p:cNvSpPr/>
-          <p:nvPr>
-            <p:ph idx="2" type="sldImg"/>
-          </p:nvPr>
-        </p:nvSpPr>
-        <p:spPr>
-          <a:xfrm>
-            <a:off x="1143225" y="685800"/>
-            <a:ext cx="4572300" cy="3429000"/>
           </a:xfrm>
           <a:custGeom>
             <a:rect b="b" l="l" r="r" t="t"/>
@@ -2227,105 +1525,6 @@
 </p:notes>
 </file>
 
-<file path=ppt/notesSlides/notesSlide5.xml><?xml version="1.0" encoding="utf-8"?>
-<p:notes xmlns:a="http://schemas.openxmlformats.org/drawingml/2006/main" xmlns:r="http://schemas.openxmlformats.org/officeDocument/2006/relationships" xmlns:mc="http://schemas.openxmlformats.org/markup-compatibility/2006" xmlns:mv="urn:schemas-microsoft-com:mac:vml" xmlns:p="http://schemas.openxmlformats.org/presentationml/2006/main" xmlns:c="http://schemas.openxmlformats.org/drawingml/2006/chart" xmlns:dgm="http://schemas.openxmlformats.org/drawingml/2006/diagram" xmlns:o="urn:schemas-microsoft-com:office:office" xmlns:v="urn:schemas-microsoft-com:vml" xmlns:pvml="urn:schemas-microsoft-com:office:powerpoint" xmlns:com="http://schemas.openxmlformats.org/drawingml/2006/compatibility" xmlns:p14="http://schemas.microsoft.com/office/powerpoint/2010/main" xmlns:p15="http://schemas.microsoft.com/office/powerpoint/2012/main" xmlns:ahyp="http://schemas.microsoft.com/office/drawing/2018/hyperlinkcolor" showMasterPhAnim="0" showMasterSp="0">
-  <p:cSld>
-    <p:spTree>
-      <p:nvGrpSpPr>
-        <p:cNvPr id="158" name="Shape 158"/>
-        <p:cNvGrpSpPr/>
-        <p:nvPr/>
-      </p:nvGrpSpPr>
-      <p:grpSpPr>
-        <a:xfrm>
-          <a:off x="0" y="0"/>
-          <a:ext cx="0" cy="0"/>
-          <a:chOff x="0" y="0"/>
-          <a:chExt cx="0" cy="0"/>
-        </a:xfrm>
-      </p:grpSpPr>
-      <p:sp>
-        <p:nvSpPr>
-          <p:cNvPr id="159" name="Google Shape;159;p4:notes"/>
-          <p:cNvSpPr txBox="1"/>
-          <p:nvPr>
-            <p:ph idx="1" type="body"/>
-          </p:nvPr>
-        </p:nvSpPr>
-        <p:spPr>
-          <a:xfrm>
-            <a:off x="685800" y="4343400"/>
-            <a:ext cx="5486400" cy="4114800"/>
-          </a:xfrm>
-          <a:prstGeom prst="rect">
-            <a:avLst/>
-          </a:prstGeom>
-        </p:spPr>
-        <p:txBody>
-          <a:bodyPr anchorCtr="0" anchor="t" bIns="91425" lIns="91425" spcFirstLastPara="1" rIns="91425" wrap="square" tIns="91425">
-            <a:noAutofit/>
-          </a:bodyPr>
-          <a:lstStyle/>
-          <a:p>
-            <a:pPr indent="0" lvl="0" marL="0" rtl="0" algn="l">
-              <a:spcBef>
-                <a:spcPts val="0"/>
-              </a:spcBef>
-              <a:spcAft>
-                <a:spcPts val="0"/>
-              </a:spcAft>
-              <a:buNone/>
-            </a:pPr>
-            <a:r>
-              <a:t/>
-            </a:r>
-            <a:endParaRPr/>
-          </a:p>
-        </p:txBody>
-      </p:sp>
-      <p:sp>
-        <p:nvSpPr>
-          <p:cNvPr id="160" name="Google Shape;160;p4:notes"/>
-          <p:cNvSpPr/>
-          <p:nvPr>
-            <p:ph idx="2" type="sldImg"/>
-          </p:nvPr>
-        </p:nvSpPr>
-        <p:spPr>
-          <a:xfrm>
-            <a:off x="1143225" y="685800"/>
-            <a:ext cx="4572225" cy="3429000"/>
-          </a:xfrm>
-          <a:custGeom>
-            <a:rect b="b" l="l" r="r" t="t"/>
-            <a:pathLst>
-              <a:path extrusionOk="0" h="120000" w="120000">
-                <a:moveTo>
-                  <a:pt x="0" y="0"/>
-                </a:moveTo>
-                <a:lnTo>
-                  <a:pt x="120000" y="0"/>
-                </a:lnTo>
-                <a:lnTo>
-                  <a:pt x="120000" y="120000"/>
-                </a:lnTo>
-                <a:lnTo>
-                  <a:pt x="0" y="120000"/>
-                </a:lnTo>
-                <a:close/>
-              </a:path>
-            </a:pathLst>
-          </a:custGeom>
-        </p:spPr>
-      </p:sp>
-    </p:spTree>
-  </p:cSld>
-  <p:clrMapOvr>
-    <a:masterClrMapping/>
-  </p:clrMapOvr>
-</p:notes>
-</file>
-
 <file path=ppt/notesSlides/notesSlide6.xml><?xml version="1.0" encoding="utf-8"?>
 <p:notes xmlns:a="http://schemas.openxmlformats.org/drawingml/2006/main" xmlns:r="http://schemas.openxmlformats.org/officeDocument/2006/relationships" xmlns:mc="http://schemas.openxmlformats.org/markup-compatibility/2006" xmlns:mv="urn:schemas-microsoft-com:mac:vml" xmlns:p="http://schemas.openxmlformats.org/presentationml/2006/main" xmlns:c="http://schemas.openxmlformats.org/drawingml/2006/chart" xmlns:dgm="http://schemas.openxmlformats.org/drawingml/2006/diagram" xmlns:o="urn:schemas-microsoft-com:office:office" xmlns:v="urn:schemas-microsoft-com:vml" xmlns:pvml="urn:schemas-microsoft-com:office:powerpoint" xmlns:com="http://schemas.openxmlformats.org/drawingml/2006/compatibility" xmlns:p14="http://schemas.microsoft.com/office/powerpoint/2010/main" xmlns:p15="http://schemas.microsoft.com/office/powerpoint/2012/main" xmlns:ahyp="http://schemas.microsoft.com/office/drawing/2018/hyperlinkcolor" showMasterPhAnim="0" showMasterSp="0">
   <p:cSld>
@@ -2385,105 +1584,6 @@
       <p:sp>
         <p:nvSpPr>
           <p:cNvPr id="180" name="Google Shape;180;g3fb70659208_26_36:notes"/>
-          <p:cNvSpPr/>
-          <p:nvPr>
-            <p:ph idx="2" type="sldImg"/>
-          </p:nvPr>
-        </p:nvSpPr>
-        <p:spPr>
-          <a:xfrm>
-            <a:off x="1143225" y="685800"/>
-            <a:ext cx="4572225" cy="3429000"/>
-          </a:xfrm>
-          <a:custGeom>
-            <a:rect b="b" l="l" r="r" t="t"/>
-            <a:pathLst>
-              <a:path extrusionOk="0" h="120000" w="120000">
-                <a:moveTo>
-                  <a:pt x="0" y="0"/>
-                </a:moveTo>
-                <a:lnTo>
-                  <a:pt x="120000" y="0"/>
-                </a:lnTo>
-                <a:lnTo>
-                  <a:pt x="120000" y="120000"/>
-                </a:lnTo>
-                <a:lnTo>
-                  <a:pt x="0" y="120000"/>
-                </a:lnTo>
-                <a:close/>
-              </a:path>
-            </a:pathLst>
-          </a:custGeom>
-        </p:spPr>
-      </p:sp>
-    </p:spTree>
-  </p:cSld>
-  <p:clrMapOvr>
-    <a:masterClrMapping/>
-  </p:clrMapOvr>
-</p:notes>
-</file>
-
-<file path=ppt/notesSlides/notesSlide7.xml><?xml version="1.0" encoding="utf-8"?>
-<p:notes xmlns:a="http://schemas.openxmlformats.org/drawingml/2006/main" xmlns:r="http://schemas.openxmlformats.org/officeDocument/2006/relationships" xmlns:mc="http://schemas.openxmlformats.org/markup-compatibility/2006" xmlns:mv="urn:schemas-microsoft-com:mac:vml" xmlns:p="http://schemas.openxmlformats.org/presentationml/2006/main" xmlns:c="http://schemas.openxmlformats.org/drawingml/2006/chart" xmlns:dgm="http://schemas.openxmlformats.org/drawingml/2006/diagram" xmlns:o="urn:schemas-microsoft-com:office:office" xmlns:v="urn:schemas-microsoft-com:vml" xmlns:pvml="urn:schemas-microsoft-com:office:powerpoint" xmlns:com="http://schemas.openxmlformats.org/drawingml/2006/compatibility" xmlns:p14="http://schemas.microsoft.com/office/powerpoint/2010/main" xmlns:p15="http://schemas.microsoft.com/office/powerpoint/2012/main" xmlns:ahyp="http://schemas.microsoft.com/office/drawing/2018/hyperlinkcolor" showMasterPhAnim="0" showMasterSp="0">
-  <p:cSld>
-    <p:spTree>
-      <p:nvGrpSpPr>
-        <p:cNvPr id="214" name="Shape 214"/>
-        <p:cNvGrpSpPr/>
-        <p:nvPr/>
-      </p:nvGrpSpPr>
-      <p:grpSpPr>
-        <a:xfrm>
-          <a:off x="0" y="0"/>
-          <a:ext cx="0" cy="0"/>
-          <a:chOff x="0" y="0"/>
-          <a:chExt cx="0" cy="0"/>
-        </a:xfrm>
-      </p:grpSpPr>
-      <p:sp>
-        <p:nvSpPr>
-          <p:cNvPr id="215" name="Google Shape;215;p5:notes"/>
-          <p:cNvSpPr txBox="1"/>
-          <p:nvPr>
-            <p:ph idx="1" type="body"/>
-          </p:nvPr>
-        </p:nvSpPr>
-        <p:spPr>
-          <a:xfrm>
-            <a:off x="685800" y="4343400"/>
-            <a:ext cx="5486400" cy="4114800"/>
-          </a:xfrm>
-          <a:prstGeom prst="rect">
-            <a:avLst/>
-          </a:prstGeom>
-        </p:spPr>
-        <p:txBody>
-          <a:bodyPr anchorCtr="0" anchor="t" bIns="91425" lIns="91425" spcFirstLastPara="1" rIns="91425" wrap="square" tIns="91425">
-            <a:noAutofit/>
-          </a:bodyPr>
-          <a:lstStyle/>
-          <a:p>
-            <a:pPr indent="0" lvl="0" marL="0" rtl="0" algn="l">
-              <a:spcBef>
-                <a:spcPts val="0"/>
-              </a:spcBef>
-              <a:spcAft>
-                <a:spcPts val="0"/>
-              </a:spcAft>
-              <a:buNone/>
-            </a:pPr>
-            <a:r>
-              <a:t/>
-            </a:r>
-            <a:endParaRPr/>
-          </a:p>
-        </p:txBody>
-      </p:sp>
-      <p:sp>
-        <p:nvSpPr>
-          <p:cNvPr id="216" name="Google Shape;216;p5:notes"/>
           <p:cNvSpPr/>
           <p:nvPr>
             <p:ph idx="2" type="sldImg"/>
@@ -2583,105 +1683,6 @@
       <p:sp>
         <p:nvSpPr>
           <p:cNvPr id="232" name="Google Shape;232;g3fb70659208_26_69:notes"/>
-          <p:cNvSpPr/>
-          <p:nvPr>
-            <p:ph idx="2" type="sldImg"/>
-          </p:nvPr>
-        </p:nvSpPr>
-        <p:spPr>
-          <a:xfrm>
-            <a:off x="1143225" y="685800"/>
-            <a:ext cx="4572225" cy="3429000"/>
-          </a:xfrm>
-          <a:custGeom>
-            <a:rect b="b" l="l" r="r" t="t"/>
-            <a:pathLst>
-              <a:path extrusionOk="0" h="120000" w="120000">
-                <a:moveTo>
-                  <a:pt x="0" y="0"/>
-                </a:moveTo>
-                <a:lnTo>
-                  <a:pt x="120000" y="0"/>
-                </a:lnTo>
-                <a:lnTo>
-                  <a:pt x="120000" y="120000"/>
-                </a:lnTo>
-                <a:lnTo>
-                  <a:pt x="0" y="120000"/>
-                </a:lnTo>
-                <a:close/>
-              </a:path>
-            </a:pathLst>
-          </a:custGeom>
-        </p:spPr>
-      </p:sp>
-    </p:spTree>
-  </p:cSld>
-  <p:clrMapOvr>
-    <a:masterClrMapping/>
-  </p:clrMapOvr>
-</p:notes>
-</file>
-
-<file path=ppt/notesSlides/notesSlide9.xml><?xml version="1.0" encoding="utf-8"?>
-<p:notes xmlns:a="http://schemas.openxmlformats.org/drawingml/2006/main" xmlns:r="http://schemas.openxmlformats.org/officeDocument/2006/relationships" xmlns:mc="http://schemas.openxmlformats.org/markup-compatibility/2006" xmlns:mv="urn:schemas-microsoft-com:mac:vml" xmlns:p="http://schemas.openxmlformats.org/presentationml/2006/main" xmlns:c="http://schemas.openxmlformats.org/drawingml/2006/chart" xmlns:dgm="http://schemas.openxmlformats.org/drawingml/2006/diagram" xmlns:o="urn:schemas-microsoft-com:office:office" xmlns:v="urn:schemas-microsoft-com:vml" xmlns:pvml="urn:schemas-microsoft-com:office:powerpoint" xmlns:com="http://schemas.openxmlformats.org/drawingml/2006/compatibility" xmlns:p14="http://schemas.microsoft.com/office/powerpoint/2010/main" xmlns:p15="http://schemas.microsoft.com/office/powerpoint/2012/main" xmlns:ahyp="http://schemas.microsoft.com/office/drawing/2018/hyperlinkcolor" showMasterPhAnim="0" showMasterSp="0">
-  <p:cSld>
-    <p:spTree>
-      <p:nvGrpSpPr>
-        <p:cNvPr id="257" name="Shape 257"/>
-        <p:cNvGrpSpPr/>
-        <p:nvPr/>
-      </p:nvGrpSpPr>
-      <p:grpSpPr>
-        <a:xfrm>
-          <a:off x="0" y="0"/>
-          <a:ext cx="0" cy="0"/>
-          <a:chOff x="0" y="0"/>
-          <a:chExt cx="0" cy="0"/>
-        </a:xfrm>
-      </p:grpSpPr>
-      <p:sp>
-        <p:nvSpPr>
-          <p:cNvPr id="258" name="Google Shape;258;p6:notes"/>
-          <p:cNvSpPr txBox="1"/>
-          <p:nvPr>
-            <p:ph idx="1" type="body"/>
-          </p:nvPr>
-        </p:nvSpPr>
-        <p:spPr>
-          <a:xfrm>
-            <a:off x="685800" y="4343400"/>
-            <a:ext cx="5486400" cy="4114800"/>
-          </a:xfrm>
-          <a:prstGeom prst="rect">
-            <a:avLst/>
-          </a:prstGeom>
-        </p:spPr>
-        <p:txBody>
-          <a:bodyPr anchorCtr="0" anchor="t" bIns="91425" lIns="91425" spcFirstLastPara="1" rIns="91425" wrap="square" tIns="91425">
-            <a:noAutofit/>
-          </a:bodyPr>
-          <a:lstStyle/>
-          <a:p>
-            <a:pPr indent="0" lvl="0" marL="0" rtl="0" algn="l">
-              <a:spcBef>
-                <a:spcPts val="0"/>
-              </a:spcBef>
-              <a:spcAft>
-                <a:spcPts val="0"/>
-              </a:spcAft>
-              <a:buNone/>
-            </a:pPr>
-            <a:r>
-              <a:t/>
-            </a:r>
-            <a:endParaRPr/>
-          </a:p>
-        </p:txBody>
-      </p:sp>
-      <p:sp>
-        <p:nvSpPr>
-          <p:cNvPr id="259" name="Google Shape;259;p6:notes"/>
           <p:cNvSpPr/>
           <p:nvPr>
             <p:ph idx="2" type="sldImg"/>
@@ -12458,13 +11459,25 @@
           <a:p>
             <a:pPr algn="ctr"/>
             <a:r>
-              <a:rPr lang="en-US" sz="1100" b="1">
+              <a:rPr lang="en-US" sz="1250" b="1">
                 <a:solidFill>
                   <a:srgbClr val="1E3A8A"/>
                 </a:solidFill>
                 <a:latin typeface="Poppins SemiBold"/>
               </a:rPr>
-              <a:t>Dermasense · LIG-on-Kapton dressing-moisture strip · Health Tech</a:t>
+              <a:t>Dermasense: a laser-written graphene strip that tells nurses when a wound dressing is full</a:t>
+            </a:r>
+          </a:p>
+          <a:p>
+            <a:pPr algn="ctr"/>
+            <a:r>
+              <a:rPr lang="en-US" sz="1050" b="0">
+                <a:solidFill>
+                  <a:srgbClr val="1E3A8A"/>
+                </a:solidFill>
+                <a:latin typeface="Poppins SemiBold"/>
+              </a:rPr>
+              <a:t>Soham Prabhakar Kadu · Bhakti Ajay Kadam  |  Health Tech: Emergency Response &amp; Remote Monitoring</a:t>
             </a:r>
           </a:p>
         </p:txBody>
@@ -12680,7 +11693,7 @@
         <p:spPr>
           <a:xfrm>
             <a:off x="533400" y="956220"/>
-            <a:ext cx="5429250" cy="2428875"/>
+            <a:ext cx="5429250" cy="4133087"/>
           </a:xfrm>
           <a:prstGeom prst="rect">
             <a:avLst/>
@@ -12802,7 +11815,7 @@
                 <a:cs typeface="DM Sans"/>
                 <a:sym typeface="DM Sans"/>
               </a:rPr>
-              <a:t>nothing ordered yet. * estimate; † public listing seen 14 Oct 2026, not a quotation. Polyimide film stock and grade to confirm.</a:t>
+              <a:t>every part is available in India. Prices are estimates or listings seen on 14 Oct 2026; we order after E1 confirms the laser recipe.</a:t>
             </a:r>
           </a:p>
         </p:txBody>
@@ -12815,7 +11828,7 @@
         </p:nvSpPr>
         <p:spPr>
           <a:xfrm>
-            <a:off x="533400" y="3432720"/>
+            <a:off x="533400" y="5135409"/>
             <a:ext cx="5429250" cy="158799"/>
           </a:xfrm>
           <a:prstGeom prst="rect">
@@ -12854,7 +11867,7 @@
                 <a:cs typeface="DM Sans"/>
                 <a:sym typeface="DM Sans"/>
               </a:rPr>
-              <a:t>Figure: planned bipolar zone readout (schemdraw); KiCad capture pending — KiCad not installed</a:t>
+              <a:t>Figure: zone readout; each zone is driven both ways and read by a 16-bit ADC (bench design; KiCad capture next)</a:t>
             </a:r>
           </a:p>
         </p:txBody>
@@ -13305,7 +12318,7 @@
                           <a:cs typeface="DM Sans"/>
                           <a:sym typeface="DM Sans"/>
                         </a:rPr>
-                        <a:t>MCU (planned)</a:t>
+                        <a:t>Microcontroller</a:t>
                       </a:r>
                     </a:p>
                   </a:txBody>
@@ -13530,7 +12543,7 @@
                           <a:cs typeface="DM Sans"/>
                           <a:sym typeface="DM Sans"/>
                         </a:rPr>
-                        <a:t>Local, TBC</a:t>
+                        <a:t>Local</a:t>
                       </a:r>
                     </a:p>
                   </a:txBody>
@@ -13605,7 +12618,7 @@
                           <a:cs typeface="DM Sans"/>
                           <a:sym typeface="DM Sans"/>
                         </a:rPr>
-                        <a:t>₹250–700*</a:t>
+                        <a:t>₹250–700</a:t>
                       </a:r>
                     </a:p>
                   </a:txBody>
@@ -13682,7 +12695,7 @@
                           <a:cs typeface="DM Sans"/>
                           <a:sym typeface="DM Sans"/>
                         </a:rPr>
-                        <a:t>ADC (planned)</a:t>
+                        <a:t>ADC</a:t>
                       </a:r>
                     </a:p>
                   </a:txBody>
@@ -13757,7 +12770,7 @@
                           <a:cs typeface="DM Sans"/>
                           <a:sym typeface="DM Sans"/>
                         </a:rPr>
-                        <a:t>ADS1115 16-bit I²C</a:t>
+                        <a:t>ADS1115 16-bit, I²C</a:t>
                       </a:r>
                     </a:p>
                   </a:txBody>
@@ -13907,7 +12920,7 @@
                           <a:cs typeface="DM Sans"/>
                           <a:sym typeface="DM Sans"/>
                         </a:rPr>
-                        <a:t>Local, TBC</a:t>
+                        <a:t>Local</a:t>
                       </a:r>
                     </a:p>
                   </a:txBody>
@@ -13982,7 +12995,7 @@
                           <a:cs typeface="DM Sans"/>
                           <a:sym typeface="DM Sans"/>
                         </a:rPr>
-                        <a:t>₹200–450*</a:t>
+                        <a:t>₹200–450</a:t>
                       </a:r>
                     </a:p>
                   </a:txBody>
@@ -14359,7 +13372,7 @@
                           <a:cs typeface="DM Sans"/>
                           <a:sym typeface="DM Sans"/>
                         </a:rPr>
-                        <a:t>₹446†</a:t>
+                        <a:t>₹446</a:t>
                       </a:r>
                     </a:p>
                   </a:txBody>
@@ -14436,7 +13449,7 @@
                           <a:cs typeface="DM Sans"/>
                           <a:sym typeface="DM Sans"/>
                         </a:rPr>
-                        <a:t>Ref. resistors</a:t>
+                        <a:t>Resistors</a:t>
                       </a:r>
                     </a:p>
                   </a:txBody>
@@ -14736,7 +13749,7 @@
                           <a:cs typeface="DM Sans"/>
                           <a:sym typeface="DM Sans"/>
                         </a:rPr>
-                        <a:t>₹40–160*</a:t>
+                        <a:t>₹40–160</a:t>
                       </a:r>
                     </a:p>
                   </a:txBody>
@@ -15113,7 +14126,7 @@
                           <a:cs typeface="DM Sans"/>
                           <a:sym typeface="DM Sans"/>
                         </a:rPr>
-                        <a:t>₹750–1,800*</a:t>
+                        <a:t>₹750–1,800</a:t>
                       </a:r>
                     </a:p>
                   </a:txBody>
@@ -15567,7 +14580,7 @@
                           <a:cs typeface="DM Sans"/>
                           <a:sym typeface="DM Sans"/>
                         </a:rPr>
-                        <a:t>Total (estimate, excl. film)</a:t>
+                        <a:t>Total (excl. film)</a:t>
                       </a:r>
                     </a:p>
                   </a:txBody>
@@ -15945,7 +14958,7 @@
         <p:spPr>
           <a:xfrm>
             <a:off x="542925" y="965745"/>
-            <a:ext cx="5410200" cy="2409825"/>
+            <a:ext cx="5410200" cy="4114800"/>
           </a:xfrm>
           <a:prstGeom prst="rect">
             <a:avLst/>
@@ -17849,1270 +16862,6 @@
       <p:pic>
         <p:nvPicPr>
           <p:cNvPr id="325" name="Google Shape;325;p22" title="VK colored transparent logo.png"/>
-          <p:cNvPicPr preferRelativeResize="0"/>
-          <p:nvPr/>
-        </p:nvPicPr>
-        <p:blipFill rotWithShape="1">
-          <a:blip r:embed="rId11">
-            <a:alphaModFix/>
-          </a:blip>
-          <a:srcRect b="44466" l="14673" r="15820" t="33074"/>
-          <a:stretch/>
-        </p:blipFill>
-        <p:spPr>
-          <a:xfrm>
-            <a:off x="0" y="6280800"/>
-            <a:ext cx="1786280" cy="577200"/>
-          </a:xfrm>
-          <a:prstGeom prst="rect">
-            <a:avLst/>
-          </a:prstGeom>
-          <a:noFill/>
-          <a:ln>
-            <a:noFill/>
-          </a:ln>
-        </p:spPr>
-      </p:pic>
-    </p:spTree>
-  </p:cSld>
-  <p:clrMapOvr>
-    <a:masterClrMapping/>
-  </p:clrMapOvr>
-</p:sld>
-</file>
-
-<file path=ppt/slides/slide11.xml><?xml version="1.0" encoding="utf-8"?>
-<p:sld xmlns:a="http://schemas.openxmlformats.org/drawingml/2006/main" xmlns:r="http://schemas.openxmlformats.org/officeDocument/2006/relationships" xmlns:mc="http://schemas.openxmlformats.org/markup-compatibility/2006" xmlns:mv="urn:schemas-microsoft-com:mac:vml" xmlns:p="http://schemas.openxmlformats.org/presentationml/2006/main" xmlns:c="http://schemas.openxmlformats.org/drawingml/2006/chart" xmlns:dgm="http://schemas.openxmlformats.org/drawingml/2006/diagram" xmlns:o="urn:schemas-microsoft-com:office:office" xmlns:v="urn:schemas-microsoft-com:vml" xmlns:pvml="urn:schemas-microsoft-com:office:powerpoint" xmlns:com="http://schemas.openxmlformats.org/drawingml/2006/compatibility" xmlns:p14="http://schemas.microsoft.com/office/powerpoint/2010/main" xmlns:p15="http://schemas.microsoft.com/office/powerpoint/2012/main" xmlns:ahyp="http://schemas.microsoft.com/office/drawing/2018/hyperlinkcolor">
-  <p:cSld>
-    <p:bg>
-      <p:bgPr>
-        <a:solidFill>
-          <a:srgbClr val="FFFFFF"/>
-        </a:solidFill>
-      </p:bgPr>
-    </p:bg>
-    <p:spTree>
-      <p:nvGrpSpPr>
-        <p:cNvPr id="329" name="Shape 329"/>
-        <p:cNvGrpSpPr/>
-        <p:nvPr/>
-      </p:nvGrpSpPr>
-      <p:grpSpPr>
-        <a:xfrm>
-          <a:off x="0" y="0"/>
-          <a:ext cx="0" cy="0"/>
-          <a:chOff x="0" y="0"/>
-          <a:chExt cx="0" cy="0"/>
-        </a:xfrm>
-      </p:grpSpPr>
-      <p:pic>
-        <p:nvPicPr>
-          <p:cNvPr descr="image.png" id="330" name="Google Shape;330;p23"/>
-          <p:cNvPicPr preferRelativeResize="0"/>
-          <p:nvPr/>
-        </p:nvPicPr>
-        <p:blipFill rotWithShape="1">
-          <a:blip r:embed="rId3">
-            <a:alphaModFix/>
-          </a:blip>
-          <a:srcRect b="0" l="0" r="0" t="0"/>
-          <a:stretch/>
-        </p:blipFill>
-        <p:spPr>
-          <a:xfrm>
-            <a:off x="533400" y="1429300"/>
-            <a:ext cx="3555950" cy="3737824"/>
-          </a:xfrm>
-          <a:prstGeom prst="rect">
-            <a:avLst/>
-          </a:prstGeom>
-          <a:noFill/>
-          <a:ln>
-            <a:noFill/>
-          </a:ln>
-        </p:spPr>
-      </p:pic>
-      <p:pic>
-        <p:nvPicPr>
-          <p:cNvPr descr="image.png" id="331" name="Google Shape;331;p23"/>
-          <p:cNvPicPr preferRelativeResize="0"/>
-          <p:nvPr/>
-        </p:nvPicPr>
-        <p:blipFill rotWithShape="1">
-          <a:blip r:embed="rId4">
-            <a:alphaModFix/>
-          </a:blip>
-          <a:srcRect b="0" l="0" r="0" t="0"/>
-          <a:stretch/>
-        </p:blipFill>
-        <p:spPr>
-          <a:xfrm>
-            <a:off x="4317950" y="1429300"/>
-            <a:ext cx="3555950" cy="3737824"/>
-          </a:xfrm>
-          <a:prstGeom prst="rect">
-            <a:avLst/>
-          </a:prstGeom>
-          <a:noFill/>
-          <a:ln>
-            <a:noFill/>
-          </a:ln>
-        </p:spPr>
-      </p:pic>
-      <p:pic>
-        <p:nvPicPr>
-          <p:cNvPr descr="image.png" id="332" name="Google Shape;332;p23"/>
-          <p:cNvPicPr preferRelativeResize="0"/>
-          <p:nvPr/>
-        </p:nvPicPr>
-        <p:blipFill rotWithShape="1">
-          <a:blip r:embed="rId5">
-            <a:alphaModFix/>
-          </a:blip>
-          <a:srcRect b="0" l="0" r="0" t="0"/>
-          <a:stretch/>
-        </p:blipFill>
-        <p:spPr>
-          <a:xfrm>
-            <a:off x="8102500" y="1429300"/>
-            <a:ext cx="3556100" cy="3737824"/>
-          </a:xfrm>
-          <a:prstGeom prst="rect">
-            <a:avLst/>
-          </a:prstGeom>
-          <a:noFill/>
-          <a:ln>
-            <a:noFill/>
-          </a:ln>
-        </p:spPr>
-      </p:pic>
-      <p:sp>
-        <p:nvSpPr>
-          <p:cNvPr id="333" name="Google Shape;333;p23"/>
-          <p:cNvSpPr txBox="1"/>
-          <p:nvPr/>
-        </p:nvSpPr>
-        <p:spPr>
-          <a:xfrm>
-            <a:off x="533400" y="457200"/>
-            <a:ext cx="11125200" cy="392400"/>
-          </a:xfrm>
-          <a:prstGeom prst="rect">
-            <a:avLst/>
-          </a:prstGeom>
-          <a:noFill/>
-          <a:ln>
-            <a:noFill/>
-          </a:ln>
-        </p:spPr>
-        <p:txBody>
-          <a:bodyPr anchorCtr="0" anchor="ctr" bIns="0" lIns="0" spcFirstLastPara="1" rIns="0" wrap="square" tIns="0">
-            <a:spAutoFit/>
-          </a:bodyPr>
-          <a:lstStyle/>
-          <a:p>
-            <a:pPr indent="0" lvl="0" marL="0" rtl="0" algn="l">
-              <a:spcBef>
-                <a:spcPts val="0"/>
-              </a:spcBef>
-              <a:spcAft>
-                <a:spcPts val="0"/>
-              </a:spcAft>
-              <a:buNone/>
-            </a:pPr>
-            <a:r>
-              <a:rPr b="1" lang="en-US" sz="2550">
-                <a:solidFill>
-                  <a:srgbClr val="1E3A8A"/>
-                </a:solidFill>
-                <a:latin typeface="Poppins"/>
-                <a:ea typeface="Poppins"/>
-                <a:cs typeface="Poppins"/>
-                <a:sym typeface="Poppins"/>
-              </a:rPr>
-              <a:t>Your Maker Journey</a:t>
-            </a:r>
-          </a:p>
-        </p:txBody>
-      </p:sp>
-      <p:sp>
-        <p:nvSpPr>
-          <p:cNvPr id="335" name="Google Shape;335;p23"/>
-          <p:cNvSpPr txBox="1"/>
-          <p:nvPr/>
-        </p:nvSpPr>
-        <p:spPr>
-          <a:xfrm>
-            <a:off x="771425" y="2110882"/>
-            <a:ext cx="3079800" cy="184800"/>
-          </a:xfrm>
-          <a:prstGeom prst="rect">
-            <a:avLst/>
-          </a:prstGeom>
-          <a:noFill/>
-          <a:ln>
-            <a:noFill/>
-          </a:ln>
-        </p:spPr>
-        <p:txBody>
-          <a:bodyPr anchorCtr="0" anchor="t" bIns="0" lIns="0" spcFirstLastPara="1" rIns="0" wrap="square" tIns="0">
-            <a:spAutoFit/>
-          </a:bodyPr>
-          <a:lstStyle/>
-          <a:p>
-            <a:pPr indent="0" lvl="0" marL="0" marR="0" rtl="0" algn="l">
-              <a:lnSpc>
-                <a:spcPct val="144977"/>
-              </a:lnSpc>
-              <a:spcBef>
-                <a:spcPts val="0"/>
-              </a:spcBef>
-              <a:spcAft>
-                <a:spcPts val="0"/>
-              </a:spcAft>
-              <a:buNone/>
-            </a:pPr>
-            <a:r>
-              <a:rPr i="0" lang="en-US" sz="1200" u="none" cap="none" strike="noStrike">
-                <a:solidFill>
-                  <a:srgbClr val="334155"/>
-                </a:solidFill>
-                <a:latin typeface="Inter"/>
-                <a:ea typeface="Inter"/>
-                <a:cs typeface="Inter"/>
-                <a:sym typeface="Inter"/>
-              </a:rPr>
-              <a:t>Earlier work [A] and next steps [B]:</a:t>
-            </a:r>
-          </a:p>
-        </p:txBody>
-      </p:sp>
-      <p:sp>
-        <p:nvSpPr>
-          <p:cNvPr id="336" name="Google Shape;336;p23"/>
-          <p:cNvSpPr txBox="1"/>
-          <p:nvPr/>
-        </p:nvSpPr>
-        <p:spPr>
-          <a:xfrm>
-            <a:off x="4572365" y="2230457"/>
-            <a:ext cx="3079800" cy="184800"/>
-          </a:xfrm>
-          <a:prstGeom prst="rect">
-            <a:avLst/>
-          </a:prstGeom>
-          <a:noFill/>
-          <a:ln>
-            <a:noFill/>
-          </a:ln>
-        </p:spPr>
-        <p:txBody>
-          <a:bodyPr anchorCtr="0" anchor="t" bIns="0" lIns="0" spcFirstLastPara="1" rIns="0" wrap="square" tIns="0">
-            <a:spAutoFit/>
-          </a:bodyPr>
-          <a:lstStyle/>
-          <a:p>
-            <a:pPr indent="0" lvl="0" marL="0" marR="0" rtl="0" algn="l">
-              <a:lnSpc>
-                <a:spcPct val="144977"/>
-              </a:lnSpc>
-              <a:spcBef>
-                <a:spcPts val="0"/>
-              </a:spcBef>
-              <a:spcAft>
-                <a:spcPts val="0"/>
-              </a:spcAft>
-              <a:buNone/>
-            </a:pPr>
-            <a:r>
-              <a:rPr i="0" lang="en-US" sz="1200" u="none" cap="none" strike="noStrike">
-                <a:solidFill>
-                  <a:srgbClr val="334155"/>
-                </a:solidFill>
-                <a:latin typeface="Inter"/>
-                <a:ea typeface="Inter"/>
-                <a:cs typeface="Inter"/>
-                <a:sym typeface="Inter"/>
-              </a:rPr>
-              <a:t>Original assets in our repository:</a:t>
-            </a:r>
-          </a:p>
-        </p:txBody>
-      </p:sp>
-      <p:sp>
-        <p:nvSpPr>
-          <p:cNvPr id="337" name="Google Shape;337;p23"/>
-          <p:cNvSpPr txBox="1"/>
-          <p:nvPr/>
-        </p:nvSpPr>
-        <p:spPr>
-          <a:xfrm>
-            <a:off x="8340526" y="2104852"/>
-            <a:ext cx="3079800" cy="452400"/>
-          </a:xfrm>
-          <a:prstGeom prst="rect">
-            <a:avLst/>
-          </a:prstGeom>
-          <a:noFill/>
-          <a:ln>
-            <a:noFill/>
-          </a:ln>
-        </p:spPr>
-        <p:txBody>
-          <a:bodyPr anchorCtr="0" anchor="t" bIns="0" lIns="0" spcFirstLastPara="1" rIns="0" wrap="square" tIns="0">
-            <a:spAutoFit/>
-          </a:bodyPr>
-          <a:lstStyle/>
-          <a:p>
-            <a:pPr indent="0" lvl="0" marL="0" marR="0" rtl="0" algn="l">
-              <a:lnSpc>
-                <a:spcPct val="144977"/>
-              </a:lnSpc>
-              <a:spcBef>
-                <a:spcPts val="0"/>
-              </a:spcBef>
-              <a:spcAft>
-                <a:spcPts val="0"/>
-              </a:spcAft>
-              <a:buNone/>
-            </a:pPr>
-            <a:r>
-              <a:rPr i="0" lang="en-US" sz="1200" u="none" cap="none" strike="noStrike">
-                <a:solidFill>
-                  <a:srgbClr val="334155"/>
-                </a:solidFill>
-                <a:latin typeface="Inter"/>
-                <a:ea typeface="Inter"/>
-                <a:cs typeface="Inter"/>
-                <a:sym typeface="Inter"/>
-              </a:rPr>
-              <a:t>Repository link (to be added after upload):</a:t>
-            </a:r>
-          </a:p>
-        </p:txBody>
-      </p:sp>
-      <p:pic>
-        <p:nvPicPr>
-          <p:cNvPr descr="image.png" id="338" name="Google Shape;338;p23"/>
-          <p:cNvPicPr preferRelativeResize="0"/>
-          <p:nvPr/>
-        </p:nvPicPr>
-        <p:blipFill rotWithShape="1">
-          <a:blip r:embed="rId7">
-            <a:alphaModFix/>
-          </a:blip>
-          <a:srcRect b="0" l="0" r="0" t="0"/>
-          <a:stretch/>
-        </p:blipFill>
-        <p:spPr>
-          <a:xfrm>
-            <a:off x="722931" y="1620696"/>
-            <a:ext cx="192425" cy="196300"/>
-          </a:xfrm>
-          <a:prstGeom prst="rect">
-            <a:avLst/>
-          </a:prstGeom>
-          <a:noFill/>
-          <a:ln>
-            <a:noFill/>
-          </a:ln>
-        </p:spPr>
-      </p:pic>
-      <p:sp>
-        <p:nvSpPr>
-          <p:cNvPr id="339" name="Google Shape;339;p23"/>
-          <p:cNvSpPr txBox="1"/>
-          <p:nvPr/>
-        </p:nvSpPr>
-        <p:spPr>
-          <a:xfrm>
-            <a:off x="982995" y="1599734"/>
-            <a:ext cx="2889300" cy="254100"/>
-          </a:xfrm>
-          <a:prstGeom prst="rect">
-            <a:avLst/>
-          </a:prstGeom>
-          <a:noFill/>
-          <a:ln>
-            <a:noFill/>
-          </a:ln>
-        </p:spPr>
-        <p:txBody>
-          <a:bodyPr anchorCtr="0" anchor="t" bIns="0" lIns="0" spcFirstLastPara="1" rIns="0" wrap="square" tIns="0">
-            <a:spAutoFit/>
-          </a:bodyPr>
-          <a:lstStyle/>
-          <a:p>
-            <a:pPr indent="0" lvl="0" marL="0" marR="0" rtl="0" algn="l">
-              <a:spcBef>
-                <a:spcPts val="0"/>
-              </a:spcBef>
-              <a:spcAft>
-                <a:spcPts val="0"/>
-              </a:spcAft>
-              <a:buNone/>
-            </a:pPr>
-            <a:r>
-              <a:rPr b="1" i="0" lang="en-US" sz="1650" u="none" cap="none" strike="noStrike">
-                <a:solidFill>
-                  <a:srgbClr val="0F172A"/>
-                </a:solidFill>
-                <a:latin typeface="Inter"/>
-                <a:ea typeface="Inter"/>
-                <a:cs typeface="Inter"/>
-                <a:sym typeface="Inter"/>
-              </a:rPr>
-              <a:t>Authenticity Verification</a:t>
-            </a:r>
-            <a:endParaRPr b="1" sz="1650">
-              <a:latin typeface="Inter"/>
-              <a:ea typeface="Inter"/>
-              <a:cs typeface="Inter"/>
-              <a:sym typeface="Inter"/>
-            </a:endParaRPr>
-          </a:p>
-        </p:txBody>
-      </p:sp>
-      <p:sp>
-        <p:nvSpPr>
-          <p:cNvPr id="340" name="Google Shape;340;p23"/>
-          <p:cNvSpPr txBox="1"/>
-          <p:nvPr/>
-        </p:nvSpPr>
-        <p:spPr>
-          <a:xfrm>
-            <a:off x="962025" y="2421528"/>
-            <a:ext cx="2889300" cy="987900"/>
-          </a:xfrm>
-          <a:prstGeom prst="rect">
-            <a:avLst/>
-          </a:prstGeom>
-          <a:noFill/>
-          <a:ln>
-            <a:noFill/>
-          </a:ln>
-        </p:spPr>
-        <p:txBody>
-          <a:bodyPr anchorCtr="0" anchor="t" bIns="0" lIns="0" spcFirstLastPara="1" rIns="0" wrap="square" tIns="0">
-            <a:spAutoFit/>
-          </a:bodyPr>
-          <a:lstStyle/>
-          <a:p>
-            <a:pPr indent="-304800" lvl="0" marL="457200" marR="0" rtl="0" algn="l">
-              <a:lnSpc>
-                <a:spcPct val="144952"/>
-              </a:lnSpc>
-              <a:spcBef>
-                <a:spcPts val="0"/>
-              </a:spcBef>
-              <a:spcAft>
-                <a:spcPts val="0"/>
-              </a:spcAft>
-              <a:buClr>
-                <a:srgbClr val="334155"/>
-              </a:buClr>
-              <a:buSzPts val="1200"/>
-              <a:buFont typeface="Inter"/>
-              <a:buChar char="●"/>
-            </a:pPr>
-            <a:r>
-              <a:rPr i="0" lang="en-US" sz="1200" u="none" cap="none" strike="noStrike">
-                <a:solidFill>
-                  <a:srgbClr val="334155"/>
-                </a:solidFill>
-                <a:latin typeface="Inter"/>
-                <a:ea typeface="Inter"/>
-                <a:cs typeface="Inter"/>
-                <a:sym typeface="Inter"/>
-              </a:rPr>
-              <a:t>Earlier trial on Kapton at setting '12' gave a black, LIG-like layer; no photos or settings retained (preliminary).</a:t>
-            </a:r>
-          </a:p>
-        </p:txBody>
-      </p:sp>
-      <p:sp>
-        <p:nvSpPr>
-          <p:cNvPr id="341" name="Google Shape;341;p23"/>
-          <p:cNvSpPr txBox="1"/>
-          <p:nvPr/>
-        </p:nvSpPr>
-        <p:spPr>
-          <a:xfrm>
-            <a:off x="962025" y="3518124"/>
-            <a:ext cx="2889300" cy="720300"/>
-          </a:xfrm>
-          <a:prstGeom prst="rect">
-            <a:avLst/>
-          </a:prstGeom>
-          <a:noFill/>
-          <a:ln>
-            <a:noFill/>
-          </a:ln>
-        </p:spPr>
-        <p:txBody>
-          <a:bodyPr anchorCtr="0" anchor="t" bIns="0" lIns="0" spcFirstLastPara="1" rIns="0" wrap="square" tIns="0">
-            <a:spAutoFit/>
-          </a:bodyPr>
-          <a:lstStyle/>
-          <a:p>
-            <a:pPr indent="-304800" lvl="0" marL="457200" marR="0" rtl="0" algn="l">
-              <a:lnSpc>
-                <a:spcPct val="144952"/>
-              </a:lnSpc>
-              <a:spcBef>
-                <a:spcPts val="0"/>
-              </a:spcBef>
-              <a:spcAft>
-                <a:spcPts val="0"/>
-              </a:spcAft>
-              <a:buClr>
-                <a:srgbClr val="334155"/>
-              </a:buClr>
-              <a:buSzPts val="1200"/>
-              <a:buFont typeface="Inter"/>
-              <a:buChar char="●"/>
-            </a:pPr>
-            <a:r>
-              <a:rPr i="0" lang="en-US" sz="1200" u="none" cap="none" strike="noStrike">
-                <a:solidFill>
-                  <a:srgbClr val="334155"/>
-                </a:solidFill>
-                <a:latin typeface="Inter"/>
-                <a:ea typeface="Inter"/>
-                <a:cs typeface="Inter"/>
-                <a:sym typeface="Inter"/>
-              </a:rPr>
-              <a:t>E1 lab photos (team with ID badges at the laser) to be added after the first session.</a:t>
-            </a:r>
-          </a:p>
-        </p:txBody>
-      </p:sp>
-      <p:sp>
-        <p:nvSpPr>
-          <p:cNvPr id="342" name="Google Shape;342;p23"/>
-          <p:cNvSpPr txBox="1"/>
-          <p:nvPr/>
-        </p:nvSpPr>
-        <p:spPr>
-          <a:xfrm>
-            <a:off x="962025" y="4347110"/>
-            <a:ext cx="2889300" cy="452400"/>
-          </a:xfrm>
-          <a:prstGeom prst="rect">
-            <a:avLst/>
-          </a:prstGeom>
-          <a:noFill/>
-          <a:ln>
-            <a:noFill/>
-          </a:ln>
-        </p:spPr>
-        <p:txBody>
-          <a:bodyPr anchorCtr="0" anchor="t" bIns="0" lIns="0" spcFirstLastPara="1" rIns="0" wrap="square" tIns="0">
-            <a:spAutoFit/>
-          </a:bodyPr>
-          <a:lstStyle/>
-          <a:p>
-            <a:pPr indent="-304800" lvl="0" marL="457200" marR="0" rtl="0" algn="l">
-              <a:lnSpc>
-                <a:spcPct val="144952"/>
-              </a:lnSpc>
-              <a:spcBef>
-                <a:spcPts val="0"/>
-              </a:spcBef>
-              <a:spcAft>
-                <a:spcPts val="0"/>
-              </a:spcAft>
-              <a:buClr>
-                <a:srgbClr val="334155"/>
-              </a:buClr>
-              <a:buSzPts val="1200"/>
-              <a:buFont typeface="Inter"/>
-              <a:buChar char="●"/>
-            </a:pPr>
-            <a:r>
-              <a:rPr i="0" lang="en-US" sz="1200" u="none" cap="none" strike="noStrike">
-                <a:solidFill>
-                  <a:srgbClr val="334155"/>
-                </a:solidFill>
-                <a:latin typeface="Inter"/>
-                <a:ea typeface="Inter"/>
-                <a:cs typeface="Inter"/>
-                <a:sym typeface="Inter"/>
-              </a:rPr>
-              <a:t>Faculty mentor review photo: pending.</a:t>
-            </a:r>
-          </a:p>
-        </p:txBody>
-      </p:sp>
-      <p:pic>
-        <p:nvPicPr>
-          <p:cNvPr descr="image.png" id="343" name="Google Shape;343;p23"/>
-          <p:cNvPicPr preferRelativeResize="0"/>
-          <p:nvPr/>
-        </p:nvPicPr>
-        <p:blipFill rotWithShape="1">
-          <a:blip r:embed="rId8">
-            <a:alphaModFix/>
-          </a:blip>
-          <a:srcRect b="0" l="0" r="0" t="0"/>
-          <a:stretch/>
-        </p:blipFill>
-        <p:spPr>
-          <a:xfrm>
-            <a:off x="4468698" y="1635924"/>
-            <a:ext cx="192425" cy="168664"/>
-          </a:xfrm>
-          <a:prstGeom prst="rect">
-            <a:avLst/>
-          </a:prstGeom>
-          <a:noFill/>
-          <a:ln>
-            <a:noFill/>
-          </a:ln>
-        </p:spPr>
-      </p:pic>
-      <p:sp>
-        <p:nvSpPr>
-          <p:cNvPr id="344" name="Google Shape;344;p23"/>
-          <p:cNvSpPr txBox="1"/>
-          <p:nvPr/>
-        </p:nvSpPr>
-        <p:spPr>
-          <a:xfrm>
-            <a:off x="4786600" y="1599734"/>
-            <a:ext cx="2889300" cy="507900"/>
-          </a:xfrm>
-          <a:prstGeom prst="rect">
-            <a:avLst/>
-          </a:prstGeom>
-          <a:noFill/>
-          <a:ln>
-            <a:noFill/>
-          </a:ln>
-        </p:spPr>
-        <p:txBody>
-          <a:bodyPr anchorCtr="0" anchor="t" bIns="0" lIns="0" spcFirstLastPara="1" rIns="0" wrap="square" tIns="0">
-            <a:spAutoFit/>
-          </a:bodyPr>
-          <a:lstStyle/>
-          <a:p>
-            <a:pPr indent="0" lvl="0" marL="0" marR="0" rtl="0" algn="l">
-              <a:spcBef>
-                <a:spcPts val="0"/>
-              </a:spcBef>
-              <a:spcAft>
-                <a:spcPts val="0"/>
-              </a:spcAft>
-              <a:buNone/>
-            </a:pPr>
-            <a:r>
-              <a:rPr b="1" i="0" lang="en-US" sz="1650" u="none" cap="none" strike="noStrike">
-                <a:solidFill>
-                  <a:srgbClr val="0F172A"/>
-                </a:solidFill>
-                <a:latin typeface="Inter"/>
-                <a:ea typeface="Inter"/>
-                <a:cs typeface="Inter"/>
-                <a:sym typeface="Inter"/>
-              </a:rPr>
-              <a:t>Work-In-Progress Software Evidence</a:t>
-            </a:r>
-            <a:endParaRPr b="1" sz="1650">
-              <a:latin typeface="Inter"/>
-              <a:ea typeface="Inter"/>
-              <a:cs typeface="Inter"/>
-              <a:sym typeface="Inter"/>
-            </a:endParaRPr>
-          </a:p>
-        </p:txBody>
-      </p:sp>
-      <p:sp>
-        <p:nvSpPr>
-          <p:cNvPr id="345" name="Google Shape;345;p23"/>
-          <p:cNvSpPr txBox="1"/>
-          <p:nvPr/>
-        </p:nvSpPr>
-        <p:spPr>
-          <a:xfrm>
-            <a:off x="4762865" y="2512065"/>
-            <a:ext cx="2889300" cy="720300"/>
-          </a:xfrm>
-          <a:prstGeom prst="rect">
-            <a:avLst/>
-          </a:prstGeom>
-          <a:noFill/>
-          <a:ln>
-            <a:noFill/>
-          </a:ln>
-        </p:spPr>
-        <p:txBody>
-          <a:bodyPr anchorCtr="0" anchor="t" bIns="0" lIns="0" spcFirstLastPara="1" rIns="0" wrap="square" tIns="0">
-            <a:spAutoFit/>
-          </a:bodyPr>
-          <a:lstStyle/>
-          <a:p>
-            <a:pPr indent="-304800" lvl="0" marL="457200" marR="0" rtl="0" algn="l">
-              <a:lnSpc>
-                <a:spcPct val="144952"/>
-              </a:lnSpc>
-              <a:spcBef>
-                <a:spcPts val="0"/>
-              </a:spcBef>
-              <a:spcAft>
-                <a:spcPts val="0"/>
-              </a:spcAft>
-              <a:buClr>
-                <a:srgbClr val="334155"/>
-              </a:buClr>
-              <a:buSzPts val="1200"/>
-              <a:buFont typeface="Inter"/>
-              <a:buChar char="●"/>
-            </a:pPr>
-            <a:r>
-              <a:rPr i="0" lang="en-US" sz="1200" u="none" cap="none" strike="noStrike">
-                <a:solidFill>
-                  <a:srgbClr val="334155"/>
-                </a:solidFill>
-                <a:latin typeface="Inter"/>
-                <a:ea typeface="Inter"/>
-                <a:cs typeface="Inter"/>
-                <a:sym typeface="Inter"/>
-              </a:rPr>
-              <a:t>Python DXF generator + coupon file; E1 analysis script; git history from 14 Oct 2026.</a:t>
-            </a:r>
-          </a:p>
-        </p:txBody>
-      </p:sp>
-      <p:sp>
-        <p:nvSpPr>
-          <p:cNvPr id="346" name="Google Shape;346;p23"/>
-          <p:cNvSpPr txBox="1"/>
-          <p:nvPr/>
-        </p:nvSpPr>
-        <p:spPr>
-          <a:xfrm>
-            <a:off x="4762865" y="3312911"/>
-            <a:ext cx="2889300" cy="452400"/>
-          </a:xfrm>
-          <a:prstGeom prst="rect">
-            <a:avLst/>
-          </a:prstGeom>
-          <a:noFill/>
-          <a:ln>
-            <a:noFill/>
-          </a:ln>
-        </p:spPr>
-        <p:txBody>
-          <a:bodyPr anchorCtr="0" anchor="t" bIns="0" lIns="0" spcFirstLastPara="1" rIns="0" wrap="square" tIns="0">
-            <a:spAutoFit/>
-          </a:bodyPr>
-          <a:lstStyle/>
-          <a:p>
-            <a:pPr indent="-304800" lvl="0" marL="457200" marR="0" rtl="0" algn="l">
-              <a:lnSpc>
-                <a:spcPct val="144952"/>
-              </a:lnSpc>
-              <a:spcBef>
-                <a:spcPts val="0"/>
-              </a:spcBef>
-              <a:spcAft>
-                <a:spcPts val="0"/>
-              </a:spcAft>
-              <a:buClr>
-                <a:srgbClr val="334155"/>
-              </a:buClr>
-              <a:buSzPts val="1200"/>
-              <a:buFont typeface="Inter"/>
-              <a:buChar char="●"/>
-            </a:pPr>
-            <a:r>
-              <a:rPr i="0" lang="en-US" sz="1200" u="none" cap="none" strike="noStrike">
-                <a:solidFill>
-                  <a:srgbClr val="334155"/>
-                </a:solidFill>
-                <a:latin typeface="Inter"/>
-                <a:ea typeface="Inter"/>
-                <a:cs typeface="Inter"/>
-                <a:sym typeface="Inter"/>
-              </a:rPr>
-              <a:t>KiCad not installed yet; schematic drawn with schemdraw.</a:t>
-            </a:r>
-          </a:p>
-        </p:txBody>
-      </p:sp>
-      <p:sp>
-        <p:nvSpPr>
-          <p:cNvPr id="347" name="Google Shape;347;p23"/>
-          <p:cNvSpPr txBox="1"/>
-          <p:nvPr/>
-        </p:nvSpPr>
-        <p:spPr>
-          <a:xfrm>
-            <a:off x="4762865" y="3845838"/>
-            <a:ext cx="2889300" cy="452400"/>
-          </a:xfrm>
-          <a:prstGeom prst="rect">
-            <a:avLst/>
-          </a:prstGeom>
-          <a:noFill/>
-          <a:ln>
-            <a:noFill/>
-          </a:ln>
-        </p:spPr>
-        <p:txBody>
-          <a:bodyPr anchorCtr="0" anchor="t" bIns="0" lIns="0" spcFirstLastPara="1" rIns="0" wrap="square" tIns="0">
-            <a:spAutoFit/>
-          </a:bodyPr>
-          <a:lstStyle/>
-          <a:p>
-            <a:pPr indent="-304800" lvl="0" marL="457200" marR="0" rtl="0" algn="l">
-              <a:lnSpc>
-                <a:spcPct val="144952"/>
-              </a:lnSpc>
-              <a:spcBef>
-                <a:spcPts val="0"/>
-              </a:spcBef>
-              <a:spcAft>
-                <a:spcPts val="0"/>
-              </a:spcAft>
-              <a:buClr>
-                <a:srgbClr val="334155"/>
-              </a:buClr>
-              <a:buSzPts val="1200"/>
-              <a:buFont typeface="Inter"/>
-              <a:buChar char="●"/>
-            </a:pPr>
-            <a:r>
-              <a:rPr i="0" lang="en-US" sz="1200" u="none" cap="none" strike="noStrike">
-                <a:solidFill>
-                  <a:srgbClr val="334155"/>
-                </a:solidFill>
-                <a:latin typeface="Inter"/>
-                <a:ea typeface="Inter"/>
-                <a:cs typeface="Inter"/>
-                <a:sym typeface="Inter"/>
-              </a:rPr>
-              <a:t>No FEA claimed; bending will be measured.</a:t>
-            </a:r>
-          </a:p>
-        </p:txBody>
-      </p:sp>
-      <p:pic>
-        <p:nvPicPr>
-          <p:cNvPr descr="image.png" id="348" name="Google Shape;348;p23"/>
-          <p:cNvPicPr preferRelativeResize="0"/>
-          <p:nvPr/>
-        </p:nvPicPr>
-        <p:blipFill rotWithShape="1">
-          <a:blip r:embed="rId9">
-            <a:alphaModFix/>
-          </a:blip>
-          <a:srcRect b="0" l="0" r="0" t="0"/>
-          <a:stretch/>
-        </p:blipFill>
-        <p:spPr>
-          <a:xfrm>
-            <a:off x="8214475" y="1592695"/>
-            <a:ext cx="318593" cy="196306"/>
-          </a:xfrm>
-          <a:prstGeom prst="rect">
-            <a:avLst/>
-          </a:prstGeom>
-          <a:noFill/>
-          <a:ln>
-            <a:noFill/>
-          </a:ln>
-        </p:spPr>
-      </p:pic>
-      <p:sp>
-        <p:nvSpPr>
-          <p:cNvPr id="349" name="Google Shape;349;p23"/>
-          <p:cNvSpPr txBox="1"/>
-          <p:nvPr/>
-        </p:nvSpPr>
-        <p:spPr>
-          <a:xfrm>
-            <a:off x="8628295" y="1599734"/>
-            <a:ext cx="2663700" cy="254100"/>
-          </a:xfrm>
-          <a:prstGeom prst="rect">
-            <a:avLst/>
-          </a:prstGeom>
-          <a:noFill/>
-          <a:ln>
-            <a:noFill/>
-          </a:ln>
-        </p:spPr>
-        <p:txBody>
-          <a:bodyPr anchorCtr="0" anchor="t" bIns="0" lIns="0" spcFirstLastPara="1" rIns="0" wrap="square" tIns="0">
-            <a:spAutoFit/>
-          </a:bodyPr>
-          <a:lstStyle/>
-          <a:p>
-            <a:pPr indent="0" lvl="0" marL="0" marR="0" rtl="0" algn="l">
-              <a:spcBef>
-                <a:spcPts val="0"/>
-              </a:spcBef>
-              <a:spcAft>
-                <a:spcPts val="0"/>
-              </a:spcAft>
-              <a:buNone/>
-            </a:pPr>
-            <a:r>
-              <a:rPr b="1" i="0" lang="en-US" sz="1650" u="none" cap="none" strike="noStrike">
-                <a:solidFill>
-                  <a:srgbClr val="0F172A"/>
-                </a:solidFill>
-                <a:latin typeface="Inter"/>
-                <a:ea typeface="Inter"/>
-                <a:cs typeface="Inter"/>
-                <a:sym typeface="Inter"/>
-              </a:rPr>
-              <a:t>Raw Repository Linkage</a:t>
-            </a:r>
-            <a:endParaRPr b="1" sz="1650">
-              <a:latin typeface="Inter"/>
-              <a:ea typeface="Inter"/>
-              <a:cs typeface="Inter"/>
-              <a:sym typeface="Inter"/>
-            </a:endParaRPr>
-          </a:p>
-        </p:txBody>
-      </p:sp>
-      <p:sp>
-        <p:nvSpPr>
-          <p:cNvPr id="350" name="Google Shape;350;p23"/>
-          <p:cNvSpPr txBox="1"/>
-          <p:nvPr/>
-        </p:nvSpPr>
-        <p:spPr>
-          <a:xfrm>
-            <a:off x="8531126" y="2604311"/>
-            <a:ext cx="2889300" cy="452400"/>
-          </a:xfrm>
-          <a:prstGeom prst="rect">
-            <a:avLst/>
-          </a:prstGeom>
-          <a:noFill/>
-          <a:ln>
-            <a:noFill/>
-          </a:ln>
-        </p:spPr>
-        <p:txBody>
-          <a:bodyPr anchorCtr="0" anchor="t" bIns="0" lIns="0" spcFirstLastPara="1" rIns="0" wrap="square" tIns="0">
-            <a:spAutoFit/>
-          </a:bodyPr>
-          <a:lstStyle/>
-          <a:p>
-            <a:pPr indent="-304800" lvl="0" marL="457200" marR="0" rtl="0" algn="l">
-              <a:lnSpc>
-                <a:spcPct val="144952"/>
-              </a:lnSpc>
-              <a:spcBef>
-                <a:spcPts val="0"/>
-              </a:spcBef>
-              <a:spcAft>
-                <a:spcPts val="0"/>
-              </a:spcAft>
-              <a:buClr>
-                <a:srgbClr val="334155"/>
-              </a:buClr>
-              <a:buSzPts val="1200"/>
-              <a:buFont typeface="Inter"/>
-              <a:buChar char="●"/>
-            </a:pPr>
-            <a:r>
-              <a:rPr i="0" lang="en-US" sz="1200" u="none" cap="none" strike="noStrike">
-                <a:solidFill>
-                  <a:srgbClr val="334155"/>
-                </a:solidFill>
-                <a:latin typeface="Inter"/>
-                <a:ea typeface="Inter"/>
-                <a:cs typeface="Inter"/>
-                <a:sym typeface="Inter"/>
-              </a:rPr>
-              <a:t>Contains .py, .dxf, .csv and protocols.</a:t>
-            </a:r>
-          </a:p>
-        </p:txBody>
-      </p:sp>
-      <p:sp>
-        <p:nvSpPr>
-          <p:cNvPr id="351" name="Google Shape;351;p23"/>
-          <p:cNvSpPr txBox="1"/>
-          <p:nvPr/>
-        </p:nvSpPr>
-        <p:spPr>
-          <a:xfrm>
-            <a:off x="8531126" y="3153913"/>
-            <a:ext cx="2889300" cy="720300"/>
-          </a:xfrm>
-          <a:prstGeom prst="rect">
-            <a:avLst/>
-          </a:prstGeom>
-          <a:noFill/>
-          <a:ln>
-            <a:noFill/>
-          </a:ln>
-        </p:spPr>
-        <p:txBody>
-          <a:bodyPr anchorCtr="0" anchor="t" bIns="0" lIns="0" spcFirstLastPara="1" rIns="0" wrap="square" tIns="0">
-            <a:spAutoFit/>
-          </a:bodyPr>
-          <a:lstStyle/>
-          <a:p>
-            <a:pPr indent="-304800" lvl="0" marL="457200" marR="0" rtl="0" algn="l">
-              <a:lnSpc>
-                <a:spcPct val="144952"/>
-              </a:lnSpc>
-              <a:spcBef>
-                <a:spcPts val="0"/>
-              </a:spcBef>
-              <a:spcAft>
-                <a:spcPts val="0"/>
-              </a:spcAft>
-              <a:buClr>
-                <a:srgbClr val="334155"/>
-              </a:buClr>
-              <a:buSzPts val="1200"/>
-              <a:buFont typeface="Inter"/>
-              <a:buChar char="●"/>
-            </a:pPr>
-            <a:r>
-              <a:rPr i="0" lang="en-US" sz="1200" u="none" cap="none" strike="noStrike">
-                <a:solidFill>
-                  <a:srgbClr val="334155"/>
-                </a:solidFill>
-                <a:latin typeface="Inter"/>
-                <a:ea typeface="Inter"/>
-                <a:cs typeface="Inter"/>
-                <a:sym typeface="Inter"/>
-              </a:rPr>
-              <a:t>Raw CSVs and original photos committed with timestamps.</a:t>
-            </a:r>
-          </a:p>
-        </p:txBody>
-      </p:sp>
-      <p:sp>
-        <p:nvSpPr>
-          <p:cNvPr id="352" name="Google Shape;352;p23"/>
-          <p:cNvSpPr txBox="1"/>
-          <p:nvPr/>
-        </p:nvSpPr>
-        <p:spPr>
-          <a:xfrm>
-            <a:off x="8531126" y="3971424"/>
-            <a:ext cx="2889300" cy="452400"/>
-          </a:xfrm>
-          <a:prstGeom prst="rect">
-            <a:avLst/>
-          </a:prstGeom>
-          <a:noFill/>
-          <a:ln>
-            <a:noFill/>
-          </a:ln>
-        </p:spPr>
-        <p:txBody>
-          <a:bodyPr anchorCtr="0" anchor="t" bIns="0" lIns="0" spcFirstLastPara="1" rIns="0" wrap="square" tIns="0">
-            <a:spAutoFit/>
-          </a:bodyPr>
-          <a:lstStyle/>
-          <a:p>
-            <a:pPr indent="-304800" lvl="0" marL="457200" marR="0" rtl="0" algn="l">
-              <a:lnSpc>
-                <a:spcPct val="144952"/>
-              </a:lnSpc>
-              <a:spcBef>
-                <a:spcPts val="0"/>
-              </a:spcBef>
-              <a:spcAft>
-                <a:spcPts val="0"/>
-              </a:spcAft>
-              <a:buClr>
-                <a:srgbClr val="334155"/>
-              </a:buClr>
-              <a:buSzPts val="1200"/>
-              <a:buFont typeface="Inter"/>
-              <a:buChar char="●"/>
-            </a:pPr>
-            <a:r>
-              <a:rPr i="0" lang="en-US" sz="1200" u="none" cap="none" strike="noStrike">
-                <a:solidFill>
-                  <a:srgbClr val="334155"/>
-                </a:solidFill>
-                <a:latin typeface="Inter"/>
-                <a:ea typeface="Inter"/>
-                <a:cs typeface="Inter"/>
-                <a:sym typeface="Inter"/>
-              </a:rPr>
-              <a:t>No embedded videos; external links only.</a:t>
-            </a:r>
-          </a:p>
-        </p:txBody>
-      </p:sp>
-      <p:sp>
-        <p:nvSpPr>
-          <p:cNvPr id="353" name="Google Shape;353;p23"/>
-          <p:cNvSpPr txBox="1"/>
-          <p:nvPr/>
-        </p:nvSpPr>
-        <p:spPr>
-          <a:xfrm>
-            <a:off x="790575" y="2064737"/>
-            <a:ext cx="57300" cy="215400"/>
-          </a:xfrm>
-          <a:prstGeom prst="rect">
-            <a:avLst/>
-          </a:prstGeom>
-          <a:noFill/>
-          <a:ln>
-            <a:noFill/>
-          </a:ln>
-        </p:spPr>
-        <p:txBody>
-          <a:bodyPr anchorCtr="0" anchor="t" bIns="0" lIns="0" spcFirstLastPara="1" rIns="0" wrap="square" tIns="0">
-            <a:spAutoFit/>
-          </a:bodyPr>
-          <a:lstStyle/>
-          <a:p>
-            <a:pPr indent="0" lvl="0" marL="0" marR="0" rtl="0" algn="l">
-              <a:lnSpc>
-                <a:spcPct val="144916"/>
-              </a:lnSpc>
-              <a:spcBef>
-                <a:spcPts val="0"/>
-              </a:spcBef>
-              <a:spcAft>
-                <a:spcPts val="0"/>
-              </a:spcAft>
-              <a:buNone/>
-            </a:pPr>
-            <a:r>
-              <a:t/>
-            </a:r>
-            <a:endParaRPr/>
-          </a:p>
-        </p:txBody>
-      </p:sp>
-      <p:sp>
-        <p:nvSpPr>
-          <p:cNvPr id="354" name="Google Shape;354;p23"/>
-          <p:cNvSpPr txBox="1"/>
-          <p:nvPr/>
-        </p:nvSpPr>
-        <p:spPr>
-          <a:xfrm>
-            <a:off x="4575125" y="2439654"/>
-            <a:ext cx="57300" cy="215400"/>
-          </a:xfrm>
-          <a:prstGeom prst="rect">
-            <a:avLst/>
-          </a:prstGeom>
-          <a:noFill/>
-          <a:ln>
-            <a:noFill/>
-          </a:ln>
-        </p:spPr>
-        <p:txBody>
-          <a:bodyPr anchorCtr="0" anchor="t" bIns="0" lIns="0" spcFirstLastPara="1" rIns="0" wrap="square" tIns="0">
-            <a:spAutoFit/>
-          </a:bodyPr>
-          <a:lstStyle/>
-          <a:p>
-            <a:pPr indent="0" lvl="0" marL="0" marR="0" rtl="0" algn="l">
-              <a:lnSpc>
-                <a:spcPct val="144916"/>
-              </a:lnSpc>
-              <a:spcBef>
-                <a:spcPts val="0"/>
-              </a:spcBef>
-              <a:spcAft>
-                <a:spcPts val="0"/>
-              </a:spcAft>
-              <a:buNone/>
-            </a:pPr>
-            <a:r>
-              <a:t/>
-            </a:r>
-            <a:endParaRPr/>
-          </a:p>
-        </p:txBody>
-      </p:sp>
-      <p:sp>
-        <p:nvSpPr>
-          <p:cNvPr id="355" name="Google Shape;355;p23"/>
-          <p:cNvSpPr txBox="1"/>
-          <p:nvPr/>
-        </p:nvSpPr>
-        <p:spPr>
-          <a:xfrm>
-            <a:off x="8359676" y="2600829"/>
-            <a:ext cx="57300" cy="215400"/>
-          </a:xfrm>
-          <a:prstGeom prst="rect">
-            <a:avLst/>
-          </a:prstGeom>
-          <a:noFill/>
-          <a:ln>
-            <a:noFill/>
-          </a:ln>
-        </p:spPr>
-        <p:txBody>
-          <a:bodyPr anchorCtr="0" anchor="t" bIns="0" lIns="0" spcFirstLastPara="1" rIns="0" wrap="square" tIns="0">
-            <a:spAutoFit/>
-          </a:bodyPr>
-          <a:lstStyle/>
-          <a:p>
-            <a:pPr indent="0" lvl="0" marL="0" marR="0" rtl="0" algn="l">
-              <a:lnSpc>
-                <a:spcPct val="144916"/>
-              </a:lnSpc>
-              <a:spcBef>
-                <a:spcPts val="0"/>
-              </a:spcBef>
-              <a:spcAft>
-                <a:spcPts val="0"/>
-              </a:spcAft>
-              <a:buNone/>
-            </a:pPr>
-            <a:r>
-              <a:t/>
-            </a:r>
-            <a:endParaRPr/>
-          </a:p>
-        </p:txBody>
-      </p:sp>
-      <p:pic>
-        <p:nvPicPr>
-          <p:cNvPr id="356" name="Google Shape;356;p23" title="MBF_Logo_2020.png"/>
-          <p:cNvPicPr preferRelativeResize="0"/>
-          <p:nvPr/>
-        </p:nvPicPr>
-        <p:blipFill>
-          <a:blip r:embed="rId10">
-            <a:alphaModFix/>
-          </a:blip>
-          <a:stretch>
-            <a:fillRect/>
-          </a:stretch>
-        </p:blipFill>
-        <p:spPr>
-          <a:xfrm>
-            <a:off x="11095194" y="6280800"/>
-            <a:ext cx="1096806" cy="577200"/>
-          </a:xfrm>
-          <a:prstGeom prst="rect">
-            <a:avLst/>
-          </a:prstGeom>
-          <a:noFill/>
-          <a:ln>
-            <a:noFill/>
-          </a:ln>
-        </p:spPr>
-      </p:pic>
-      <p:pic>
-        <p:nvPicPr>
-          <p:cNvPr id="357" name="Google Shape;357;p23" title="VK colored transparent logo.png"/>
           <p:cNvPicPr preferRelativeResize="0"/>
           <p:nvPr/>
         </p:nvPicPr>
@@ -19266,7 +17015,7 @@
         <p:spPr>
           <a:xfrm>
             <a:off x="533400" y="956220"/>
-            <a:ext cx="5429250" cy="2428875"/>
+            <a:ext cx="5429250" cy="3035808"/>
           </a:xfrm>
           <a:prstGeom prst="rect">
             <a:avLst/>
@@ -19376,7 +17125,7 @@
                 <a:cs typeface="DM Sans"/>
                 <a:sym typeface="DM Sans"/>
               </a:rPr>
-              <a:t>Institutional Sign-Off: </a:t>
+              <a:t>Team: </a:t>
             </a:r>
             <a:r>
               <a:rPr b="0" i="0" lang="en-US" sz="937" u="none" cap="none" strike="noStrike">
@@ -19388,7 +17137,7 @@
                 <a:cs typeface="DM Sans"/>
                 <a:sym typeface="DM Sans"/>
               </a:rPr>
-              <a:t>faculty mentor review pending — to be added after Experiment E1.</a:t>
+              <a:t>Soham Prabhakar Kadu &amp; Bhakti Ajay Kadam. Faculty mentor sign-off to be added after the E1 review.</a:t>
             </a:r>
           </a:p>
         </p:txBody>
@@ -19401,7 +17150,7 @@
         </p:nvSpPr>
         <p:spPr>
           <a:xfrm>
-            <a:off x="533400" y="3432720"/>
+            <a:off x="533400" y="4038129"/>
             <a:ext cx="5429250" cy="158799"/>
           </a:xfrm>
           <a:prstGeom prst="rect">
@@ -19440,7 +17189,7 @@
                 <a:cs typeface="DM Sans"/>
                 <a:sym typeface="DM Sans"/>
               </a:rPr>
-              <a:t>Figure: PLACEHOLDER — original E1 lab photo to be inserted (no photo exists yet)</a:t>
+              <a:t>Figure: our real work so far: coupon design file, E1 data sheet, machine settings read from our LaserCAD install (lab photos follow E1)</a:t>
             </a:r>
           </a:p>
         </p:txBody>
@@ -19461,7 +17210,7 @@
         <p:spPr>
           <a:xfrm>
             <a:off x="542925" y="965745"/>
-            <a:ext cx="5410200" cy="2409825"/>
+            <a:ext cx="5410200" cy="3017520"/>
           </a:xfrm>
           <a:prstGeom prst="rect">
             <a:avLst/>
@@ -19608,7 +17357,7 @@
                 <a:cs typeface="DM Sans"/>
                 <a:sym typeface="DM Sans"/>
               </a:rPr>
-              <a:t>after an evidence audit, the Stage 1 closed-loop electrotherapy bandage was re-scoped to a measurable first step: reproducible LIG on our own 100 W laser.</a:t>
+              <a:t>Stage 1's closed-loop electrotherapy bandage was too broad to build well; we narrowed it to one measurable job: telling when a dressing is full.</a:t>
             </a:r>
           </a:p>
         </p:txBody>
@@ -19660,7 +17409,7 @@
                 <a:cs typeface="DM Sans"/>
                 <a:sym typeface="DM Sans"/>
               </a:rPr>
-              <a:t>Machine Facts Recovered: </a:t>
+              <a:t>Laser Evidence: </a:t>
             </a:r>
             <a:r>
               <a:rPr b="0" i="0" lang="en-US" sz="1012" u="none" cap="none" strike="noStrike">
@@ -19672,7 +17421,7 @@
                 <a:cs typeface="DM Sans"/>
                 <a:sym typeface="DM Sans"/>
               </a:rPr>
-              <a:t>LaserCAD V8.28 config on our laptop: 1200×900 mm bed, 500/400 mm/s axes, 20 kHz PWM, 98 % max power [A].</a:t>
+              <a:t>our earlier trial on Kapton at setting '12' gave a black, graphene-like layer; E1 repeats it with full records.</a:t>
             </a:r>
           </a:p>
         </p:txBody>
@@ -19724,7 +17473,7 @@
                 <a:cs typeface="DM Sans"/>
                 <a:sym typeface="DM Sans"/>
               </a:rPr>
-              <a:t>Preliminary Observation: </a:t>
+              <a:t>Machine Facts: </a:t>
             </a:r>
             <a:r>
               <a:rPr b="0" i="0" lang="en-US" sz="1012" u="none" cap="none" strike="noStrike">
@@ -19736,7 +17485,7 @@
                 <a:cs typeface="DM Sans"/>
                 <a:sym typeface="DM Sans"/>
               </a:rPr>
-              <a:t>setting '12' gave a LIG-like black layer [A, unverified]. '12' is most likely a % PWM command, not watts; tube current must be measured.</a:t>
+              <a:t>LaserCAD V8.28 on our laptop: 1200 × 900 mm bed, 20 kHz PWM, 98 % cap. So '12' is a % command, not watts.</a:t>
             </a:r>
           </a:p>
         </p:txBody>
@@ -19800,7 +17549,7 @@
                 <a:cs typeface="DM Sans"/>
                 <a:sym typeface="DM Sans"/>
               </a:rPr>
-              <a:t>E1 protocol, pre-filled sample log, test coupon, analysis code and evidence register committed with timestamps (link to be added).</a:t>
+              <a:t>design scripts, coupon DXF, E1 protocol and data sheets under version control with timestamps (link to be added).</a:t>
             </a:r>
           </a:p>
         </p:txBody>
@@ -20053,898 +17802,6 @@
         </p:nvPicPr>
         <p:blipFill rotWithShape="1">
           <a:blip r:embed="rId11">
-            <a:alphaModFix/>
-          </a:blip>
-          <a:srcRect b="44466" l="14673" r="15820" t="33074"/>
-          <a:stretch/>
-        </p:blipFill>
-        <p:spPr>
-          <a:xfrm>
-            <a:off x="0" y="6280800"/>
-            <a:ext cx="1786280" cy="577200"/>
-          </a:xfrm>
-          <a:prstGeom prst="rect">
-            <a:avLst/>
-          </a:prstGeom>
-          <a:noFill/>
-          <a:ln>
-            <a:noFill/>
-          </a:ln>
-        </p:spPr>
-      </p:pic>
-    </p:spTree>
-  </p:cSld>
-  <p:clrMapOvr>
-    <a:masterClrMapping/>
-  </p:clrMapOvr>
-</p:sld>
-</file>
-
-<file path=ppt/slides/slide13.xml><?xml version="1.0" encoding="utf-8"?>
-<p:sld xmlns:a="http://schemas.openxmlformats.org/drawingml/2006/main" xmlns:r="http://schemas.openxmlformats.org/officeDocument/2006/relationships" xmlns:mc="http://schemas.openxmlformats.org/markup-compatibility/2006" xmlns:mv="urn:schemas-microsoft-com:mac:vml" xmlns:p="http://schemas.openxmlformats.org/presentationml/2006/main" xmlns:c="http://schemas.openxmlformats.org/drawingml/2006/chart" xmlns:dgm="http://schemas.openxmlformats.org/drawingml/2006/diagram" xmlns:o="urn:schemas-microsoft-com:office:office" xmlns:v="urn:schemas-microsoft-com:vml" xmlns:pvml="urn:schemas-microsoft-com:office:powerpoint" xmlns:com="http://schemas.openxmlformats.org/drawingml/2006/compatibility" xmlns:p14="http://schemas.microsoft.com/office/powerpoint/2010/main" xmlns:p15="http://schemas.microsoft.com/office/powerpoint/2012/main" xmlns:ahyp="http://schemas.microsoft.com/office/drawing/2018/hyperlinkcolor">
-  <p:cSld>
-    <p:bg>
-      <p:bgPr>
-        <a:solidFill>
-          <a:srgbClr val="FFFFFF"/>
-        </a:solidFill>
-      </p:bgPr>
-    </p:bg>
-    <p:spTree>
-      <p:nvGrpSpPr>
-        <p:cNvPr id="386" name="Shape 386"/>
-        <p:cNvGrpSpPr/>
-        <p:nvPr/>
-      </p:nvGrpSpPr>
-      <p:grpSpPr>
-        <a:xfrm>
-          <a:off x="0" y="0"/>
-          <a:ext cx="0" cy="0"/>
-          <a:chOff x="0" y="0"/>
-          <a:chExt cx="0" cy="0"/>
-        </a:xfrm>
-      </p:grpSpPr>
-      <p:pic>
-        <p:nvPicPr>
-          <p:cNvPr descr="image.png" id="387" name="Google Shape;387;p25"/>
-          <p:cNvPicPr preferRelativeResize="0"/>
-          <p:nvPr/>
-        </p:nvPicPr>
-        <p:blipFill rotWithShape="1">
-          <a:blip r:embed="rId3">
-            <a:alphaModFix/>
-          </a:blip>
-          <a:srcRect b="0" l="0" r="0" t="0"/>
-          <a:stretch/>
-        </p:blipFill>
-        <p:spPr>
-          <a:xfrm>
-            <a:off x="563213" y="1451250"/>
-            <a:ext cx="5372100" cy="2552700"/>
-          </a:xfrm>
-          <a:prstGeom prst="rect">
-            <a:avLst/>
-          </a:prstGeom>
-          <a:noFill/>
-          <a:ln>
-            <a:noFill/>
-          </a:ln>
-        </p:spPr>
-      </p:pic>
-      <p:sp>
-        <p:nvSpPr>
-          <p:cNvPr id="388" name="Google Shape;388;p25"/>
-          <p:cNvSpPr txBox="1"/>
-          <p:nvPr/>
-        </p:nvSpPr>
-        <p:spPr>
-          <a:xfrm>
-            <a:off x="801338" y="2194200"/>
-            <a:ext cx="5140500" cy="254100"/>
-          </a:xfrm>
-          <a:prstGeom prst="rect">
-            <a:avLst/>
-          </a:prstGeom>
-          <a:noFill/>
-          <a:ln>
-            <a:noFill/>
-          </a:ln>
-        </p:spPr>
-        <p:txBody>
-          <a:bodyPr anchorCtr="0" anchor="t" bIns="0" lIns="0" spcFirstLastPara="1" rIns="0" wrap="square" tIns="0">
-            <a:spAutoFit/>
-          </a:bodyPr>
-          <a:lstStyle/>
-          <a:p>
-            <a:pPr indent="0" lvl="0" marL="0" marR="0" rtl="0" algn="l">
-              <a:spcBef>
-                <a:spcPts val="0"/>
-              </a:spcBef>
-              <a:spcAft>
-                <a:spcPts val="0"/>
-              </a:spcAft>
-              <a:buNone/>
-            </a:pPr>
-            <a:r>
-              <a:rPr b="0" i="0" lang="en-US" sz="1650" u="none" cap="none" strike="noStrike">
-                <a:solidFill>
-                  <a:srgbClr val="0284C7"/>
-                </a:solidFill>
-                <a:latin typeface="Poppins SemiBold"/>
-                <a:ea typeface="Poppins SemiBold"/>
-                <a:cs typeface="Poppins SemiBold"/>
-                <a:sym typeface="Poppins SemiBold"/>
-              </a:rPr>
-              <a:t>Safety &amp; Hazard Mitigation</a:t>
-            </a:r>
-            <a:endParaRPr/>
-          </a:p>
-        </p:txBody>
-      </p:sp>
-      <p:sp>
-        <p:nvSpPr>
-          <p:cNvPr id="389" name="Google Shape;389;p25"/>
-          <p:cNvSpPr txBox="1"/>
-          <p:nvPr/>
-        </p:nvSpPr>
-        <p:spPr>
-          <a:xfrm>
-            <a:off x="801338" y="2622825"/>
-            <a:ext cx="4896000" cy="461700"/>
-          </a:xfrm>
-          <a:prstGeom prst="rect">
-            <a:avLst/>
-          </a:prstGeom>
-          <a:noFill/>
-          <a:ln>
-            <a:noFill/>
-          </a:ln>
-        </p:spPr>
-        <p:txBody>
-          <a:bodyPr anchorCtr="0" anchor="t" bIns="0" lIns="0" spcFirstLastPara="1" rIns="0" wrap="square" tIns="0">
-            <a:spAutoFit/>
-          </a:bodyPr>
-          <a:lstStyle/>
-          <a:p>
-            <a:pPr indent="0" lvl="0" marL="0" marR="0" rtl="0" algn="l">
-              <a:lnSpc>
-                <a:spcPct val="150000"/>
-              </a:lnSpc>
-              <a:spcBef>
-                <a:spcPts val="0"/>
-              </a:spcBef>
-              <a:spcAft>
-                <a:spcPts val="0"/>
-              </a:spcAft>
-              <a:buNone/>
-            </a:pPr>
-            <a:r>
-              <a:rPr b="1" i="0" lang="en-US" sz="1200" u="none" cap="none" strike="noStrike">
-                <a:solidFill>
-                  <a:srgbClr val="334155"/>
-                </a:solidFill>
-                <a:latin typeface="Inter"/>
-                <a:ea typeface="Inter"/>
-                <a:cs typeface="Inter"/>
-                <a:sym typeface="Inter"/>
-              </a:rPr>
-              <a:t>Physical Fail-safes: </a:t>
-            </a:r>
-            <a:r>
-              <a:rPr b="0" i="0" lang="en-US" sz="1200" u="none" cap="none" strike="noStrike">
-                <a:solidFill>
-                  <a:srgbClr val="334155"/>
-                </a:solidFill>
-                <a:latin typeface="Inter"/>
-                <a:ea typeface="Inter"/>
-                <a:cs typeface="Inter"/>
-                <a:sym typeface="Inter"/>
-              </a:rPr>
-              <a:t>laser runs only with exhaust on, lid closed and operator present; lowest setting first; extinguisher nearby.</a:t>
-            </a:r>
-          </a:p>
-        </p:txBody>
-      </p:sp>
-      <p:sp>
-        <p:nvSpPr>
-          <p:cNvPr id="390" name="Google Shape;390;p25"/>
-          <p:cNvSpPr txBox="1"/>
-          <p:nvPr/>
-        </p:nvSpPr>
-        <p:spPr>
-          <a:xfrm>
-            <a:off x="801338" y="3194325"/>
-            <a:ext cx="4896000" cy="461700"/>
-          </a:xfrm>
-          <a:prstGeom prst="rect">
-            <a:avLst/>
-          </a:prstGeom>
-          <a:noFill/>
-          <a:ln>
-            <a:noFill/>
-          </a:ln>
-        </p:spPr>
-        <p:txBody>
-          <a:bodyPr anchorCtr="0" anchor="t" bIns="0" lIns="0" spcFirstLastPara="1" rIns="0" wrap="square" tIns="0">
-            <a:spAutoFit/>
-          </a:bodyPr>
-          <a:lstStyle/>
-          <a:p>
-            <a:pPr indent="0" lvl="0" marL="0" marR="0" rtl="0" algn="l">
-              <a:lnSpc>
-                <a:spcPct val="150000"/>
-              </a:lnSpc>
-              <a:spcBef>
-                <a:spcPts val="0"/>
-              </a:spcBef>
-              <a:spcAft>
-                <a:spcPts val="0"/>
-              </a:spcAft>
-              <a:buNone/>
-            </a:pPr>
-            <a:r>
-              <a:rPr b="1" i="0" lang="en-US" sz="1200" u="none" cap="none" strike="noStrike">
-                <a:solidFill>
-                  <a:srgbClr val="334155"/>
-                </a:solidFill>
-                <a:latin typeface="Inter"/>
-                <a:ea typeface="Inter"/>
-                <a:cs typeface="Inter"/>
-                <a:sym typeface="Inter"/>
-              </a:rPr>
-              <a:t>FMEA Matrix: </a:t>
-            </a:r>
-            <a:r>
-              <a:rPr b="0" i="0" lang="en-US" sz="1200" u="none" cap="none" strike="noStrike">
-                <a:solidFill>
-                  <a:srgbClr val="334155"/>
-                </a:solidFill>
-                <a:latin typeface="Inter"/>
-                <a:ea typeface="Inter"/>
-                <a:cs typeface="Inter"/>
-                <a:sym typeface="Inter"/>
-              </a:rPr>
-              <a:t>see Safety by Design slide. No human or animal testing in Stages 2–3; bench and phantom only.</a:t>
-            </a:r>
-          </a:p>
-        </p:txBody>
-      </p:sp>
-      <p:pic>
-        <p:nvPicPr>
-          <p:cNvPr descr="image.png" id="391" name="Google Shape;391;p25"/>
-          <p:cNvPicPr preferRelativeResize="0"/>
-          <p:nvPr/>
-        </p:nvPicPr>
-        <p:blipFill rotWithShape="1">
-          <a:blip r:embed="rId4">
-            <a:alphaModFix/>
-          </a:blip>
-          <a:srcRect b="0" l="0" r="0" t="0"/>
-          <a:stretch/>
-        </p:blipFill>
-        <p:spPr>
-          <a:xfrm>
-            <a:off x="801338" y="1717950"/>
-            <a:ext cx="304800" cy="304800"/>
-          </a:xfrm>
-          <a:prstGeom prst="rect">
-            <a:avLst/>
-          </a:prstGeom>
-          <a:noFill/>
-          <a:ln>
-            <a:noFill/>
-          </a:ln>
-        </p:spPr>
-      </p:pic>
-      <p:sp>
-        <p:nvSpPr>
-          <p:cNvPr id="392" name="Google Shape;392;p25"/>
-          <p:cNvSpPr txBox="1"/>
-          <p:nvPr/>
-        </p:nvSpPr>
-        <p:spPr>
-          <a:xfrm>
-            <a:off x="571500" y="476250"/>
-            <a:ext cx="11601600" cy="392400"/>
-          </a:xfrm>
-          <a:prstGeom prst="rect">
-            <a:avLst/>
-          </a:prstGeom>
-          <a:noFill/>
-          <a:ln>
-            <a:noFill/>
-          </a:ln>
-        </p:spPr>
-        <p:txBody>
-          <a:bodyPr anchorCtr="0" anchor="t" bIns="0" lIns="0" spcFirstLastPara="1" rIns="0" wrap="square" tIns="0">
-            <a:spAutoFit/>
-          </a:bodyPr>
-          <a:lstStyle/>
-          <a:p>
-            <a:pPr indent="0" lvl="0" marL="0" marR="0" rtl="0" algn="l">
-              <a:spcBef>
-                <a:spcPts val="0"/>
-              </a:spcBef>
-              <a:spcAft>
-                <a:spcPts val="0"/>
-              </a:spcAft>
-              <a:buNone/>
-            </a:pPr>
-            <a:r>
-              <a:rPr b="1" i="0" lang="en-US" sz="2550" u="none" cap="none" strike="noStrike">
-                <a:solidFill>
-                  <a:srgbClr val="1E3A8A"/>
-                </a:solidFill>
-                <a:latin typeface="Poppins"/>
-                <a:ea typeface="Poppins"/>
-                <a:cs typeface="Poppins"/>
-                <a:sym typeface="Poppins"/>
-              </a:rPr>
-              <a:t>Safety &amp; Hazard Mitigation</a:t>
-            </a:r>
-          </a:p>
-        </p:txBody>
-      </p:sp>
-      <p:pic>
-        <p:nvPicPr>
-          <p:cNvPr descr="image.png" id="393" name="Google Shape;393;p25"/>
-          <p:cNvPicPr preferRelativeResize="0"/>
-          <p:nvPr/>
-        </p:nvPicPr>
-        <p:blipFill rotWithShape="1">
-          <a:blip r:embed="rId5">
-            <a:alphaModFix/>
-          </a:blip>
-          <a:srcRect b="0" l="0" r="0" t="0"/>
-          <a:stretch/>
-        </p:blipFill>
-        <p:spPr>
-          <a:xfrm>
-            <a:off x="6488300" y="1451250"/>
-            <a:ext cx="5140500" cy="2552700"/>
-          </a:xfrm>
-          <a:prstGeom prst="rect">
-            <a:avLst/>
-          </a:prstGeom>
-          <a:noFill/>
-          <a:ln>
-            <a:noFill/>
-          </a:ln>
-        </p:spPr>
-      </p:pic>
-      <p:sp>
-        <p:nvSpPr>
-          <p:cNvPr id="394" name="Google Shape;394;p25"/>
-          <p:cNvSpPr txBox="1"/>
-          <p:nvPr/>
-        </p:nvSpPr>
-        <p:spPr>
-          <a:xfrm>
-            <a:off x="6818517" y="2194200"/>
-            <a:ext cx="4447200" cy="254100"/>
-          </a:xfrm>
-          <a:prstGeom prst="rect">
-            <a:avLst/>
-          </a:prstGeom>
-          <a:noFill/>
-          <a:ln>
-            <a:noFill/>
-          </a:ln>
-        </p:spPr>
-        <p:txBody>
-          <a:bodyPr anchorCtr="0" anchor="t" bIns="0" lIns="0" spcFirstLastPara="1" rIns="0" wrap="square" tIns="0">
-            <a:spAutoFit/>
-          </a:bodyPr>
-          <a:lstStyle/>
-          <a:p>
-            <a:pPr indent="0" lvl="0" marL="0" marR="0" rtl="0" algn="l">
-              <a:spcBef>
-                <a:spcPts val="0"/>
-              </a:spcBef>
-              <a:spcAft>
-                <a:spcPts val="0"/>
-              </a:spcAft>
-              <a:buNone/>
-            </a:pPr>
-            <a:r>
-              <a:rPr b="0" i="0" lang="en-US" sz="1650" u="none" cap="none" strike="noStrike">
-                <a:solidFill>
-                  <a:srgbClr val="0284C7"/>
-                </a:solidFill>
-                <a:latin typeface="Poppins SemiBold"/>
-                <a:ea typeface="Poppins SemiBold"/>
-                <a:cs typeface="Poppins SemiBold"/>
-                <a:sym typeface="Poppins SemiBold"/>
-              </a:rPr>
-              <a:t>Standards Compliance</a:t>
-            </a:r>
-            <a:endParaRPr/>
-          </a:p>
-        </p:txBody>
-      </p:sp>
-      <p:sp>
-        <p:nvSpPr>
-          <p:cNvPr id="395" name="Google Shape;395;p25"/>
-          <p:cNvSpPr txBox="1"/>
-          <p:nvPr/>
-        </p:nvSpPr>
-        <p:spPr>
-          <a:xfrm>
-            <a:off x="6818517" y="2622825"/>
-            <a:ext cx="4235400" cy="461700"/>
-          </a:xfrm>
-          <a:prstGeom prst="rect">
-            <a:avLst/>
-          </a:prstGeom>
-          <a:noFill/>
-          <a:ln>
-            <a:noFill/>
-          </a:ln>
-        </p:spPr>
-        <p:txBody>
-          <a:bodyPr anchorCtr="0" anchor="t" bIns="0" lIns="0" spcFirstLastPara="1" rIns="0" wrap="square" tIns="0">
-            <a:spAutoFit/>
-          </a:bodyPr>
-          <a:lstStyle/>
-          <a:p>
-            <a:pPr indent="0" lvl="0" marL="0" marR="0" rtl="0" algn="l">
-              <a:lnSpc>
-                <a:spcPct val="150000"/>
-              </a:lnSpc>
-              <a:spcBef>
-                <a:spcPts val="0"/>
-              </a:spcBef>
-              <a:spcAft>
-                <a:spcPts val="0"/>
-              </a:spcAft>
-              <a:buNone/>
-            </a:pPr>
-            <a:r>
-              <a:rPr b="0" i="0" lang="en-US" sz="1200" u="none" cap="none" strike="noStrike">
-                <a:solidFill>
-                  <a:srgbClr val="334155"/>
-                </a:solidFill>
-                <a:latin typeface="Inter"/>
-                <a:ea typeface="Inter"/>
-                <a:cs typeface="Inter"/>
-                <a:sym typeface="Inter"/>
-              </a:rPr>
-              <a:t>ISO 10993 biocompatibility before any skin or wound contact; IEC 60601-1 limits for any future on-body electronics; university laser-safety rules. None claimed as met yet.</a:t>
-            </a:r>
-          </a:p>
-        </p:txBody>
-      </p:sp>
-      <p:pic>
-        <p:nvPicPr>
-          <p:cNvPr descr="image.png" id="396" name="Google Shape;396;p25"/>
-          <p:cNvPicPr preferRelativeResize="0"/>
-          <p:nvPr/>
-        </p:nvPicPr>
-        <p:blipFill rotWithShape="1">
-          <a:blip r:embed="rId6">
-            <a:alphaModFix/>
-          </a:blip>
-          <a:srcRect b="0" l="0" r="0" t="0"/>
-          <a:stretch/>
-        </p:blipFill>
-        <p:spPr>
-          <a:xfrm>
-            <a:off x="6818525" y="1717950"/>
-            <a:ext cx="422671" cy="304800"/>
-          </a:xfrm>
-          <a:prstGeom prst="rect">
-            <a:avLst/>
-          </a:prstGeom>
-          <a:noFill/>
-          <a:ln>
-            <a:noFill/>
-          </a:ln>
-        </p:spPr>
-      </p:pic>
-      <p:pic>
-        <p:nvPicPr>
-          <p:cNvPr id="397" name="Google Shape;397;p25" title="MBF_Logo_2020.png"/>
-          <p:cNvPicPr preferRelativeResize="0"/>
-          <p:nvPr/>
-        </p:nvPicPr>
-        <p:blipFill>
-          <a:blip r:embed="rId7">
-            <a:alphaModFix/>
-          </a:blip>
-          <a:stretch>
-            <a:fillRect/>
-          </a:stretch>
-        </p:blipFill>
-        <p:spPr>
-          <a:xfrm>
-            <a:off x="11095194" y="6280800"/>
-            <a:ext cx="1096806" cy="577200"/>
-          </a:xfrm>
-          <a:prstGeom prst="rect">
-            <a:avLst/>
-          </a:prstGeom>
-          <a:noFill/>
-          <a:ln>
-            <a:noFill/>
-          </a:ln>
-        </p:spPr>
-      </p:pic>
-      <p:pic>
-        <p:nvPicPr>
-          <p:cNvPr id="398" name="Google Shape;398;p25" title="VK colored transparent logo.png"/>
-          <p:cNvPicPr preferRelativeResize="0"/>
-          <p:nvPr/>
-        </p:nvPicPr>
-        <p:blipFill rotWithShape="1">
-          <a:blip r:embed="rId8">
-            <a:alphaModFix/>
-          </a:blip>
-          <a:srcRect b="44466" l="14673" r="15820" t="33074"/>
-          <a:stretch/>
-        </p:blipFill>
-        <p:spPr>
-          <a:xfrm>
-            <a:off x="0" y="6280800"/>
-            <a:ext cx="1786280" cy="577200"/>
-          </a:xfrm>
-          <a:prstGeom prst="rect">
-            <a:avLst/>
-          </a:prstGeom>
-          <a:noFill/>
-          <a:ln>
-            <a:noFill/>
-          </a:ln>
-        </p:spPr>
-      </p:pic>
-    </p:spTree>
-  </p:cSld>
-  <p:clrMapOvr>
-    <a:masterClrMapping/>
-  </p:clrMapOvr>
-</p:sld>
-</file>
-
-<file path=ppt/slides/slide14.xml><?xml version="1.0" encoding="utf-8"?>
-<p:sld xmlns:a="http://schemas.openxmlformats.org/drawingml/2006/main" xmlns:r="http://schemas.openxmlformats.org/officeDocument/2006/relationships" xmlns:mc="http://schemas.openxmlformats.org/markup-compatibility/2006" xmlns:mv="urn:schemas-microsoft-com:mac:vml" xmlns:p="http://schemas.openxmlformats.org/presentationml/2006/main" xmlns:c="http://schemas.openxmlformats.org/drawingml/2006/chart" xmlns:dgm="http://schemas.openxmlformats.org/drawingml/2006/diagram" xmlns:o="urn:schemas-microsoft-com:office:office" xmlns:v="urn:schemas-microsoft-com:vml" xmlns:pvml="urn:schemas-microsoft-com:office:powerpoint" xmlns:com="http://schemas.openxmlformats.org/drawingml/2006/compatibility" xmlns:p14="http://schemas.microsoft.com/office/powerpoint/2010/main" xmlns:p15="http://schemas.microsoft.com/office/powerpoint/2012/main" xmlns:ahyp="http://schemas.microsoft.com/office/drawing/2018/hyperlinkcolor">
-  <p:cSld>
-    <p:bg>
-      <p:bgPr>
-        <a:solidFill>
-          <a:srgbClr val="FFFFFF"/>
-        </a:solidFill>
-      </p:bgPr>
-    </p:bg>
-    <p:spTree>
-      <p:nvGrpSpPr>
-        <p:cNvPr id="403" name="Shape 403"/>
-        <p:cNvGrpSpPr/>
-        <p:nvPr/>
-      </p:nvGrpSpPr>
-      <p:grpSpPr>
-        <a:xfrm>
-          <a:off x="0" y="0"/>
-          <a:ext cx="0" cy="0"/>
-          <a:chOff x="0" y="0"/>
-          <a:chExt cx="0" cy="0"/>
-        </a:xfrm>
-      </p:grpSpPr>
-      <p:pic>
-        <p:nvPicPr>
-          <p:cNvPr descr="image.png" id="404" name="Google Shape;404;p26"/>
-          <p:cNvPicPr preferRelativeResize="0"/>
-          <p:nvPr/>
-        </p:nvPicPr>
-        <p:blipFill rotWithShape="1">
-          <a:blip r:embed="rId3">
-            <a:alphaModFix/>
-          </a:blip>
-          <a:srcRect b="0" l="0" r="0" t="0"/>
-          <a:stretch/>
-        </p:blipFill>
-        <p:spPr>
-          <a:xfrm>
-            <a:off x="758745" y="1402400"/>
-            <a:ext cx="5372100" cy="2552700"/>
-          </a:xfrm>
-          <a:prstGeom prst="rect">
-            <a:avLst/>
-          </a:prstGeom>
-          <a:noFill/>
-          <a:ln>
-            <a:noFill/>
-          </a:ln>
-        </p:spPr>
-      </p:pic>
-      <p:sp>
-        <p:nvSpPr>
-          <p:cNvPr id="405" name="Google Shape;405;p26"/>
-          <p:cNvSpPr txBox="1"/>
-          <p:nvPr/>
-        </p:nvSpPr>
-        <p:spPr>
-          <a:xfrm>
-            <a:off x="996870" y="2145350"/>
-            <a:ext cx="5140500" cy="254100"/>
-          </a:xfrm>
-          <a:prstGeom prst="rect">
-            <a:avLst/>
-          </a:prstGeom>
-          <a:noFill/>
-          <a:ln>
-            <a:noFill/>
-          </a:ln>
-        </p:spPr>
-        <p:txBody>
-          <a:bodyPr anchorCtr="0" anchor="t" bIns="0" lIns="0" spcFirstLastPara="1" rIns="0" wrap="square" tIns="0">
-            <a:spAutoFit/>
-          </a:bodyPr>
-          <a:lstStyle/>
-          <a:p>
-            <a:pPr indent="0" lvl="0" marL="0" marR="0" rtl="0" algn="l">
-              <a:spcBef>
-                <a:spcPts val="0"/>
-              </a:spcBef>
-              <a:spcAft>
-                <a:spcPts val="0"/>
-              </a:spcAft>
-              <a:buNone/>
-            </a:pPr>
-            <a:r>
-              <a:rPr b="0" i="0" lang="en-US" sz="1650" u="none" cap="none" strike="noStrike">
-                <a:solidFill>
-                  <a:srgbClr val="0284C7"/>
-                </a:solidFill>
-                <a:latin typeface="Poppins SemiBold"/>
-                <a:ea typeface="Poppins SemiBold"/>
-                <a:cs typeface="Poppins SemiBold"/>
-                <a:sym typeface="Poppins SemiBold"/>
-              </a:rPr>
-              <a:t>4-Month Fabrication Plan</a:t>
-            </a:r>
-            <a:endParaRPr/>
-          </a:p>
-        </p:txBody>
-      </p:sp>
-      <p:sp>
-        <p:nvSpPr>
-          <p:cNvPr id="406" name="Google Shape;406;p26"/>
-          <p:cNvSpPr txBox="1"/>
-          <p:nvPr/>
-        </p:nvSpPr>
-        <p:spPr>
-          <a:xfrm>
-            <a:off x="996870" y="2573975"/>
-            <a:ext cx="4896000" cy="461700"/>
-          </a:xfrm>
-          <a:prstGeom prst="rect">
-            <a:avLst/>
-          </a:prstGeom>
-          <a:noFill/>
-          <a:ln>
-            <a:noFill/>
-          </a:ln>
-        </p:spPr>
-        <p:txBody>
-          <a:bodyPr anchorCtr="0" anchor="t" bIns="0" lIns="0" spcFirstLastPara="1" rIns="0" wrap="square" tIns="0">
-            <a:spAutoFit/>
-          </a:bodyPr>
-          <a:lstStyle/>
-          <a:p>
-            <a:pPr indent="0" lvl="0" marL="0" marR="0" rtl="0" algn="l">
-              <a:lnSpc>
-                <a:spcPct val="150000"/>
-              </a:lnSpc>
-              <a:spcBef>
-                <a:spcPts val="0"/>
-              </a:spcBef>
-              <a:spcAft>
-                <a:spcPts val="0"/>
-              </a:spcAft>
-              <a:buNone/>
-            </a:pPr>
-            <a:r>
-              <a:rPr b="1" i="0" lang="en-US" sz="1200" u="none" cap="none" strike="noStrike">
-                <a:solidFill>
-                  <a:srgbClr val="334155"/>
-                </a:solidFill>
-                <a:latin typeface="Inter"/>
-                <a:ea typeface="Inter"/>
-                <a:cs typeface="Inter"/>
-                <a:sym typeface="Inter"/>
-              </a:rPr>
-              <a:t>Fabrication Timeline: </a:t>
-            </a:r>
-            <a:r>
-              <a:rPr b="0" i="0" lang="en-US" sz="1200" u="none" cap="none" strike="noStrike">
-                <a:solidFill>
-                  <a:srgbClr val="334155"/>
-                </a:solidFill>
-                <a:latin typeface="Inter"/>
-                <a:ea typeface="Inter"/>
-                <a:cs typeface="Inter"/>
-                <a:sym typeface="Inter"/>
-              </a:rPr>
-              <a:t>Oct E1 laser repeatability · Nov line width, strip v0.1, bench readout · Dec dressing bench tests · Jan integration.</a:t>
-            </a:r>
-          </a:p>
-        </p:txBody>
-      </p:sp>
-      <p:sp>
-        <p:nvSpPr>
-          <p:cNvPr id="407" name="Google Shape;407;p26"/>
-          <p:cNvSpPr txBox="1"/>
-          <p:nvPr/>
-        </p:nvSpPr>
-        <p:spPr>
-          <a:xfrm>
-            <a:off x="996870" y="3145475"/>
-            <a:ext cx="4896000" cy="461700"/>
-          </a:xfrm>
-          <a:prstGeom prst="rect">
-            <a:avLst/>
-          </a:prstGeom>
-          <a:noFill/>
-          <a:ln>
-            <a:noFill/>
-          </a:ln>
-        </p:spPr>
-        <p:txBody>
-          <a:bodyPr anchorCtr="0" anchor="t" bIns="0" lIns="0" spcFirstLastPara="1" rIns="0" wrap="square" tIns="0">
-            <a:spAutoFit/>
-          </a:bodyPr>
-          <a:lstStyle/>
-          <a:p>
-            <a:pPr indent="0" lvl="0" marL="0" marR="0" rtl="0" algn="l">
-              <a:lnSpc>
-                <a:spcPct val="150000"/>
-              </a:lnSpc>
-              <a:spcBef>
-                <a:spcPts val="0"/>
-              </a:spcBef>
-              <a:spcAft>
-                <a:spcPts val="0"/>
-              </a:spcAft>
-              <a:buNone/>
-            </a:pPr>
-            <a:r>
-              <a:rPr b="1" i="0" lang="en-US" sz="1200" u="none" cap="none" strike="noStrike">
-                <a:solidFill>
-                  <a:srgbClr val="334155"/>
-                </a:solidFill>
-                <a:latin typeface="Inter"/>
-                <a:ea typeface="Inter"/>
-                <a:cs typeface="Inter"/>
-                <a:sym typeface="Inter"/>
-              </a:rPr>
-              <a:t>Stage 3 Target: </a:t>
-            </a:r>
-            <a:r>
-              <a:rPr b="0" i="0" lang="en-US" sz="1200" u="none" cap="none" strike="noStrike">
-                <a:solidFill>
-                  <a:srgbClr val="334155"/>
-                </a:solidFill>
-                <a:latin typeface="Inter"/>
-                <a:ea typeface="Inter"/>
-                <a:cs typeface="Inter"/>
-                <a:sym typeface="Inter"/>
-              </a:rPr>
-              <a:t>a bench-tested LIG moisture strip with raw data and repeatability statistics; no clinical or diagnostic claims.</a:t>
-            </a:r>
-          </a:p>
-        </p:txBody>
-      </p:sp>
-      <p:pic>
-        <p:nvPicPr>
-          <p:cNvPr descr="image.png" id="408" name="Google Shape;408;p26"/>
-          <p:cNvPicPr preferRelativeResize="0"/>
-          <p:nvPr/>
-        </p:nvPicPr>
-        <p:blipFill rotWithShape="1">
-          <a:blip r:embed="rId4">
-            <a:alphaModFix/>
-          </a:blip>
-          <a:srcRect b="0" l="0" r="0" t="0"/>
-          <a:stretch/>
-        </p:blipFill>
-        <p:spPr>
-          <a:xfrm>
-            <a:off x="996870" y="1669100"/>
-            <a:ext cx="266700" cy="304800"/>
-          </a:xfrm>
-          <a:prstGeom prst="rect">
-            <a:avLst/>
-          </a:prstGeom>
-          <a:noFill/>
-          <a:ln>
-            <a:noFill/>
-          </a:ln>
-        </p:spPr>
-      </p:pic>
-      <p:sp>
-        <p:nvSpPr>
-          <p:cNvPr id="409" name="Google Shape;409;p26"/>
-          <p:cNvSpPr txBox="1"/>
-          <p:nvPr/>
-        </p:nvSpPr>
-        <p:spPr>
-          <a:xfrm>
-            <a:off x="571500" y="476250"/>
-            <a:ext cx="11601600" cy="392400"/>
-          </a:xfrm>
-          <a:prstGeom prst="rect">
-            <a:avLst/>
-          </a:prstGeom>
-          <a:noFill/>
-          <a:ln>
-            <a:noFill/>
-          </a:ln>
-        </p:spPr>
-        <p:txBody>
-          <a:bodyPr anchorCtr="0" anchor="t" bIns="0" lIns="0" spcFirstLastPara="1" rIns="0" wrap="square" tIns="0">
-            <a:spAutoFit/>
-          </a:bodyPr>
-          <a:lstStyle/>
-          <a:p>
-            <a:pPr indent="0" lvl="0" marL="0" marR="0" rtl="0" algn="l">
-              <a:spcBef>
-                <a:spcPts val="0"/>
-              </a:spcBef>
-              <a:spcAft>
-                <a:spcPts val="0"/>
-              </a:spcAft>
-              <a:buNone/>
-            </a:pPr>
-            <a:r>
-              <a:rPr b="1" i="0" lang="en-US" sz="2550" u="none" cap="none" strike="noStrike">
-                <a:solidFill>
-                  <a:srgbClr val="1E3A8A"/>
-                </a:solidFill>
-                <a:latin typeface="Poppins"/>
-                <a:ea typeface="Poppins"/>
-                <a:cs typeface="Poppins"/>
-                <a:sym typeface="Poppins"/>
-              </a:rPr>
-              <a:t>Roadmap</a:t>
-            </a:r>
-          </a:p>
-        </p:txBody>
-      </p:sp>
-      <p:pic>
-        <p:nvPicPr>
-          <p:cNvPr id="410" name="Google Shape;410;p26" title="MBF_Logo_2020.png"/>
-          <p:cNvPicPr preferRelativeResize="0"/>
-          <p:nvPr/>
-        </p:nvPicPr>
-        <p:blipFill>
-          <a:blip r:embed="rId5">
-            <a:alphaModFix/>
-          </a:blip>
-          <a:stretch>
-            <a:fillRect/>
-          </a:stretch>
-        </p:blipFill>
-        <p:spPr>
-          <a:xfrm>
-            <a:off x="11095194" y="6280800"/>
-            <a:ext cx="1096806" cy="577200"/>
-          </a:xfrm>
-          <a:prstGeom prst="rect">
-            <a:avLst/>
-          </a:prstGeom>
-          <a:noFill/>
-          <a:ln>
-            <a:noFill/>
-          </a:ln>
-        </p:spPr>
-      </p:pic>
-      <p:pic>
-        <p:nvPicPr>
-          <p:cNvPr id="411" name="Google Shape;411;p26" title="VK colored transparent logo.png"/>
-          <p:cNvPicPr preferRelativeResize="0"/>
-          <p:nvPr/>
-        </p:nvPicPr>
-        <p:blipFill rotWithShape="1">
-          <a:blip r:embed="rId6">
             <a:alphaModFix/>
           </a:blip>
           <a:srcRect b="44466" l="14673" r="15820" t="33074"/>
@@ -21669,7 +18526,7 @@
                           <a:cs typeface="DM Sans"/>
                           <a:sym typeface="DM Sans"/>
                         </a:rPr>
-                        <a:t>Unstable low-PWM output</a:t>
+                        <a:t>Unstable low-power output</a:t>
                       </a:r>
                     </a:p>
                   </a:txBody>
@@ -21744,7 +18601,7 @@
                           <a:cs typeface="DM Sans"/>
                           <a:sym typeface="DM Sans"/>
                         </a:rPr>
-                        <a:t>Irreproducible LIG, wrong conclusions</a:t>
+                        <a:t>Graphene quality varies run to run</a:t>
                       </a:r>
                     </a:p>
                   </a:txBody>
@@ -21819,7 +18676,7 @@
                           <a:cs typeface="DM Sans"/>
                           <a:sym typeface="DM Sans"/>
                         </a:rPr>
-                        <a:t>Log tube mA; reference cell ×2 per coupon; repeat on 2 days; report CV</a:t>
+                        <a:t>Log tube current; reference cell ×2 per coupon; repeat on 2 days</a:t>
                       </a:r>
                     </a:p>
                   </a:txBody>
@@ -21896,7 +18753,7 @@
                           <a:cs typeface="DM Sans"/>
                           <a:sym typeface="DM Sans"/>
                         </a:rPr>
-                        <a:t>Contact artefacts</a:t>
+                        <a:t>Electrodes near skin (future)</a:t>
                       </a:r>
                     </a:p>
                   </a:txBody>
@@ -21971,7 +18828,7 @@
                           <a:cs typeface="DM Sans"/>
                           <a:sym typeface="DM Sans"/>
                         </a:rPr>
-                        <a:t>False sheet resistance</a:t>
+                        <a:t>Irritation, current through tissue</a:t>
                       </a:r>
                     </a:p>
                   </a:txBody>
@@ -22046,7 +18903,7 @@
                           <a:cs typeface="DM Sans"/>
                           <a:sym typeface="DM Sans"/>
                         </a:rPr>
-                        <a:t>3-length fit separates contacts; silver-paint pads; meter checked on resistors</a:t>
+                        <a:t>Strip stays off the wound; AC only, ≤ 10 µA; ISO 10993 tests before skin use</a:t>
                       </a:r>
                     </a:p>
                   </a:txBody>
@@ -22774,7 +19631,7 @@
                 <a:cs typeface="DM Sans"/>
                 <a:sym typeface="DM Sans"/>
               </a:rPr>
-              <a:t>E1 — machine record, film thickness, 4 coupons around setting '12' on 2 days; resistance + microscope.</a:t>
+              <a:t>E1: reproducible graphene on our laser; measure sheet resistance and line width (4 coupons, 2 days).</a:t>
             </a:r>
           </a:p>
         </p:txBody>
@@ -22838,7 +19695,7 @@
                 <a:cs typeface="DM Sans"/>
                 <a:sym typeface="DM Sans"/>
               </a:rPr>
-              <a:t>E2 — line width and isolation gaps; strip v0.1; bench readout (ESP32-C3 + ADS1115) assembled.</a:t>
+              <a:t>zone strip v0.1 cut from E1 dimensions; bench reader (ESP32-C3 + ADS1115) assembled and calibrated.</a:t>
             </a:r>
           </a:p>
         </p:txBody>
@@ -22978,7 +19835,7 @@
                 <a:cs typeface="DM Sans"/>
                 <a:sym typeface="DM Sans"/>
               </a:rPr>
-              <a:t>E3 — strip on real dressings with Solution A: centre zone vs 2 cm-line zone vs visual front.</a:t>
+              <a:t>E3: strips on real dressings with simulated exudate⁹; zone alerts vs the visible stain front.</a:t>
             </a:r>
           </a:p>
         </p:txBody>
@@ -23042,7 +19899,7 @@
                 <a:cs typeface="DM Sans"/>
                 <a:sym typeface="DM Sans"/>
               </a:rPr>
-              <a:t>repeatability and bending tests; Stage 3 video of the bench system with raw data.</a:t>
+              <a:t>repeatability and bending tests; Stage 3 demo video with raw data.</a:t>
             </a:r>
           </a:p>
         </p:txBody>
@@ -23295,590 +20152,6 @@
         </p:nvPicPr>
         <p:blipFill rotWithShape="1">
           <a:blip r:embed="rId12">
-            <a:alphaModFix/>
-          </a:blip>
-          <a:srcRect b="44466" l="14673" r="15820" t="33074"/>
-          <a:stretch/>
-        </p:blipFill>
-        <p:spPr>
-          <a:xfrm>
-            <a:off x="0" y="6280800"/>
-            <a:ext cx="1786280" cy="577200"/>
-          </a:xfrm>
-          <a:prstGeom prst="rect">
-            <a:avLst/>
-          </a:prstGeom>
-          <a:noFill/>
-          <a:ln>
-            <a:noFill/>
-          </a:ln>
-        </p:spPr>
-      </p:pic>
-    </p:spTree>
-  </p:cSld>
-  <p:clrMapOvr>
-    <a:masterClrMapping/>
-  </p:clrMapOvr>
-</p:sld>
-</file>
-
-<file path=ppt/slides/slide16.xml><?xml version="1.0" encoding="utf-8"?>
-<p:sld xmlns:a="http://schemas.openxmlformats.org/drawingml/2006/main" xmlns:r="http://schemas.openxmlformats.org/officeDocument/2006/relationships" xmlns:mc="http://schemas.openxmlformats.org/markup-compatibility/2006" xmlns:mv="urn:schemas-microsoft-com:mac:vml" xmlns:p="http://schemas.openxmlformats.org/presentationml/2006/main" xmlns:c="http://schemas.openxmlformats.org/drawingml/2006/chart" xmlns:dgm="http://schemas.openxmlformats.org/drawingml/2006/diagram" xmlns:o="urn:schemas-microsoft-com:office:office" xmlns:v="urn:schemas-microsoft-com:vml" xmlns:pvml="urn:schemas-microsoft-com:office:powerpoint" xmlns:com="http://schemas.openxmlformats.org/drawingml/2006/compatibility" xmlns:p14="http://schemas.microsoft.com/office/powerpoint/2010/main" xmlns:p15="http://schemas.microsoft.com/office/powerpoint/2012/main" xmlns:ahyp="http://schemas.microsoft.com/office/drawing/2018/hyperlinkcolor">
-  <p:cSld>
-    <p:bg>
-      <p:bgPr>
-        <a:solidFill>
-          <a:srgbClr val="FFFFFF"/>
-        </a:solidFill>
-      </p:bgPr>
-    </p:bg>
-    <p:spTree>
-      <p:nvGrpSpPr>
-        <p:cNvPr id="452" name="Shape 452"/>
-        <p:cNvGrpSpPr/>
-        <p:nvPr/>
-      </p:nvGrpSpPr>
-      <p:grpSpPr>
-        <a:xfrm>
-          <a:off x="0" y="0"/>
-          <a:ext cx="0" cy="0"/>
-          <a:chOff x="0" y="0"/>
-          <a:chExt cx="0" cy="0"/>
-        </a:xfrm>
-      </p:grpSpPr>
-      <p:pic>
-        <p:nvPicPr>
-          <p:cNvPr descr="image.png" id="453" name="Google Shape;453;p28"/>
-          <p:cNvPicPr preferRelativeResize="0"/>
-          <p:nvPr/>
-        </p:nvPicPr>
-        <p:blipFill rotWithShape="1">
-          <a:blip r:embed="rId3">
-            <a:alphaModFix/>
-          </a:blip>
-          <a:srcRect b="0" l="0" r="0" t="0"/>
-          <a:stretch/>
-        </p:blipFill>
-        <p:spPr>
-          <a:xfrm>
-            <a:off x="946175" y="1353525"/>
-            <a:ext cx="3530649" cy="2438400"/>
-          </a:xfrm>
-          <a:prstGeom prst="rect">
-            <a:avLst/>
-          </a:prstGeom>
-          <a:noFill/>
-          <a:ln>
-            <a:noFill/>
-          </a:ln>
-        </p:spPr>
-      </p:pic>
-      <p:sp>
-        <p:nvSpPr>
-          <p:cNvPr id="454" name="Google Shape;454;p28"/>
-          <p:cNvSpPr txBox="1"/>
-          <p:nvPr/>
-        </p:nvSpPr>
-        <p:spPr>
-          <a:xfrm>
-            <a:off x="1184300" y="2096475"/>
-            <a:ext cx="3207000" cy="254100"/>
-          </a:xfrm>
-          <a:prstGeom prst="rect">
-            <a:avLst/>
-          </a:prstGeom>
-          <a:noFill/>
-          <a:ln>
-            <a:noFill/>
-          </a:ln>
-        </p:spPr>
-        <p:txBody>
-          <a:bodyPr anchorCtr="0" anchor="t" bIns="0" lIns="0" spcFirstLastPara="1" rIns="0" wrap="square" tIns="0">
-            <a:spAutoFit/>
-          </a:bodyPr>
-          <a:lstStyle/>
-          <a:p>
-            <a:pPr indent="0" lvl="0" marL="0" marR="0" rtl="0" algn="l">
-              <a:spcBef>
-                <a:spcPts val="0"/>
-              </a:spcBef>
-              <a:spcAft>
-                <a:spcPts val="0"/>
-              </a:spcAft>
-              <a:buNone/>
-            </a:pPr>
-            <a:r>
-              <a:rPr b="0" i="0" lang="en-US" sz="1650" u="none" cap="none" strike="noStrike">
-                <a:solidFill>
-                  <a:srgbClr val="0284C7"/>
-                </a:solidFill>
-                <a:latin typeface="Poppins SemiBold"/>
-                <a:ea typeface="Poppins SemiBold"/>
-                <a:cs typeface="Poppins SemiBold"/>
-                <a:sym typeface="Poppins SemiBold"/>
-              </a:rPr>
-              <a:t>Engineering Bottlenecks</a:t>
-            </a:r>
-            <a:endParaRPr/>
-          </a:p>
-        </p:txBody>
-      </p:sp>
-      <p:sp>
-        <p:nvSpPr>
-          <p:cNvPr id="455" name="Google Shape;455;p28"/>
-          <p:cNvSpPr txBox="1"/>
-          <p:nvPr/>
-        </p:nvSpPr>
-        <p:spPr>
-          <a:xfrm>
-            <a:off x="1184300" y="2525100"/>
-            <a:ext cx="3054300" cy="1015800"/>
-          </a:xfrm>
-          <a:prstGeom prst="rect">
-            <a:avLst/>
-          </a:prstGeom>
-          <a:noFill/>
-          <a:ln>
-            <a:noFill/>
-          </a:ln>
-        </p:spPr>
-        <p:txBody>
-          <a:bodyPr anchorCtr="0" anchor="t" bIns="0" lIns="0" spcFirstLastPara="1" rIns="0" wrap="square" tIns="0">
-            <a:spAutoFit/>
-          </a:bodyPr>
-          <a:lstStyle/>
-          <a:p>
-            <a:pPr indent="0" lvl="0" marL="0" marR="0" rtl="0" algn="l">
-              <a:lnSpc>
-                <a:spcPct val="150000"/>
-              </a:lnSpc>
-              <a:spcBef>
-                <a:spcPts val="0"/>
-              </a:spcBef>
-              <a:spcAft>
-                <a:spcPts val="0"/>
-              </a:spcAft>
-              <a:buNone/>
-            </a:pPr>
-            <a:r>
-              <a:rPr b="0" i="0" lang="en-US" sz="1200" u="none" cap="none" strike="noStrike">
-                <a:solidFill>
-                  <a:srgbClr val="334155"/>
-                </a:solidFill>
-                <a:latin typeface="Inter"/>
-                <a:ea typeface="Inter"/>
-                <a:cs typeface="Inter"/>
-                <a:sym typeface="Inter"/>
-              </a:rPr>
-              <a:t>'12' is a low-PWM setting on a 100 W tube, where output can be unstable [C]; actual power unknown [A]; film grade unverified; without Raman/SEM we cannot prove 'graphene'.</a:t>
-            </a:r>
-          </a:p>
-        </p:txBody>
-      </p:sp>
-      <p:pic>
-        <p:nvPicPr>
-          <p:cNvPr descr="image.png" id="456" name="Google Shape;456;p28"/>
-          <p:cNvPicPr preferRelativeResize="0"/>
-          <p:nvPr/>
-        </p:nvPicPr>
-        <p:blipFill rotWithShape="1">
-          <a:blip r:embed="rId4">
-            <a:alphaModFix/>
-          </a:blip>
-          <a:srcRect b="0" l="0" r="0" t="0"/>
-          <a:stretch/>
-        </p:blipFill>
-        <p:spPr>
-          <a:xfrm>
-            <a:off x="1184300" y="1620225"/>
-            <a:ext cx="304800" cy="304800"/>
-          </a:xfrm>
-          <a:prstGeom prst="rect">
-            <a:avLst/>
-          </a:prstGeom>
-          <a:noFill/>
-          <a:ln>
-            <a:noFill/>
-          </a:ln>
-        </p:spPr>
-      </p:pic>
-      <p:sp>
-        <p:nvSpPr>
-          <p:cNvPr id="457" name="Google Shape;457;p28"/>
-          <p:cNvSpPr txBox="1"/>
-          <p:nvPr/>
-        </p:nvSpPr>
-        <p:spPr>
-          <a:xfrm>
-            <a:off x="571500" y="476250"/>
-            <a:ext cx="11601600" cy="392400"/>
-          </a:xfrm>
-          <a:prstGeom prst="rect">
-            <a:avLst/>
-          </a:prstGeom>
-          <a:noFill/>
-          <a:ln>
-            <a:noFill/>
-          </a:ln>
-        </p:spPr>
-        <p:txBody>
-          <a:bodyPr anchorCtr="0" anchor="t" bIns="0" lIns="0" spcFirstLastPara="1" rIns="0" wrap="square" tIns="0">
-            <a:spAutoFit/>
-          </a:bodyPr>
-          <a:lstStyle/>
-          <a:p>
-            <a:pPr indent="0" lvl="0" marL="0" marR="0" rtl="0" algn="l">
-              <a:spcBef>
-                <a:spcPts val="0"/>
-              </a:spcBef>
-              <a:spcAft>
-                <a:spcPts val="0"/>
-              </a:spcAft>
-              <a:buNone/>
-            </a:pPr>
-            <a:r>
-              <a:rPr b="1" i="0" lang="en-US" sz="2550" u="none" cap="none" strike="noStrike">
-                <a:solidFill>
-                  <a:srgbClr val="1E3A8A"/>
-                </a:solidFill>
-                <a:latin typeface="Poppins"/>
-                <a:ea typeface="Poppins"/>
-                <a:cs typeface="Poppins"/>
-                <a:sym typeface="Poppins"/>
-              </a:rPr>
-              <a:t>Technical Challenges &amp; Risks</a:t>
-            </a:r>
-          </a:p>
-        </p:txBody>
-      </p:sp>
-      <p:pic>
-        <p:nvPicPr>
-          <p:cNvPr id="458" name="Google Shape;458;p28" title="MBF_Logo_2020.png"/>
-          <p:cNvPicPr preferRelativeResize="0"/>
-          <p:nvPr/>
-        </p:nvPicPr>
-        <p:blipFill>
-          <a:blip r:embed="rId5">
-            <a:alphaModFix/>
-          </a:blip>
-          <a:stretch>
-            <a:fillRect/>
-          </a:stretch>
-        </p:blipFill>
-        <p:spPr>
-          <a:xfrm>
-            <a:off x="11095194" y="6280800"/>
-            <a:ext cx="1096806" cy="577200"/>
-          </a:xfrm>
-          <a:prstGeom prst="rect">
-            <a:avLst/>
-          </a:prstGeom>
-          <a:noFill/>
-          <a:ln>
-            <a:noFill/>
-          </a:ln>
-        </p:spPr>
-      </p:pic>
-      <p:pic>
-        <p:nvPicPr>
-          <p:cNvPr id="459" name="Google Shape;459;p28" title="VK colored transparent logo.png"/>
-          <p:cNvPicPr preferRelativeResize="0"/>
-          <p:nvPr/>
-        </p:nvPicPr>
-        <p:blipFill rotWithShape="1">
-          <a:blip r:embed="rId6">
-            <a:alphaModFix/>
-          </a:blip>
-          <a:srcRect b="44466" l="14673" r="15820" t="33074"/>
-          <a:stretch/>
-        </p:blipFill>
-        <p:spPr>
-          <a:xfrm>
-            <a:off x="0" y="6280800"/>
-            <a:ext cx="1786280" cy="577200"/>
-          </a:xfrm>
-          <a:prstGeom prst="rect">
-            <a:avLst/>
-          </a:prstGeom>
-          <a:noFill/>
-          <a:ln>
-            <a:noFill/>
-          </a:ln>
-        </p:spPr>
-      </p:pic>
-    </p:spTree>
-  </p:cSld>
-  <p:clrMapOvr>
-    <a:masterClrMapping/>
-  </p:clrMapOvr>
-</p:sld>
-</file>
-
-<file path=ppt/slides/slide17.xml><?xml version="1.0" encoding="utf-8"?>
-<p:sld xmlns:a="http://schemas.openxmlformats.org/drawingml/2006/main" xmlns:r="http://schemas.openxmlformats.org/officeDocument/2006/relationships" xmlns:mc="http://schemas.openxmlformats.org/markup-compatibility/2006" xmlns:mv="urn:schemas-microsoft-com:mac:vml" xmlns:p="http://schemas.openxmlformats.org/presentationml/2006/main" xmlns:c="http://schemas.openxmlformats.org/drawingml/2006/chart" xmlns:dgm="http://schemas.openxmlformats.org/drawingml/2006/diagram" xmlns:o="urn:schemas-microsoft-com:office:office" xmlns:v="urn:schemas-microsoft-com:vml" xmlns:pvml="urn:schemas-microsoft-com:office:powerpoint" xmlns:com="http://schemas.openxmlformats.org/drawingml/2006/compatibility" xmlns:p14="http://schemas.microsoft.com/office/powerpoint/2010/main" xmlns:p15="http://schemas.microsoft.com/office/powerpoint/2012/main" xmlns:ahyp="http://schemas.microsoft.com/office/drawing/2018/hyperlinkcolor">
-  <p:cSld>
-    <p:bg>
-      <p:bgPr>
-        <a:solidFill>
-          <a:srgbClr val="FFFFFF"/>
-        </a:solidFill>
-      </p:bgPr>
-    </p:bg>
-    <p:spTree>
-      <p:nvGrpSpPr>
-        <p:cNvPr id="464" name="Shape 464"/>
-        <p:cNvGrpSpPr/>
-        <p:nvPr/>
-      </p:nvGrpSpPr>
-      <p:grpSpPr>
-        <a:xfrm>
-          <a:off x="0" y="0"/>
-          <a:ext cx="0" cy="0"/>
-          <a:chOff x="0" y="0"/>
-          <a:chExt cx="0" cy="0"/>
-        </a:xfrm>
-      </p:grpSpPr>
-      <p:pic>
-        <p:nvPicPr>
-          <p:cNvPr descr="image.png" id="465" name="Google Shape;465;p29"/>
-          <p:cNvPicPr preferRelativeResize="0"/>
-          <p:nvPr/>
-        </p:nvPicPr>
-        <p:blipFill rotWithShape="1">
-          <a:blip r:embed="rId3">
-            <a:alphaModFix/>
-          </a:blip>
-          <a:srcRect b="0" l="0" r="0" t="0"/>
-          <a:stretch/>
-        </p:blipFill>
-        <p:spPr>
-          <a:xfrm>
-            <a:off x="861033" y="1434975"/>
-            <a:ext cx="3530649" cy="2438400"/>
-          </a:xfrm>
-          <a:prstGeom prst="rect">
-            <a:avLst/>
-          </a:prstGeom>
-          <a:noFill/>
-          <a:ln>
-            <a:noFill/>
-          </a:ln>
-        </p:spPr>
-      </p:pic>
-      <p:sp>
-        <p:nvSpPr>
-          <p:cNvPr id="466" name="Google Shape;466;p29"/>
-          <p:cNvSpPr txBox="1"/>
-          <p:nvPr/>
-        </p:nvSpPr>
-        <p:spPr>
-          <a:xfrm>
-            <a:off x="1099158" y="2177925"/>
-            <a:ext cx="3207000" cy="254100"/>
-          </a:xfrm>
-          <a:prstGeom prst="rect">
-            <a:avLst/>
-          </a:prstGeom>
-          <a:noFill/>
-          <a:ln>
-            <a:noFill/>
-          </a:ln>
-        </p:spPr>
-        <p:txBody>
-          <a:bodyPr anchorCtr="0" anchor="t" bIns="0" lIns="0" spcFirstLastPara="1" rIns="0" wrap="square" tIns="0">
-            <a:spAutoFit/>
-          </a:bodyPr>
-          <a:lstStyle/>
-          <a:p>
-            <a:pPr indent="0" lvl="0" marL="0" marR="0" rtl="0" algn="l">
-              <a:spcBef>
-                <a:spcPts val="0"/>
-              </a:spcBef>
-              <a:spcAft>
-                <a:spcPts val="0"/>
-              </a:spcAft>
-              <a:buNone/>
-            </a:pPr>
-            <a:r>
-              <a:rPr b="0" i="0" lang="en-US" sz="1650" u="none" cap="none" strike="noStrike">
-                <a:solidFill>
-                  <a:srgbClr val="0284C7"/>
-                </a:solidFill>
-                <a:latin typeface="Poppins SemiBold"/>
-                <a:ea typeface="Poppins SemiBold"/>
-                <a:cs typeface="Poppins SemiBold"/>
-                <a:sym typeface="Poppins SemiBold"/>
-              </a:rPr>
-              <a:t>Risk Mitigation</a:t>
-            </a:r>
-            <a:endParaRPr/>
-          </a:p>
-        </p:txBody>
-      </p:sp>
-      <p:sp>
-        <p:nvSpPr>
-          <p:cNvPr id="467" name="Google Shape;467;p29"/>
-          <p:cNvSpPr txBox="1"/>
-          <p:nvPr/>
-        </p:nvSpPr>
-        <p:spPr>
-          <a:xfrm>
-            <a:off x="1099158" y="2606550"/>
-            <a:ext cx="3054300" cy="738900"/>
-          </a:xfrm>
-          <a:prstGeom prst="rect">
-            <a:avLst/>
-          </a:prstGeom>
-          <a:noFill/>
-          <a:ln>
-            <a:noFill/>
-          </a:ln>
-        </p:spPr>
-        <p:txBody>
-          <a:bodyPr anchorCtr="0" anchor="t" bIns="0" lIns="0" spcFirstLastPara="1" rIns="0" wrap="square" tIns="0">
-            <a:spAutoFit/>
-          </a:bodyPr>
-          <a:lstStyle/>
-          <a:p>
-            <a:pPr indent="0" lvl="0" marL="0" marR="0" rtl="0" algn="l">
-              <a:lnSpc>
-                <a:spcPct val="150000"/>
-              </a:lnSpc>
-              <a:spcBef>
-                <a:spcPts val="0"/>
-              </a:spcBef>
-              <a:spcAft>
-                <a:spcPts val="0"/>
-              </a:spcAft>
-              <a:buNone/>
-            </a:pPr>
-            <a:r>
-              <a:rPr b="0" i="0" lang="en-US" sz="1200" u="none" cap="none" strike="noStrike">
-                <a:solidFill>
-                  <a:srgbClr val="334155"/>
-                </a:solidFill>
-                <a:latin typeface="Inter"/>
-                <a:ea typeface="Inter"/>
-                <a:cs typeface="Inter"/>
-                <a:sym typeface="Inter"/>
-              </a:rPr>
-              <a:t>Log tube current per setting; replicate the reference cell; adjust speed to avoid unstable power; request Raman/SEM via IIT Indore SIC; keep claims bench-level.</a:t>
-            </a:r>
-          </a:p>
-        </p:txBody>
-      </p:sp>
-      <p:pic>
-        <p:nvPicPr>
-          <p:cNvPr descr="image.png" id="468" name="Google Shape;468;p29"/>
-          <p:cNvPicPr preferRelativeResize="0"/>
-          <p:nvPr/>
-        </p:nvPicPr>
-        <p:blipFill rotWithShape="1">
-          <a:blip r:embed="rId4">
-            <a:alphaModFix/>
-          </a:blip>
-          <a:srcRect b="0" l="0" r="0" t="0"/>
-          <a:stretch/>
-        </p:blipFill>
-        <p:spPr>
-          <a:xfrm>
-            <a:off x="1099158" y="1701675"/>
-            <a:ext cx="304800" cy="304800"/>
-          </a:xfrm>
-          <a:prstGeom prst="rect">
-            <a:avLst/>
-          </a:prstGeom>
-          <a:noFill/>
-          <a:ln>
-            <a:noFill/>
-          </a:ln>
-        </p:spPr>
-      </p:pic>
-      <p:sp>
-        <p:nvSpPr>
-          <p:cNvPr id="469" name="Google Shape;469;p29"/>
-          <p:cNvSpPr txBox="1"/>
-          <p:nvPr/>
-        </p:nvSpPr>
-        <p:spPr>
-          <a:xfrm>
-            <a:off x="571500" y="476250"/>
-            <a:ext cx="11601600" cy="392400"/>
-          </a:xfrm>
-          <a:prstGeom prst="rect">
-            <a:avLst/>
-          </a:prstGeom>
-          <a:noFill/>
-          <a:ln>
-            <a:noFill/>
-          </a:ln>
-        </p:spPr>
-        <p:txBody>
-          <a:bodyPr anchorCtr="0" anchor="t" bIns="0" lIns="0" spcFirstLastPara="1" rIns="0" wrap="square" tIns="0">
-            <a:spAutoFit/>
-          </a:bodyPr>
-          <a:lstStyle/>
-          <a:p>
-            <a:pPr indent="0" lvl="0" marL="0" marR="0" rtl="0" algn="l">
-              <a:spcBef>
-                <a:spcPts val="0"/>
-              </a:spcBef>
-              <a:spcAft>
-                <a:spcPts val="0"/>
-              </a:spcAft>
-              <a:buNone/>
-            </a:pPr>
-            <a:r>
-              <a:rPr b="1" lang="en-US" sz="2550">
-                <a:solidFill>
-                  <a:srgbClr val="1E3A8A"/>
-                </a:solidFill>
-                <a:latin typeface="Poppins"/>
-                <a:ea typeface="Poppins"/>
-                <a:cs typeface="Poppins"/>
-                <a:sym typeface="Poppins"/>
-              </a:rPr>
-              <a:t>Potential Solutions &amp; Risk Mitigation</a:t>
-            </a:r>
-          </a:p>
-        </p:txBody>
-      </p:sp>
-      <p:pic>
-        <p:nvPicPr>
-          <p:cNvPr id="470" name="Google Shape;470;p29" title="MBF_Logo_2020.png"/>
-          <p:cNvPicPr preferRelativeResize="0"/>
-          <p:nvPr/>
-        </p:nvPicPr>
-        <p:blipFill>
-          <a:blip r:embed="rId5">
-            <a:alphaModFix/>
-          </a:blip>
-          <a:stretch>
-            <a:fillRect/>
-          </a:stretch>
-        </p:blipFill>
-        <p:spPr>
-          <a:xfrm>
-            <a:off x="11095194" y="6280800"/>
-            <a:ext cx="1096806" cy="577200"/>
-          </a:xfrm>
-          <a:prstGeom prst="rect">
-            <a:avLst/>
-          </a:prstGeom>
-          <a:noFill/>
-          <a:ln>
-            <a:noFill/>
-          </a:ln>
-        </p:spPr>
-      </p:pic>
-      <p:pic>
-        <p:nvPicPr>
-          <p:cNvPr id="471" name="Google Shape;471;p29" title="VK colored transparent logo.png"/>
-          <p:cNvPicPr preferRelativeResize="0"/>
-          <p:nvPr/>
-        </p:nvPicPr>
-        <p:blipFill rotWithShape="1">
-          <a:blip r:embed="rId6">
             <a:alphaModFix/>
           </a:blip>
           <a:srcRect b="44466" l="14673" r="15820" t="33074"/>
@@ -24164,7 +20437,7 @@
                 <a:cs typeface="DM Sans"/>
                 <a:sym typeface="DM Sans"/>
               </a:rPr>
-              <a:t>Empirical Verification: </a:t>
+              <a:t>Fallback: </a:t>
             </a:r>
             <a:r>
               <a:rPr b="0" i="0" lang="en-US" sz="937" u="none" cap="none" strike="noStrike">
@@ -24176,7 +20449,7 @@
                 <a:cs typeface="DM Sans"/>
                 <a:sym typeface="DM Sans"/>
               </a:rPr>
-              <a:t>none yet — first measurements are Experiment E1 (Oct 2026); results will replace every target on these slides.</a:t>
+              <a:t>if our laser cannot give repeatable graphene, we use a partner lab's laser; the strip design and reader stay the same.</a:t>
             </a:r>
           </a:p>
         </p:txBody>
@@ -24214,12 +20487,12 @@
                 <a:spcPts val="0"/>
               </a:spcBef>
               <a:spcAft>
-                <a:spcPts val="0"/>
+                <a:spcPts val="600"/>
               </a:spcAft>
               <a:buNone/>
             </a:pPr>
             <a:r>
-              <a:rPr b="1" i="0" lang="en-US" sz="937" u="none" cap="none" strike="noStrike">
+              <a:rPr b="1" i="0" lang="en-US" sz="1100" u="none" cap="none" strike="noStrike">
                 <a:solidFill>
                   <a:srgbClr val="334155"/>
                 </a:solidFill>
@@ -24231,7 +20504,7 @@
               <a:t>Observed Risk: </a:t>
             </a:r>
             <a:r>
-              <a:rPr b="0" i="0" lang="en-US" sz="937" u="none" cap="none" strike="noStrike">
+              <a:rPr b="0" i="0" lang="en-US" sz="1100" u="none" cap="none" strike="noStrike">
                 <a:solidFill>
                   <a:srgbClr val="334155"/>
                 </a:solidFill>
@@ -24240,35 +20513,9 @@
                 <a:cs typeface="DM Sans"/>
                 <a:sym typeface="DM Sans"/>
               </a:rPr>
-              <a:t>tube current is spiky below ~25 % PWM (engineering measurements, not peer-reviewed) [C]; our '12' is in this range [A].</a:t>
+              <a:t>'12' is a low-power command on a 100 W tube; such tubes fire unevenly below ~25 %⁷, and the polyimide brand changes the result⁸.</a:t>
             </a:r>
           </a:p>
-        </p:txBody>
-      </p:sp>
-      <p:sp>
-        <p:nvSpPr>
-          <p:cNvPr id="486" name="Google Shape;486;p30"/>
-          <p:cNvSpPr txBox="1"/>
-          <p:nvPr/>
-        </p:nvSpPr>
-        <p:spPr>
-          <a:xfrm>
-            <a:off x="752475" y="2055167"/>
-            <a:ext cx="3130450" cy="517921"/>
-          </a:xfrm>
-          <a:prstGeom prst="rect">
-            <a:avLst/>
-          </a:prstGeom>
-          <a:noFill/>
-          <a:ln>
-            <a:noFill/>
-          </a:ln>
-        </p:spPr>
-        <p:txBody>
-          <a:bodyPr anchorCtr="0" anchor="t" bIns="0" lIns="0" spcFirstLastPara="1" rIns="0" wrap="square" tIns="0">
-            <a:spAutoFit/>
-          </a:bodyPr>
-          <a:lstStyle/>
           <a:p>
             <a:pPr indent="0" lvl="0" marL="0" marR="0" rtl="0" algn="l">
               <a:lnSpc>
@@ -24278,12 +20525,12 @@
                 <a:spcPts val="0"/>
               </a:spcBef>
               <a:spcAft>
-                <a:spcPts val="0"/>
+                <a:spcPts val="600"/>
               </a:spcAft>
               <a:buNone/>
             </a:pPr>
             <a:r>
-              <a:rPr b="1" i="0" lang="en-US" sz="937" u="none" cap="none" strike="noStrike">
+              <a:rPr b="1" i="0" lang="en-US" sz="1100" u="none" cap="none" strike="noStrike">
                 <a:solidFill>
                   <a:srgbClr val="334155"/>
                 </a:solidFill>
@@ -24295,7 +20542,7 @@
               <a:t>Mitigation: </a:t>
             </a:r>
             <a:r>
-              <a:rPr b="0" i="0" lang="en-US" sz="937" u="none" cap="none" strike="noStrike">
+              <a:rPr b="0" i="0" lang="en-US" sz="1100" u="none" cap="none" strike="noStrike">
                 <a:solidFill>
                   <a:srgbClr val="334155"/>
                 </a:solidFill>
@@ -24304,7 +20551,45 @@
                 <a:cs typeface="DM Sans"/>
                 <a:sym typeface="DM Sans"/>
               </a:rPr>
-              <a:t>log tube mA; 2 coupons per day on 2 days; accept only if CV ≤ 20 % (pre-registered).</a:t>
+              <a:t>log tube current, repeat the reference on 2 days, accept only if variation ≤ 20 %; fall back to slower or defocused passes.</a:t>
+            </a:r>
+          </a:p>
+          <a:p>
+            <a:pPr indent="0" lvl="0" marL="0" marR="0" rtl="0" algn="l">
+              <a:lnSpc>
+                <a:spcPct val="145037"/>
+              </a:lnSpc>
+              <a:spcBef>
+                <a:spcPts val="0"/>
+              </a:spcBef>
+              <a:spcAft>
+                <a:spcPts val="600"/>
+              </a:spcAft>
+              <a:buNone/>
+            </a:pPr>
+            <a:r>
+              <a:rPr b="1" i="0" lang="en-US" sz="1100" u="none" cap="none" strike="noStrike">
+                <a:solidFill>
+                  <a:srgbClr val="334155"/>
+                </a:solidFill>
+                <a:latin typeface="DM Sans"/>
+                <a:ea typeface="DM Sans"/>
+                <a:cs typeface="DM Sans"/>
+                <a:sym typeface="DM Sans"/>
+              </a:rPr>
+              <a:t>Test: </a:t>
+            </a:r>
+            <a:r>
+              <a:rPr b="0" i="0" lang="en-US" sz="1100" u="none" cap="none" strike="noStrike">
+                <a:solidFill>
+                  <a:srgbClr val="334155"/>
+                </a:solidFill>
+                <a:latin typeface="DM Sans"/>
+                <a:ea typeface="DM Sans"/>
+                <a:cs typeface="DM Sans"/>
+                <a:sym typeface="DM Sans"/>
+              </a:rPr>
+              <a:t>E1, 8 reference cells over 2 days, tube current logged.</a:t>
             </a:r>
           </a:p>
         </p:txBody>
@@ -24342,12 +20627,12 @@
                 <a:spcPts val="0"/>
               </a:spcBef>
               <a:spcAft>
-                <a:spcPts val="0"/>
+                <a:spcPts val="600"/>
               </a:spcAft>
               <a:buNone/>
             </a:pPr>
             <a:r>
-              <a:rPr b="1" i="0" lang="en-US" sz="937" u="none" cap="none" strike="noStrike">
+              <a:rPr b="1" i="0" lang="en-US" sz="1100" u="none" cap="none" strike="noStrike">
                 <a:solidFill>
                   <a:srgbClr val="334155"/>
                 </a:solidFill>
@@ -24359,7 +20644,7 @@
               <a:t>Observed Risk: </a:t>
             </a:r>
             <a:r>
-              <a:rPr b="0" i="0" lang="en-US" sz="937" u="none" cap="none" strike="noStrike">
+              <a:rPr b="0" i="0" lang="en-US" sz="1100" u="none" cap="none" strike="noStrike">
                 <a:solidFill>
                   <a:srgbClr val="334155"/>
                 </a:solidFill>
@@ -24368,35 +20653,9 @@
                 <a:cs typeface="DM Sans"/>
                 <a:sym typeface="DM Sans"/>
               </a:rPr>
-              <a:t>black and conductive does not prove graphene; resistance alone cannot confirm graphitic carbon.</a:t>
+              <a:t>black and conductive is not proof of graphene; resistance alone cannot show graphitic carbon.</a:t>
             </a:r>
           </a:p>
-        </p:txBody>
-      </p:sp>
-      <p:sp>
-        <p:nvSpPr>
-          <p:cNvPr id="488" name="Google Shape;488;p30"/>
-          <p:cNvSpPr txBox="1"/>
-          <p:nvPr/>
-        </p:nvSpPr>
-        <p:spPr>
-          <a:xfrm>
-            <a:off x="4530625" y="2055167"/>
-            <a:ext cx="3130599" cy="517921"/>
-          </a:xfrm>
-          <a:prstGeom prst="rect">
-            <a:avLst/>
-          </a:prstGeom>
-          <a:noFill/>
-          <a:ln>
-            <a:noFill/>
-          </a:ln>
-        </p:spPr>
-        <p:txBody>
-          <a:bodyPr anchorCtr="0" anchor="t" bIns="0" lIns="0" spcFirstLastPara="1" rIns="0" wrap="square" tIns="0">
-            <a:spAutoFit/>
-          </a:bodyPr>
-          <a:lstStyle/>
           <a:p>
             <a:pPr indent="0" lvl="0" marL="0" marR="0" rtl="0" algn="l">
               <a:lnSpc>
@@ -24406,12 +20665,12 @@
                 <a:spcPts val="0"/>
               </a:spcBef>
               <a:spcAft>
-                <a:spcPts val="0"/>
+                <a:spcPts val="600"/>
               </a:spcAft>
               <a:buNone/>
             </a:pPr>
             <a:r>
-              <a:rPr b="1" i="0" lang="en-US" sz="937" u="none" cap="none" strike="noStrike">
+              <a:rPr b="1" i="0" lang="en-US" sz="1100" u="none" cap="none" strike="noStrike">
                 <a:solidFill>
                   <a:srgbClr val="334155"/>
                 </a:solidFill>
@@ -24423,7 +20682,7 @@
               <a:t>Mitigation: </a:t>
             </a:r>
             <a:r>
-              <a:rPr b="0" i="0" lang="en-US" sz="937" u="none" cap="none" strike="noStrike">
+              <a:rPr b="0" i="0" lang="en-US" sz="1100" u="none" cap="none" strike="noStrike">
                 <a:solidFill>
                   <a:srgbClr val="334155"/>
                 </a:solidFill>
@@ -24432,7 +20691,45 @@
                 <a:cs typeface="DM Sans"/>
                 <a:sym typeface="DM Sans"/>
               </a:rPr>
-              <a:t>Raman (D, G, 2D) and SEM via a university facility; until then we report a 'LIG-like conductive layer'.</a:t>
+              <a:t>Raman (D, G, 2D peaks) and SEM through a university facility; until then we call it a graphene-like layer.</a:t>
+            </a:r>
+          </a:p>
+          <a:p>
+            <a:pPr indent="0" lvl="0" marL="0" marR="0" rtl="0" algn="l">
+              <a:lnSpc>
+                <a:spcPct val="145037"/>
+              </a:lnSpc>
+              <a:spcBef>
+                <a:spcPts val="0"/>
+              </a:spcBef>
+              <a:spcAft>
+                <a:spcPts val="600"/>
+              </a:spcAft>
+              <a:buNone/>
+            </a:pPr>
+            <a:r>
+              <a:rPr b="1" i="0" lang="en-US" sz="1100" u="none" cap="none" strike="noStrike">
+                <a:solidFill>
+                  <a:srgbClr val="334155"/>
+                </a:solidFill>
+                <a:latin typeface="DM Sans"/>
+                <a:ea typeface="DM Sans"/>
+                <a:cs typeface="DM Sans"/>
+                <a:sym typeface="DM Sans"/>
+              </a:rPr>
+              <a:t>Test: </a:t>
+            </a:r>
+            <a:r>
+              <a:rPr b="0" i="0" lang="en-US" sz="1100" u="none" cap="none" strike="noStrike">
+                <a:solidFill>
+                  <a:srgbClr val="334155"/>
+                </a:solidFill>
+                <a:latin typeface="DM Sans"/>
+                <a:ea typeface="DM Sans"/>
+                <a:cs typeface="DM Sans"/>
+                <a:sym typeface="DM Sans"/>
+              </a:rPr>
+              <a:t>Raman on our 3 best cells; graphene shows D ≈ 1350, G ≈ 1580 and 2D ≈ 2700 cm⁻¹ bands³.</a:t>
             </a:r>
           </a:p>
         </p:txBody>
@@ -24470,12 +20767,50 @@
                 <a:spcPts val="0"/>
               </a:spcBef>
               <a:spcAft>
-                <a:spcPts val="0"/>
+                <a:spcPts val="600"/>
               </a:spcAft>
               <a:buNone/>
             </a:pPr>
             <a:r>
-              <a:rPr b="1" i="0" lang="en-US" sz="937" u="none" cap="none" strike="noStrike">
+              <a:rPr b="1" i="0" lang="en-US" sz="1100" u="none" cap="none" strike="noStrike">
+                <a:solidFill>
+                  <a:srgbClr val="334155"/>
+                </a:solidFill>
+                <a:latin typeface="DM Sans"/>
+                <a:ea typeface="DM Sans"/>
+                <a:cs typeface="DM Sans"/>
+                <a:sym typeface="DM Sans"/>
+              </a:rPr>
+              <a:t>Wound Contact: </a:t>
+            </a:r>
+            <a:r>
+              <a:rPr b="0" i="0" lang="en-US" sz="1100" u="none" cap="none" strike="noStrike">
+                <a:solidFill>
+                  <a:srgbClr val="334155"/>
+                </a:solidFill>
+                <a:latin typeface="DM Sans"/>
+                <a:ea typeface="DM Sans"/>
+                <a:cs typeface="DM Sans"/>
+                <a:sym typeface="DM Sans"/>
+              </a:rPr>
+              <a:t>none by design; the strip sits on the outer face of the pad.</a:t>
+            </a:r>
+          </a:p>
+          <a:p>
+            <a:pPr indent="0" lvl="0" marL="0" marR="0" rtl="0" algn="l">
+              <a:lnSpc>
+                <a:spcPct val="145037"/>
+              </a:lnSpc>
+              <a:spcBef>
+                <a:spcPts val="0"/>
+              </a:spcBef>
+              <a:spcAft>
+                <a:spcPts val="600"/>
+              </a:spcAft>
+              <a:buNone/>
+            </a:pPr>
+            <a:r>
+              <a:rPr b="1" i="0" lang="en-US" sz="1100" u="none" cap="none" strike="noStrike">
                 <a:solidFill>
                   <a:srgbClr val="334155"/>
                 </a:solidFill>
@@ -24487,7 +20822,7 @@
               <a:t>ISO 10993: </a:t>
             </a:r>
             <a:r>
-              <a:rPr b="0" i="0" lang="en-US" sz="937" u="none" cap="none" strike="noStrike">
+              <a:rPr b="0" i="0" lang="en-US" sz="1100" u="none" cap="none" strike="noStrike">
                 <a:solidFill>
                   <a:srgbClr val="334155"/>
                 </a:solidFill>
@@ -24496,35 +20831,9 @@
                 <a:cs typeface="DM Sans"/>
                 <a:sym typeface="DM Sans"/>
               </a:rPr>
-              <a:t>required before any skin or wound contact; not started.</a:t>
+              <a:t>required before any skin contact; Kapton is not sold as medical grade¹⁰.</a:t>
             </a:r>
           </a:p>
-        </p:txBody>
-      </p:sp>
-      <p:sp>
-        <p:nvSpPr>
-          <p:cNvPr id="490" name="Google Shape;490;p30"/>
-          <p:cNvSpPr txBox="1"/>
-          <p:nvPr/>
-        </p:nvSpPr>
-        <p:spPr>
-          <a:xfrm>
-            <a:off x="8308925" y="1882526"/>
-            <a:ext cx="3130450" cy="517921"/>
-          </a:xfrm>
-          <a:prstGeom prst="rect">
-            <a:avLst/>
-          </a:prstGeom>
-          <a:noFill/>
-          <a:ln>
-            <a:noFill/>
-          </a:ln>
-        </p:spPr>
-        <p:txBody>
-          <a:bodyPr anchorCtr="0" anchor="t" bIns="0" lIns="0" spcFirstLastPara="1" rIns="0" wrap="square" tIns="0">
-            <a:spAutoFit/>
-          </a:bodyPr>
-          <a:lstStyle/>
           <a:p>
             <a:pPr indent="0" lvl="0" marL="0" marR="0" rtl="0" algn="l">
               <a:lnSpc>
@@ -24534,12 +20843,12 @@
                 <a:spcPts val="0"/>
               </a:spcBef>
               <a:spcAft>
-                <a:spcPts val="0"/>
+                <a:spcPts val="600"/>
               </a:spcAft>
               <a:buNone/>
             </a:pPr>
             <a:r>
-              <a:rPr b="1" i="0" lang="en-US" sz="937" u="none" cap="none" strike="noStrike">
+              <a:rPr b="1" i="0" lang="en-US" sz="1100" u="none" cap="none" strike="noStrike">
                 <a:solidFill>
                   <a:srgbClr val="334155"/>
                 </a:solidFill>
@@ -24548,10 +20857,10 @@
                 <a:cs typeface="DM Sans"/>
                 <a:sym typeface="DM Sans"/>
               </a:rPr>
-              <a:t>Wound Contact: </a:t>
+              <a:t>IEC 60601-1: </a:t>
             </a:r>
             <a:r>
-              <a:rPr b="0" i="0" lang="en-US" sz="937" u="none" cap="none" strike="noStrike">
+              <a:rPr b="0" i="0" lang="en-US" sz="1100" u="none" cap="none" strike="noStrike">
                 <a:solidFill>
                   <a:srgbClr val="334155"/>
                 </a:solidFill>
@@ -24560,35 +20869,9 @@
                 <a:cs typeface="DM Sans"/>
                 <a:sym typeface="DM Sans"/>
               </a:rPr>
-              <a:t>none by design; the strip sits on the outer face of the absorbent pad.</a:t>
+              <a:t>applies to the future on-body reader, not to bench tests.</a:t>
             </a:r>
           </a:p>
-        </p:txBody>
-      </p:sp>
-      <p:sp>
-        <p:nvSpPr>
-          <p:cNvPr id="491" name="Google Shape;491;p30"/>
-          <p:cNvSpPr txBox="1"/>
-          <p:nvPr/>
-        </p:nvSpPr>
-        <p:spPr>
-          <a:xfrm>
-            <a:off x="8308925" y="2476648"/>
-            <a:ext cx="3130450" cy="345281"/>
-          </a:xfrm>
-          <a:prstGeom prst="rect">
-            <a:avLst/>
-          </a:prstGeom>
-          <a:noFill/>
-          <a:ln>
-            <a:noFill/>
-          </a:ln>
-        </p:spPr>
-        <p:txBody>
-          <a:bodyPr anchorCtr="0" anchor="t" bIns="0" lIns="0" spcFirstLastPara="1" rIns="0" wrap="square" tIns="0">
-            <a:spAutoFit/>
-          </a:bodyPr>
-          <a:lstStyle/>
           <a:p>
             <a:pPr indent="0" lvl="0" marL="0" marR="0" rtl="0" algn="l">
               <a:lnSpc>
@@ -24598,12 +20881,12 @@
                 <a:spcPts val="0"/>
               </a:spcBef>
               <a:spcAft>
-                <a:spcPts val="0"/>
+                <a:spcPts val="600"/>
               </a:spcAft>
               <a:buNone/>
             </a:pPr>
             <a:r>
-              <a:rPr b="1" i="0" lang="en-US" sz="937" u="none" cap="none" strike="noStrike">
+              <a:rPr b="1" i="0" lang="en-US" sz="1100" u="none" cap="none" strike="noStrike">
                 <a:solidFill>
                   <a:srgbClr val="334155"/>
                 </a:solidFill>
@@ -24615,7 +20898,7 @@
               <a:t>Claims: </a:t>
             </a:r>
             <a:r>
-              <a:rPr b="0" i="0" lang="en-US" sz="937" u="none" cap="none" strike="noStrike">
+              <a:rPr b="0" i="0" lang="en-US" sz="1100" u="none" cap="none" strike="noStrike">
                 <a:solidFill>
                   <a:srgbClr val="334155"/>
                 </a:solidFill>
@@ -24624,7 +20907,7 @@
                 <a:cs typeface="DM Sans"/>
                 <a:sym typeface="DM Sans"/>
               </a:rPr>
-              <a:t>bench data only; no diagnostic or healing claims.</a:t>
+              <a:t>bench data only, so no diagnostic or healing claims.</a:t>
             </a:r>
           </a:p>
         </p:txBody>
@@ -24700,7 +20983,7 @@
                 <a:cs typeface="DM Sans"/>
                 <a:sym typeface="DM Sans"/>
               </a:rPr>
-              <a:t>Bottleneck: Laser Stability</a:t>
+              <a:t>Laser Repeatability</a:t>
             </a:r>
           </a:p>
         </p:txBody>
@@ -24776,7 +21059,7 @@
                 <a:cs typeface="DM Sans"/>
                 <a:sym typeface="DM Sans"/>
               </a:rPr>
-              <a:t>Bottleneck: Proving It Is LIG</a:t>
+              <a:t>Is It Graphene?</a:t>
             </a:r>
           </a:p>
         </p:txBody>
@@ -24852,7 +21135,7 @@
                 <a:cs typeface="DM Sans"/>
                 <a:sym typeface="DM Sans"/>
               </a:rPr>
-              <a:t>Claims &amp; Standards</a:t>
+              <a:t>Safety &amp; Standards</a:t>
             </a:r>
           </a:p>
         </p:txBody>
@@ -25040,7 +21323,7 @@
                 <a:cs typeface="Inter"/>
                 <a:sym typeface="Inter"/>
               </a:rPr>
-              <a:t>1. Lin J. et al., Laser-induced porous graphene films from commercial polymers, Nat. Commun. 5, 5714 (2014). doi:10.1038/ncomms6714</a:t>
+              <a:t>1. Milne S.D. et al., A wearable wound moisture sensor as an indicator for wound dressing change, Int. Wound J. 13(6):1309–1314 (2016). doi:10.1111/iwj.12521</a:t>
             </a:r>
           </a:p>
           <a:p>
@@ -25066,7 +21349,7 @@
                 <a:cs typeface="Inter"/>
                 <a:sym typeface="Inter"/>
               </a:rPr>
-              <a:t>2. Milne S.D. et al., A wearable wound moisture sensor as an indicator for wound dressing change, Int. Wound J. 13(6), 1309–1314 (2016). doi:10.1111/iwj.12521</a:t>
+              <a:t>2. Dressing instructions for use: Mölnlycke Mepilex Border Flex 'time to change'; 3M Tegaderm silicone foam border guide; foam dressings citing the 2 cm rule.</a:t>
             </a:r>
           </a:p>
           <a:p>
@@ -25092,7 +21375,7 @@
                 <a:cs typeface="Inter"/>
                 <a:sym typeface="Inter"/>
               </a:rPr>
-              <a:t>3. McColl D., Cartlidge B., Connolly P., Real-time monitoring of moisture levels in wound dressings in vitro, Int. J. Surg. 5(5), 316–322 (2007). doi:10.1016/j.ijsu.2007.02.008</a:t>
+              <a:t>3. Lin J. et al., Laser-induced porous graphene films from commercial polymers, Nat. Commun. 5, 5714 (2014). doi:10.1038/ncomms6714</a:t>
             </a:r>
           </a:p>
           <a:p>
@@ -25118,7 +21401,7 @@
                 <a:cs typeface="Inter"/>
                 <a:sym typeface="Inter"/>
               </a:rPr>
-              <a:t>4. Jiang Y. et al., Wireless, closed-loop, smart bandage with integrated sensors and stimulators, Nat. Biotechnol. (2022). doi:10.1038/s41587-022-01528-3</a:t>
+              <a:t>4. McColl D., Cartlidge B., Connolly P., Real-time monitoring of moisture levels in wound dressings in vitro, Int. J. Surg. 5(5):316–322 (2007). doi:10.1016/j.ijsu.2007.02.008</a:t>
             </a:r>
           </a:p>
           <a:p>
@@ -25144,7 +21427,7 @@
                 <a:cs typeface="Inter"/>
                 <a:sym typeface="Inter"/>
               </a:rPr>
-              <a:t>5. Shirzaei Sani E. et al., A stretchable wireless wearable bioelectronic system for infected chronic wounds, Sci. Adv. 9, eadf7388 (2023). doi:10.1126/sciadv.adf7388</a:t>
+              <a:t>5. Jiang Y. et al., Wireless, closed-loop, smart bandage with integrated sensors and stimulators, Nat. Biotechnol. (2022). doi:10.1038/s41587-022-01528-3</a:t>
             </a:r>
           </a:p>
           <a:p>
@@ -25170,7 +21453,7 @@
                 <a:cs typeface="Inter"/>
                 <a:sym typeface="Inter"/>
               </a:rPr>
-              <a:t>6. Asgharian H. et al., WoundMx: multiplexed wound-infection biomarker detection with laser-induced graphene, Research Square preprint (2025). doi:10.21203/rs.3.rs-7274589/v1</a:t>
+              <a:t>6. Asgharian H. et al., WoundMx: wound-infection biomarker detection with laser-induced graphene, Research Square preprint (2025). doi:10.21203/rs.3.rs-7274589/v1</a:t>
             </a:r>
           </a:p>
           <a:p>
@@ -25196,7 +21479,7 @@
                 <a:cs typeface="Inter"/>
                 <a:sym typeface="Inter"/>
               </a:rPr>
-              <a:t>7. Influence of lasing parameters on the morphology and electrical resistance of polyimide-based LIG, Carbon Letters (2023).</a:t>
+              <a:t>7. CO₂ laser tube current vs PWM setting, engineering measurements, softsolder.com (2022), not peer-reviewed.</a:t>
             </a:r>
           </a:p>
           <a:p>
@@ -25222,7 +21505,7 @@
                 <a:cs typeface="Inter"/>
                 <a:sym typeface="Inter"/>
               </a:rPr>
-              <a:t>8. Design of experiments and optimization of laser-induced graphene, University College Cork (2023).</a:t>
+              <a:t>8. Influence of lasing parameters on the morphology and electrical resistance of polyimide-based LIG, Carbon Letters (2023).</a:t>
             </a:r>
           </a:p>
           <a:p>
@@ -25248,7 +21531,7 @@
                 <a:cs typeface="Inter"/>
                 <a:sym typeface="Inter"/>
               </a:rPr>
-              <a:t>9. Dressing instructions: Mölnlycke Mepilex Border Flex 'time to change'; 3M Tegaderm silicone foam border guide.</a:t>
+              <a:t>9. EN 13726-1:2002 / EN 13726:2023, Test methods for primary wound dressings (absorbency; 'Solution A' simulated exudate).</a:t>
             </a:r>
           </a:p>
           <a:p>
@@ -25274,7 +21557,7 @@
                 <a:cs typeface="Inter"/>
                 <a:sym typeface="Inter"/>
               </a:rPr>
-              <a:t>10. EN 13726-1:2002 / EN 13726:2023, Test methods for primary wound dressings (absorbency, 'Solution A').</a:t>
+              <a:t>10. DuPont statement on the use of DuPont materials in medical applications (Kapton medical caution).</a:t>
             </a:r>
           </a:p>
           <a:p>
@@ -25300,59 +21583,7 @@
                 <a:cs typeface="Inter"/>
                 <a:sym typeface="Inter"/>
               </a:rPr>
-              <a:t>11. CO₂ laser tube current vs PWM measurements, softsolder.com (2022) — engineering blog, not peer-reviewed.</a:t>
-            </a:r>
-          </a:p>
-          <a:p>
-            <a:pPr indent="0" lvl="0" marL="0" marR="0" rtl="0" algn="l">
-              <a:lnSpc>
-                <a:spcPct val="149948"/>
-              </a:lnSpc>
-              <a:spcBef>
-                <a:spcPts val="0"/>
-              </a:spcBef>
-              <a:spcAft>
-                <a:spcPts val="0"/>
-              </a:spcAft>
-              <a:buNone/>
-            </a:pPr>
-            <a:r>
-              <a:rPr b="0" i="0" lang="en-US" sz="975" u="none" cap="none" strike="noStrike">
-                <a:solidFill>
-                  <a:srgbClr val="334155"/>
-                </a:solidFill>
-                <a:latin typeface="Inter"/>
-                <a:ea typeface="Inter"/>
-                <a:cs typeface="Inter"/>
-                <a:sym typeface="Inter"/>
-              </a:rPr>
-              <a:t>12. Rezaei I. et al., Wearable Kapton graphene biosensor for toxic gases, J. Hazard. Mater. Adv. 15, 100452 (2024) — simulation only; reviewed, not used as evidence.</a:t>
-            </a:r>
-          </a:p>
-          <a:p>
-            <a:pPr indent="0" lvl="0" marL="0" marR="0" rtl="0" algn="l">
-              <a:lnSpc>
-                <a:spcPct val="149948"/>
-              </a:lnSpc>
-              <a:spcBef>
-                <a:spcPts val="0"/>
-              </a:spcBef>
-              <a:spcAft>
-                <a:spcPts val="0"/>
-              </a:spcAft>
-              <a:buNone/>
-            </a:pPr>
-            <a:r>
-              <a:rPr b="0" i="0" lang="en-US" sz="975" u="none" cap="none" strike="noStrike">
-                <a:solidFill>
-                  <a:srgbClr val="334155"/>
-                </a:solidFill>
-                <a:latin typeface="Inter"/>
-                <a:ea typeface="Inter"/>
-                <a:cs typeface="Inter"/>
-                <a:sym typeface="Inter"/>
-              </a:rPr>
-              <a:t>13. DuPont statement on use of DuPont materials in medical applications (Kapton medical caution).</a:t>
+              <a:t>11. Reviewed, not used as evidence: Rezaei I. et al., Wearable Kapton graphene biosensor for toxic gases, J. Hazard. Mater. Adv. 15, 100452 (2024), simulation only.</a:t>
             </a:r>
           </a:p>
         </p:txBody>
@@ -25445,7 +21676,7 @@
                 <a:cs typeface="Poppins"/>
                 <a:sym typeface="Poppins"/>
               </a:rPr>
-              <a:t>(tags: [A] our records · [B] planned measurement · [C] published literature)</a:t>
+              <a:t>(numbers match the superscripts on each slide)</a:t>
             </a:r>
             <a:r>
               <a:rPr lang="en-US" sz="1800">
@@ -25550,373 +21781,6 @@
 </p:sld>
 </file>
 
-<file path=ppt/slides/slide2.xml><?xml version="1.0" encoding="utf-8"?>
-<p:sld xmlns:a="http://schemas.openxmlformats.org/drawingml/2006/main" xmlns:r="http://schemas.openxmlformats.org/officeDocument/2006/relationships" xmlns:mc="http://schemas.openxmlformats.org/markup-compatibility/2006" xmlns:mv="urn:schemas-microsoft-com:mac:vml" xmlns:p="http://schemas.openxmlformats.org/presentationml/2006/main" xmlns:c="http://schemas.openxmlformats.org/drawingml/2006/chart" xmlns:dgm="http://schemas.openxmlformats.org/drawingml/2006/diagram" xmlns:o="urn:schemas-microsoft-com:office:office" xmlns:v="urn:schemas-microsoft-com:vml" xmlns:pvml="urn:schemas-microsoft-com:office:powerpoint" xmlns:com="http://schemas.openxmlformats.org/drawingml/2006/compatibility" xmlns:p14="http://schemas.microsoft.com/office/powerpoint/2010/main" xmlns:p15="http://schemas.microsoft.com/office/powerpoint/2012/main" xmlns:ahyp="http://schemas.microsoft.com/office/drawing/2018/hyperlinkcolor">
-  <p:cSld>
-    <p:bg>
-      <p:bgPr>
-        <a:solidFill>
-          <a:srgbClr val="FFFFFF"/>
-        </a:solidFill>
-      </p:bgPr>
-    </p:bg>
-    <p:spTree>
-      <p:nvGrpSpPr>
-        <p:cNvPr id="93" name="Shape 93"/>
-        <p:cNvGrpSpPr/>
-        <p:nvPr/>
-      </p:nvGrpSpPr>
-      <p:grpSpPr>
-        <a:xfrm>
-          <a:off x="0" y="0"/>
-          <a:ext cx="0" cy="0"/>
-          <a:chOff x="0" y="0"/>
-          <a:chExt cx="0" cy="0"/>
-        </a:xfrm>
-      </p:grpSpPr>
-      <p:pic>
-        <p:nvPicPr>
-          <p:cNvPr descr="image.png" id="94" name="Google Shape;94;p14"/>
-          <p:cNvPicPr preferRelativeResize="0"/>
-          <p:nvPr/>
-        </p:nvPicPr>
-        <p:blipFill rotWithShape="1">
-          <a:blip r:embed="rId3">
-            <a:alphaModFix/>
-          </a:blip>
-          <a:srcRect b="0" l="0" r="0" t="0"/>
-          <a:stretch/>
-        </p:blipFill>
-        <p:spPr>
-          <a:xfrm>
-            <a:off x="571500" y="1369800"/>
-            <a:ext cx="5372100" cy="2872740"/>
-          </a:xfrm>
-          <a:prstGeom prst="rect">
-            <a:avLst/>
-          </a:prstGeom>
-          <a:noFill/>
-          <a:ln>
-            <a:noFill/>
-          </a:ln>
-        </p:spPr>
-      </p:pic>
-      <p:sp>
-        <p:nvSpPr>
-          <p:cNvPr id="95" name="Google Shape;95;p14"/>
-          <p:cNvSpPr txBox="1"/>
-          <p:nvPr/>
-        </p:nvSpPr>
-        <p:spPr>
-          <a:xfrm>
-            <a:off x="809625" y="2112750"/>
-            <a:ext cx="5140500" cy="254100"/>
-          </a:xfrm>
-          <a:prstGeom prst="rect">
-            <a:avLst/>
-          </a:prstGeom>
-          <a:noFill/>
-          <a:ln>
-            <a:noFill/>
-          </a:ln>
-        </p:spPr>
-        <p:txBody>
-          <a:bodyPr anchorCtr="0" anchor="t" bIns="0" lIns="0" spcFirstLastPara="1" rIns="0" wrap="square" tIns="0">
-            <a:spAutoFit/>
-          </a:bodyPr>
-          <a:lstStyle/>
-          <a:p>
-            <a:pPr indent="0" lvl="0" marL="0" marR="0" rtl="0" algn="l">
-              <a:spcBef>
-                <a:spcPts val="0"/>
-              </a:spcBef>
-              <a:spcAft>
-                <a:spcPts val="0"/>
-              </a:spcAft>
-              <a:buNone/>
-            </a:pPr>
-            <a:r>
-              <a:rPr b="0" i="0" lang="en-US" sz="1650" u="none" cap="none" strike="noStrike">
-                <a:solidFill>
-                  <a:srgbClr val="0284C7"/>
-                </a:solidFill>
-                <a:latin typeface="Poppins SemiBold"/>
-                <a:ea typeface="Poppins SemiBold"/>
-                <a:cs typeface="Poppins SemiBold"/>
-                <a:sym typeface="Poppins SemiBold"/>
-              </a:rPr>
-              <a:t>Project Overview &amp; Problem Statement</a:t>
-            </a:r>
-          </a:p>
-        </p:txBody>
-      </p:sp>
-      <p:sp>
-        <p:nvSpPr>
-          <p:cNvPr id="96" name="Google Shape;96;p14"/>
-          <p:cNvSpPr txBox="1"/>
-          <p:nvPr/>
-        </p:nvSpPr>
-        <p:spPr>
-          <a:xfrm>
-            <a:off x="809625" y="2541375"/>
-            <a:ext cx="4896000" cy="461700"/>
-          </a:xfrm>
-          <a:prstGeom prst="rect">
-            <a:avLst/>
-          </a:prstGeom>
-          <a:noFill/>
-          <a:ln>
-            <a:noFill/>
-          </a:ln>
-        </p:spPr>
-        <p:txBody>
-          <a:bodyPr anchorCtr="0" anchor="t" bIns="0" lIns="0" spcFirstLastPara="1" rIns="0" wrap="square" tIns="0">
-            <a:spAutoFit/>
-          </a:bodyPr>
-          <a:lstStyle/>
-          <a:p>
-            <a:pPr indent="0" lvl="0" marL="0" marR="0" rtl="0" algn="l">
-              <a:lnSpc>
-                <a:spcPct val="150000"/>
-              </a:lnSpc>
-              <a:spcBef>
-                <a:spcPts val="0"/>
-              </a:spcBef>
-              <a:spcAft>
-                <a:spcPts val="0"/>
-              </a:spcAft>
-              <a:buNone/>
-            </a:pPr>
-            <a:r>
-              <a:rPr b="1" i="0" lang="en-US" sz="1200" u="none" cap="none" strike="noStrike">
-                <a:solidFill>
-                  <a:srgbClr val="334155"/>
-                </a:solidFill>
-                <a:latin typeface="Inter"/>
-                <a:ea typeface="Inter"/>
-                <a:cs typeface="Inter"/>
-                <a:sym typeface="Inter"/>
-              </a:rPr>
-              <a:t>Project Overview: </a:t>
-            </a:r>
-            <a:r>
-              <a:rPr b="0" i="0" lang="en-US" sz="1200" u="none" cap="none" strike="noStrike">
-                <a:solidFill>
-                  <a:srgbClr val="334155"/>
-                </a:solidFill>
-                <a:latin typeface="Inter"/>
-                <a:ea typeface="Inter"/>
-                <a:cs typeface="Inter"/>
-                <a:sym typeface="Inter"/>
-              </a:rPr>
-              <a:t>Dermasense (VK26-IITI-HT-0050, Health Tech): low-cost laser-induced graphene (LIG) strips written on Kapton to show when a dressing is full.</a:t>
-            </a:r>
-          </a:p>
-        </p:txBody>
-      </p:sp>
-      <p:sp>
-        <p:nvSpPr>
-          <p:cNvPr id="97" name="Google Shape;97;p14"/>
-          <p:cNvSpPr txBox="1"/>
-          <p:nvPr/>
-        </p:nvSpPr>
-        <p:spPr>
-          <a:xfrm>
-            <a:off x="809625" y="3341475"/>
-            <a:ext cx="4896000" cy="461700"/>
-          </a:xfrm>
-          <a:prstGeom prst="rect">
-            <a:avLst/>
-          </a:prstGeom>
-          <a:noFill/>
-          <a:ln>
-            <a:noFill/>
-          </a:ln>
-        </p:spPr>
-        <p:txBody>
-          <a:bodyPr anchorCtr="0" anchor="t" bIns="0" lIns="0" spcFirstLastPara="1" rIns="0" wrap="square" tIns="0">
-            <a:spAutoFit/>
-          </a:bodyPr>
-          <a:lstStyle/>
-          <a:p>
-            <a:pPr indent="0" lvl="0" marL="0" marR="0" rtl="0" algn="l">
-              <a:lnSpc>
-                <a:spcPct val="150000"/>
-              </a:lnSpc>
-              <a:spcBef>
-                <a:spcPts val="0"/>
-              </a:spcBef>
-              <a:spcAft>
-                <a:spcPts val="0"/>
-              </a:spcAft>
-              <a:buNone/>
-            </a:pPr>
-            <a:r>
-              <a:rPr b="1" i="0" lang="en-US" sz="1200" u="none" cap="none" strike="noStrike">
-                <a:solidFill>
-                  <a:srgbClr val="334155"/>
-                </a:solidFill>
-                <a:latin typeface="Inter"/>
-                <a:ea typeface="Inter"/>
-                <a:cs typeface="Inter"/>
-                <a:sym typeface="Inter"/>
-              </a:rPr>
-              <a:t>Problem Statement: </a:t>
-            </a:r>
-            <a:r>
-              <a:rPr b="0" i="0" lang="en-US" sz="1200" u="none" cap="none" strike="noStrike">
-                <a:solidFill>
-                  <a:srgbClr val="334155"/>
-                </a:solidFill>
-                <a:latin typeface="Inter"/>
-                <a:ea typeface="Inter"/>
-                <a:cs typeface="Inter"/>
-                <a:sym typeface="Inter"/>
-              </a:rPr>
-              <a:t>exudate spread is hidden under bandages; in one study 44.9 % of 588 dressing changes were made while moisture was still optimal [C]. Beneficiaries: wound-care nurses and patients.</a:t>
-            </a:r>
-          </a:p>
-        </p:txBody>
-      </p:sp>
-      <p:pic>
-        <p:nvPicPr>
-          <p:cNvPr descr="image.png" id="98" name="Google Shape;98;p14"/>
-          <p:cNvPicPr preferRelativeResize="0"/>
-          <p:nvPr/>
-        </p:nvPicPr>
-        <p:blipFill rotWithShape="1">
-          <a:blip r:embed="rId4">
-            <a:alphaModFix/>
-          </a:blip>
-          <a:srcRect b="0" l="0" r="0" t="0"/>
-          <a:stretch/>
-        </p:blipFill>
-        <p:spPr>
-          <a:xfrm>
-            <a:off x="809625" y="1636500"/>
-            <a:ext cx="304800" cy="304800"/>
-          </a:xfrm>
-          <a:prstGeom prst="rect">
-            <a:avLst/>
-          </a:prstGeom>
-          <a:noFill/>
-          <a:ln>
-            <a:noFill/>
-          </a:ln>
-        </p:spPr>
-      </p:pic>
-      <p:sp>
-        <p:nvSpPr>
-          <p:cNvPr id="99" name="Google Shape;99;p14"/>
-          <p:cNvSpPr txBox="1"/>
-          <p:nvPr/>
-        </p:nvSpPr>
-        <p:spPr>
-          <a:xfrm>
-            <a:off x="571500" y="476250"/>
-            <a:ext cx="11601600" cy="392400"/>
-          </a:xfrm>
-          <a:prstGeom prst="rect">
-            <a:avLst/>
-          </a:prstGeom>
-          <a:noFill/>
-          <a:ln>
-            <a:noFill/>
-          </a:ln>
-        </p:spPr>
-        <p:txBody>
-          <a:bodyPr anchorCtr="0" anchor="t" bIns="0" lIns="0" spcFirstLastPara="1" rIns="0" wrap="square" tIns="0">
-            <a:spAutoFit/>
-          </a:bodyPr>
-          <a:lstStyle/>
-          <a:p>
-            <a:pPr indent="0" lvl="0" marL="0" marR="0" rtl="0" algn="l">
-              <a:spcBef>
-                <a:spcPts val="0"/>
-              </a:spcBef>
-              <a:spcAft>
-                <a:spcPts val="0"/>
-              </a:spcAft>
-              <a:buNone/>
-            </a:pPr>
-            <a:r>
-              <a:rPr b="1" i="0" lang="en-US" sz="2550" u="none" cap="none" strike="noStrike">
-                <a:solidFill>
-                  <a:srgbClr val="1E3A8A"/>
-                </a:solidFill>
-                <a:latin typeface="Poppins"/>
-                <a:ea typeface="Poppins"/>
-                <a:cs typeface="Poppins"/>
-                <a:sym typeface="Poppins"/>
-              </a:rPr>
-              <a:t>Problem Context</a:t>
-            </a:r>
-          </a:p>
-        </p:txBody>
-      </p:sp>
-      <p:pic>
-        <p:nvPicPr>
-          <p:cNvPr id="100" name="Google Shape;100;p14" title="MBF_Logo_2020.png"/>
-          <p:cNvPicPr preferRelativeResize="0"/>
-          <p:nvPr/>
-        </p:nvPicPr>
-        <p:blipFill>
-          <a:blip r:embed="rId5">
-            <a:alphaModFix/>
-          </a:blip>
-          <a:stretch>
-            <a:fillRect/>
-          </a:stretch>
-        </p:blipFill>
-        <p:spPr>
-          <a:xfrm>
-            <a:off x="11095194" y="6280800"/>
-            <a:ext cx="1096806" cy="577200"/>
-          </a:xfrm>
-          <a:prstGeom prst="rect">
-            <a:avLst/>
-          </a:prstGeom>
-          <a:noFill/>
-          <a:ln>
-            <a:noFill/>
-          </a:ln>
-        </p:spPr>
-      </p:pic>
-      <p:pic>
-        <p:nvPicPr>
-          <p:cNvPr id="101" name="Google Shape;101;p14" title="VK colored transparent logo.png"/>
-          <p:cNvPicPr preferRelativeResize="0"/>
-          <p:nvPr/>
-        </p:nvPicPr>
-        <p:blipFill rotWithShape="1">
-          <a:blip r:embed="rId6">
-            <a:alphaModFix/>
-          </a:blip>
-          <a:srcRect b="44466" l="14673" r="15820" t="33074"/>
-          <a:stretch/>
-        </p:blipFill>
-        <p:spPr>
-          <a:xfrm>
-            <a:off x="0" y="6280800"/>
-            <a:ext cx="1786280" cy="577200"/>
-          </a:xfrm>
-          <a:prstGeom prst="rect">
-            <a:avLst/>
-          </a:prstGeom>
-          <a:noFill/>
-          <a:ln>
-            <a:noFill/>
-          </a:ln>
-        </p:spPr>
-      </p:pic>
-    </p:spTree>
-  </p:cSld>
-  <p:clrMapOvr>
-    <a:masterClrMapping/>
-  </p:clrMapOvr>
-</p:sld>
-</file>
-
 <file path=ppt/slides/slide20.xml><?xml version="1.0" encoding="utf-8"?>
 <p:sld xmlns:a="http://schemas.openxmlformats.org/drawingml/2006/main" xmlns:r="http://schemas.openxmlformats.org/officeDocument/2006/relationships" xmlns:mc="http://schemas.openxmlformats.org/markup-compatibility/2006" xmlns:mv="urn:schemas-microsoft-com:mac:vml" xmlns:p="http://schemas.openxmlformats.org/presentationml/2006/main" xmlns:c="http://schemas.openxmlformats.org/drawingml/2006/chart" xmlns:dgm="http://schemas.openxmlformats.org/drawingml/2006/diagram" xmlns:o="urn:schemas-microsoft-com:office:office" xmlns:v="urn:schemas-microsoft-com:vml" xmlns:pvml="urn:schemas-microsoft-com:office:powerpoint" xmlns:com="http://schemas.openxmlformats.org/drawingml/2006/compatibility" xmlns:p14="http://schemas.microsoft.com/office/powerpoint/2010/main" xmlns:p15="http://schemas.microsoft.com/office/powerpoint/2012/main" xmlns:ahyp="http://schemas.microsoft.com/office/drawing/2018/hyperlinkcolor">
   <p:cSld>
@@ -26030,7 +21894,7 @@
         <p:spPr>
           <a:xfrm>
             <a:off x="533400" y="956220"/>
-            <a:ext cx="11125200" cy="1151334"/>
+            <a:ext cx="11125200" cy="1188720"/>
           </a:xfrm>
           <a:prstGeom prst="rect">
             <a:avLst/>
@@ -26117,7 +21981,7 @@
                 <a:cs typeface="DM Sans"/>
                 <a:sym typeface="DM Sans"/>
               </a:rPr>
-              <a:t>All figures in this deck were generated by the team from project files: flow diagrams (matplotlib), coupon drawing rendered from lig_test_coupon.dxf, schematic (schemdraw). Script: 08_submission/make_figures.py.</a:t>
+              <a:t>All figures were drawn by the team with Python from project files: problem, journey and concept illustrations; the coupon from lig_test_coupon.dxf; the schematic with schemdraw; machine settings from LaserCAD SysCfg.ini. Script: 08_submission/make_figures.py.</a:t>
             </a:r>
           </a:p>
           <a:p>
@@ -26143,7 +22007,7 @@
                 <a:cs typeface="DM Sans"/>
                 <a:sym typeface="DM Sans"/>
               </a:rPr>
-              <a:t>No stock photos and no AI-generated images are used. The photo slot on the Maker Journey slide is a marked placeholder for an original E1 lab photo.</a:t>
+              <a:t>No stock photos and no AI-generated images are used; concept drawings are labelled as concepts.</a:t>
             </a:r>
           </a:p>
         </p:txBody>
@@ -26211,8 +22075,8 @@
 </p:sld>
 </file>
 
-<file path=ppt/slides/slide3.xml><?xml version="1.0" encoding="utf-8"?>
-<p:sld xmlns:a="http://schemas.openxmlformats.org/drawingml/2006/main" xmlns:r="http://schemas.openxmlformats.org/officeDocument/2006/relationships" xmlns:mc="http://schemas.openxmlformats.org/markup-compatibility/2006" xmlns:mv="urn:schemas-microsoft-com:mac:vml" xmlns:p="http://schemas.openxmlformats.org/presentationml/2006/main" xmlns:c="http://schemas.openxmlformats.org/drawingml/2006/chart" xmlns:dgm="http://schemas.openxmlformats.org/drawingml/2006/diagram" xmlns:o="urn:schemas-microsoft-com:office:office" xmlns:v="urn:schemas-microsoft-com:vml" xmlns:pvml="urn:schemas-microsoft-com:office:powerpoint" xmlns:com="http://schemas.openxmlformats.org/drawingml/2006/compatibility" xmlns:p14="http://schemas.microsoft.com/office/powerpoint/2010/main" xmlns:p15="http://schemas.microsoft.com/office/powerpoint/2012/main" xmlns:ahyp="http://schemas.microsoft.com/office/drawing/2018/hyperlinkcolor">
+<file path=ppt/slides/slide21.xml><?xml version="1.0" encoding="utf-8"?>
+<p:sld xmlns:a="http://schemas.openxmlformats.org/drawingml/2006/main" xmlns:p="http://schemas.openxmlformats.org/presentationml/2006/main" xmlns:r="http://schemas.openxmlformats.org/officeDocument/2006/relationships">
   <p:cSld>
     <p:bg>
       <p:bgPr>
@@ -26223,26 +22087,19 @@
     </p:bg>
     <p:spTree>
       <p:nvGrpSpPr>
-        <p:cNvPr id="106" name="Shape 106"/>
+        <p:cNvPr id="1" name=""/>
         <p:cNvGrpSpPr/>
         <p:nvPr/>
       </p:nvGrpSpPr>
-      <p:grpSpPr>
-        <a:xfrm>
-          <a:off x="0" y="0"/>
-          <a:ext cx="0" cy="0"/>
-          <a:chOff x="0" y="0"/>
-          <a:chExt cx="0" cy="0"/>
-        </a:xfrm>
-      </p:grpSpPr>
+      <p:grpSpPr/>
       <p:pic>
         <p:nvPicPr>
-          <p:cNvPr descr="image.png" id="107" name="Google Shape;107;p15"/>
+          <p:cNvPr descr="image.png" id="125" name="Google Shape;125;p16"/>
           <p:cNvPicPr preferRelativeResize="0"/>
           <p:nvPr/>
         </p:nvPicPr>
         <p:blipFill rotWithShape="1">
-          <a:blip r:embed="rId3">
+          <a:blip r:embed="rId6">
             <a:alphaModFix/>
           </a:blip>
           <a:srcRect b="0" l="0" r="0" t="0"/>
@@ -26250,8 +22107,197 @@
         </p:blipFill>
         <p:spPr>
           <a:xfrm>
-            <a:off x="6230075" y="1597875"/>
-            <a:ext cx="5372100" cy="2827020"/>
+            <a:off x="0" y="0"/>
+            <a:ext cx="12192000" cy="6858000"/>
+          </a:xfrm>
+          <a:prstGeom prst="rect">
+            <a:avLst/>
+          </a:prstGeom>
+          <a:noFill/>
+          <a:ln>
+            <a:noFill/>
+          </a:ln>
+        </p:spPr>
+      </p:pic>
+      <p:pic>
+        <p:nvPicPr>
+          <p:cNvPr descr="image.png" id="126" name="Google Shape;126;p16"/>
+          <p:cNvPicPr preferRelativeResize="0"/>
+          <p:nvPr/>
+        </p:nvPicPr>
+        <p:blipFill rotWithShape="1">
+          <a:blip r:embed="rId7">
+            <a:alphaModFix/>
+          </a:blip>
+          <a:srcRect b="0" l="0" r="0" t="0"/>
+          <a:stretch/>
+        </p:blipFill>
+        <p:spPr>
+          <a:xfrm>
+            <a:off x="533400" y="5714641"/>
+            <a:ext cx="11125200" cy="363140"/>
+          </a:xfrm>
+          <a:prstGeom prst="rect">
+            <a:avLst/>
+          </a:prstGeom>
+          <a:noFill/>
+          <a:ln>
+            <a:noFill/>
+          </a:ln>
+        </p:spPr>
+      </p:pic>
+      <p:pic>
+        <p:nvPicPr>
+          <p:cNvPr descr="image.png" id="127" name="Google Shape;127;p16"/>
+          <p:cNvPicPr preferRelativeResize="0"/>
+          <p:nvPr/>
+        </p:nvPicPr>
+        <p:blipFill rotWithShape="1">
+          <a:blip r:embed="rId10">
+            <a:alphaModFix/>
+          </a:blip>
+          <a:srcRect b="0" l="0" r="0" t="0"/>
+          <a:stretch/>
+        </p:blipFill>
+        <p:spPr>
+          <a:xfrm>
+            <a:off x="533400" y="956220"/>
+            <a:ext cx="2667000" cy="649485"/>
+          </a:xfrm>
+          <a:prstGeom prst="rect">
+            <a:avLst/>
+          </a:prstGeom>
+          <a:noFill/>
+          <a:ln>
+            <a:noFill/>
+          </a:ln>
+        </p:spPr>
+      </p:pic>
+      <p:pic>
+        <p:nvPicPr>
+          <p:cNvPr descr="image.png" id="128" name="Google Shape;128;p16"/>
+          <p:cNvPicPr preferRelativeResize="0"/>
+          <p:nvPr/>
+        </p:nvPicPr>
+        <p:blipFill rotWithShape="1">
+          <a:blip r:embed="rId11">
+            <a:alphaModFix/>
+          </a:blip>
+          <a:srcRect b="0" l="0" r="0" t="0"/>
+          <a:stretch/>
+        </p:blipFill>
+        <p:spPr>
+          <a:xfrm>
+            <a:off x="3352800" y="956220"/>
+            <a:ext cx="2667000" cy="649485"/>
+          </a:xfrm>
+          <a:prstGeom prst="rect">
+            <a:avLst/>
+          </a:prstGeom>
+          <a:noFill/>
+          <a:ln>
+            <a:noFill/>
+          </a:ln>
+        </p:spPr>
+      </p:pic>
+      <p:pic>
+        <p:nvPicPr>
+          <p:cNvPr descr="image.png" id="129" name="Google Shape;129;p16"/>
+          <p:cNvPicPr preferRelativeResize="0"/>
+          <p:nvPr/>
+        </p:nvPicPr>
+        <p:blipFill rotWithShape="1">
+          <a:blip r:embed="rId12">
+            <a:alphaModFix/>
+          </a:blip>
+          <a:srcRect b="0" l="0" r="0" t="0"/>
+          <a:stretch/>
+        </p:blipFill>
+        <p:spPr>
+          <a:xfrm>
+            <a:off x="6172200" y="956220"/>
+            <a:ext cx="2667000" cy="649485"/>
+          </a:xfrm>
+          <a:prstGeom prst="rect">
+            <a:avLst/>
+          </a:prstGeom>
+          <a:noFill/>
+          <a:ln>
+            <a:noFill/>
+          </a:ln>
+        </p:spPr>
+      </p:pic>
+      <p:pic>
+        <p:nvPicPr>
+          <p:cNvPr descr="image.png" id="130" name="Google Shape;130;p16"/>
+          <p:cNvPicPr preferRelativeResize="0"/>
+          <p:nvPr/>
+        </p:nvPicPr>
+        <p:blipFill rotWithShape="1">
+          <a:blip r:embed="rId12">
+            <a:alphaModFix/>
+          </a:blip>
+          <a:srcRect b="0" l="0" r="0" t="0"/>
+          <a:stretch/>
+        </p:blipFill>
+        <p:spPr>
+          <a:xfrm>
+            <a:off x="8991600" y="956220"/>
+            <a:ext cx="2667000" cy="649485"/>
+          </a:xfrm>
+          <a:prstGeom prst="rect">
+            <a:avLst/>
+          </a:prstGeom>
+          <a:noFill/>
+          <a:ln>
+            <a:noFill/>
+          </a:ln>
+        </p:spPr>
+      </p:pic>
+      <p:pic>
+        <p:nvPicPr>
+          <p:cNvPr descr="image.png" id="131" name="Google Shape;131;p16"/>
+          <p:cNvPicPr preferRelativeResize="0"/>
+          <p:nvPr/>
+        </p:nvPicPr>
+        <p:blipFill rotWithShape="1">
+          <a:blip r:embed="rId13">
+            <a:alphaModFix/>
+          </a:blip>
+          <a:srcRect b="0" l="0" r="0" t="0"/>
+          <a:stretch/>
+        </p:blipFill>
+        <p:spPr>
+          <a:xfrm>
+            <a:off x="6229350" y="1739051"/>
+            <a:ext cx="5429250" cy="3801299"/>
+          </a:xfrm>
+          <a:prstGeom prst="rect">
+            <a:avLst/>
+          </a:prstGeom>
+          <a:noFill/>
+          <a:ln>
+            <a:noFill/>
+          </a:ln>
+        </p:spPr>
+      </p:pic>
+      <p:pic>
+        <p:nvPicPr>
+          <p:cNvPr descr="image.png" id="132" name="Google Shape;132;p16"/>
+          <p:cNvPicPr preferRelativeResize="0"/>
+          <p:nvPr/>
+        </p:nvPicPr>
+        <p:blipFill rotWithShape="1">
+          <a:blip r:embed="rId8">
+            <a:alphaModFix/>
+          </a:blip>
+          <a:srcRect b="0" l="0" r="0" t="0"/>
+          <a:stretch/>
+        </p:blipFill>
+        <p:spPr>
+          <a:xfrm>
+            <a:off x="533400" y="1739056"/>
+            <a:ext cx="5429250" cy="3538728"/>
           </a:xfrm>
           <a:prstGeom prst="rect">
             <a:avLst/>
@@ -26264,14 +22310,14 @@
       </p:pic>
       <p:sp>
         <p:nvSpPr>
-          <p:cNvPr id="108" name="Google Shape;108;p15"/>
+          <p:cNvPr id="133" name="Google Shape;133;p16"/>
           <p:cNvSpPr txBox="1"/>
           <p:nvPr/>
         </p:nvSpPr>
         <p:spPr>
           <a:xfrm>
-            <a:off x="6468200" y="2340825"/>
-            <a:ext cx="5140500" cy="254100"/>
+            <a:off x="533400" y="438150"/>
+            <a:ext cx="11125200" cy="308520"/>
           </a:xfrm>
           <a:prstGeom prst="rect">
             <a:avLst/>
@@ -26282,12 +22328,15 @@
           </a:ln>
         </p:spPr>
         <p:txBody>
-          <a:bodyPr anchorCtr="0" anchor="t" bIns="0" lIns="0" spcFirstLastPara="1" rIns="0" wrap="square" tIns="0">
+          <a:bodyPr anchorCtr="0" anchor="ctr" bIns="0" lIns="0" spcFirstLastPara="1" rIns="0" wrap="square" tIns="0">
             <a:spAutoFit/>
           </a:bodyPr>
           <a:lstStyle/>
           <a:p>
             <a:pPr indent="0" lvl="0" marL="0" marR="0" rtl="0" algn="l">
+              <a:lnSpc>
+                <a:spcPct val="119950"/>
+              </a:lnSpc>
               <a:spcBef>
                 <a:spcPts val="0"/>
               </a:spcBef>
@@ -26297,30 +22346,30 @@
               <a:buNone/>
             </a:pPr>
             <a:r>
-              <a:rPr b="0" i="0" lang="en-US" sz="1650" u="none" cap="none" strike="noStrike">
+              <a:rPr b="1" i="0" lang="en-US" sz="2025" u="none" cap="none" strike="noStrike">
                 <a:solidFill>
-                  <a:srgbClr val="0284C7"/>
+                  <a:srgbClr val="0F172A"/>
                 </a:solidFill>
                 <a:latin typeface="Poppins SemiBold"/>
                 <a:ea typeface="Poppins SemiBold"/>
                 <a:cs typeface="Poppins SemiBold"/>
                 <a:sym typeface="Poppins SemiBold"/>
               </a:rPr>
-              <a:t>After State (planned, not yet built)</a:t>
+              <a:t>User Journey</a:t>
             </a:r>
           </a:p>
         </p:txBody>
       </p:sp>
       <p:sp>
         <p:nvSpPr>
-          <p:cNvPr id="109" name="Google Shape;109;p15"/>
+          <p:cNvPr id="135" name="Google Shape;135;p16"/>
           <p:cNvSpPr txBox="1"/>
           <p:nvPr/>
         </p:nvSpPr>
         <p:spPr>
           <a:xfrm>
-            <a:off x="6468200" y="2769450"/>
-            <a:ext cx="4896000" cy="461700"/>
+            <a:off x="695325" y="5838653"/>
+            <a:ext cx="9048900" cy="144300"/>
           </a:xfrm>
           <a:prstGeom prst="rect">
             <a:avLst/>
@@ -26338,7 +22387,7 @@
           <a:p>
             <a:pPr indent="0" lvl="0" marL="0" marR="0" rtl="0" algn="l">
               <a:lnSpc>
-                <a:spcPct val="150000"/>
+                <a:spcPct val="145037"/>
               </a:lnSpc>
               <a:spcBef>
                 <a:spcPts val="0"/>
@@ -26349,42 +22398,601 @@
               <a:buNone/>
             </a:pPr>
             <a:r>
-              <a:rPr b="1" lang="en-US" sz="1200">
+              <a:rPr b="1" i="0" lang="en-US" sz="937" u="none" cap="none" strike="noStrike">
                 <a:solidFill>
-                  <a:srgbClr val="334155"/>
+                  <a:srgbClr val="0F172A"/>
                 </a:solidFill>
-                <a:latin typeface="Inter"/>
-                <a:ea typeface="Inter"/>
-                <a:cs typeface="Inter"/>
-                <a:sym typeface="Inter"/>
+                <a:latin typeface="DM Sans"/>
+                <a:ea typeface="DM Sans"/>
+                <a:cs typeface="DM Sans"/>
+                <a:sym typeface="DM Sans"/>
               </a:rPr>
-              <a:t>Future Solution: </a:t>
+              <a:t>Design Principle: </a:t>
             </a:r>
             <a:r>
-              <a:rPr b="0" i="0" lang="en-US" sz="1200" u="none" cap="none" strike="noStrike">
+              <a:rPr b="0" i="0" lang="en-US" sz="937" u="none" cap="none" strike="noStrike">
                 <a:solidFill>
-                  <a:srgbClr val="334155"/>
+                  <a:srgbClr val="475569"/>
                 </a:solidFill>
-                <a:latin typeface="Inter"/>
-                <a:ea typeface="Inter"/>
-                <a:cs typeface="Inter"/>
-                <a:sym typeface="Inter"/>
+                <a:latin typeface="DM Sans"/>
+                <a:ea typeface="DM Sans"/>
+                <a:cs typeface="DM Sans"/>
+                <a:sym typeface="DM Sans"/>
               </a:rPr>
-              <a:t>a thin LIG strip on the outer face of the pad (no wound contact) reads wet/dry at the centre and at the maker's 2 cm change line.</a:t>
+              <a:t>the strip sits on the outer face of the absorbent pad, never on the wound: lower biocompatibility risk and no fouling of the sensor.</a:t>
             </a:r>
           </a:p>
         </p:txBody>
       </p:sp>
       <p:sp>
         <p:nvSpPr>
-          <p:cNvPr id="110" name="Google Shape;110;p15"/>
+          <p:cNvPr id="136" name="Google Shape;136;p16"/>
           <p:cNvSpPr txBox="1"/>
           <p:nvPr/>
         </p:nvSpPr>
         <p:spPr>
           <a:xfrm>
-            <a:off x="6468200" y="3569550"/>
-            <a:ext cx="4896000" cy="461700"/>
+            <a:off x="695325" y="1080045"/>
+            <a:ext cx="2343150" cy="230385"/>
+          </a:xfrm>
+          <a:prstGeom prst="rect">
+            <a:avLst/>
+          </a:prstGeom>
+          <a:noFill/>
+          <a:ln>
+            <a:noFill/>
+          </a:ln>
+        </p:spPr>
+        <p:txBody>
+          <a:bodyPr anchorCtr="0" anchor="t" bIns="0" lIns="0" spcFirstLastPara="1" rIns="0" wrap="square" tIns="0">
+            <a:spAutoFit/>
+          </a:bodyPr>
+          <a:lstStyle/>
+          <a:p>
+            <a:pPr indent="0" lvl="0" marL="0" marR="0" rtl="0" algn="ctr">
+              <a:lnSpc>
+                <a:spcPct val="109939"/>
+              </a:lnSpc>
+              <a:spcBef>
+                <a:spcPts val="0"/>
+              </a:spcBef>
+              <a:spcAft>
+                <a:spcPts val="0"/>
+              </a:spcAft>
+              <a:buNone/>
+            </a:pPr>
+            <a:r>
+              <a:rPr b="1" i="0" lang="en-US" sz="1650" u="none" cap="none" strike="noStrike">
+                <a:solidFill>
+                  <a:srgbClr val="0369A1"/>
+                </a:solidFill>
+                <a:latin typeface="Poppins"/>
+                <a:ea typeface="Poppins"/>
+                <a:cs typeface="Poppins"/>
+                <a:sym typeface="Poppins"/>
+              </a:rPr>
+              <a:t>By clock</a:t>
+            </a:r>
+          </a:p>
+        </p:txBody>
+      </p:sp>
+      <p:sp>
+        <p:nvSpPr>
+          <p:cNvPr id="137" name="Google Shape;137;p16"/>
+          <p:cNvSpPr txBox="1"/>
+          <p:nvPr/>
+        </p:nvSpPr>
+        <p:spPr>
+          <a:xfrm>
+            <a:off x="695325" y="1339006"/>
+            <a:ext cx="2343150" cy="142875"/>
+          </a:xfrm>
+          <a:prstGeom prst="rect">
+            <a:avLst/>
+          </a:prstGeom>
+          <a:noFill/>
+          <a:ln>
+            <a:noFill/>
+          </a:ln>
+        </p:spPr>
+        <p:txBody>
+          <a:bodyPr anchorCtr="0" anchor="t" bIns="0" lIns="0" spcFirstLastPara="1" rIns="0" wrap="square" tIns="0">
+            <a:spAutoFit/>
+          </a:bodyPr>
+          <a:lstStyle/>
+          <a:p>
+            <a:pPr indent="0" lvl="0" marL="0" marR="0" rtl="0" algn="ctr">
+              <a:spcBef>
+                <a:spcPts val="0"/>
+              </a:spcBef>
+              <a:spcAft>
+                <a:spcPts val="0"/>
+              </a:spcAft>
+              <a:buNone/>
+            </a:pPr>
+            <a:r>
+              <a:rPr b="0" i="0" lang="en-US" sz="862" u="none" cap="none" strike="noStrike">
+                <a:solidFill>
+                  <a:srgbClr val="64748B"/>
+                </a:solidFill>
+                <a:latin typeface="DM Sans Medium"/>
+                <a:ea typeface="DM Sans Medium"/>
+                <a:cs typeface="DM Sans Medium"/>
+                <a:sym typeface="DM Sans Medium"/>
+              </a:rPr>
+              <a:t>HOW DRESSINGS ARE CHANGED TODAY</a:t>
+            </a:r>
+          </a:p>
+        </p:txBody>
+      </p:sp>
+      <p:sp>
+        <p:nvSpPr>
+          <p:cNvPr id="138" name="Google Shape;138;p16"/>
+          <p:cNvSpPr txBox="1"/>
+          <p:nvPr/>
+        </p:nvSpPr>
+        <p:spPr>
+          <a:xfrm>
+            <a:off x="3514725" y="1080045"/>
+            <a:ext cx="2343150" cy="230385"/>
+          </a:xfrm>
+          <a:prstGeom prst="rect">
+            <a:avLst/>
+          </a:prstGeom>
+          <a:noFill/>
+          <a:ln>
+            <a:noFill/>
+          </a:ln>
+        </p:spPr>
+        <p:txBody>
+          <a:bodyPr anchorCtr="0" anchor="t" bIns="0" lIns="0" spcFirstLastPara="1" rIns="0" wrap="square" tIns="0">
+            <a:spAutoFit/>
+          </a:bodyPr>
+          <a:lstStyle/>
+          <a:p>
+            <a:pPr indent="0" lvl="0" marL="0" marR="0" rtl="0" algn="ctr">
+              <a:lnSpc>
+                <a:spcPct val="109939"/>
+              </a:lnSpc>
+              <a:spcBef>
+                <a:spcPts val="0"/>
+              </a:spcBef>
+              <a:spcAft>
+                <a:spcPts val="0"/>
+              </a:spcAft>
+              <a:buNone/>
+            </a:pPr>
+            <a:r>
+              <a:rPr b="1" i="0" lang="en-US" sz="1650" u="none" cap="none" strike="noStrike">
+                <a:solidFill>
+                  <a:srgbClr val="0369A1"/>
+                </a:solidFill>
+                <a:latin typeface="Poppins"/>
+                <a:ea typeface="Poppins"/>
+                <a:cs typeface="Poppins"/>
+                <a:sym typeface="Poppins"/>
+              </a:rPr>
+              <a:t>4 zones</a:t>
+            </a:r>
+          </a:p>
+        </p:txBody>
+      </p:sp>
+      <p:sp>
+        <p:nvSpPr>
+          <p:cNvPr id="139" name="Google Shape;139;p16"/>
+          <p:cNvSpPr txBox="1"/>
+          <p:nvPr/>
+        </p:nvSpPr>
+        <p:spPr>
+          <a:xfrm>
+            <a:off x="3514725" y="1339006"/>
+            <a:ext cx="2343150" cy="142875"/>
+          </a:xfrm>
+          <a:prstGeom prst="rect">
+            <a:avLst/>
+          </a:prstGeom>
+          <a:noFill/>
+          <a:ln>
+            <a:noFill/>
+          </a:ln>
+        </p:spPr>
+        <p:txBody>
+          <a:bodyPr anchorCtr="0" anchor="t" bIns="0" lIns="0" spcFirstLastPara="1" rIns="0" wrap="square" tIns="0">
+            <a:spAutoFit/>
+          </a:bodyPr>
+          <a:lstStyle/>
+          <a:p>
+            <a:pPr indent="0" lvl="0" marL="0" marR="0" rtl="0" algn="ctr">
+              <a:spcBef>
+                <a:spcPts val="0"/>
+              </a:spcBef>
+              <a:spcAft>
+                <a:spcPts val="0"/>
+              </a:spcAft>
+              <a:buNone/>
+            </a:pPr>
+            <a:r>
+              <a:rPr b="0" i="0" lang="en-US" sz="862" u="none" cap="none" strike="noStrike">
+                <a:solidFill>
+                  <a:srgbClr val="64748B"/>
+                </a:solidFill>
+                <a:latin typeface="DM Sans Medium"/>
+                <a:ea typeface="DM Sans Medium"/>
+                <a:cs typeface="DM Sans Medium"/>
+                <a:sym typeface="DM Sans Medium"/>
+              </a:rPr>
+              <a:t>CENTRE → EDGE ON ONE STRIP</a:t>
+            </a:r>
+          </a:p>
+        </p:txBody>
+      </p:sp>
+      <p:sp>
+        <p:nvSpPr>
+          <p:cNvPr id="140" name="Google Shape;140;p16"/>
+          <p:cNvSpPr txBox="1"/>
+          <p:nvPr/>
+        </p:nvSpPr>
+        <p:spPr>
+          <a:xfrm>
+            <a:off x="6334125" y="1080045"/>
+            <a:ext cx="2343150" cy="230385"/>
+          </a:xfrm>
+          <a:prstGeom prst="rect">
+            <a:avLst/>
+          </a:prstGeom>
+          <a:noFill/>
+          <a:ln>
+            <a:noFill/>
+          </a:ln>
+        </p:spPr>
+        <p:txBody>
+          <a:bodyPr anchorCtr="0" anchor="t" bIns="0" lIns="0" spcFirstLastPara="1" rIns="0" wrap="square" tIns="0">
+            <a:spAutoFit/>
+          </a:bodyPr>
+          <a:lstStyle/>
+          <a:p>
+            <a:pPr indent="0" lvl="0" marL="0" marR="0" rtl="0" algn="ctr">
+              <a:lnSpc>
+                <a:spcPct val="109939"/>
+              </a:lnSpc>
+              <a:spcBef>
+                <a:spcPts val="0"/>
+              </a:spcBef>
+              <a:spcAft>
+                <a:spcPts val="0"/>
+              </a:spcAft>
+              <a:buNone/>
+            </a:pPr>
+            <a:r>
+              <a:rPr b="1" i="0" lang="en-US" sz="1650" u="none" cap="none" strike="noStrike">
+                <a:solidFill>
+                  <a:srgbClr val="0369A1"/>
+                </a:solidFill>
+                <a:latin typeface="Poppins"/>
+                <a:ea typeface="Poppins"/>
+                <a:cs typeface="Poppins"/>
+                <a:sym typeface="Poppins"/>
+              </a:rPr>
+              <a:t>0</a:t>
+            </a:r>
+          </a:p>
+        </p:txBody>
+      </p:sp>
+      <p:sp>
+        <p:nvSpPr>
+          <p:cNvPr id="141" name="Google Shape;141;p16"/>
+          <p:cNvSpPr txBox="1"/>
+          <p:nvPr/>
+        </p:nvSpPr>
+        <p:spPr>
+          <a:xfrm>
+            <a:off x="6334125" y="1339006"/>
+            <a:ext cx="2343150" cy="142875"/>
+          </a:xfrm>
+          <a:prstGeom prst="rect">
+            <a:avLst/>
+          </a:prstGeom>
+          <a:noFill/>
+          <a:ln>
+            <a:noFill/>
+          </a:ln>
+        </p:spPr>
+        <p:txBody>
+          <a:bodyPr anchorCtr="0" anchor="t" bIns="0" lIns="0" spcFirstLastPara="1" rIns="0" wrap="square" tIns="0">
+            <a:spAutoFit/>
+          </a:bodyPr>
+          <a:lstStyle/>
+          <a:p>
+            <a:pPr indent="0" lvl="0" marL="0" marR="0" rtl="0" algn="ctr">
+              <a:spcBef>
+                <a:spcPts val="0"/>
+              </a:spcBef>
+              <a:spcAft>
+                <a:spcPts val="0"/>
+              </a:spcAft>
+              <a:buNone/>
+            </a:pPr>
+            <a:r>
+              <a:rPr b="0" i="0" lang="en-US" sz="862" u="none" cap="none" strike="noStrike">
+                <a:solidFill>
+                  <a:srgbClr val="64748B"/>
+                </a:solidFill>
+                <a:latin typeface="DM Sans Medium"/>
+                <a:ea typeface="DM Sans Medium"/>
+                <a:cs typeface="DM Sans Medium"/>
+                <a:sym typeface="DM Sans Medium"/>
+              </a:rPr>
+              <a:t>CONTACT WITH THE WOUND BED</a:t>
+            </a:r>
+          </a:p>
+        </p:txBody>
+      </p:sp>
+      <p:sp>
+        <p:nvSpPr>
+          <p:cNvPr id="142" name="Google Shape;142;p16"/>
+          <p:cNvSpPr txBox="1"/>
+          <p:nvPr/>
+        </p:nvSpPr>
+        <p:spPr>
+          <a:xfrm>
+            <a:off x="9153525" y="1080045"/>
+            <a:ext cx="2343150" cy="230385"/>
+          </a:xfrm>
+          <a:prstGeom prst="rect">
+            <a:avLst/>
+          </a:prstGeom>
+          <a:noFill/>
+          <a:ln>
+            <a:noFill/>
+          </a:ln>
+        </p:spPr>
+        <p:txBody>
+          <a:bodyPr anchorCtr="0" anchor="t" bIns="0" lIns="0" spcFirstLastPara="1" rIns="0" wrap="square" tIns="0">
+            <a:spAutoFit/>
+          </a:bodyPr>
+          <a:lstStyle/>
+          <a:p>
+            <a:pPr indent="0" lvl="0" marL="0" marR="0" rtl="0" algn="ctr">
+              <a:lnSpc>
+                <a:spcPct val="109939"/>
+              </a:lnSpc>
+              <a:spcBef>
+                <a:spcPts val="0"/>
+              </a:spcBef>
+              <a:spcAft>
+                <a:spcPts val="0"/>
+              </a:spcAft>
+              <a:buNone/>
+            </a:pPr>
+            <a:r>
+              <a:rPr b="1" i="0" lang="en-US" sz="1650" u="none" cap="none" strike="noStrike">
+                <a:solidFill>
+                  <a:srgbClr val="0369A1"/>
+                </a:solidFill>
+                <a:latin typeface="Poppins"/>
+                <a:ea typeface="Poppins"/>
+                <a:cs typeface="Poppins"/>
+                <a:sym typeface="Poppins"/>
+              </a:rPr>
+              <a:t>≤ ₹100</a:t>
+            </a:r>
+          </a:p>
+        </p:txBody>
+      </p:sp>
+      <p:sp>
+        <p:nvSpPr>
+          <p:cNvPr id="143" name="Google Shape;143;p16"/>
+          <p:cNvSpPr txBox="1"/>
+          <p:nvPr/>
+        </p:nvSpPr>
+        <p:spPr>
+          <a:xfrm>
+            <a:off x="9153525" y="1339006"/>
+            <a:ext cx="2343150" cy="142875"/>
+          </a:xfrm>
+          <a:prstGeom prst="rect">
+            <a:avLst/>
+          </a:prstGeom>
+          <a:noFill/>
+          <a:ln>
+            <a:noFill/>
+          </a:ln>
+        </p:spPr>
+        <p:txBody>
+          <a:bodyPr anchorCtr="0" anchor="t" bIns="0" lIns="0" spcFirstLastPara="1" rIns="0" wrap="square" tIns="0">
+            <a:spAutoFit/>
+          </a:bodyPr>
+          <a:lstStyle/>
+          <a:p>
+            <a:pPr indent="0" lvl="0" marL="0" marR="0" rtl="0" algn="ctr">
+              <a:spcBef>
+                <a:spcPts val="0"/>
+              </a:spcBef>
+              <a:spcAft>
+                <a:spcPts val="0"/>
+              </a:spcAft>
+              <a:buNone/>
+            </a:pPr>
+            <a:r>
+              <a:rPr b="0" i="0" lang="en-US" sz="862" u="none" cap="none" strike="noStrike">
+                <a:solidFill>
+                  <a:srgbClr val="64748B"/>
+                </a:solidFill>
+                <a:latin typeface="DM Sans Medium"/>
+                <a:ea typeface="DM Sans Medium"/>
+                <a:cs typeface="DM Sans Medium"/>
+                <a:sym typeface="DM Sans Medium"/>
+              </a:rPr>
+              <a:t>TARGET COST PER STRIP</a:t>
+            </a:r>
+          </a:p>
+        </p:txBody>
+      </p:sp>
+      <p:sp>
+        <p:nvSpPr>
+          <p:cNvPr id="144" name="Google Shape;144;p16"/>
+          <p:cNvSpPr txBox="1"/>
+          <p:nvPr/>
+        </p:nvSpPr>
+        <p:spPr>
+          <a:xfrm>
+            <a:off x="533400" y="5323885"/>
+            <a:ext cx="5429250" cy="158799"/>
+          </a:xfrm>
+          <a:prstGeom prst="rect">
+            <a:avLst/>
+          </a:prstGeom>
+          <a:noFill/>
+          <a:ln>
+            <a:noFill/>
+          </a:ln>
+        </p:spPr>
+        <p:txBody>
+          <a:bodyPr anchorCtr="0" anchor="t" bIns="0" lIns="0" spcFirstLastPara="1" rIns="0" wrap="square" tIns="0">
+            <a:spAutoFit/>
+          </a:bodyPr>
+          <a:lstStyle/>
+          <a:p>
+            <a:pPr indent="0" lvl="0" marL="0" marR="0" rtl="0" algn="r">
+              <a:lnSpc>
+                <a:spcPct val="145011"/>
+              </a:lnSpc>
+              <a:spcBef>
+                <a:spcPts val="0"/>
+              </a:spcBef>
+              <a:spcAft>
+                <a:spcPts val="0"/>
+              </a:spcAft>
+              <a:buNone/>
+            </a:pPr>
+            <a:r>
+              <a:rPr b="0" i="1" lang="en-US" sz="862" u="none" cap="none" strike="noStrike">
+                <a:solidFill>
+                  <a:srgbClr val="64748B"/>
+                </a:solidFill>
+                <a:latin typeface="DM Sans"/>
+                <a:ea typeface="DM Sans"/>
+                <a:cs typeface="DM Sans"/>
+                <a:sym typeface="DM Sans"/>
+              </a:rPr>
+              <a:t>Figure: today's blind cycle vs the Dermasense cycle (target workflow, to be proven on the bench first)</a:t>
+            </a:r>
+          </a:p>
+        </p:txBody>
+      </p:sp>
+      <p:pic>
+        <p:nvPicPr>
+          <p:cNvPr descr="image.png" id="145" name="Google Shape;145;p16"/>
+          <p:cNvPicPr preferRelativeResize="0"/>
+          <p:nvPr/>
+        </p:nvPicPr>
+        <p:blipFill rotWithShape="1">
+          <a:blip r:embed="rId14">
+            <a:alphaModFix/>
+          </a:blip>
+          <a:srcRect/>
+          <a:stretch/>
+        </p:blipFill>
+        <p:spPr>
+          <a:xfrm>
+            <a:off x="542925" y="1748581"/>
+            <a:ext cx="5410200" cy="3520440"/>
+          </a:xfrm>
+          <a:prstGeom prst="rect">
+            <a:avLst/>
+          </a:prstGeom>
+          <a:noFill/>
+          <a:ln>
+            <a:noFill/>
+          </a:ln>
+        </p:spPr>
+      </p:pic>
+      <p:pic>
+        <p:nvPicPr>
+          <p:cNvPr descr="image.png" id="146" name="Google Shape;146;p16"/>
+          <p:cNvPicPr preferRelativeResize="0"/>
+          <p:nvPr/>
+        </p:nvPicPr>
+        <p:blipFill rotWithShape="1">
+          <a:blip r:embed="rId5">
+            <a:alphaModFix/>
+          </a:blip>
+          <a:srcRect b="0" l="0" r="0" t="0"/>
+          <a:stretch/>
+        </p:blipFill>
+        <p:spPr>
+          <a:xfrm>
+            <a:off x="6448425" y="1958131"/>
+            <a:ext cx="154334" cy="152400"/>
+          </a:xfrm>
+          <a:prstGeom prst="rect">
+            <a:avLst/>
+          </a:prstGeom>
+          <a:noFill/>
+          <a:ln>
+            <a:noFill/>
+          </a:ln>
+        </p:spPr>
+      </p:pic>
+      <p:sp>
+        <p:nvSpPr>
+          <p:cNvPr id="147" name="Google Shape;147;p16"/>
+          <p:cNvSpPr txBox="1"/>
+          <p:nvPr/>
+        </p:nvSpPr>
+        <p:spPr>
+          <a:xfrm>
+            <a:off x="6698009" y="1939081"/>
+            <a:ext cx="3215729" cy="190500"/>
+          </a:xfrm>
+          <a:prstGeom prst="rect">
+            <a:avLst/>
+          </a:prstGeom>
+          <a:noFill/>
+          <a:ln>
+            <a:noFill/>
+          </a:ln>
+        </p:spPr>
+        <p:txBody>
+          <a:bodyPr anchorCtr="0" anchor="t" bIns="0" lIns="0" spcFirstLastPara="1" rIns="0" wrap="square" tIns="0">
+            <a:spAutoFit/>
+          </a:bodyPr>
+          <a:lstStyle/>
+          <a:p>
+            <a:pPr indent="0" lvl="0" marL="0" marR="0" rtl="0" algn="l">
+              <a:spcBef>
+                <a:spcPts val="0"/>
+              </a:spcBef>
+              <a:spcAft>
+                <a:spcPts val="0"/>
+              </a:spcAft>
+              <a:buNone/>
+            </a:pPr>
+            <a:r>
+              <a:rPr b="1" i="0" lang="en-US" sz="1125" u="none" cap="none" strike="noStrike">
+                <a:solidFill>
+                  <a:srgbClr val="0F172A"/>
+                </a:solidFill>
+                <a:latin typeface="DM Sans"/>
+                <a:ea typeface="DM Sans"/>
+                <a:cs typeface="DM Sans"/>
+                <a:sym typeface="DM Sans"/>
+              </a:rPr>
+              <a:t>After-State User Flow &amp; Quantified Efficiency</a:t>
+            </a:r>
+          </a:p>
+        </p:txBody>
+      </p:sp>
+      <p:sp>
+        <p:nvSpPr>
+          <p:cNvPr id="148" name="Google Shape;148;p16"/>
+          <p:cNvSpPr txBox="1"/>
+          <p:nvPr/>
+        </p:nvSpPr>
+        <p:spPr>
+          <a:xfrm>
+            <a:off x="6638925" y="2243881"/>
+            <a:ext cx="4800600" cy="372665"/>
           </a:xfrm>
           <a:prstGeom prst="rect">
             <a:avLst/>
@@ -26402,7 +23010,7 @@
           <a:p>
             <a:pPr indent="0" lvl="0" marL="0" marR="0" rtl="0" algn="l">
               <a:lnSpc>
-                <a:spcPct val="150000"/>
+                <a:spcPct val="145059"/>
               </a:lnSpc>
               <a:spcBef>
                 <a:spcPts val="0"/>
@@ -26413,194 +23021,42 @@
               <a:buNone/>
             </a:pPr>
             <a:r>
-              <a:rPr b="1" i="0" lang="en-US" sz="1200" u="none" cap="none" strike="noStrike">
+              <a:rPr b="1" i="0" lang="en-US" sz="1012" u="none" cap="none" strike="noStrike">
                 <a:solidFill>
                   <a:srgbClr val="334155"/>
                 </a:solidFill>
-                <a:latin typeface="Inter"/>
-                <a:ea typeface="Inter"/>
-                <a:cs typeface="Inter"/>
-                <a:sym typeface="Inter"/>
+                <a:latin typeface="DM Sans"/>
+                <a:ea typeface="DM Sans"/>
+                <a:cs typeface="DM Sans"/>
+                <a:sym typeface="DM Sans"/>
               </a:rPr>
-              <a:t>Quantified Efficiency (target, unproven): </a:t>
+              <a:t>After-State Flow: </a:t>
             </a:r>
             <a:r>
-              <a:rPr b="0" i="0" lang="en-US" sz="1200" u="none" cap="none" strike="noStrike">
+              <a:rPr b="0" i="0" lang="en-US" sz="1012" u="none" cap="none" strike="noStrike">
                 <a:solidFill>
                   <a:srgbClr val="334155"/>
                 </a:solidFill>
-                <a:latin typeface="Inter"/>
-                <a:ea typeface="Inter"/>
-                <a:cs typeface="Inter"/>
-                <a:sym typeface="Inter"/>
+                <a:latin typeface="DM Sans"/>
+                <a:ea typeface="DM Sans"/>
+                <a:cs typeface="DM Sans"/>
+                <a:sym typeface="DM Sans"/>
               </a:rPr>
-              <a:t>alert within ±10 % of the fluid volume at which exudate visibly reaches the 2 cm line in bench tests [B]. No clinical benefit claimed.</a:t>
-            </a:r>
-          </a:p>
-        </p:txBody>
-      </p:sp>
-      <p:pic>
-        <p:nvPicPr>
-          <p:cNvPr descr="image.png" id="111" name="Google Shape;111;p15"/>
-          <p:cNvPicPr preferRelativeResize="0"/>
-          <p:nvPr/>
-        </p:nvPicPr>
-        <p:blipFill rotWithShape="1">
-          <a:blip r:embed="rId4">
-            <a:alphaModFix/>
-          </a:blip>
-          <a:srcRect b="0" l="0" r="0" t="0"/>
-          <a:stretch/>
-        </p:blipFill>
-        <p:spPr>
-          <a:xfrm>
-            <a:off x="6468200" y="1864575"/>
-            <a:ext cx="304800" cy="304800"/>
-          </a:xfrm>
-          <a:prstGeom prst="rect">
-            <a:avLst/>
-          </a:prstGeom>
-          <a:noFill/>
-          <a:ln>
-            <a:noFill/>
-          </a:ln>
-        </p:spPr>
-      </p:pic>
-      <p:sp>
-        <p:nvSpPr>
-          <p:cNvPr id="112" name="Google Shape;112;p15"/>
-          <p:cNvSpPr txBox="1"/>
-          <p:nvPr/>
-        </p:nvSpPr>
-        <p:spPr>
-          <a:xfrm>
-            <a:off x="571500" y="476250"/>
-            <a:ext cx="11601600" cy="392400"/>
-          </a:xfrm>
-          <a:prstGeom prst="rect">
-            <a:avLst/>
-          </a:prstGeom>
-          <a:noFill/>
-          <a:ln>
-            <a:noFill/>
-          </a:ln>
-        </p:spPr>
-        <p:txBody>
-          <a:bodyPr anchorCtr="0" anchor="t" bIns="0" lIns="0" spcFirstLastPara="1" rIns="0" wrap="square" tIns="0">
-            <a:spAutoFit/>
-          </a:bodyPr>
-          <a:lstStyle/>
-          <a:p>
-            <a:pPr indent="0" lvl="0" marL="0" marR="0" rtl="0" algn="l">
-              <a:spcBef>
-                <a:spcPts val="0"/>
-              </a:spcBef>
-              <a:spcAft>
-                <a:spcPts val="0"/>
-              </a:spcAft>
-              <a:buNone/>
-            </a:pPr>
-            <a:r>
-              <a:rPr b="1" i="0" lang="en-US" sz="2550" u="none" cap="none" strike="noStrike">
-                <a:solidFill>
-                  <a:srgbClr val="1E3A8A"/>
-                </a:solidFill>
-                <a:latin typeface="Poppins"/>
-                <a:ea typeface="Poppins"/>
-                <a:cs typeface="Poppins"/>
-                <a:sym typeface="Poppins"/>
-              </a:rPr>
-              <a:t>User Journey</a:t>
-            </a:r>
-          </a:p>
-        </p:txBody>
-      </p:sp>
-      <p:pic>
-        <p:nvPicPr>
-          <p:cNvPr descr="image.png" id="113" name="Google Shape;113;p15"/>
-          <p:cNvPicPr preferRelativeResize="0"/>
-          <p:nvPr/>
-        </p:nvPicPr>
-        <p:blipFill rotWithShape="1">
-          <a:blip r:embed="rId3">
-            <a:alphaModFix/>
-          </a:blip>
-          <a:srcRect b="0" l="0" r="0" t="0"/>
-          <a:stretch/>
-        </p:blipFill>
-        <p:spPr>
-          <a:xfrm>
-            <a:off x="583312" y="1636247"/>
-            <a:ext cx="5372100" cy="2644140"/>
-          </a:xfrm>
-          <a:prstGeom prst="rect">
-            <a:avLst/>
-          </a:prstGeom>
-          <a:noFill/>
-          <a:ln>
-            <a:noFill/>
-          </a:ln>
-        </p:spPr>
-      </p:pic>
-      <p:sp>
-        <p:nvSpPr>
-          <p:cNvPr id="114" name="Google Shape;114;p15"/>
-          <p:cNvSpPr txBox="1"/>
-          <p:nvPr/>
-        </p:nvSpPr>
-        <p:spPr>
-          <a:xfrm>
-            <a:off x="821437" y="2379197"/>
-            <a:ext cx="5140500" cy="254100"/>
-          </a:xfrm>
-          <a:prstGeom prst="rect">
-            <a:avLst/>
-          </a:prstGeom>
-          <a:noFill/>
-          <a:ln>
-            <a:noFill/>
-          </a:ln>
-        </p:spPr>
-        <p:txBody>
-          <a:bodyPr anchorCtr="0" anchor="t" bIns="0" lIns="0" spcFirstLastPara="1" rIns="0" wrap="square" tIns="0">
-            <a:spAutoFit/>
-          </a:bodyPr>
-          <a:lstStyle/>
-          <a:p>
-            <a:pPr indent="0" lvl="0" marL="0" marR="0" rtl="0" algn="l">
-              <a:spcBef>
-                <a:spcPts val="0"/>
-              </a:spcBef>
-              <a:spcAft>
-                <a:spcPts val="0"/>
-              </a:spcAft>
-              <a:buNone/>
-            </a:pPr>
-            <a:r>
-              <a:rPr b="0" i="0" lang="en-US" sz="1650" u="none" cap="none" strike="noStrike">
-                <a:solidFill>
-                  <a:srgbClr val="0284C7"/>
-                </a:solidFill>
-                <a:latin typeface="Poppins SemiBold"/>
-                <a:ea typeface="Poppins SemiBold"/>
-                <a:cs typeface="Poppins SemiBold"/>
-                <a:sym typeface="Poppins SemiBold"/>
-              </a:rPr>
-              <a:t>Before State (today)</a:t>
+              <a:t>strip on the pad, reader clipped on → zones read wet/dry → phone shows OK, SOON, CHANGE or LEAK → change when the change line is wet.</a:t>
             </a:r>
           </a:p>
         </p:txBody>
       </p:sp>
       <p:sp>
         <p:nvSpPr>
-          <p:cNvPr id="115" name="Google Shape;115;p15"/>
+          <p:cNvPr id="149" name="Google Shape;149;p16"/>
           <p:cNvSpPr txBox="1"/>
           <p:nvPr/>
         </p:nvSpPr>
         <p:spPr>
           <a:xfrm>
-            <a:off x="821437" y="2807822"/>
-            <a:ext cx="4896000" cy="738900"/>
+            <a:off x="6638925" y="2702272"/>
+            <a:ext cx="4800600" cy="558998"/>
           </a:xfrm>
           <a:prstGeom prst="rect">
             <a:avLst/>
@@ -26618,7 +23074,7 @@
           <a:p>
             <a:pPr indent="0" lvl="0" marL="0" marR="0" rtl="0" algn="l">
               <a:lnSpc>
-                <a:spcPct val="150000"/>
+                <a:spcPct val="145059"/>
               </a:lnSpc>
               <a:spcBef>
                 <a:spcPts val="0"/>
@@ -26629,42 +23085,42 @@
               <a:buNone/>
             </a:pPr>
             <a:r>
-              <a:rPr b="1" i="0" lang="en-US" sz="1200" u="none" cap="none" strike="noStrike">
+              <a:rPr b="1" i="0" lang="en-US" sz="1012" u="none" cap="none" strike="noStrike">
                 <a:solidFill>
                   <a:srgbClr val="334155"/>
                 </a:solidFill>
-                <a:latin typeface="Inter"/>
-                <a:ea typeface="Inter"/>
-                <a:cs typeface="Inter"/>
-                <a:sym typeface="Inter"/>
+                <a:latin typeface="DM Sans"/>
+                <a:ea typeface="DM Sans"/>
+                <a:cs typeface="DM Sans"/>
+                <a:sym typeface="DM Sans"/>
               </a:rPr>
-              <a:t>Current Pain Point: </a:t>
+              <a:t>Who Benefits: </a:t>
             </a:r>
             <a:r>
-              <a:rPr b="0" i="0" lang="en-US" sz="1200" u="none" cap="none" strike="noStrike">
+              <a:rPr b="0" i="0" lang="en-US" sz="1012" u="none" cap="none" strike="noStrike">
                 <a:solidFill>
                   <a:srgbClr val="334155"/>
                 </a:solidFill>
-                <a:latin typeface="Inter"/>
-                <a:ea typeface="Inter"/>
-                <a:cs typeface="Inter"/>
-                <a:sym typeface="Inter"/>
+                <a:latin typeface="DM Sans"/>
+                <a:ea typeface="DM Sans"/>
+                <a:cs typeface="DM Sans"/>
+                <a:sym typeface="DM Sans"/>
               </a:rPr>
-              <a:t>exudate spreads unseen → change on a schedule or after leakage → early changes disturb the moist wound bed; late changes cause leakage and skin maceration [C].</a:t>
+              <a:t>patients get fewer needless removals; nurses get a reason for every change; clinics waste fewer dressings.</a:t>
             </a:r>
           </a:p>
         </p:txBody>
       </p:sp>
       <p:sp>
         <p:nvSpPr>
-          <p:cNvPr id="116" name="Google Shape;116;p15"/>
+          <p:cNvPr id="150" name="Google Shape;150;p16"/>
           <p:cNvSpPr txBox="1"/>
           <p:nvPr/>
         </p:nvSpPr>
         <p:spPr>
           <a:xfrm>
-            <a:off x="821437" y="3591089"/>
-            <a:ext cx="4896000" cy="461700"/>
+            <a:off x="6638925" y="3346995"/>
+            <a:ext cx="4800600" cy="558998"/>
           </a:xfrm>
           <a:prstGeom prst="rect">
             <a:avLst/>
@@ -26682,7 +23138,7 @@
           <a:p>
             <a:pPr indent="0" lvl="0" marL="0" marR="0" rtl="0" algn="l">
               <a:lnSpc>
-                <a:spcPct val="150000"/>
+                <a:spcPct val="145059"/>
               </a:lnSpc>
               <a:spcBef>
                 <a:spcPts val="0"/>
@@ -26693,67 +23149,316 @@
               <a:buNone/>
             </a:pPr>
             <a:r>
-              <a:rPr b="1" i="0" lang="en-US" sz="1200" u="none" cap="none" strike="noStrike">
+              <a:rPr b="1" i="0" lang="en-US" sz="1012" u="none" cap="none" strike="noStrike">
                 <a:solidFill>
                   <a:srgbClr val="334155"/>
                 </a:solidFill>
-                <a:latin typeface="Inter"/>
-                <a:ea typeface="Inter"/>
-                <a:cs typeface="Inter"/>
-                <a:sym typeface="Inter"/>
+                <a:latin typeface="DM Sans"/>
+                <a:ea typeface="DM Sans"/>
+                <a:cs typeface="DM Sans"/>
+                <a:sym typeface="DM Sans"/>
               </a:rPr>
-              <a:t>Quantified Inefficiency: </a:t>
+              <a:t>Efficiency Target: </a:t>
             </a:r>
+            <a:r>
+              <a:rPr b="0" i="0" lang="en-US" sz="1012" u="none" cap="none" strike="noStrike">
+                <a:solidFill>
+                  <a:srgbClr val="334155"/>
+                </a:solidFill>
+                <a:latin typeface="DM Sans"/>
+                <a:ea typeface="DM Sans"/>
+                <a:cs typeface="DM Sans"/>
+                <a:sym typeface="DM Sans"/>
+              </a:rPr>
+              <a:t>alert within ±10 % of the fluid volume at which exudate visibly reaches the change line, in bench tests with simulated exudate⁹.</a:t>
+            </a:r>
+          </a:p>
+        </p:txBody>
+      </p:sp>
+      <p:sp>
+        <p:nvSpPr>
+          <p:cNvPr id="151" name="Google Shape;151;p16"/>
+          <p:cNvSpPr txBox="1"/>
+          <p:nvPr/>
+        </p:nvSpPr>
+        <p:spPr>
+          <a:xfrm>
+            <a:off x="6638925" y="3991719"/>
+            <a:ext cx="4800600" cy="558998"/>
+          </a:xfrm>
+          <a:prstGeom prst="rect">
+            <a:avLst/>
+          </a:prstGeom>
+          <a:noFill/>
+          <a:ln>
+            <a:noFill/>
+          </a:ln>
+        </p:spPr>
+        <p:txBody>
+          <a:bodyPr anchorCtr="0" anchor="t" bIns="0" lIns="0" spcFirstLastPara="1" rIns="0" wrap="square" tIns="0">
+            <a:spAutoFit/>
+          </a:bodyPr>
+          <a:lstStyle/>
+          <a:p>
+            <a:pPr indent="0" lvl="0" marL="0" marR="0" rtl="0" algn="l">
+              <a:lnSpc>
+                <a:spcPct val="145059"/>
+              </a:lnSpc>
+              <a:spcBef>
+                <a:spcPts val="0"/>
+              </a:spcBef>
+              <a:spcAft>
+                <a:spcPts val="0"/>
+              </a:spcAft>
+              <a:buNone/>
+            </a:pPr>
+            <a:r>
+              <a:rPr b="1" i="0" lang="en-US" sz="1012" u="none" cap="none" strike="noStrike">
+                <a:solidFill>
+                  <a:srgbClr val="334155"/>
+                </a:solidFill>
+                <a:latin typeface="DM Sans"/>
+                <a:ea typeface="DM Sans"/>
+                <a:cs typeface="DM Sans"/>
+                <a:sym typeface="DM Sans"/>
+              </a:rPr>
+              <a:t>Not Claimed Yet: </a:t>
+            </a:r>
+            <a:r>
+              <a:rPr b="0" i="0" lang="en-US" sz="1012" u="none" cap="none" strike="noStrike">
+                <a:solidFill>
+                  <a:srgbClr val="334155"/>
+                </a:solidFill>
+                <a:latin typeface="DM Sans"/>
+                <a:ea typeface="DM Sans"/>
+                <a:cs typeface="DM Sans"/>
+                <a:sym typeface="DM Sans"/>
+              </a:rPr>
+              <a:t>fewer dressing changes or faster healing. Those need clinical studies after the bench prototype works.</a:t>
+            </a:r>
+          </a:p>
+        </p:txBody>
+      </p:sp>
+      <p:sp>
+        <p:nvSpPr>
+          <p:cNvPr id="152" name="Google Shape;152;p16"/>
+          <p:cNvSpPr txBox="1"/>
+          <p:nvPr/>
+        </p:nvSpPr>
+        <p:spPr>
+          <a:xfrm>
+            <a:off x="6467475" y="2234356"/>
+            <a:ext cx="57150" cy="219075"/>
+          </a:xfrm>
+          <a:prstGeom prst="rect">
+            <a:avLst/>
+          </a:prstGeom>
+          <a:noFill/>
+          <a:ln>
+            <a:noFill/>
+          </a:ln>
+        </p:spPr>
+        <p:txBody>
+          <a:bodyPr anchorCtr="0" anchor="t" bIns="0" lIns="0" spcFirstLastPara="1" rIns="0" wrap="square" tIns="0">
+            <a:spAutoFit/>
+          </a:bodyPr>
+          <a:lstStyle/>
+          <a:p>
+            <a:pPr indent="0" lvl="0" marL="0" marR="0" rtl="0" algn="l">
+              <a:lnSpc>
+                <a:spcPct val="144916"/>
+              </a:lnSpc>
+              <a:spcBef>
+                <a:spcPts val="0"/>
+              </a:spcBef>
+              <a:spcAft>
+                <a:spcPts val="0"/>
+              </a:spcAft>
+              <a:buNone/>
+            </a:pPr>
             <a:r>
               <a:rPr b="0" i="0" lang="en-US" sz="1200" u="none" cap="none" strike="noStrike">
                 <a:solidFill>
-                  <a:srgbClr val="334155"/>
+                  <a:srgbClr val="059669"/>
                 </a:solidFill>
-                <a:latin typeface="Inter"/>
-                <a:ea typeface="Inter"/>
-                <a:cs typeface="Inter"/>
-                <a:sym typeface="Inter"/>
+                <a:latin typeface="DM Sans"/>
+                <a:ea typeface="DM Sans"/>
+                <a:cs typeface="DM Sans"/>
+                <a:sym typeface="DM Sans"/>
               </a:rPr>
-              <a:t>44.9 % of 588 changes at optimal moisture (Milne 2016) [C]. Local time and cost per change: to be measured [B].</a:t>
+              <a:t>▪</a:t>
             </a:r>
+            <a:endParaRPr/>
+          </a:p>
+        </p:txBody>
+      </p:sp>
+      <p:sp>
+        <p:nvSpPr>
+          <p:cNvPr id="153" name="Google Shape;153;p16"/>
+          <p:cNvSpPr txBox="1"/>
+          <p:nvPr/>
+        </p:nvSpPr>
+        <p:spPr>
+          <a:xfrm>
+            <a:off x="6467475" y="2692747"/>
+            <a:ext cx="57150" cy="219075"/>
+          </a:xfrm>
+          <a:prstGeom prst="rect">
+            <a:avLst/>
+          </a:prstGeom>
+          <a:noFill/>
+          <a:ln>
+            <a:noFill/>
+          </a:ln>
+        </p:spPr>
+        <p:txBody>
+          <a:bodyPr anchorCtr="0" anchor="t" bIns="0" lIns="0" spcFirstLastPara="1" rIns="0" wrap="square" tIns="0">
+            <a:spAutoFit/>
+          </a:bodyPr>
+          <a:lstStyle/>
+          <a:p>
+            <a:pPr indent="0" lvl="0" marL="0" marR="0" rtl="0" algn="l">
+              <a:lnSpc>
+                <a:spcPct val="144916"/>
+              </a:lnSpc>
+              <a:spcBef>
+                <a:spcPts val="0"/>
+              </a:spcBef>
+              <a:spcAft>
+                <a:spcPts val="0"/>
+              </a:spcAft>
+              <a:buNone/>
+            </a:pPr>
+            <a:r>
+              <a:rPr b="0" i="0" lang="en-US" sz="1200" u="none" cap="none" strike="noStrike">
+                <a:solidFill>
+                  <a:srgbClr val="059669"/>
+                </a:solidFill>
+                <a:latin typeface="DM Sans"/>
+                <a:ea typeface="DM Sans"/>
+                <a:cs typeface="DM Sans"/>
+                <a:sym typeface="DM Sans"/>
+              </a:rPr>
+              <a:t>▪</a:t>
+            </a:r>
+            <a:endParaRPr/>
+          </a:p>
+        </p:txBody>
+      </p:sp>
+      <p:sp>
+        <p:nvSpPr>
+          <p:cNvPr id="154" name="Google Shape;154;p16"/>
+          <p:cNvSpPr txBox="1"/>
+          <p:nvPr/>
+        </p:nvSpPr>
+        <p:spPr>
+          <a:xfrm>
+            <a:off x="6467475" y="3337470"/>
+            <a:ext cx="57150" cy="219075"/>
+          </a:xfrm>
+          <a:prstGeom prst="rect">
+            <a:avLst/>
+          </a:prstGeom>
+          <a:noFill/>
+          <a:ln>
+            <a:noFill/>
+          </a:ln>
+        </p:spPr>
+        <p:txBody>
+          <a:bodyPr anchorCtr="0" anchor="t" bIns="0" lIns="0" spcFirstLastPara="1" rIns="0" wrap="square" tIns="0">
+            <a:spAutoFit/>
+          </a:bodyPr>
+          <a:lstStyle/>
+          <a:p>
+            <a:pPr indent="0" lvl="0" marL="0" marR="0" rtl="0" algn="l">
+              <a:lnSpc>
+                <a:spcPct val="144916"/>
+              </a:lnSpc>
+              <a:spcBef>
+                <a:spcPts val="0"/>
+              </a:spcBef>
+              <a:spcAft>
+                <a:spcPts val="0"/>
+              </a:spcAft>
+              <a:buNone/>
+            </a:pPr>
+            <a:r>
+              <a:rPr b="0" i="0" lang="en-US" sz="1200" u="none" cap="none" strike="noStrike">
+                <a:solidFill>
+                  <a:srgbClr val="059669"/>
+                </a:solidFill>
+                <a:latin typeface="DM Sans"/>
+                <a:ea typeface="DM Sans"/>
+                <a:cs typeface="DM Sans"/>
+                <a:sym typeface="DM Sans"/>
+              </a:rPr>
+              <a:t>▪</a:t>
+            </a:r>
+            <a:endParaRPr/>
+          </a:p>
+        </p:txBody>
+      </p:sp>
+      <p:sp>
+        <p:nvSpPr>
+          <p:cNvPr id="155" name="Google Shape;155;p16"/>
+          <p:cNvSpPr txBox="1"/>
+          <p:nvPr/>
+        </p:nvSpPr>
+        <p:spPr>
+          <a:xfrm>
+            <a:off x="6467475" y="3982194"/>
+            <a:ext cx="57150" cy="219075"/>
+          </a:xfrm>
+          <a:prstGeom prst="rect">
+            <a:avLst/>
+          </a:prstGeom>
+          <a:noFill/>
+          <a:ln>
+            <a:noFill/>
+          </a:ln>
+        </p:spPr>
+        <p:txBody>
+          <a:bodyPr anchorCtr="0" anchor="t" bIns="0" lIns="0" spcFirstLastPara="1" rIns="0" wrap="square" tIns="0">
+            <a:spAutoFit/>
+          </a:bodyPr>
+          <a:lstStyle/>
+          <a:p>
+            <a:pPr indent="0" lvl="0" marL="0" marR="0" rtl="0" algn="l">
+              <a:lnSpc>
+                <a:spcPct val="144916"/>
+              </a:lnSpc>
+              <a:spcBef>
+                <a:spcPts val="0"/>
+              </a:spcBef>
+              <a:spcAft>
+                <a:spcPts val="0"/>
+              </a:spcAft>
+              <a:buNone/>
+            </a:pPr>
+            <a:r>
+              <a:rPr b="0" i="0" lang="en-US" sz="1200" u="none" cap="none" strike="noStrike">
+                <a:solidFill>
+                  <a:srgbClr val="059669"/>
+                </a:solidFill>
+                <a:latin typeface="DM Sans"/>
+                <a:ea typeface="DM Sans"/>
+                <a:cs typeface="DM Sans"/>
+                <a:sym typeface="DM Sans"/>
+              </a:rPr>
+              <a:t>▪</a:t>
+            </a:r>
+            <a:endParaRPr/>
           </a:p>
         </p:txBody>
       </p:sp>
       <p:pic>
         <p:nvPicPr>
-          <p:cNvPr descr="image.png" id="117" name="Google Shape;117;p15"/>
-          <p:cNvPicPr preferRelativeResize="0"/>
-          <p:nvPr/>
-        </p:nvPicPr>
-        <p:blipFill rotWithShape="1">
-          <a:blip r:embed="rId4">
-            <a:alphaModFix/>
-          </a:blip>
-          <a:srcRect b="0" l="0" r="0" t="0"/>
-          <a:stretch/>
-        </p:blipFill>
-        <p:spPr>
-          <a:xfrm>
-            <a:off x="821437" y="1902947"/>
-            <a:ext cx="304800" cy="304800"/>
-          </a:xfrm>
-          <a:prstGeom prst="rect">
-            <a:avLst/>
-          </a:prstGeom>
-          <a:noFill/>
-          <a:ln>
-            <a:noFill/>
-          </a:ln>
-        </p:spPr>
-      </p:pic>
-      <p:pic>
-        <p:nvPicPr>
-          <p:cNvPr id="118" name="Google Shape;118;p15" title="MBF_Logo_2020.png"/>
+          <p:cNvPr id="156" name="Google Shape;156;p16" title="MBF_Logo_2020.png"/>
           <p:cNvPicPr preferRelativeResize="0"/>
           <p:nvPr/>
         </p:nvPicPr>
         <p:blipFill>
-          <a:blip r:embed="rId5">
+          <a:blip r:embed="rId4">
             <a:alphaModFix/>
           </a:blip>
           <a:stretch>
@@ -26776,12 +23481,12 @@
       </p:pic>
       <p:pic>
         <p:nvPicPr>
-          <p:cNvPr id="119" name="Google Shape;119;p15" title="VK colored transparent logo.png"/>
+          <p:cNvPr id="157" name="Google Shape;157;p16" title="VK colored transparent logo.png"/>
           <p:cNvPicPr preferRelativeResize="0"/>
           <p:nvPr/>
         </p:nvPicPr>
         <p:blipFill rotWithShape="1">
-          <a:blip r:embed="rId6">
+          <a:blip r:embed="rId9">
             <a:alphaModFix/>
           </a:blip>
           <a:srcRect b="44466" l="14673" r="15820" t="33074"/>
@@ -27038,7 +23743,7 @@
         <p:spPr>
           <a:xfrm>
             <a:off x="533400" y="1739056"/>
-            <a:ext cx="5429250" cy="2428875"/>
+            <a:ext cx="5429250" cy="3538728"/>
           </a:xfrm>
           <a:prstGeom prst="rect">
             <a:avLst/>
@@ -27096,7 +23801,7 @@
                 <a:cs typeface="Poppins SemiBold"/>
                 <a:sym typeface="Poppins SemiBold"/>
               </a:rPr>
-              <a:t>Problem Context &amp; User Journey</a:t>
+              <a:t>Problem Context</a:t>
             </a:r>
           </a:p>
         </p:txBody>
@@ -27148,7 +23853,7 @@
                 <a:cs typeface="DM Sans"/>
                 <a:sym typeface="DM Sans"/>
               </a:rPr>
-              <a:t>Submission Note: </a:t>
+              <a:t>Core Insight: </a:t>
             </a:r>
             <a:r>
               <a:rPr b="0" i="0" lang="en-US" sz="937" u="none" cap="none" strike="noStrike">
@@ -27160,7 +23865,7 @@
                 <a:cs typeface="DM Sans"/>
                 <a:sym typeface="DM Sans"/>
               </a:rPr>
-              <a:t>Team ID: VK26-IITI-HT-0050 | Track: Health Tech | Stage 2 focus: prove a reproducible LIG process on our own 100 W laser before any sensor claim.</a:t>
+              <a:t>dressing makers already define 'full' as a distance from the pad edge. Dermasense measures exactly that line, from outside the wound.</a:t>
             </a:r>
           </a:p>
         </p:txBody>
@@ -27261,7 +23966,7 @@
                 <a:cs typeface="DM Sans Medium"/>
                 <a:sym typeface="DM Sans Medium"/>
               </a:rPr>
-              <a:t>CHANGES AT OPTIMAL MOISTURE [C]</a:t>
+              <a:t>OF CHANGES MADE AT OPTIMAL MOISTURE¹</a:t>
             </a:r>
           </a:p>
         </p:txBody>
@@ -27362,7 +24067,7 @@
                 <a:cs typeface="DM Sans Medium"/>
                 <a:sym typeface="DM Sans Medium"/>
               </a:rPr>
-              <a:t>MAKER'S CHANGE LINE FROM EDGE [C]</a:t>
+              <a:t>MAKER'S 'CHANGE NOW' LINE FROM PAD EDGE²</a:t>
             </a:r>
           </a:p>
         </p:txBody>
@@ -27414,7 +24119,7 @@
                 <a:cs typeface="Poppins"/>
                 <a:sym typeface="Poppins"/>
               </a:rPr>
-              <a:t>&lt; 35 Ω/sq</a:t>
+              <a:t>1 spot</a:t>
             </a:r>
           </a:p>
         </p:txBody>
@@ -27463,7 +24168,7 @@
                 <a:cs typeface="DM Sans Medium"/>
                 <a:sym typeface="DM Sans Medium"/>
               </a:rPr>
-              <a:t>LIG BENCHMARK, LIN 2014 [C]</a:t>
+              <a:t>WHAT TODAY'S MOISTURE SENSOR READS¹</a:t>
             </a:r>
           </a:p>
         </p:txBody>
@@ -27515,7 +24220,7 @@
                 <a:cs typeface="Poppins"/>
                 <a:sym typeface="Poppins"/>
               </a:rPr>
-              <a:t>'12'</a:t>
+              <a:t>1 laser pass</a:t>
             </a:r>
           </a:p>
         </p:txBody>
@@ -27564,7 +24269,7 @@
                 <a:cs typeface="DM Sans Medium"/>
                 <a:sym typeface="DM Sans Medium"/>
               </a:rPr>
-              <a:t>OUR EARLIER LASER SETTING [A]</a:t>
+              <a:t>TO WRITE A GRAPHENE ELECTRODE³</a:t>
             </a:r>
           </a:p>
         </p:txBody>
@@ -27577,7 +24282,7 @@
         </p:nvSpPr>
         <p:spPr>
           <a:xfrm>
-            <a:off x="533400" y="4215556"/>
+            <a:off x="533400" y="5323885"/>
             <a:ext cx="5429250" cy="158799"/>
           </a:xfrm>
           <a:prstGeom prst="rect">
@@ -27616,7 +24321,7 @@
                 <a:cs typeface="DM Sans"/>
                 <a:sym typeface="DM Sans"/>
               </a:rPr>
-              <a:t>Figure: before-state vs planned after-state (team diagram; after-state not yet built or tested)</a:t>
+              <a:t>Figure: exudate spreads outward; makers say change when it nears 2 cm from the pad edge², but under a bandage nobody can see it</a:t>
             </a:r>
           </a:p>
         </p:txBody>
@@ -27637,7 +24342,7 @@
         <p:spPr>
           <a:xfrm>
             <a:off x="542925" y="1748581"/>
-            <a:ext cx="5410200" cy="2409825"/>
+            <a:ext cx="5410200" cy="3520440"/>
           </a:xfrm>
           <a:prstGeom prst="rect">
             <a:avLst/>
@@ -27721,7 +24426,6 @@
               </a:rPr>
               <a:t>Target Beneficiary &amp; Before-State User Flow</a:t>
             </a:r>
-            <a:endParaRPr/>
           </a:p>
         </p:txBody>
       </p:sp>
@@ -27784,7 +24488,7 @@
                 <a:cs typeface="DM Sans"/>
                 <a:sym typeface="DM Sans"/>
               </a:rPr>
-              <a:t>wound-care nurses and patients with exuding chronic wounds (diabetic foot and pressure ulcers) in clinics and home care.</a:t>
+              <a:t>wound-care nurses (clinics, home care) and patients with exuding chronic wounds: diabetic foot, pressure and venous leg ulcers.</a:t>
             </a:r>
           </a:p>
         </p:txBody>
@@ -27848,7 +24552,7 @@
                 <a:cs typeface="DM Sans"/>
                 <a:sym typeface="DM Sans"/>
               </a:rPr>
-              <a:t>the change decision depends on seeing the exudate front; under bandages it is hidden, so changes follow a schedule or leakage [C; to confirm in nurse interviews].</a:t>
+              <a:t>the 'change now' signal is visual. Under bandages or opaque covers it is hidden, so dressings are changed by the clock or after a leak.</a:t>
             </a:r>
           </a:p>
         </p:txBody>
@@ -27912,7 +24616,7 @@
                 <a:cs typeface="DM Sans"/>
                 <a:sym typeface="DM Sans"/>
               </a:rPr>
-              <a:t>dressing applied → exudate spreads unseen → scheduled change or leakage → wound bed disturbed or skin macerated → repeat.</a:t>
+              <a:t>dressing on → exudate spreads unseen → changed too early (wasted dressing, disturbed wound) or too late (leak, macerated skin) → repeat.</a:t>
             </a:r>
           </a:p>
         </p:txBody>
@@ -27976,7 +24680,7 @@
                 <a:cs typeface="DM Sans"/>
                 <a:sym typeface="DM Sans"/>
               </a:rPr>
-              <a:t>WoundSense single-point impedance sensor; McColl 2007 8-point in-vitro moisture array; moisture-map patents; Stanford closed-loop bandage 2022 [C]. Novelty of our approach is NOT yet established.</a:t>
+              <a:t>WoundSense reads moisture at one spot under the dressing¹; a 2007 lab array mapped moisture⁴; Stanford's smart bandage uses cleanroom electronics⁵; graphene wound sensors are still lab-only⁶. None reads the maker's change line at rupee cost.</a:t>
             </a:r>
           </a:p>
         </p:txBody>
@@ -28229,610 +24933,6 @@
         </p:nvPicPr>
         <p:blipFill rotWithShape="1">
           <a:blip r:embed="rId14">
-            <a:alphaModFix/>
-          </a:blip>
-          <a:srcRect b="44466" l="14673" r="15820" t="33074"/>
-          <a:stretch/>
-        </p:blipFill>
-        <p:spPr>
-          <a:xfrm>
-            <a:off x="0" y="6280800"/>
-            <a:ext cx="1786280" cy="577200"/>
-          </a:xfrm>
-          <a:prstGeom prst="rect">
-            <a:avLst/>
-          </a:prstGeom>
-          <a:noFill/>
-          <a:ln>
-            <a:noFill/>
-          </a:ln>
-        </p:spPr>
-      </p:pic>
-    </p:spTree>
-  </p:cSld>
-  <p:clrMapOvr>
-    <a:masterClrMapping/>
-  </p:clrMapOvr>
-</p:sld>
-</file>
-
-<file path=ppt/slides/slide5.xml><?xml version="1.0" encoding="utf-8"?>
-<p:sld xmlns:a="http://schemas.openxmlformats.org/drawingml/2006/main" xmlns:r="http://schemas.openxmlformats.org/officeDocument/2006/relationships" xmlns:mc="http://schemas.openxmlformats.org/markup-compatibility/2006" xmlns:mv="urn:schemas-microsoft-com:mac:vml" xmlns:p="http://schemas.openxmlformats.org/presentationml/2006/main" xmlns:c="http://schemas.openxmlformats.org/drawingml/2006/chart" xmlns:dgm="http://schemas.openxmlformats.org/drawingml/2006/diagram" xmlns:o="urn:schemas-microsoft-com:office:office" xmlns:v="urn:schemas-microsoft-com:vml" xmlns:pvml="urn:schemas-microsoft-com:office:powerpoint" xmlns:com="http://schemas.openxmlformats.org/drawingml/2006/compatibility" xmlns:p14="http://schemas.microsoft.com/office/powerpoint/2010/main" xmlns:p15="http://schemas.microsoft.com/office/powerpoint/2012/main" xmlns:ahyp="http://schemas.microsoft.com/office/drawing/2018/hyperlinkcolor">
-  <p:cSld>
-    <p:bg>
-      <p:bgPr>
-        <a:solidFill>
-          <a:srgbClr val="FFFFFF"/>
-        </a:solidFill>
-      </p:bgPr>
-    </p:bg>
-    <p:spTree>
-      <p:nvGrpSpPr>
-        <p:cNvPr id="161" name="Shape 161"/>
-        <p:cNvGrpSpPr/>
-        <p:nvPr/>
-      </p:nvGrpSpPr>
-      <p:grpSpPr>
-        <a:xfrm>
-          <a:off x="0" y="0"/>
-          <a:ext cx="0" cy="0"/>
-          <a:chOff x="0" y="0"/>
-          <a:chExt cx="0" cy="0"/>
-        </a:xfrm>
-      </p:grpSpPr>
-      <p:pic>
-        <p:nvPicPr>
-          <p:cNvPr descr="image.png" id="162" name="Google Shape;162;p17"/>
-          <p:cNvPicPr preferRelativeResize="0"/>
-          <p:nvPr/>
-        </p:nvPicPr>
-        <p:blipFill rotWithShape="1">
-          <a:blip r:embed="rId3">
-            <a:alphaModFix/>
-          </a:blip>
-          <a:srcRect b="0" l="0" r="0" t="0"/>
-          <a:stretch/>
-        </p:blipFill>
-        <p:spPr>
-          <a:xfrm>
-            <a:off x="571425" y="1614175"/>
-            <a:ext cx="3530649" cy="2438400"/>
-          </a:xfrm>
-          <a:prstGeom prst="rect">
-            <a:avLst/>
-          </a:prstGeom>
-          <a:noFill/>
-          <a:ln>
-            <a:noFill/>
-          </a:ln>
-        </p:spPr>
-      </p:pic>
-      <p:pic>
-        <p:nvPicPr>
-          <p:cNvPr descr="image.png" id="163" name="Google Shape;163;p17"/>
-          <p:cNvPicPr preferRelativeResize="0"/>
-          <p:nvPr/>
-        </p:nvPicPr>
-        <p:blipFill rotWithShape="1">
-          <a:blip r:embed="rId4">
-            <a:alphaModFix/>
-          </a:blip>
-          <a:srcRect b="0" l="0" r="0" t="0"/>
-          <a:stretch/>
-        </p:blipFill>
-        <p:spPr>
-          <a:xfrm>
-            <a:off x="4330674" y="1614175"/>
-            <a:ext cx="3530649" cy="2438400"/>
-          </a:xfrm>
-          <a:prstGeom prst="rect">
-            <a:avLst/>
-          </a:prstGeom>
-          <a:noFill/>
-          <a:ln>
-            <a:noFill/>
-          </a:ln>
-        </p:spPr>
-      </p:pic>
-      <p:pic>
-        <p:nvPicPr>
-          <p:cNvPr descr="image.png" id="164" name="Google Shape;164;p17"/>
-          <p:cNvPicPr preferRelativeResize="0"/>
-          <p:nvPr/>
-        </p:nvPicPr>
-        <p:blipFill rotWithShape="1">
-          <a:blip r:embed="rId5">
-            <a:alphaModFix/>
-          </a:blip>
-          <a:srcRect b="0" l="0" r="0" t="0"/>
-          <a:stretch/>
-        </p:blipFill>
-        <p:spPr>
-          <a:xfrm>
-            <a:off x="8089924" y="1614175"/>
-            <a:ext cx="3530649" cy="2438400"/>
-          </a:xfrm>
-          <a:prstGeom prst="rect">
-            <a:avLst/>
-          </a:prstGeom>
-          <a:noFill/>
-          <a:ln>
-            <a:noFill/>
-          </a:ln>
-        </p:spPr>
-      </p:pic>
-      <p:sp>
-        <p:nvSpPr>
-          <p:cNvPr id="165" name="Google Shape;165;p17"/>
-          <p:cNvSpPr txBox="1"/>
-          <p:nvPr/>
-        </p:nvSpPr>
-        <p:spPr>
-          <a:xfrm>
-            <a:off x="809550" y="2357125"/>
-            <a:ext cx="3207000" cy="254100"/>
-          </a:xfrm>
-          <a:prstGeom prst="rect">
-            <a:avLst/>
-          </a:prstGeom>
-          <a:noFill/>
-          <a:ln>
-            <a:noFill/>
-          </a:ln>
-        </p:spPr>
-        <p:txBody>
-          <a:bodyPr anchorCtr="0" anchor="t" bIns="0" lIns="0" spcFirstLastPara="1" rIns="0" wrap="square" tIns="0">
-            <a:spAutoFit/>
-          </a:bodyPr>
-          <a:lstStyle/>
-          <a:p>
-            <a:pPr indent="0" lvl="0" marL="0" marR="0" rtl="0" algn="l">
-              <a:spcBef>
-                <a:spcPts val="0"/>
-              </a:spcBef>
-              <a:spcAft>
-                <a:spcPts val="0"/>
-              </a:spcAft>
-              <a:buNone/>
-            </a:pPr>
-            <a:r>
-              <a:rPr b="0" i="0" lang="en-US" sz="1650" u="none" cap="none" strike="noStrike">
-                <a:solidFill>
-                  <a:srgbClr val="0284C7"/>
-                </a:solidFill>
-                <a:latin typeface="Poppins SemiBold"/>
-                <a:ea typeface="Poppins SemiBold"/>
-                <a:cs typeface="Poppins SemiBold"/>
-                <a:sym typeface="Poppins SemiBold"/>
-              </a:rPr>
-              <a:t>System Block Diagram</a:t>
-            </a:r>
-            <a:endParaRPr/>
-          </a:p>
-        </p:txBody>
-      </p:sp>
-      <p:sp>
-        <p:nvSpPr>
-          <p:cNvPr id="166" name="Google Shape;166;p17"/>
-          <p:cNvSpPr txBox="1"/>
-          <p:nvPr/>
-        </p:nvSpPr>
-        <p:spPr>
-          <a:xfrm>
-            <a:off x="809550" y="2785750"/>
-            <a:ext cx="3054300" cy="1015800"/>
-          </a:xfrm>
-          <a:prstGeom prst="rect">
-            <a:avLst/>
-          </a:prstGeom>
-          <a:noFill/>
-          <a:ln>
-            <a:noFill/>
-          </a:ln>
-        </p:spPr>
-        <p:txBody>
-          <a:bodyPr anchorCtr="0" anchor="t" bIns="0" lIns="0" spcFirstLastPara="1" rIns="0" wrap="square" tIns="0">
-            <a:spAutoFit/>
-          </a:bodyPr>
-          <a:lstStyle/>
-          <a:p>
-            <a:pPr indent="0" lvl="0" marL="0" marR="0" rtl="0" algn="l">
-              <a:lnSpc>
-                <a:spcPct val="150000"/>
-              </a:lnSpc>
-              <a:spcBef>
-                <a:spcPts val="0"/>
-              </a:spcBef>
-              <a:spcAft>
-                <a:spcPts val="0"/>
-              </a:spcAft>
-              <a:buNone/>
-            </a:pPr>
-            <a:r>
-              <a:rPr b="0" i="0" lang="en-US" sz="1200" u="none" cap="none" strike="noStrike">
-                <a:solidFill>
-                  <a:srgbClr val="334155"/>
-                </a:solidFill>
-                <a:latin typeface="Inter"/>
-                <a:ea typeface="Inter"/>
-                <a:cs typeface="Inter"/>
-                <a:sym typeface="Inter"/>
-              </a:rPr>
-              <a:t>Now: film → 100 W CO₂ laser → test coupon → multimeter + microscope → CSV → sheet resistance and repeatability. Planned: LIG strip → ESP32-C3 + 16-bit ADC → phone.</a:t>
-            </a:r>
-          </a:p>
-        </p:txBody>
-      </p:sp>
-      <p:sp>
-        <p:nvSpPr>
-          <p:cNvPr id="167" name="Google Shape;167;p17"/>
-          <p:cNvSpPr txBox="1"/>
-          <p:nvPr/>
-        </p:nvSpPr>
-        <p:spPr>
-          <a:xfrm>
-            <a:off x="4568799" y="2357125"/>
-            <a:ext cx="3207000" cy="254100"/>
-          </a:xfrm>
-          <a:prstGeom prst="rect">
-            <a:avLst/>
-          </a:prstGeom>
-          <a:noFill/>
-          <a:ln>
-            <a:noFill/>
-          </a:ln>
-        </p:spPr>
-        <p:txBody>
-          <a:bodyPr anchorCtr="0" anchor="t" bIns="0" lIns="0" spcFirstLastPara="1" rIns="0" wrap="square" tIns="0">
-            <a:spAutoFit/>
-          </a:bodyPr>
-          <a:lstStyle/>
-          <a:p>
-            <a:pPr indent="0" lvl="0" marL="0" marR="0" rtl="0" algn="l">
-              <a:spcBef>
-                <a:spcPts val="0"/>
-              </a:spcBef>
-              <a:spcAft>
-                <a:spcPts val="0"/>
-              </a:spcAft>
-              <a:buNone/>
-            </a:pPr>
-            <a:r>
-              <a:rPr b="0" i="0" lang="en-US" sz="1650" u="none" cap="none" strike="noStrike">
-                <a:solidFill>
-                  <a:srgbClr val="0284C7"/>
-                </a:solidFill>
-                <a:latin typeface="Poppins SemiBold"/>
-                <a:ea typeface="Poppins SemiBold"/>
-                <a:cs typeface="Poppins SemiBold"/>
-                <a:sym typeface="Poppins SemiBold"/>
-              </a:rPr>
-              <a:t>Target Specifications</a:t>
-            </a:r>
-            <a:endParaRPr/>
-          </a:p>
-        </p:txBody>
-      </p:sp>
-      <p:sp>
-        <p:nvSpPr>
-          <p:cNvPr id="168" name="Google Shape;168;p17"/>
-          <p:cNvSpPr txBox="1"/>
-          <p:nvPr/>
-        </p:nvSpPr>
-        <p:spPr>
-          <a:xfrm>
-            <a:off x="4568799" y="2785750"/>
-            <a:ext cx="3054300" cy="1015800"/>
-          </a:xfrm>
-          <a:prstGeom prst="rect">
-            <a:avLst/>
-          </a:prstGeom>
-          <a:noFill/>
-          <a:ln>
-            <a:noFill/>
-          </a:ln>
-        </p:spPr>
-        <p:txBody>
-          <a:bodyPr anchorCtr="0" anchor="t" bIns="0" lIns="0" spcFirstLastPara="1" rIns="0" wrap="square" tIns="0">
-            <a:spAutoFit/>
-          </a:bodyPr>
-          <a:lstStyle/>
-          <a:p>
-            <a:pPr indent="0" lvl="0" marL="0" marR="0" rtl="0" algn="l">
-              <a:lnSpc>
-                <a:spcPct val="150000"/>
-              </a:lnSpc>
-              <a:spcBef>
-                <a:spcPts val="0"/>
-              </a:spcBef>
-              <a:spcAft>
-                <a:spcPts val="0"/>
-              </a:spcAft>
-              <a:buNone/>
-            </a:pPr>
-            <a:r>
-              <a:rPr b="0" i="0" lang="en-US" sz="1200" u="none" cap="none" strike="noStrike">
-                <a:solidFill>
-                  <a:srgbClr val="334155"/>
-                </a:solidFill>
-                <a:latin typeface="Inter"/>
-                <a:ea typeface="Inter"/>
-                <a:cs typeface="Inter"/>
-                <a:sym typeface="Inter"/>
-              </a:rPr>
-              <a:t>Targets [B]: sheet resistance ≤ 100 Ω/sq; run-to-run CV ≤ 20 %; line growth measured; strip dry/wet contrast ≥ 100×; strip cost ≤ ₹100.</a:t>
-            </a:r>
-          </a:p>
-        </p:txBody>
-      </p:sp>
-      <p:sp>
-        <p:nvSpPr>
-          <p:cNvPr id="169" name="Google Shape;169;p17"/>
-          <p:cNvSpPr txBox="1"/>
-          <p:nvPr/>
-        </p:nvSpPr>
-        <p:spPr>
-          <a:xfrm>
-            <a:off x="8328049" y="2357125"/>
-            <a:ext cx="3207000" cy="254100"/>
-          </a:xfrm>
-          <a:prstGeom prst="rect">
-            <a:avLst/>
-          </a:prstGeom>
-          <a:noFill/>
-          <a:ln>
-            <a:noFill/>
-          </a:ln>
-        </p:spPr>
-        <p:txBody>
-          <a:bodyPr anchorCtr="0" anchor="t" bIns="0" lIns="0" spcFirstLastPara="1" rIns="0" wrap="square" tIns="0">
-            <a:spAutoFit/>
-          </a:bodyPr>
-          <a:lstStyle/>
-          <a:p>
-            <a:pPr indent="0" lvl="0" marL="0" marR="0" rtl="0" algn="l">
-              <a:spcBef>
-                <a:spcPts val="0"/>
-              </a:spcBef>
-              <a:spcAft>
-                <a:spcPts val="0"/>
-              </a:spcAft>
-              <a:buNone/>
-            </a:pPr>
-            <a:r>
-              <a:rPr b="0" i="0" lang="en-US" sz="1650" u="none" cap="none" strike="noStrike">
-                <a:solidFill>
-                  <a:srgbClr val="0284C7"/>
-                </a:solidFill>
-                <a:latin typeface="Poppins SemiBold"/>
-                <a:ea typeface="Poppins SemiBold"/>
-                <a:cs typeface="Poppins SemiBold"/>
-                <a:sym typeface="Poppins SemiBold"/>
-              </a:rPr>
-              <a:t>Hardware Selection</a:t>
-            </a:r>
-            <a:endParaRPr/>
-          </a:p>
-        </p:txBody>
-      </p:sp>
-      <p:sp>
-        <p:nvSpPr>
-          <p:cNvPr id="170" name="Google Shape;170;p17"/>
-          <p:cNvSpPr txBox="1"/>
-          <p:nvPr/>
-        </p:nvSpPr>
-        <p:spPr>
-          <a:xfrm>
-            <a:off x="8328049" y="2785750"/>
-            <a:ext cx="3054300" cy="738900"/>
-          </a:xfrm>
-          <a:prstGeom prst="rect">
-            <a:avLst/>
-          </a:prstGeom>
-          <a:noFill/>
-          <a:ln>
-            <a:noFill/>
-          </a:ln>
-        </p:spPr>
-        <p:txBody>
-          <a:bodyPr anchorCtr="0" anchor="t" bIns="0" lIns="0" spcFirstLastPara="1" rIns="0" wrap="square" tIns="0">
-            <a:spAutoFit/>
-          </a:bodyPr>
-          <a:lstStyle/>
-          <a:p>
-            <a:pPr indent="0" lvl="0" marL="0" marR="0" rtl="0" algn="l">
-              <a:lnSpc>
-                <a:spcPct val="150000"/>
-              </a:lnSpc>
-              <a:spcBef>
-                <a:spcPts val="0"/>
-              </a:spcBef>
-              <a:spcAft>
-                <a:spcPts val="0"/>
-              </a:spcAft>
-              <a:buNone/>
-            </a:pPr>
-            <a:r>
-              <a:rPr b="0" i="0" lang="en-US" sz="1200" u="none" cap="none" strike="noStrike">
-                <a:solidFill>
-                  <a:srgbClr val="334155"/>
-                </a:solidFill>
-                <a:latin typeface="Inter"/>
-                <a:ea typeface="Inter"/>
-                <a:cs typeface="Inter"/>
-                <a:sym typeface="Inter"/>
-              </a:rPr>
-              <a:t>100 W CO₂ laser with LaserCAD V8.28 (1200×900 mm, 20 kHz PWM) [A]; multimeter; microscope. Planned: ESP32-C3, ADS1115, TMP117.</a:t>
-            </a:r>
-          </a:p>
-        </p:txBody>
-      </p:sp>
-      <p:pic>
-        <p:nvPicPr>
-          <p:cNvPr descr="image.png" id="171" name="Google Shape;171;p17"/>
-          <p:cNvPicPr preferRelativeResize="0"/>
-          <p:nvPr/>
-        </p:nvPicPr>
-        <p:blipFill rotWithShape="1">
-          <a:blip r:embed="rId6">
-            <a:alphaModFix/>
-          </a:blip>
-          <a:srcRect b="0" l="0" r="0" t="0"/>
-          <a:stretch/>
-        </p:blipFill>
-        <p:spPr>
-          <a:xfrm>
-            <a:off x="809550" y="1880875"/>
-            <a:ext cx="342900" cy="304800"/>
-          </a:xfrm>
-          <a:prstGeom prst="rect">
-            <a:avLst/>
-          </a:prstGeom>
-          <a:noFill/>
-          <a:ln>
-            <a:noFill/>
-          </a:ln>
-        </p:spPr>
-      </p:pic>
-      <p:pic>
-        <p:nvPicPr>
-          <p:cNvPr descr="image.png" id="172" name="Google Shape;172;p17"/>
-          <p:cNvPicPr preferRelativeResize="0"/>
-          <p:nvPr/>
-        </p:nvPicPr>
-        <p:blipFill rotWithShape="1">
-          <a:blip r:embed="rId7">
-            <a:alphaModFix/>
-          </a:blip>
-          <a:srcRect b="0" l="0" r="0" t="0"/>
-          <a:stretch/>
-        </p:blipFill>
-        <p:spPr>
-          <a:xfrm>
-            <a:off x="4568799" y="1880875"/>
-            <a:ext cx="304800" cy="304800"/>
-          </a:xfrm>
-          <a:prstGeom prst="rect">
-            <a:avLst/>
-          </a:prstGeom>
-          <a:noFill/>
-          <a:ln>
-            <a:noFill/>
-          </a:ln>
-        </p:spPr>
-      </p:pic>
-      <p:pic>
-        <p:nvPicPr>
-          <p:cNvPr descr="image.png" id="173" name="Google Shape;173;p17"/>
-          <p:cNvPicPr preferRelativeResize="0"/>
-          <p:nvPr/>
-        </p:nvPicPr>
-        <p:blipFill rotWithShape="1">
-          <a:blip r:embed="rId8">
-            <a:alphaModFix/>
-          </a:blip>
-          <a:srcRect b="0" l="0" r="0" t="0"/>
-          <a:stretch/>
-        </p:blipFill>
-        <p:spPr>
-          <a:xfrm>
-            <a:off x="8328049" y="1880875"/>
-            <a:ext cx="304800" cy="304800"/>
-          </a:xfrm>
-          <a:prstGeom prst="rect">
-            <a:avLst/>
-          </a:prstGeom>
-          <a:noFill/>
-          <a:ln>
-            <a:noFill/>
-          </a:ln>
-        </p:spPr>
-      </p:pic>
-      <p:sp>
-        <p:nvSpPr>
-          <p:cNvPr id="174" name="Google Shape;174;p17"/>
-          <p:cNvSpPr txBox="1"/>
-          <p:nvPr/>
-        </p:nvSpPr>
-        <p:spPr>
-          <a:xfrm>
-            <a:off x="571500" y="476250"/>
-            <a:ext cx="11601600" cy="392400"/>
-          </a:xfrm>
-          <a:prstGeom prst="rect">
-            <a:avLst/>
-          </a:prstGeom>
-          <a:noFill/>
-          <a:ln>
-            <a:noFill/>
-          </a:ln>
-        </p:spPr>
-        <p:txBody>
-          <a:bodyPr anchorCtr="0" anchor="t" bIns="0" lIns="0" spcFirstLastPara="1" rIns="0" wrap="square" tIns="0">
-            <a:spAutoFit/>
-          </a:bodyPr>
-          <a:lstStyle/>
-          <a:p>
-            <a:pPr indent="0" lvl="0" marL="0" marR="0" rtl="0" algn="l">
-              <a:spcBef>
-                <a:spcPts val="0"/>
-              </a:spcBef>
-              <a:spcAft>
-                <a:spcPts val="0"/>
-              </a:spcAft>
-              <a:buNone/>
-            </a:pPr>
-            <a:r>
-              <a:rPr b="1" i="0" lang="en-US" sz="2550" u="none" cap="none" strike="noStrike">
-                <a:solidFill>
-                  <a:srgbClr val="1E3A8A"/>
-                </a:solidFill>
-                <a:latin typeface="Poppins"/>
-                <a:ea typeface="Poppins"/>
-                <a:cs typeface="Poppins"/>
-                <a:sym typeface="Poppins"/>
-              </a:rPr>
-              <a:t>System Architecture &amp; Specs</a:t>
-            </a:r>
-          </a:p>
-        </p:txBody>
-      </p:sp>
-      <p:pic>
-        <p:nvPicPr>
-          <p:cNvPr id="175" name="Google Shape;175;p17" title="MBF_Logo_2020.png"/>
-          <p:cNvPicPr preferRelativeResize="0"/>
-          <p:nvPr/>
-        </p:nvPicPr>
-        <p:blipFill>
-          <a:blip r:embed="rId9">
-            <a:alphaModFix/>
-          </a:blip>
-          <a:stretch>
-            <a:fillRect/>
-          </a:stretch>
-        </p:blipFill>
-        <p:spPr>
-          <a:xfrm>
-            <a:off x="11095194" y="6280800"/>
-            <a:ext cx="1096806" cy="577200"/>
-          </a:xfrm>
-          <a:prstGeom prst="rect">
-            <a:avLst/>
-          </a:prstGeom>
-          <a:noFill/>
-          <a:ln>
-            <a:noFill/>
-          </a:ln>
-        </p:spPr>
-      </p:pic>
-      <p:pic>
-        <p:nvPicPr>
-          <p:cNvPr id="176" name="Google Shape;176;p17" title="VK colored transparent logo.png"/>
-          <p:cNvPicPr preferRelativeResize="0"/>
-          <p:nvPr/>
-        </p:nvPicPr>
-        <p:blipFill rotWithShape="1">
-          <a:blip r:embed="rId10">
             <a:alphaModFix/>
           </a:blip>
           <a:srcRect b="44466" l="14673" r="15820" t="33074"/>
@@ -28981,7 +25081,7 @@
         <p:spPr>
           <a:xfrm>
             <a:off x="533400" y="956220"/>
-            <a:ext cx="5429250" cy="2428875"/>
+            <a:ext cx="5429250" cy="3813048"/>
           </a:xfrm>
           <a:prstGeom prst="rect">
             <a:avLst/>
@@ -29103,7 +25203,7 @@
                 <a:cs typeface="DM Sans"/>
                 <a:sym typeface="DM Sans"/>
               </a:rPr>
-              <a:t>material first — no sensor or electronics claim until the LIG process is shown to be reproducible on our own machine (Experiment E1).</a:t>
+              <a:t>only film and graphene are thrown away; every electronic part lives in the reusable reader.</a:t>
             </a:r>
           </a:p>
         </p:txBody>
@@ -29116,7 +25216,7 @@
         </p:nvSpPr>
         <p:spPr>
           <a:xfrm>
-            <a:off x="533400" y="3432720"/>
+            <a:off x="533400" y="4815369"/>
             <a:ext cx="5429250" cy="158799"/>
           </a:xfrm>
           <a:prstGeom prst="rect">
@@ -29155,7 +25255,7 @@
                 <a:cs typeface="DM Sans"/>
                 <a:sym typeface="DM Sans"/>
               </a:rPr>
-              <a:t>Figure: Stage 2 measurement chain (now) and Stage 3 readout chain (planned) — team diagram</a:t>
+              <a:t>Figure: disposable LIG strip on the pad + reusable clip-on reader + phone (concept illustration; not yet built)</a:t>
             </a:r>
           </a:p>
         </p:txBody>
@@ -29446,7 +25546,7 @@
                           <a:cs typeface="DM Sans"/>
                           <a:sym typeface="DM Sans"/>
                         </a:rPr>
-                        <a:t>Laser source</a:t>
+                        <a:t>Sensing strip</a:t>
                       </a:r>
                     </a:p>
                   </a:txBody>
@@ -29521,7 +25621,7 @@
                           <a:cs typeface="DM Sans"/>
                           <a:sym typeface="DM Sans"/>
                         </a:rPr>
-                        <a:t>Setting + tube mA logged per cell</a:t>
+                        <a:t>4 wet/dry zones</a:t>
                       </a:r>
                     </a:p>
                   </a:txBody>
@@ -29596,7 +25696,7 @@
                           <a:cs typeface="DM Sans"/>
                           <a:sym typeface="DM Sans"/>
                         </a:rPr>
-                        <a:t>100 W CO₂ tube, LaserCAD V8.28 [A]</a:t>
+                        <a:t>Laser-induced graphene on Kapton</a:t>
                       </a:r>
                     </a:p>
                   </a:txBody>
@@ -29673,7 +25773,7 @@
                           <a:cs typeface="DM Sans"/>
                           <a:sym typeface="DM Sans"/>
                         </a:rPr>
-                        <a:t>Sheet resistance</a:t>
+                        <a:t>Zone signal</a:t>
                       </a:r>
                     </a:p>
                   </a:txBody>
@@ -29748,7 +25848,7 @@
                           <a:cs typeface="DM Sans"/>
                           <a:sym typeface="DM Sans"/>
                         </a:rPr>
-                        <a:t>≤ 100 Ω/sq (target)</a:t>
+                        <a:t>Dry/wet ≥ 100× (target)</a:t>
                       </a:r>
                     </a:p>
                   </a:txBody>
@@ -29823,7 +25923,7 @@
                           <a:cs typeface="DM Sans"/>
                           <a:sym typeface="DM Sans"/>
                         </a:rPr>
-                        <a:t>3-length strips + multimeter [B]</a:t>
+                        <a:t>AC drive between LIG electrodes</a:t>
                       </a:r>
                     </a:p>
                   </a:txBody>
@@ -29900,7 +26000,7 @@
                           <a:cs typeface="DM Sans"/>
                           <a:sym typeface="DM Sans"/>
                         </a:rPr>
-                        <a:t>Repeatability</a:t>
+                        <a:t>Reader</a:t>
                       </a:r>
                     </a:p>
                   </a:txBody>
@@ -29975,7 +26075,7 @@
                           <a:cs typeface="DM Sans"/>
                           <a:sym typeface="DM Sans"/>
                         </a:rPr>
-                        <a:t>CV ≤ 20 % over 2 days</a:t>
+                        <a:t>All zones every 5 s</a:t>
                       </a:r>
                     </a:p>
                   </a:txBody>
@@ -30050,461 +26150,7 @@
                           <a:cs typeface="DM Sans"/>
                           <a:sym typeface="DM Sans"/>
                         </a:rPr>
-                        <a:t>Reference cell ×2 per coupon [B]</a:t>
-                      </a:r>
-                    </a:p>
-                  </a:txBody>
-                  <a:tcPr marT="25400" marB="25400" marR="63500" marL="63500" anchor="ctr">
-                    <a:lnL cap="flat" cmpd="sng" w="9525">
-                      <a:solidFill>
-                        <a:srgbClr val="000000">
-                          <a:alpha val="0"/>
-                        </a:srgbClr>
-                      </a:solidFill>
-                      <a:prstDash val="solid"/>
-                      <a:round/>
-                      <a:headEnd len="sm" w="sm" type="none"/>
-                      <a:tailEnd len="sm" w="sm" type="none"/>
-                    </a:lnL>
-                    <a:lnR cap="flat" cmpd="sng" w="9525">
-                      <a:solidFill>
-                        <a:srgbClr val="000000">
-                          <a:alpha val="0"/>
-                        </a:srgbClr>
-                      </a:solidFill>
-                      <a:prstDash val="solid"/>
-                      <a:round/>
-                      <a:headEnd len="sm" w="sm" type="none"/>
-                      <a:tailEnd len="sm" w="sm" type="none"/>
-                    </a:lnR>
-                    <a:lnT cap="flat" cmpd="sng" w="9525">
-                      <a:solidFill>
-                        <a:srgbClr val="000000">
-                          <a:alpha val="0"/>
-                        </a:srgbClr>
-                      </a:solidFill>
-                      <a:prstDash val="solid"/>
-                      <a:round/>
-                      <a:headEnd len="sm" w="sm" type="none"/>
-                      <a:tailEnd len="sm" w="sm" type="none"/>
-                    </a:lnT>
-                    <a:lnB cap="flat" cmpd="sng" w="9525">
-                      <a:solidFill>
-                        <a:srgbClr val="000000">
-                          <a:alpha val="0"/>
-                        </a:srgbClr>
-                      </a:solidFill>
-                      <a:prstDash val="solid"/>
-                      <a:round/>
-                      <a:headEnd len="sm" w="sm" type="none"/>
-                      <a:tailEnd len="sm" w="sm" type="none"/>
-                    </a:lnB>
-                  </a:tcPr>
-                </a:tc>
-              </a:tr>
-              <a:tr h="431350">
-                <a:tc>
-                  <a:txBody>
-                    <a:bodyPr/>
-                    <a:lstStyle/>
-                    <a:p>
-                      <a:pPr indent="0" lvl="0" marL="0" marR="0" rtl="0" algn="l">
-                        <a:spcBef>
-                          <a:spcPts val="0"/>
-                        </a:spcBef>
-                        <a:spcAft>
-                          <a:spcPts val="0"/>
-                        </a:spcAft>
-                        <a:buNone/>
-                      </a:pPr>
-                      <a:r>
-                        <a:rPr b="0" i="0" lang="en-US" sz="937" u="none" cap="none" strike="noStrike">
-                          <a:solidFill>
-                            <a:srgbClr val="334155"/>
-                          </a:solidFill>
-                          <a:latin typeface="DM Sans"/>
-                          <a:ea typeface="DM Sans"/>
-                          <a:cs typeface="DM Sans"/>
-                          <a:sym typeface="DM Sans"/>
-                        </a:rPr>
-                        <a:t>Line width</a:t>
-                      </a:r>
-                    </a:p>
-                  </a:txBody>
-                  <a:tcPr marT="25400" marB="25400" marR="63500" marL="63500" anchor="ctr">
-                    <a:lnL cap="flat" cmpd="sng" w="9525">
-                      <a:solidFill>
-                        <a:srgbClr val="000000">
-                          <a:alpha val="0"/>
-                        </a:srgbClr>
-                      </a:solidFill>
-                      <a:prstDash val="solid"/>
-                      <a:round/>
-                      <a:headEnd len="sm" w="sm" type="none"/>
-                      <a:tailEnd len="sm" w="sm" type="none"/>
-                    </a:lnL>
-                    <a:lnR cap="flat" cmpd="sng" w="9525">
-                      <a:solidFill>
-                        <a:srgbClr val="000000">
-                          <a:alpha val="0"/>
-                        </a:srgbClr>
-                      </a:solidFill>
-                      <a:prstDash val="solid"/>
-                      <a:round/>
-                      <a:headEnd len="sm" w="sm" type="none"/>
-                      <a:tailEnd len="sm" w="sm" type="none"/>
-                    </a:lnR>
-                    <a:lnT cap="flat" cmpd="sng" w="9525">
-                      <a:solidFill>
-                        <a:srgbClr val="000000">
-                          <a:alpha val="0"/>
-                        </a:srgbClr>
-                      </a:solidFill>
-                      <a:prstDash val="solid"/>
-                      <a:round/>
-                      <a:headEnd len="sm" w="sm" type="none"/>
-                      <a:tailEnd len="sm" w="sm" type="none"/>
-                    </a:lnT>
-                    <a:lnB cap="flat" cmpd="sng" w="9525">
-                      <a:solidFill>
-                        <a:srgbClr val="000000">
-                          <a:alpha val="0"/>
-                        </a:srgbClr>
-                      </a:solidFill>
-                      <a:prstDash val="solid"/>
-                      <a:round/>
-                      <a:headEnd len="sm" w="sm" type="none"/>
-                      <a:tailEnd len="sm" w="sm" type="none"/>
-                    </a:lnB>
-                  </a:tcPr>
-                </a:tc>
-                <a:tc>
-                  <a:txBody>
-                    <a:bodyPr/>
-                    <a:lstStyle/>
-                    <a:p>
-                      <a:pPr indent="0" lvl="0" marL="0" marR="0" rtl="0" algn="l">
-                        <a:spcBef>
-                          <a:spcPts val="0"/>
-                        </a:spcBef>
-                        <a:spcAft>
-                          <a:spcPts val="0"/>
-                        </a:spcAft>
-                        <a:buNone/>
-                      </a:pPr>
-                      <a:r>
-                        <a:rPr b="0" i="0" lang="en-US" sz="937" u="none" cap="none" strike="noStrike">
-                          <a:solidFill>
-                            <a:srgbClr val="334155"/>
-                          </a:solidFill>
-                          <a:latin typeface="DM Sans"/>
-                          <a:ea typeface="DM Sans"/>
-                          <a:cs typeface="DM Sans"/>
-                          <a:sym typeface="DM Sans"/>
-                        </a:rPr>
-                        <a:t>Measured vs drawn 2.00 mm</a:t>
-                      </a:r>
-                    </a:p>
-                  </a:txBody>
-                  <a:tcPr marT="25400" marB="25400" marR="63500" marL="63500" anchor="ctr">
-                    <a:lnL cap="flat" cmpd="sng" w="9525">
-                      <a:solidFill>
-                        <a:srgbClr val="000000">
-                          <a:alpha val="0"/>
-                        </a:srgbClr>
-                      </a:solidFill>
-                      <a:prstDash val="solid"/>
-                      <a:round/>
-                      <a:headEnd len="sm" w="sm" type="none"/>
-                      <a:tailEnd len="sm" w="sm" type="none"/>
-                    </a:lnL>
-                    <a:lnR cap="flat" cmpd="sng" w="9525">
-                      <a:solidFill>
-                        <a:srgbClr val="000000">
-                          <a:alpha val="0"/>
-                        </a:srgbClr>
-                      </a:solidFill>
-                      <a:prstDash val="solid"/>
-                      <a:round/>
-                      <a:headEnd len="sm" w="sm" type="none"/>
-                      <a:tailEnd len="sm" w="sm" type="none"/>
-                    </a:lnR>
-                    <a:lnT cap="flat" cmpd="sng" w="9525">
-                      <a:solidFill>
-                        <a:srgbClr val="000000">
-                          <a:alpha val="0"/>
-                        </a:srgbClr>
-                      </a:solidFill>
-                      <a:prstDash val="solid"/>
-                      <a:round/>
-                      <a:headEnd len="sm" w="sm" type="none"/>
-                      <a:tailEnd len="sm" w="sm" type="none"/>
-                    </a:lnT>
-                    <a:lnB cap="flat" cmpd="sng" w="9525">
-                      <a:solidFill>
-                        <a:srgbClr val="000000">
-                          <a:alpha val="0"/>
-                        </a:srgbClr>
-                      </a:solidFill>
-                      <a:prstDash val="solid"/>
-                      <a:round/>
-                      <a:headEnd len="sm" w="sm" type="none"/>
-                      <a:tailEnd len="sm" w="sm" type="none"/>
-                    </a:lnB>
-                  </a:tcPr>
-                </a:tc>
-                <a:tc>
-                  <a:txBody>
-                    <a:bodyPr/>
-                    <a:lstStyle/>
-                    <a:p>
-                      <a:pPr indent="0" lvl="0" marL="0" marR="0" rtl="0" algn="l">
-                        <a:spcBef>
-                          <a:spcPts val="0"/>
-                        </a:spcBef>
-                        <a:spcAft>
-                          <a:spcPts val="0"/>
-                        </a:spcAft>
-                        <a:buNone/>
-                      </a:pPr>
-                      <a:r>
-                        <a:rPr b="0" i="0" lang="en-US" sz="937" u="none" cap="none" strike="noStrike">
-                          <a:solidFill>
-                            <a:srgbClr val="334155"/>
-                          </a:solidFill>
-                          <a:latin typeface="DM Sans"/>
-                          <a:ea typeface="DM Sans"/>
-                          <a:cs typeface="DM Sans"/>
-                          <a:sym typeface="DM Sans"/>
-                        </a:rPr>
-                        <a:t>Optical microscope + scale [B]</a:t>
-                      </a:r>
-                    </a:p>
-                  </a:txBody>
-                  <a:tcPr marT="25400" marB="25400" marR="63500" marL="63500" anchor="ctr">
-                    <a:lnL cap="flat" cmpd="sng" w="9525">
-                      <a:solidFill>
-                        <a:srgbClr val="000000">
-                          <a:alpha val="0"/>
-                        </a:srgbClr>
-                      </a:solidFill>
-                      <a:prstDash val="solid"/>
-                      <a:round/>
-                      <a:headEnd len="sm" w="sm" type="none"/>
-                      <a:tailEnd len="sm" w="sm" type="none"/>
-                    </a:lnL>
-                    <a:lnR cap="flat" cmpd="sng" w="9525">
-                      <a:solidFill>
-                        <a:srgbClr val="000000">
-                          <a:alpha val="0"/>
-                        </a:srgbClr>
-                      </a:solidFill>
-                      <a:prstDash val="solid"/>
-                      <a:round/>
-                      <a:headEnd len="sm" w="sm" type="none"/>
-                      <a:tailEnd len="sm" w="sm" type="none"/>
-                    </a:lnR>
-                    <a:lnT cap="flat" cmpd="sng" w="9525">
-                      <a:solidFill>
-                        <a:srgbClr val="000000">
-                          <a:alpha val="0"/>
-                        </a:srgbClr>
-                      </a:solidFill>
-                      <a:prstDash val="solid"/>
-                      <a:round/>
-                      <a:headEnd len="sm" w="sm" type="none"/>
-                      <a:tailEnd len="sm" w="sm" type="none"/>
-                    </a:lnT>
-                    <a:lnB cap="flat" cmpd="sng" w="9525">
-                      <a:solidFill>
-                        <a:srgbClr val="000000">
-                          <a:alpha val="0"/>
-                        </a:srgbClr>
-                      </a:solidFill>
-                      <a:prstDash val="solid"/>
-                      <a:round/>
-                      <a:headEnd len="sm" w="sm" type="none"/>
-                      <a:tailEnd len="sm" w="sm" type="none"/>
-                    </a:lnB>
-                  </a:tcPr>
-                </a:tc>
-              </a:tr>
-              <a:tr h="431350">
-                <a:tc>
-                  <a:txBody>
-                    <a:bodyPr/>
-                    <a:lstStyle/>
-                    <a:p>
-                      <a:pPr indent="0" lvl="0" marL="0" marR="0" rtl="0" algn="l">
-                        <a:spcBef>
-                          <a:spcPts val="0"/>
-                        </a:spcBef>
-                        <a:spcAft>
-                          <a:spcPts val="0"/>
-                        </a:spcAft>
-                        <a:buNone/>
-                      </a:pPr>
-                      <a:r>
-                        <a:rPr b="0" i="0" lang="en-US" sz="937" u="none" cap="none" strike="noStrike">
-                          <a:solidFill>
-                            <a:srgbClr val="334155"/>
-                          </a:solidFill>
-                          <a:latin typeface="DM Sans"/>
-                          <a:ea typeface="DM Sans"/>
-                          <a:cs typeface="DM Sans"/>
-                          <a:sym typeface="DM Sans"/>
-                        </a:rPr>
-                        <a:t>Zone readout</a:t>
-                      </a:r>
-                    </a:p>
-                  </a:txBody>
-                  <a:tcPr marT="25400" marB="25400" marR="63500" marL="63500" anchor="ctr">
-                    <a:lnL cap="flat" cmpd="sng" w="9525">
-                      <a:solidFill>
-                        <a:srgbClr val="000000">
-                          <a:alpha val="0"/>
-                        </a:srgbClr>
-                      </a:solidFill>
-                      <a:prstDash val="solid"/>
-                      <a:round/>
-                      <a:headEnd len="sm" w="sm" type="none"/>
-                      <a:tailEnd len="sm" w="sm" type="none"/>
-                    </a:lnL>
-                    <a:lnR cap="flat" cmpd="sng" w="9525">
-                      <a:solidFill>
-                        <a:srgbClr val="000000">
-                          <a:alpha val="0"/>
-                        </a:srgbClr>
-                      </a:solidFill>
-                      <a:prstDash val="solid"/>
-                      <a:round/>
-                      <a:headEnd len="sm" w="sm" type="none"/>
-                      <a:tailEnd len="sm" w="sm" type="none"/>
-                    </a:lnR>
-                    <a:lnT cap="flat" cmpd="sng" w="9525">
-                      <a:solidFill>
-                        <a:srgbClr val="000000">
-                          <a:alpha val="0"/>
-                        </a:srgbClr>
-                      </a:solidFill>
-                      <a:prstDash val="solid"/>
-                      <a:round/>
-                      <a:headEnd len="sm" w="sm" type="none"/>
-                      <a:tailEnd len="sm" w="sm" type="none"/>
-                    </a:lnT>
-                    <a:lnB cap="flat" cmpd="sng" w="9525">
-                      <a:solidFill>
-                        <a:srgbClr val="000000">
-                          <a:alpha val="0"/>
-                        </a:srgbClr>
-                      </a:solidFill>
-                      <a:prstDash val="solid"/>
-                      <a:round/>
-                      <a:headEnd len="sm" w="sm" type="none"/>
-                      <a:tailEnd len="sm" w="sm" type="none"/>
-                    </a:lnB>
-                  </a:tcPr>
-                </a:tc>
-                <a:tc>
-                  <a:txBody>
-                    <a:bodyPr/>
-                    <a:lstStyle/>
-                    <a:p>
-                      <a:pPr indent="0" lvl="0" marL="0" marR="0" rtl="0" algn="l">
-                        <a:spcBef>
-                          <a:spcPts val="0"/>
-                        </a:spcBef>
-                        <a:spcAft>
-                          <a:spcPts val="0"/>
-                        </a:spcAft>
-                        <a:buNone/>
-                      </a:pPr>
-                      <a:r>
-                        <a:rPr b="0" i="0" lang="en-US" sz="937" u="none" cap="none" strike="noStrike">
-                          <a:solidFill>
-                            <a:srgbClr val="334155"/>
-                          </a:solidFill>
-                          <a:latin typeface="DM Sans"/>
-                          <a:ea typeface="DM Sans"/>
-                          <a:cs typeface="DM Sans"/>
-                          <a:sym typeface="DM Sans"/>
-                        </a:rPr>
-                        <a:t>Dry/wet ≥ 100× (planned)</a:t>
-                      </a:r>
-                    </a:p>
-                  </a:txBody>
-                  <a:tcPr marT="25400" marB="25400" marR="63500" marL="63500" anchor="ctr">
-                    <a:lnL cap="flat" cmpd="sng" w="9525">
-                      <a:solidFill>
-                        <a:srgbClr val="000000">
-                          <a:alpha val="0"/>
-                        </a:srgbClr>
-                      </a:solidFill>
-                      <a:prstDash val="solid"/>
-                      <a:round/>
-                      <a:headEnd len="sm" w="sm" type="none"/>
-                      <a:tailEnd len="sm" w="sm" type="none"/>
-                    </a:lnL>
-                    <a:lnR cap="flat" cmpd="sng" w="9525">
-                      <a:solidFill>
-                        <a:srgbClr val="000000">
-                          <a:alpha val="0"/>
-                        </a:srgbClr>
-                      </a:solidFill>
-                      <a:prstDash val="solid"/>
-                      <a:round/>
-                      <a:headEnd len="sm" w="sm" type="none"/>
-                      <a:tailEnd len="sm" w="sm" type="none"/>
-                    </a:lnR>
-                    <a:lnT cap="flat" cmpd="sng" w="9525">
-                      <a:solidFill>
-                        <a:srgbClr val="000000">
-                          <a:alpha val="0"/>
-                        </a:srgbClr>
-                      </a:solidFill>
-                      <a:prstDash val="solid"/>
-                      <a:round/>
-                      <a:headEnd len="sm" w="sm" type="none"/>
-                      <a:tailEnd len="sm" w="sm" type="none"/>
-                    </a:lnT>
-                    <a:lnB cap="flat" cmpd="sng" w="9525">
-                      <a:solidFill>
-                        <a:srgbClr val="000000">
-                          <a:alpha val="0"/>
-                        </a:srgbClr>
-                      </a:solidFill>
-                      <a:prstDash val="solid"/>
-                      <a:round/>
-                      <a:headEnd len="sm" w="sm" type="none"/>
-                      <a:tailEnd len="sm" w="sm" type="none"/>
-                    </a:lnB>
-                  </a:tcPr>
-                </a:tc>
-                <a:tc>
-                  <a:txBody>
-                    <a:bodyPr/>
-                    <a:lstStyle/>
-                    <a:p>
-                      <a:pPr indent="0" lvl="0" marL="0" marR="0" rtl="0" algn="l">
-                        <a:spcBef>
-                          <a:spcPts val="0"/>
-                        </a:spcBef>
-                        <a:spcAft>
-                          <a:spcPts val="0"/>
-                        </a:spcAft>
-                        <a:buNone/>
-                      </a:pPr>
-                      <a:r>
-                        <a:rPr b="0" i="0" lang="en-US" sz="937" u="none" cap="none" strike="noStrike">
-                          <a:solidFill>
-                            <a:srgbClr val="334155"/>
-                          </a:solidFill>
-                          <a:latin typeface="DM Sans"/>
-                          <a:ea typeface="DM Sans"/>
-                          <a:cs typeface="DM Sans"/>
-                          <a:sym typeface="DM Sans"/>
-                        </a:rPr>
-                        <a:t>ESP32-C3 + ADS1115 16-bit [B]</a:t>
+                        <a:t>ESP32-C3 + ADS1115 (16-bit)</a:t>
                       </a:r>
                     </a:p>
                   </a:txBody>
@@ -30656,7 +26302,7 @@
                           <a:cs typeface="DM Sans"/>
                           <a:sym typeface="DM Sans"/>
                         </a:rPr>
-                        <a:t>±0.1 °C class sensor</a:t>
+                        <a:t>±0.1 °C class</a:t>
                       </a:r>
                     </a:p>
                   </a:txBody>
@@ -30731,7 +26377,461 @@
                           <a:cs typeface="DM Sans"/>
                           <a:sym typeface="DM Sans"/>
                         </a:rPr>
-                        <a:t>TMP117, I²C (datasheet) [C]</a:t>
+                        <a:t>TMP117, I²C</a:t>
+                      </a:r>
+                    </a:p>
+                  </a:txBody>
+                  <a:tcPr marT="25400" marB="25400" marR="63500" marL="63500" anchor="ctr">
+                    <a:lnL cap="flat" cmpd="sng" w="9525">
+                      <a:solidFill>
+                        <a:srgbClr val="000000">
+                          <a:alpha val="0"/>
+                        </a:srgbClr>
+                      </a:solidFill>
+                      <a:prstDash val="solid"/>
+                      <a:round/>
+                      <a:headEnd len="sm" w="sm" type="none"/>
+                      <a:tailEnd len="sm" w="sm" type="none"/>
+                    </a:lnL>
+                    <a:lnR cap="flat" cmpd="sng" w="9525">
+                      <a:solidFill>
+                        <a:srgbClr val="000000">
+                          <a:alpha val="0"/>
+                        </a:srgbClr>
+                      </a:solidFill>
+                      <a:prstDash val="solid"/>
+                      <a:round/>
+                      <a:headEnd len="sm" w="sm" type="none"/>
+                      <a:tailEnd len="sm" w="sm" type="none"/>
+                    </a:lnR>
+                    <a:lnT cap="flat" cmpd="sng" w="9525">
+                      <a:solidFill>
+                        <a:srgbClr val="000000">
+                          <a:alpha val="0"/>
+                        </a:srgbClr>
+                      </a:solidFill>
+                      <a:prstDash val="solid"/>
+                      <a:round/>
+                      <a:headEnd len="sm" w="sm" type="none"/>
+                      <a:tailEnd len="sm" w="sm" type="none"/>
+                    </a:lnT>
+                    <a:lnB cap="flat" cmpd="sng" w="9525">
+                      <a:solidFill>
+                        <a:srgbClr val="000000">
+                          <a:alpha val="0"/>
+                        </a:srgbClr>
+                      </a:solidFill>
+                      <a:prstDash val="solid"/>
+                      <a:round/>
+                      <a:headEnd len="sm" w="sm" type="none"/>
+                      <a:tailEnd len="sm" w="sm" type="none"/>
+                    </a:lnB>
+                  </a:tcPr>
+                </a:tc>
+              </a:tr>
+              <a:tr h="431350">
+                <a:tc>
+                  <a:txBody>
+                    <a:bodyPr/>
+                    <a:lstStyle/>
+                    <a:p>
+                      <a:pPr indent="0" lvl="0" marL="0" marR="0" rtl="0" algn="l">
+                        <a:spcBef>
+                          <a:spcPts val="0"/>
+                        </a:spcBef>
+                        <a:spcAft>
+                          <a:spcPts val="0"/>
+                        </a:spcAft>
+                        <a:buNone/>
+                      </a:pPr>
+                      <a:r>
+                        <a:rPr b="0" i="0" lang="en-US" sz="937" u="none" cap="none" strike="noStrike">
+                          <a:solidFill>
+                            <a:srgbClr val="334155"/>
+                          </a:solidFill>
+                          <a:latin typeface="DM Sans"/>
+                          <a:ea typeface="DM Sans"/>
+                          <a:cs typeface="DM Sans"/>
+                          <a:sym typeface="DM Sans"/>
+                        </a:rPr>
+                        <a:t>Display</a:t>
+                      </a:r>
+                    </a:p>
+                  </a:txBody>
+                  <a:tcPr marT="25400" marB="25400" marR="63500" marL="63500" anchor="ctr">
+                    <a:lnL cap="flat" cmpd="sng" w="9525">
+                      <a:solidFill>
+                        <a:srgbClr val="000000">
+                          <a:alpha val="0"/>
+                        </a:srgbClr>
+                      </a:solidFill>
+                      <a:prstDash val="solid"/>
+                      <a:round/>
+                      <a:headEnd len="sm" w="sm" type="none"/>
+                      <a:tailEnd len="sm" w="sm" type="none"/>
+                    </a:lnL>
+                    <a:lnR cap="flat" cmpd="sng" w="9525">
+                      <a:solidFill>
+                        <a:srgbClr val="000000">
+                          <a:alpha val="0"/>
+                        </a:srgbClr>
+                      </a:solidFill>
+                      <a:prstDash val="solid"/>
+                      <a:round/>
+                      <a:headEnd len="sm" w="sm" type="none"/>
+                      <a:tailEnd len="sm" w="sm" type="none"/>
+                    </a:lnR>
+                    <a:lnT cap="flat" cmpd="sng" w="9525">
+                      <a:solidFill>
+                        <a:srgbClr val="000000">
+                          <a:alpha val="0"/>
+                        </a:srgbClr>
+                      </a:solidFill>
+                      <a:prstDash val="solid"/>
+                      <a:round/>
+                      <a:headEnd len="sm" w="sm" type="none"/>
+                      <a:tailEnd len="sm" w="sm" type="none"/>
+                    </a:lnT>
+                    <a:lnB cap="flat" cmpd="sng" w="9525">
+                      <a:solidFill>
+                        <a:srgbClr val="000000">
+                          <a:alpha val="0"/>
+                        </a:srgbClr>
+                      </a:solidFill>
+                      <a:prstDash val="solid"/>
+                      <a:round/>
+                      <a:headEnd len="sm" w="sm" type="none"/>
+                      <a:tailEnd len="sm" w="sm" type="none"/>
+                    </a:lnB>
+                  </a:tcPr>
+                </a:tc>
+                <a:tc>
+                  <a:txBody>
+                    <a:bodyPr/>
+                    <a:lstStyle/>
+                    <a:p>
+                      <a:pPr indent="0" lvl="0" marL="0" marR="0" rtl="0" algn="l">
+                        <a:spcBef>
+                          <a:spcPts val="0"/>
+                        </a:spcBef>
+                        <a:spcAft>
+                          <a:spcPts val="0"/>
+                        </a:spcAft>
+                        <a:buNone/>
+                      </a:pPr>
+                      <a:r>
+                        <a:rPr b="0" i="0" lang="en-US" sz="937" u="none" cap="none" strike="noStrike">
+                          <a:solidFill>
+                            <a:srgbClr val="334155"/>
+                          </a:solidFill>
+                          <a:latin typeface="DM Sans"/>
+                          <a:ea typeface="DM Sans"/>
+                          <a:cs typeface="DM Sans"/>
+                          <a:sym typeface="DM Sans"/>
+                        </a:rPr>
+                        <a:t>OK / SOON / CHANGE / LEAK</a:t>
+                      </a:r>
+                    </a:p>
+                  </a:txBody>
+                  <a:tcPr marT="25400" marB="25400" marR="63500" marL="63500" anchor="ctr">
+                    <a:lnL cap="flat" cmpd="sng" w="9525">
+                      <a:solidFill>
+                        <a:srgbClr val="000000">
+                          <a:alpha val="0"/>
+                        </a:srgbClr>
+                      </a:solidFill>
+                      <a:prstDash val="solid"/>
+                      <a:round/>
+                      <a:headEnd len="sm" w="sm" type="none"/>
+                      <a:tailEnd len="sm" w="sm" type="none"/>
+                    </a:lnL>
+                    <a:lnR cap="flat" cmpd="sng" w="9525">
+                      <a:solidFill>
+                        <a:srgbClr val="000000">
+                          <a:alpha val="0"/>
+                        </a:srgbClr>
+                      </a:solidFill>
+                      <a:prstDash val="solid"/>
+                      <a:round/>
+                      <a:headEnd len="sm" w="sm" type="none"/>
+                      <a:tailEnd len="sm" w="sm" type="none"/>
+                    </a:lnR>
+                    <a:lnT cap="flat" cmpd="sng" w="9525">
+                      <a:solidFill>
+                        <a:srgbClr val="000000">
+                          <a:alpha val="0"/>
+                        </a:srgbClr>
+                      </a:solidFill>
+                      <a:prstDash val="solid"/>
+                      <a:round/>
+                      <a:headEnd len="sm" w="sm" type="none"/>
+                      <a:tailEnd len="sm" w="sm" type="none"/>
+                    </a:lnT>
+                    <a:lnB cap="flat" cmpd="sng" w="9525">
+                      <a:solidFill>
+                        <a:srgbClr val="000000">
+                          <a:alpha val="0"/>
+                        </a:srgbClr>
+                      </a:solidFill>
+                      <a:prstDash val="solid"/>
+                      <a:round/>
+                      <a:headEnd len="sm" w="sm" type="none"/>
+                      <a:tailEnd len="sm" w="sm" type="none"/>
+                    </a:lnB>
+                  </a:tcPr>
+                </a:tc>
+                <a:tc>
+                  <a:txBody>
+                    <a:bodyPr/>
+                    <a:lstStyle/>
+                    <a:p>
+                      <a:pPr indent="0" lvl="0" marL="0" marR="0" rtl="0" algn="l">
+                        <a:spcBef>
+                          <a:spcPts val="0"/>
+                        </a:spcBef>
+                        <a:spcAft>
+                          <a:spcPts val="0"/>
+                        </a:spcAft>
+                        <a:buNone/>
+                      </a:pPr>
+                      <a:r>
+                        <a:rPr b="0" i="0" lang="en-US" sz="937" u="none" cap="none" strike="noStrike">
+                          <a:solidFill>
+                            <a:srgbClr val="334155"/>
+                          </a:solidFill>
+                          <a:latin typeface="DM Sans"/>
+                          <a:ea typeface="DM Sans"/>
+                          <a:cs typeface="DM Sans"/>
+                          <a:sym typeface="DM Sans"/>
+                        </a:rPr>
+                        <a:t>USB log now, BLE app next</a:t>
+                      </a:r>
+                    </a:p>
+                  </a:txBody>
+                  <a:tcPr marT="25400" marB="25400" marR="63500" marL="63500" anchor="ctr">
+                    <a:lnL cap="flat" cmpd="sng" w="9525">
+                      <a:solidFill>
+                        <a:srgbClr val="000000">
+                          <a:alpha val="0"/>
+                        </a:srgbClr>
+                      </a:solidFill>
+                      <a:prstDash val="solid"/>
+                      <a:round/>
+                      <a:headEnd len="sm" w="sm" type="none"/>
+                      <a:tailEnd len="sm" w="sm" type="none"/>
+                    </a:lnL>
+                    <a:lnR cap="flat" cmpd="sng" w="9525">
+                      <a:solidFill>
+                        <a:srgbClr val="000000">
+                          <a:alpha val="0"/>
+                        </a:srgbClr>
+                      </a:solidFill>
+                      <a:prstDash val="solid"/>
+                      <a:round/>
+                      <a:headEnd len="sm" w="sm" type="none"/>
+                      <a:tailEnd len="sm" w="sm" type="none"/>
+                    </a:lnR>
+                    <a:lnT cap="flat" cmpd="sng" w="9525">
+                      <a:solidFill>
+                        <a:srgbClr val="000000">
+                          <a:alpha val="0"/>
+                        </a:srgbClr>
+                      </a:solidFill>
+                      <a:prstDash val="solid"/>
+                      <a:round/>
+                      <a:headEnd len="sm" w="sm" type="none"/>
+                      <a:tailEnd len="sm" w="sm" type="none"/>
+                    </a:lnT>
+                    <a:lnB cap="flat" cmpd="sng" w="9525">
+                      <a:solidFill>
+                        <a:srgbClr val="000000">
+                          <a:alpha val="0"/>
+                        </a:srgbClr>
+                      </a:solidFill>
+                      <a:prstDash val="solid"/>
+                      <a:round/>
+                      <a:headEnd len="sm" w="sm" type="none"/>
+                      <a:tailEnd len="sm" w="sm" type="none"/>
+                    </a:lnB>
+                  </a:tcPr>
+                </a:tc>
+              </a:tr>
+              <a:tr h="431350">
+                <a:tc>
+                  <a:txBody>
+                    <a:bodyPr/>
+                    <a:lstStyle/>
+                    <a:p>
+                      <a:pPr indent="0" lvl="0" marL="0" marR="0" rtl="0" algn="l">
+                        <a:spcBef>
+                          <a:spcPts val="0"/>
+                        </a:spcBef>
+                        <a:spcAft>
+                          <a:spcPts val="0"/>
+                        </a:spcAft>
+                        <a:buNone/>
+                      </a:pPr>
+                      <a:r>
+                        <a:rPr b="0" i="0" lang="en-US" sz="937" u="none" cap="none" strike="noStrike">
+                          <a:solidFill>
+                            <a:srgbClr val="334155"/>
+                          </a:solidFill>
+                          <a:latin typeface="DM Sans"/>
+                          <a:ea typeface="DM Sans"/>
+                          <a:cs typeface="DM Sans"/>
+                          <a:sym typeface="DM Sans"/>
+                        </a:rPr>
+                        <a:t>Strip cost</a:t>
+                      </a:r>
+                    </a:p>
+                  </a:txBody>
+                  <a:tcPr marT="25400" marB="25400" marR="63500" marL="63500" anchor="ctr">
+                    <a:lnL cap="flat" cmpd="sng" w="9525">
+                      <a:solidFill>
+                        <a:srgbClr val="000000">
+                          <a:alpha val="0"/>
+                        </a:srgbClr>
+                      </a:solidFill>
+                      <a:prstDash val="solid"/>
+                      <a:round/>
+                      <a:headEnd len="sm" w="sm" type="none"/>
+                      <a:tailEnd len="sm" w="sm" type="none"/>
+                    </a:lnL>
+                    <a:lnR cap="flat" cmpd="sng" w="9525">
+                      <a:solidFill>
+                        <a:srgbClr val="000000">
+                          <a:alpha val="0"/>
+                        </a:srgbClr>
+                      </a:solidFill>
+                      <a:prstDash val="solid"/>
+                      <a:round/>
+                      <a:headEnd len="sm" w="sm" type="none"/>
+                      <a:tailEnd len="sm" w="sm" type="none"/>
+                    </a:lnR>
+                    <a:lnT cap="flat" cmpd="sng" w="9525">
+                      <a:solidFill>
+                        <a:srgbClr val="000000">
+                          <a:alpha val="0"/>
+                        </a:srgbClr>
+                      </a:solidFill>
+                      <a:prstDash val="solid"/>
+                      <a:round/>
+                      <a:headEnd len="sm" w="sm" type="none"/>
+                      <a:tailEnd len="sm" w="sm" type="none"/>
+                    </a:lnT>
+                    <a:lnB cap="flat" cmpd="sng" w="9525">
+                      <a:solidFill>
+                        <a:srgbClr val="000000">
+                          <a:alpha val="0"/>
+                        </a:srgbClr>
+                      </a:solidFill>
+                      <a:prstDash val="solid"/>
+                      <a:round/>
+                      <a:headEnd len="sm" w="sm" type="none"/>
+                      <a:tailEnd len="sm" w="sm" type="none"/>
+                    </a:lnB>
+                  </a:tcPr>
+                </a:tc>
+                <a:tc>
+                  <a:txBody>
+                    <a:bodyPr/>
+                    <a:lstStyle/>
+                    <a:p>
+                      <a:pPr indent="0" lvl="0" marL="0" marR="0" rtl="0" algn="l">
+                        <a:spcBef>
+                          <a:spcPts val="0"/>
+                        </a:spcBef>
+                        <a:spcAft>
+                          <a:spcPts val="0"/>
+                        </a:spcAft>
+                        <a:buNone/>
+                      </a:pPr>
+                      <a:r>
+                        <a:rPr b="0" i="0" lang="en-US" sz="937" u="none" cap="none" strike="noStrike">
+                          <a:solidFill>
+                            <a:srgbClr val="334155"/>
+                          </a:solidFill>
+                          <a:latin typeface="DM Sans"/>
+                          <a:ea typeface="DM Sans"/>
+                          <a:cs typeface="DM Sans"/>
+                          <a:sym typeface="DM Sans"/>
+                        </a:rPr>
+                        <a:t>≤ ₹100 (target)</a:t>
+                      </a:r>
+                    </a:p>
+                  </a:txBody>
+                  <a:tcPr marT="25400" marB="25400" marR="63500" marL="63500" anchor="ctr">
+                    <a:lnL cap="flat" cmpd="sng" w="9525">
+                      <a:solidFill>
+                        <a:srgbClr val="000000">
+                          <a:alpha val="0"/>
+                        </a:srgbClr>
+                      </a:solidFill>
+                      <a:prstDash val="solid"/>
+                      <a:round/>
+                      <a:headEnd len="sm" w="sm" type="none"/>
+                      <a:tailEnd len="sm" w="sm" type="none"/>
+                    </a:lnL>
+                    <a:lnR cap="flat" cmpd="sng" w="9525">
+                      <a:solidFill>
+                        <a:srgbClr val="000000">
+                          <a:alpha val="0"/>
+                        </a:srgbClr>
+                      </a:solidFill>
+                      <a:prstDash val="solid"/>
+                      <a:round/>
+                      <a:headEnd len="sm" w="sm" type="none"/>
+                      <a:tailEnd len="sm" w="sm" type="none"/>
+                    </a:lnR>
+                    <a:lnT cap="flat" cmpd="sng" w="9525">
+                      <a:solidFill>
+                        <a:srgbClr val="000000">
+                          <a:alpha val="0"/>
+                        </a:srgbClr>
+                      </a:solidFill>
+                      <a:prstDash val="solid"/>
+                      <a:round/>
+                      <a:headEnd len="sm" w="sm" type="none"/>
+                      <a:tailEnd len="sm" w="sm" type="none"/>
+                    </a:lnT>
+                    <a:lnB cap="flat" cmpd="sng" w="9525">
+                      <a:solidFill>
+                        <a:srgbClr val="000000">
+                          <a:alpha val="0"/>
+                        </a:srgbClr>
+                      </a:solidFill>
+                      <a:prstDash val="solid"/>
+                      <a:round/>
+                      <a:headEnd len="sm" w="sm" type="none"/>
+                      <a:tailEnd len="sm" w="sm" type="none"/>
+                    </a:lnB>
+                  </a:tcPr>
+                </a:tc>
+                <a:tc>
+                  <a:txBody>
+                    <a:bodyPr/>
+                    <a:lstStyle/>
+                    <a:p>
+                      <a:pPr indent="0" lvl="0" marL="0" marR="0" rtl="0" algn="l">
+                        <a:spcBef>
+                          <a:spcPts val="0"/>
+                        </a:spcBef>
+                        <a:spcAft>
+                          <a:spcPts val="0"/>
+                        </a:spcAft>
+                        <a:buNone/>
+                      </a:pPr>
+                      <a:r>
+                        <a:rPr b="0" i="0" lang="en-US" sz="937" u="none" cap="none" strike="noStrike">
+                          <a:solidFill>
+                            <a:srgbClr val="334155"/>
+                          </a:solidFill>
+                          <a:latin typeface="DM Sans"/>
+                          <a:ea typeface="DM Sans"/>
+                          <a:cs typeface="DM Sans"/>
+                          <a:sym typeface="DM Sans"/>
+                        </a:rPr>
+                        <a:t>One laser pass, no masks</a:t>
                       </a:r>
                     </a:p>
                   </a:txBody>
@@ -30803,7 +26903,7 @@
         <p:spPr>
           <a:xfrm>
             <a:off x="542925" y="965745"/>
-            <a:ext cx="5410200" cy="2409825"/>
+            <a:ext cx="5410200" cy="3794760"/>
           </a:xfrm>
           <a:prstGeom prst="rect">
             <a:avLst/>
@@ -31845,469 +27945,6 @@
         </p:nvPicPr>
         <p:blipFill rotWithShape="1">
           <a:blip r:embed="rId11">
-            <a:alphaModFix/>
-          </a:blip>
-          <a:srcRect b="44466" l="14673" r="15820" t="33074"/>
-          <a:stretch/>
-        </p:blipFill>
-        <p:spPr>
-          <a:xfrm>
-            <a:off x="0" y="6280800"/>
-            <a:ext cx="1786280" cy="577200"/>
-          </a:xfrm>
-          <a:prstGeom prst="rect">
-            <a:avLst/>
-          </a:prstGeom>
-          <a:noFill/>
-          <a:ln>
-            <a:noFill/>
-          </a:ln>
-        </p:spPr>
-      </p:pic>
-    </p:spTree>
-  </p:cSld>
-  <p:clrMapOvr>
-    <a:masterClrMapping/>
-  </p:clrMapOvr>
-</p:sld>
-</file>
-
-<file path=ppt/slides/slide7.xml><?xml version="1.0" encoding="utf-8"?>
-<p:sld xmlns:a="http://schemas.openxmlformats.org/drawingml/2006/main" xmlns:r="http://schemas.openxmlformats.org/officeDocument/2006/relationships" xmlns:mc="http://schemas.openxmlformats.org/markup-compatibility/2006" xmlns:mv="urn:schemas-microsoft-com:mac:vml" xmlns:p="http://schemas.openxmlformats.org/presentationml/2006/main" xmlns:c="http://schemas.openxmlformats.org/drawingml/2006/chart" xmlns:dgm="http://schemas.openxmlformats.org/drawingml/2006/diagram" xmlns:o="urn:schemas-microsoft-com:office:office" xmlns:v="urn:schemas-microsoft-com:vml" xmlns:pvml="urn:schemas-microsoft-com:office:powerpoint" xmlns:com="http://schemas.openxmlformats.org/drawingml/2006/compatibility" xmlns:p14="http://schemas.microsoft.com/office/powerpoint/2010/main" xmlns:p15="http://schemas.microsoft.com/office/powerpoint/2012/main" xmlns:ahyp="http://schemas.microsoft.com/office/drawing/2018/hyperlinkcolor">
-  <p:cSld>
-    <p:bg>
-      <p:bgPr>
-        <a:solidFill>
-          <a:srgbClr val="FFFFFF"/>
-        </a:solidFill>
-      </p:bgPr>
-    </p:bg>
-    <p:spTree>
-      <p:nvGrpSpPr>
-        <p:cNvPr id="217" name="Shape 217"/>
-        <p:cNvGrpSpPr/>
-        <p:nvPr/>
-      </p:nvGrpSpPr>
-      <p:grpSpPr>
-        <a:xfrm>
-          <a:off x="0" y="0"/>
-          <a:ext cx="0" cy="0"/>
-          <a:chOff x="0" y="0"/>
-          <a:chExt cx="0" cy="0"/>
-        </a:xfrm>
-      </p:grpSpPr>
-      <p:pic>
-        <p:nvPicPr>
-          <p:cNvPr descr="image.png" id="218" name="Google Shape;218;p19"/>
-          <p:cNvPicPr preferRelativeResize="0"/>
-          <p:nvPr/>
-        </p:nvPicPr>
-        <p:blipFill rotWithShape="1">
-          <a:blip r:embed="rId3">
-            <a:alphaModFix/>
-          </a:blip>
-          <a:srcRect b="0" l="0" r="0" t="0"/>
-          <a:stretch/>
-        </p:blipFill>
-        <p:spPr>
-          <a:xfrm>
-            <a:off x="6248400" y="1190625"/>
-            <a:ext cx="5372100" cy="4000500"/>
-          </a:xfrm>
-          <a:prstGeom prst="rect">
-            <a:avLst/>
-          </a:prstGeom>
-          <a:noFill/>
-          <a:ln>
-            <a:noFill/>
-          </a:ln>
-        </p:spPr>
-      </p:pic>
-      <p:pic>
-        <p:nvPicPr>
-          <p:cNvPr descr="image.png" id="219" name="Google Shape;219;p19"/>
-          <p:cNvPicPr preferRelativeResize="0"/>
-          <p:nvPr/>
-        </p:nvPicPr>
-        <p:blipFill rotWithShape="1">
-          <a:blip r:embed="rId11">
-            <a:alphaModFix/>
-          </a:blip>
-          <a:srcRect/>
-          <a:stretch/>
-        </p:blipFill>
-        <p:spPr>
-          <a:xfrm>
-            <a:off x="6257925" y="1200150"/>
-            <a:ext cx="5353050" cy="3981450"/>
-          </a:xfrm>
-          <a:prstGeom prst="rect">
-            <a:avLst/>
-          </a:prstGeom>
-          <a:noFill/>
-          <a:ln>
-            <a:noFill/>
-          </a:ln>
-        </p:spPr>
-      </p:pic>
-      <p:sp>
-        <p:nvSpPr>
-          <p:cNvPr id="220" name="Google Shape;220;p19"/>
-          <p:cNvSpPr txBox="1"/>
-          <p:nvPr/>
-        </p:nvSpPr>
-        <p:spPr>
-          <a:xfrm>
-            <a:off x="914400" y="1402378"/>
-            <a:ext cx="5029200" cy="461700"/>
-          </a:xfrm>
-          <a:prstGeom prst="rect">
-            <a:avLst/>
-          </a:prstGeom>
-          <a:noFill/>
-          <a:ln>
-            <a:noFill/>
-          </a:ln>
-        </p:spPr>
-        <p:txBody>
-          <a:bodyPr anchorCtr="0" anchor="t" bIns="0" lIns="0" spcFirstLastPara="1" rIns="0" wrap="square" tIns="0">
-            <a:spAutoFit/>
-          </a:bodyPr>
-          <a:lstStyle/>
-          <a:p>
-            <a:pPr indent="0" lvl="0" marL="0" marR="0" rtl="0" algn="l">
-              <a:lnSpc>
-                <a:spcPct val="150000"/>
-              </a:lnSpc>
-              <a:spcBef>
-                <a:spcPts val="0"/>
-              </a:spcBef>
-              <a:spcAft>
-                <a:spcPts val="0"/>
-              </a:spcAft>
-              <a:buNone/>
-            </a:pPr>
-            <a:r>
-              <a:rPr b="1" i="0" lang="en-US" sz="1200" u="none" cap="none" strike="noStrike">
-                <a:solidFill>
-                  <a:srgbClr val="334155"/>
-                </a:solidFill>
-                <a:latin typeface="Inter"/>
-                <a:ea typeface="Inter"/>
-                <a:cs typeface="Inter"/>
-                <a:sym typeface="Inter"/>
-              </a:rPr>
-              <a:t>Design Assets (now): </a:t>
-            </a:r>
-            <a:r>
-              <a:rPr b="0" i="0" lang="en-US" sz="1200" u="none" cap="none" strike="noStrike">
-                <a:solidFill>
-                  <a:srgbClr val="334155"/>
-                </a:solidFill>
-                <a:latin typeface="Inter"/>
-                <a:ea typeface="Inter"/>
-                <a:cs typeface="Inter"/>
-                <a:sym typeface="Inter"/>
-              </a:rPr>
-              <a:t>parametric laser test coupon (Python → DXF, shown). Strip and test-rig CAD start after line width is measured.</a:t>
-            </a:r>
-          </a:p>
-        </p:txBody>
-      </p:sp>
-      <p:sp>
-        <p:nvSpPr>
-          <p:cNvPr id="221" name="Google Shape;221;p19"/>
-          <p:cNvSpPr txBox="1"/>
-          <p:nvPr/>
-        </p:nvSpPr>
-        <p:spPr>
-          <a:xfrm>
-            <a:off x="914400" y="2011978"/>
-            <a:ext cx="5029200" cy="461700"/>
-          </a:xfrm>
-          <a:prstGeom prst="rect">
-            <a:avLst/>
-          </a:prstGeom>
-          <a:noFill/>
-          <a:ln>
-            <a:noFill/>
-          </a:ln>
-        </p:spPr>
-        <p:txBody>
-          <a:bodyPr anchorCtr="0" anchor="t" bIns="0" lIns="0" spcFirstLastPara="1" rIns="0" wrap="square" tIns="0">
-            <a:spAutoFit/>
-          </a:bodyPr>
-          <a:lstStyle/>
-          <a:p>
-            <a:pPr indent="0" lvl="0" marL="0" marR="0" rtl="0" algn="l">
-              <a:lnSpc>
-                <a:spcPct val="150000"/>
-              </a:lnSpc>
-              <a:spcBef>
-                <a:spcPts val="0"/>
-              </a:spcBef>
-              <a:spcAft>
-                <a:spcPts val="0"/>
-              </a:spcAft>
-              <a:buNone/>
-            </a:pPr>
-            <a:r>
-              <a:rPr b="1" i="0" lang="en-US" sz="1200" u="none" cap="none" strike="noStrike">
-                <a:solidFill>
-                  <a:srgbClr val="334155"/>
-                </a:solidFill>
-                <a:latin typeface="Inter"/>
-                <a:ea typeface="Inter"/>
-                <a:cs typeface="Inter"/>
-                <a:sym typeface="Inter"/>
-              </a:rPr>
-              <a:t>Material Selection: </a:t>
-            </a:r>
-            <a:r>
-              <a:rPr b="0" i="0" lang="en-US" sz="1200" u="none" cap="none" strike="noStrike">
-                <a:solidFill>
-                  <a:srgbClr val="334155"/>
-                </a:solidFill>
-                <a:latin typeface="Inter"/>
-                <a:ea typeface="Inter"/>
-                <a:cs typeface="Inter"/>
-                <a:sym typeface="Inter"/>
-              </a:rPr>
-              <a:t>polyimide (Kapton-type) film, grade and thickness to be measured [B]; polyimide tape to seal traces; no wound contact.</a:t>
-            </a:r>
-          </a:p>
-        </p:txBody>
-      </p:sp>
-      <p:sp>
-        <p:nvSpPr>
-          <p:cNvPr id="222" name="Google Shape;222;p19"/>
-          <p:cNvSpPr txBox="1"/>
-          <p:nvPr/>
-        </p:nvSpPr>
-        <p:spPr>
-          <a:xfrm>
-            <a:off x="914400" y="2621578"/>
-            <a:ext cx="5029200" cy="461700"/>
-          </a:xfrm>
-          <a:prstGeom prst="rect">
-            <a:avLst/>
-          </a:prstGeom>
-          <a:noFill/>
-          <a:ln>
-            <a:noFill/>
-          </a:ln>
-        </p:spPr>
-        <p:txBody>
-          <a:bodyPr anchorCtr="0" anchor="t" bIns="0" lIns="0" spcFirstLastPara="1" rIns="0" wrap="square" tIns="0">
-            <a:spAutoFit/>
-          </a:bodyPr>
-          <a:lstStyle/>
-          <a:p>
-            <a:pPr indent="0" lvl="0" marL="0" marR="0" rtl="0" algn="l">
-              <a:lnSpc>
-                <a:spcPct val="150000"/>
-              </a:lnSpc>
-              <a:spcBef>
-                <a:spcPts val="0"/>
-              </a:spcBef>
-              <a:spcAft>
-                <a:spcPts val="0"/>
-              </a:spcAft>
-              <a:buNone/>
-            </a:pPr>
-            <a:r>
-              <a:rPr b="1" i="0" lang="en-US" sz="1200" u="none" cap="none" strike="noStrike">
-                <a:solidFill>
-                  <a:srgbClr val="334155"/>
-                </a:solidFill>
-                <a:latin typeface="Inter"/>
-                <a:ea typeface="Inter"/>
-                <a:cs typeface="Inter"/>
-                <a:sym typeface="Inter"/>
-              </a:rPr>
-              <a:t>Mechanical Testing: </a:t>
-            </a:r>
-            <a:r>
-              <a:rPr b="0" i="0" lang="en-US" sz="1200" u="none" cap="none" strike="noStrike">
-                <a:solidFill>
-                  <a:srgbClr val="334155"/>
-                </a:solidFill>
-                <a:latin typeface="Inter"/>
-                <a:ea typeface="Inter"/>
-                <a:cs typeface="Inter"/>
-                <a:sym typeface="Inter"/>
-              </a:rPr>
-              <a:t>no FEA claimed; bending durability will be measured (1,000 bends, 10 mm radius), not simulated [B].</a:t>
-            </a:r>
-          </a:p>
-        </p:txBody>
-      </p:sp>
-      <p:pic>
-        <p:nvPicPr>
-          <p:cNvPr descr="image.png" id="223" name="Google Shape;223;p19"/>
-          <p:cNvPicPr preferRelativeResize="0"/>
-          <p:nvPr/>
-        </p:nvPicPr>
-        <p:blipFill rotWithShape="1">
-          <a:blip r:embed="rId5">
-            <a:alphaModFix/>
-          </a:blip>
-          <a:srcRect b="0" l="0" r="0" t="0"/>
-          <a:stretch/>
-        </p:blipFill>
-        <p:spPr>
-          <a:xfrm>
-            <a:off x="571500" y="1416665"/>
-            <a:ext cx="190500" cy="200025"/>
-          </a:xfrm>
-          <a:prstGeom prst="rect">
-            <a:avLst/>
-          </a:prstGeom>
-          <a:noFill/>
-          <a:ln>
-            <a:noFill/>
-          </a:ln>
-        </p:spPr>
-      </p:pic>
-      <p:pic>
-        <p:nvPicPr>
-          <p:cNvPr descr="image.png" id="224" name="Google Shape;224;p19"/>
-          <p:cNvPicPr preferRelativeResize="0"/>
-          <p:nvPr/>
-        </p:nvPicPr>
-        <p:blipFill rotWithShape="1">
-          <a:blip r:embed="rId6">
-            <a:alphaModFix/>
-          </a:blip>
-          <a:srcRect b="0" l="0" r="0" t="0"/>
-          <a:stretch/>
-        </p:blipFill>
-        <p:spPr>
-          <a:xfrm>
-            <a:off x="571500" y="2026265"/>
-            <a:ext cx="190500" cy="200025"/>
-          </a:xfrm>
-          <a:prstGeom prst="rect">
-            <a:avLst/>
-          </a:prstGeom>
-          <a:noFill/>
-          <a:ln>
-            <a:noFill/>
-          </a:ln>
-        </p:spPr>
-      </p:pic>
-      <p:pic>
-        <p:nvPicPr>
-          <p:cNvPr descr="image.png" id="225" name="Google Shape;225;p19"/>
-          <p:cNvPicPr preferRelativeResize="0"/>
-          <p:nvPr/>
-        </p:nvPicPr>
-        <p:blipFill rotWithShape="1">
-          <a:blip r:embed="rId7">
-            <a:alphaModFix/>
-          </a:blip>
-          <a:srcRect b="0" l="0" r="0" t="0"/>
-          <a:stretch/>
-        </p:blipFill>
-        <p:spPr>
-          <a:xfrm>
-            <a:off x="571500" y="2635865"/>
-            <a:ext cx="190500" cy="200025"/>
-          </a:xfrm>
-          <a:prstGeom prst="rect">
-            <a:avLst/>
-          </a:prstGeom>
-          <a:noFill/>
-          <a:ln>
-            <a:noFill/>
-          </a:ln>
-        </p:spPr>
-      </p:pic>
-      <p:sp>
-        <p:nvSpPr>
-          <p:cNvPr id="226" name="Google Shape;226;p19"/>
-          <p:cNvSpPr txBox="1"/>
-          <p:nvPr/>
-        </p:nvSpPr>
-        <p:spPr>
-          <a:xfrm>
-            <a:off x="571500" y="476250"/>
-            <a:ext cx="11601600" cy="392400"/>
-          </a:xfrm>
-          <a:prstGeom prst="rect">
-            <a:avLst/>
-          </a:prstGeom>
-          <a:noFill/>
-          <a:ln>
-            <a:noFill/>
-          </a:ln>
-        </p:spPr>
-        <p:txBody>
-          <a:bodyPr anchorCtr="0" anchor="t" bIns="0" lIns="0" spcFirstLastPara="1" rIns="0" wrap="square" tIns="0">
-            <a:spAutoFit/>
-          </a:bodyPr>
-          <a:lstStyle/>
-          <a:p>
-            <a:pPr indent="0" lvl="0" marL="0" marR="0" rtl="0" algn="l">
-              <a:spcBef>
-                <a:spcPts val="0"/>
-              </a:spcBef>
-              <a:spcAft>
-                <a:spcPts val="0"/>
-              </a:spcAft>
-              <a:buNone/>
-            </a:pPr>
-            <a:r>
-              <a:rPr b="1" i="0" lang="en-US" sz="2550" u="none" cap="none" strike="noStrike">
-                <a:solidFill>
-                  <a:srgbClr val="1E3A8A"/>
-                </a:solidFill>
-                <a:latin typeface="Poppins"/>
-                <a:ea typeface="Poppins"/>
-                <a:cs typeface="Poppins"/>
-                <a:sym typeface="Poppins"/>
-              </a:rPr>
-              <a:t>CAD Design &amp; Mechanical Specs</a:t>
-            </a:r>
-          </a:p>
-        </p:txBody>
-      </p:sp>
-      <p:pic>
-        <p:nvPicPr>
-          <p:cNvPr id="227" name="Google Shape;227;p19" title="MBF_Logo_2020.png"/>
-          <p:cNvPicPr preferRelativeResize="0"/>
-          <p:nvPr/>
-        </p:nvPicPr>
-        <p:blipFill>
-          <a:blip r:embed="rId8">
-            <a:alphaModFix/>
-          </a:blip>
-          <a:stretch>
-            <a:fillRect/>
-          </a:stretch>
-        </p:blipFill>
-        <p:spPr>
-          <a:xfrm>
-            <a:off x="11095194" y="6280800"/>
-            <a:ext cx="1096806" cy="577200"/>
-          </a:xfrm>
-          <a:prstGeom prst="rect">
-            <a:avLst/>
-          </a:prstGeom>
-          <a:noFill/>
-          <a:ln>
-            <a:noFill/>
-          </a:ln>
-        </p:spPr>
-      </p:pic>
-      <p:pic>
-        <p:nvPicPr>
-          <p:cNvPr id="228" name="Google Shape;228;p19" title="VK colored transparent logo.png"/>
-          <p:cNvPicPr preferRelativeResize="0"/>
-          <p:nvPr/>
-        </p:nvPicPr>
-        <p:blipFill rotWithShape="1">
-          <a:blip r:embed="rId9">
             <a:alphaModFix/>
           </a:blip>
           <a:srcRect b="44466" l="14673" r="15820" t="33074"/>
@@ -32456,7 +28093,7 @@
         <p:spPr>
           <a:xfrm>
             <a:off x="533400" y="956220"/>
-            <a:ext cx="5429250" cy="2428875"/>
+            <a:ext cx="5429250" cy="3310128"/>
           </a:xfrm>
           <a:prstGeom prst="rect">
             <a:avLst/>
@@ -32566,7 +28203,7 @@
                 <a:cs typeface="DM Sans"/>
                 <a:sym typeface="DM Sans"/>
               </a:rPr>
-              <a:t>Design Iteration: </a:t>
+              <a:t>Why Process First: </a:t>
             </a:r>
             <a:r>
               <a:rPr b="0" i="0" lang="en-US" sz="937" u="none" cap="none" strike="noStrike">
@@ -32578,7 +28215,7 @@
                 <a:cs typeface="DM Sans"/>
                 <a:sym typeface="DM Sans"/>
               </a:rPr>
-              <a:t>Stage 1 closed-loop electrotherapy bandage re-scoped: the LIG process must be proven first; stimulation deferred.</a:t>
+              <a:t>every graphene sensor needs a repeatable laser recipe, and '12' sits in the low-power range where CO₂ tubes can be unstable⁷.</a:t>
             </a:r>
           </a:p>
         </p:txBody>
@@ -32591,7 +28228,7 @@
         </p:nvSpPr>
         <p:spPr>
           <a:xfrm>
-            <a:off x="533400" y="3432720"/>
+            <a:off x="533400" y="4312449"/>
             <a:ext cx="5429250" cy="158799"/>
           </a:xfrm>
           <a:prstGeom prst="rect">
@@ -32630,7 +28267,7 @@
                 <a:cs typeface="DM Sans"/>
                 <a:sym typeface="DM Sans"/>
               </a:rPr>
-              <a:t>Figure: lig_test_coupon.dxf generated by make_test_pattern.py (real design file; not yet fabricated)</a:t>
+              <a:t>Figure: our laser test coupon (real DXF from make_test_pattern.py) and the E1 settings around 'setting 12'</a:t>
             </a:r>
           </a:p>
         </p:txBody>
@@ -32651,7 +28288,7 @@
         <p:spPr>
           <a:xfrm>
             <a:off x="542925" y="965745"/>
-            <a:ext cx="5410200" cy="2409825"/>
+            <a:ext cx="5410200" cy="3291840"/>
           </a:xfrm>
           <a:prstGeom prst="rect">
             <a:avLst/>
@@ -32733,7 +28370,7 @@
                 <a:cs typeface="DM Sans"/>
                 <a:sym typeface="DM Sans"/>
               </a:rPr>
-              <a:t>Design File &amp; Fabrication Constraints</a:t>
+              <a:t>Design Files &amp; Laser Process Window</a:t>
             </a:r>
           </a:p>
         </p:txBody>
@@ -32797,7 +28434,7 @@
                 <a:cs typeface="DM Sans"/>
                 <a:sym typeface="DM Sans"/>
               </a:rPr>
-              <a:t>6 cells × 3 strips, 2.00 mm wide, 8/16/24 mm long, 4 × 4 mm pads; one closed outline each, no overlaps.</a:t>
+              <a:t>6 cells × 3 graphene strips, 2 mm wide, 8/16/24 mm long; each colour is one laser setting.</a:t>
             </a:r>
           </a:p>
         </p:txBody>
@@ -32849,7 +28486,7 @@
                 <a:cs typeface="DM Sans"/>
                 <a:sym typeface="DM Sans"/>
               </a:rPr>
-              <a:t>Why 3 Lengths: </a:t>
+              <a:t>Measurement Trick: </a:t>
             </a:r>
             <a:r>
               <a:rPr b="0" i="0" lang="en-US" sz="1012" u="none" cap="none" strike="noStrike">
@@ -32861,7 +28498,7 @@
                 <a:cs typeface="DM Sans"/>
                 <a:sym typeface="DM Sans"/>
               </a:rPr>
-              <a:t>R = Rs·L/W + R0; the slope gives sheet resistance, the intercept gives contact resistance.</a:t>
+              <a:t>three lengths separate the graphene's sheet resistance from probe contact resistance, so a multimeter is enough.</a:t>
             </a:r>
           </a:p>
         </p:txBody>
@@ -32913,7 +28550,7 @@
                 <a:cs typeface="DM Sans"/>
                 <a:sym typeface="DM Sans"/>
               </a:rPr>
-              <a:t>Laser Settings: </a:t>
+              <a:t>Reference: </a:t>
             </a:r>
             <a:r>
               <a:rPr b="0" i="0" lang="en-US" sz="1012" u="none" cap="none" strike="noStrike">
@@ -32925,7 +28562,7 @@
                 <a:cs typeface="DM Sans"/>
                 <a:sym typeface="DM Sans"/>
               </a:rPr>
-              <a:t>each colour layer has its own power and speed in LaserCAD; the reference cell appears twice per coupon.</a:t>
+              <a:t>'setting 12', where we saw a graphene-like layer, appears twice per coupon, on 2 days.</a:t>
             </a:r>
           </a:p>
         </p:txBody>
@@ -32977,7 +28614,7 @@
                 <a:cs typeface="DM Sans"/>
                 <a:sym typeface="DM Sans"/>
               </a:rPr>
-              <a:t>Not Final: </a:t>
+              <a:t>Accept Rule: </a:t>
             </a:r>
             <a:r>
               <a:rPr b="0" i="0" lang="en-US" sz="1012" u="none" cap="none" strike="noStrike">
@@ -32989,7 +28626,7 @@
                 <a:cs typeface="DM Sans"/>
                 <a:sym typeface="DM Sans"/>
               </a:rPr>
-              <a:t>sensor-strip gaps and pads depend on measured line growth and the minimum isolating gap [B].</a:t>
+              <a:t>the recipe passes if sheet resistance varies ≤ 20 % between runs, fixed before testing.</a:t>
             </a:r>
           </a:p>
         </p:txBody>
@@ -33041,7 +28678,7 @@
                 <a:cs typeface="DM Sans"/>
                 <a:sym typeface="DM Sans"/>
               </a:rPr>
-              <a:t>Next CAD (SolidWorks): </a:t>
+              <a:t>Next in SolidWorks: </a:t>
             </a:r>
             <a:r>
               <a:rPr b="0" i="0" lang="en-US" sz="1012" u="none" cap="none" strike="noStrike">
@@ -33053,7 +28690,7 @@
                 <a:cs typeface="DM Sans"/>
                 <a:sym typeface="DM Sans"/>
               </a:rPr>
-              <a:t>laser alignment plate, bending jig and dressing test rig, after E1 gives real dimensions.</a:t>
+              <a:t>zone strip, clip-on reader and dressing test rig, sized from E1's measured line width.</a:t>
             </a:r>
           </a:p>
         </p:txBody>
@@ -33359,469 +28996,6 @@
         </p:nvPicPr>
         <p:blipFill rotWithShape="1">
           <a:blip r:embed="rId11">
-            <a:alphaModFix/>
-          </a:blip>
-          <a:srcRect b="44466" l="14673" r="15820" t="33074"/>
-          <a:stretch/>
-        </p:blipFill>
-        <p:spPr>
-          <a:xfrm>
-            <a:off x="0" y="6280800"/>
-            <a:ext cx="1786280" cy="577200"/>
-          </a:xfrm>
-          <a:prstGeom prst="rect">
-            <a:avLst/>
-          </a:prstGeom>
-          <a:noFill/>
-          <a:ln>
-            <a:noFill/>
-          </a:ln>
-        </p:spPr>
-      </p:pic>
-    </p:spTree>
-  </p:cSld>
-  <p:clrMapOvr>
-    <a:masterClrMapping/>
-  </p:clrMapOvr>
-</p:sld>
-</file>
-
-<file path=ppt/slides/slide9.xml><?xml version="1.0" encoding="utf-8"?>
-<p:sld xmlns:a="http://schemas.openxmlformats.org/drawingml/2006/main" xmlns:r="http://schemas.openxmlformats.org/officeDocument/2006/relationships" xmlns:mc="http://schemas.openxmlformats.org/markup-compatibility/2006" xmlns:mv="urn:schemas-microsoft-com:mac:vml" xmlns:p="http://schemas.openxmlformats.org/presentationml/2006/main" xmlns:c="http://schemas.openxmlformats.org/drawingml/2006/chart" xmlns:dgm="http://schemas.openxmlformats.org/drawingml/2006/diagram" xmlns:o="urn:schemas-microsoft-com:office:office" xmlns:v="urn:schemas-microsoft-com:vml" xmlns:pvml="urn:schemas-microsoft-com:office:powerpoint" xmlns:com="http://schemas.openxmlformats.org/drawingml/2006/compatibility" xmlns:p14="http://schemas.microsoft.com/office/powerpoint/2010/main" xmlns:p15="http://schemas.microsoft.com/office/powerpoint/2012/main" xmlns:ahyp="http://schemas.microsoft.com/office/drawing/2018/hyperlinkcolor">
-  <p:cSld>
-    <p:bg>
-      <p:bgPr>
-        <a:solidFill>
-          <a:srgbClr val="FFFFFF"/>
-        </a:solidFill>
-      </p:bgPr>
-    </p:bg>
-    <p:spTree>
-      <p:nvGrpSpPr>
-        <p:cNvPr id="260" name="Shape 260"/>
-        <p:cNvGrpSpPr/>
-        <p:nvPr/>
-      </p:nvGrpSpPr>
-      <p:grpSpPr>
-        <a:xfrm>
-          <a:off x="0" y="0"/>
-          <a:ext cx="0" cy="0"/>
-          <a:chOff x="0" y="0"/>
-          <a:chExt cx="0" cy="0"/>
-        </a:xfrm>
-      </p:grpSpPr>
-      <p:pic>
-        <p:nvPicPr>
-          <p:cNvPr descr="image.png" id="261" name="Google Shape;261;p21"/>
-          <p:cNvPicPr preferRelativeResize="0"/>
-          <p:nvPr/>
-        </p:nvPicPr>
-        <p:blipFill rotWithShape="1">
-          <a:blip r:embed="rId3">
-            <a:alphaModFix/>
-          </a:blip>
-          <a:srcRect b="0" l="0" r="0" t="0"/>
-          <a:stretch/>
-        </p:blipFill>
-        <p:spPr>
-          <a:xfrm>
-            <a:off x="571500" y="1190625"/>
-            <a:ext cx="5372100" cy="4000500"/>
-          </a:xfrm>
-          <a:prstGeom prst="rect">
-            <a:avLst/>
-          </a:prstGeom>
-          <a:noFill/>
-          <a:ln>
-            <a:noFill/>
-          </a:ln>
-        </p:spPr>
-      </p:pic>
-      <p:pic>
-        <p:nvPicPr>
-          <p:cNvPr descr="image.png" id="262" name="Google Shape;262;p21"/>
-          <p:cNvPicPr preferRelativeResize="0"/>
-          <p:nvPr/>
-        </p:nvPicPr>
-        <p:blipFill rotWithShape="1">
-          <a:blip r:embed="rId11">
-            <a:alphaModFix/>
-          </a:blip>
-          <a:srcRect/>
-          <a:stretch/>
-        </p:blipFill>
-        <p:spPr>
-          <a:xfrm>
-            <a:off x="581025" y="1200150"/>
-            <a:ext cx="5353050" cy="3981450"/>
-          </a:xfrm>
-          <a:prstGeom prst="rect">
-            <a:avLst/>
-          </a:prstGeom>
-          <a:noFill/>
-          <a:ln>
-            <a:noFill/>
-          </a:ln>
-        </p:spPr>
-      </p:pic>
-      <p:sp>
-        <p:nvSpPr>
-          <p:cNvPr id="263" name="Google Shape;263;p21"/>
-          <p:cNvSpPr txBox="1"/>
-          <p:nvPr/>
-        </p:nvSpPr>
-        <p:spPr>
-          <a:xfrm>
-            <a:off x="6591300" y="1451262"/>
-            <a:ext cx="5029200" cy="461700"/>
-          </a:xfrm>
-          <a:prstGeom prst="rect">
-            <a:avLst/>
-          </a:prstGeom>
-          <a:noFill/>
-          <a:ln>
-            <a:noFill/>
-          </a:ln>
-        </p:spPr>
-        <p:txBody>
-          <a:bodyPr anchorCtr="0" anchor="t" bIns="0" lIns="0" spcFirstLastPara="1" rIns="0" wrap="square" tIns="0">
-            <a:spAutoFit/>
-          </a:bodyPr>
-          <a:lstStyle/>
-          <a:p>
-            <a:pPr indent="0" lvl="0" marL="0" marR="0" rtl="0" algn="l">
-              <a:lnSpc>
-                <a:spcPct val="150000"/>
-              </a:lnSpc>
-              <a:spcBef>
-                <a:spcPts val="0"/>
-              </a:spcBef>
-              <a:spcAft>
-                <a:spcPts val="0"/>
-              </a:spcAft>
-              <a:buNone/>
-            </a:pPr>
-            <a:r>
-              <a:rPr b="1" i="0" lang="en-US" sz="1200" u="none" cap="none" strike="noStrike">
-                <a:solidFill>
-                  <a:srgbClr val="334155"/>
-                </a:solidFill>
-                <a:latin typeface="Inter"/>
-                <a:ea typeface="Inter"/>
-                <a:cs typeface="Inter"/>
-                <a:sym typeface="Inter"/>
-              </a:rPr>
-              <a:t>Circuit Schematics: </a:t>
-            </a:r>
-            <a:r>
-              <a:rPr b="0" i="0" lang="en-US" sz="1200" u="none" cap="none" strike="noStrike">
-                <a:solidFill>
-                  <a:srgbClr val="334155"/>
-                </a:solidFill>
-                <a:latin typeface="Inter"/>
-                <a:ea typeface="Inter"/>
-                <a:cs typeface="Inter"/>
-                <a:sym typeface="Inter"/>
-              </a:rPr>
-              <a:t>Stage 2 needs no custom circuit (2-wire multimeter per strip). Planned zone readout shown; not yet built.</a:t>
-            </a:r>
-          </a:p>
-        </p:txBody>
-      </p:sp>
-      <p:sp>
-        <p:nvSpPr>
-          <p:cNvPr id="264" name="Google Shape;264;p21"/>
-          <p:cNvSpPr txBox="1"/>
-          <p:nvPr/>
-        </p:nvSpPr>
-        <p:spPr>
-          <a:xfrm>
-            <a:off x="6591300" y="2060862"/>
-            <a:ext cx="5029200" cy="461700"/>
-          </a:xfrm>
-          <a:prstGeom prst="rect">
-            <a:avLst/>
-          </a:prstGeom>
-          <a:noFill/>
-          <a:ln>
-            <a:noFill/>
-          </a:ln>
-        </p:spPr>
-        <p:txBody>
-          <a:bodyPr anchorCtr="0" anchor="t" bIns="0" lIns="0" spcFirstLastPara="1" rIns="0" wrap="square" tIns="0">
-            <a:spAutoFit/>
-          </a:bodyPr>
-          <a:lstStyle/>
-          <a:p>
-            <a:pPr indent="0" lvl="0" marL="0" marR="0" rtl="0" algn="l">
-              <a:lnSpc>
-                <a:spcPct val="150000"/>
-              </a:lnSpc>
-              <a:spcBef>
-                <a:spcPts val="0"/>
-              </a:spcBef>
-              <a:spcAft>
-                <a:spcPts val="0"/>
-              </a:spcAft>
-              <a:buNone/>
-            </a:pPr>
-            <a:r>
-              <a:rPr b="1" i="0" lang="en-US" sz="1200" u="none" cap="none" strike="noStrike">
-                <a:solidFill>
-                  <a:srgbClr val="334155"/>
-                </a:solidFill>
-                <a:latin typeface="Inter"/>
-                <a:ea typeface="Inter"/>
-                <a:cs typeface="Inter"/>
-                <a:sym typeface="Inter"/>
-              </a:rPr>
-              <a:t>Itemized BOM Table: </a:t>
-            </a:r>
-            <a:r>
-              <a:rPr b="0" i="0" lang="en-US" sz="1200" u="none" cap="none" strike="noStrike">
-                <a:solidFill>
-                  <a:srgbClr val="334155"/>
-                </a:solidFill>
-                <a:latin typeface="Inter"/>
-                <a:ea typeface="Inter"/>
-                <a:cs typeface="Inter"/>
-                <a:sym typeface="Inter"/>
-              </a:rPr>
-              <a:t>next slide; characterisation + readout ≈ ₹1.7–3.6k (estimates), excluding film.</a:t>
-            </a:r>
-          </a:p>
-        </p:txBody>
-      </p:sp>
-      <p:sp>
-        <p:nvSpPr>
-          <p:cNvPr id="265" name="Google Shape;265;p21"/>
-          <p:cNvSpPr txBox="1"/>
-          <p:nvPr/>
-        </p:nvSpPr>
-        <p:spPr>
-          <a:xfrm>
-            <a:off x="6591300" y="2670462"/>
-            <a:ext cx="5029200" cy="461700"/>
-          </a:xfrm>
-          <a:prstGeom prst="rect">
-            <a:avLst/>
-          </a:prstGeom>
-          <a:noFill/>
-          <a:ln>
-            <a:noFill/>
-          </a:ln>
-        </p:spPr>
-        <p:txBody>
-          <a:bodyPr anchorCtr="0" anchor="t" bIns="0" lIns="0" spcFirstLastPara="1" rIns="0" wrap="square" tIns="0">
-            <a:spAutoFit/>
-          </a:bodyPr>
-          <a:lstStyle/>
-          <a:p>
-            <a:pPr indent="0" lvl="0" marL="0" marR="0" rtl="0" algn="l">
-              <a:lnSpc>
-                <a:spcPct val="150000"/>
-              </a:lnSpc>
-              <a:spcBef>
-                <a:spcPts val="0"/>
-              </a:spcBef>
-              <a:spcAft>
-                <a:spcPts val="0"/>
-              </a:spcAft>
-              <a:buNone/>
-            </a:pPr>
-            <a:r>
-              <a:rPr b="1" i="0" lang="en-US" sz="1200" u="none" cap="none" strike="noStrike">
-                <a:solidFill>
-                  <a:srgbClr val="334155"/>
-                </a:solidFill>
-                <a:latin typeface="Inter"/>
-                <a:ea typeface="Inter"/>
-                <a:cs typeface="Inter"/>
-                <a:sym typeface="Inter"/>
-              </a:rPr>
-              <a:t>Procurement Sourcing: </a:t>
-            </a:r>
-            <a:r>
-              <a:rPr b="0" i="0" lang="en-US" sz="1200" u="none" cap="none" strike="noStrike">
-                <a:solidFill>
-                  <a:srgbClr val="334155"/>
-                </a:solidFill>
-                <a:latin typeface="Inter"/>
-                <a:ea typeface="Inter"/>
-                <a:cs typeface="Inter"/>
-                <a:sym typeface="Inter"/>
-              </a:rPr>
-              <a:t>nothing ordered, no quotations yet; prices are estimates or public listings seen on 14 Oct 2026.</a:t>
-            </a:r>
-          </a:p>
-        </p:txBody>
-      </p:sp>
-      <p:pic>
-        <p:nvPicPr>
-          <p:cNvPr descr="image.png" id="266" name="Google Shape;266;p21"/>
-          <p:cNvPicPr preferRelativeResize="0"/>
-          <p:nvPr/>
-        </p:nvPicPr>
-        <p:blipFill rotWithShape="1">
-          <a:blip r:embed="rId5">
-            <a:alphaModFix/>
-          </a:blip>
-          <a:srcRect b="0" l="0" r="0" t="0"/>
-          <a:stretch/>
-        </p:blipFill>
-        <p:spPr>
-          <a:xfrm>
-            <a:off x="6248400" y="1465549"/>
-            <a:ext cx="219075" cy="200025"/>
-          </a:xfrm>
-          <a:prstGeom prst="rect">
-            <a:avLst/>
-          </a:prstGeom>
-          <a:noFill/>
-          <a:ln>
-            <a:noFill/>
-          </a:ln>
-        </p:spPr>
-      </p:pic>
-      <p:pic>
-        <p:nvPicPr>
-          <p:cNvPr descr="image.png" id="267" name="Google Shape;267;p21"/>
-          <p:cNvPicPr preferRelativeResize="0"/>
-          <p:nvPr/>
-        </p:nvPicPr>
-        <p:blipFill rotWithShape="1">
-          <a:blip r:embed="rId6">
-            <a:alphaModFix/>
-          </a:blip>
-          <a:srcRect b="0" l="0" r="0" t="0"/>
-          <a:stretch/>
-        </p:blipFill>
-        <p:spPr>
-          <a:xfrm>
-            <a:off x="6248400" y="2075149"/>
-            <a:ext cx="190500" cy="200025"/>
-          </a:xfrm>
-          <a:prstGeom prst="rect">
-            <a:avLst/>
-          </a:prstGeom>
-          <a:noFill/>
-          <a:ln>
-            <a:noFill/>
-          </a:ln>
-        </p:spPr>
-      </p:pic>
-      <p:pic>
-        <p:nvPicPr>
-          <p:cNvPr descr="image.png" id="268" name="Google Shape;268;p21"/>
-          <p:cNvPicPr preferRelativeResize="0"/>
-          <p:nvPr/>
-        </p:nvPicPr>
-        <p:blipFill rotWithShape="1">
-          <a:blip r:embed="rId7">
-            <a:alphaModFix/>
-          </a:blip>
-          <a:srcRect b="0" l="0" r="0" t="0"/>
-          <a:stretch/>
-        </p:blipFill>
-        <p:spPr>
-          <a:xfrm>
-            <a:off x="6248400" y="2684749"/>
-            <a:ext cx="238125" cy="200025"/>
-          </a:xfrm>
-          <a:prstGeom prst="rect">
-            <a:avLst/>
-          </a:prstGeom>
-          <a:noFill/>
-          <a:ln>
-            <a:noFill/>
-          </a:ln>
-        </p:spPr>
-      </p:pic>
-      <p:sp>
-        <p:nvSpPr>
-          <p:cNvPr id="269" name="Google Shape;269;p21"/>
-          <p:cNvSpPr txBox="1"/>
-          <p:nvPr/>
-        </p:nvSpPr>
-        <p:spPr>
-          <a:xfrm>
-            <a:off x="571500" y="476250"/>
-            <a:ext cx="11601600" cy="392400"/>
-          </a:xfrm>
-          <a:prstGeom prst="rect">
-            <a:avLst/>
-          </a:prstGeom>
-          <a:noFill/>
-          <a:ln>
-            <a:noFill/>
-          </a:ln>
-        </p:spPr>
-        <p:txBody>
-          <a:bodyPr anchorCtr="0" anchor="t" bIns="0" lIns="0" spcFirstLastPara="1" rIns="0" wrap="square" tIns="0">
-            <a:spAutoFit/>
-          </a:bodyPr>
-          <a:lstStyle/>
-          <a:p>
-            <a:pPr indent="0" lvl="0" marL="0" marR="0" rtl="0" algn="l">
-              <a:spcBef>
-                <a:spcPts val="0"/>
-              </a:spcBef>
-              <a:spcAft>
-                <a:spcPts val="0"/>
-              </a:spcAft>
-              <a:buNone/>
-            </a:pPr>
-            <a:r>
-              <a:rPr b="1" i="0" lang="en-US" sz="2550" u="none" cap="none" strike="noStrike">
-                <a:solidFill>
-                  <a:srgbClr val="1E3A8A"/>
-                </a:solidFill>
-                <a:latin typeface="Poppins"/>
-                <a:ea typeface="Poppins"/>
-                <a:cs typeface="Poppins"/>
-                <a:sym typeface="Poppins"/>
-              </a:rPr>
-              <a:t>Electronics Schematics &amp; BOM</a:t>
-            </a:r>
-          </a:p>
-        </p:txBody>
-      </p:sp>
-      <p:pic>
-        <p:nvPicPr>
-          <p:cNvPr id="270" name="Google Shape;270;p21" title="MBF_Logo_2020.png"/>
-          <p:cNvPicPr preferRelativeResize="0"/>
-          <p:nvPr/>
-        </p:nvPicPr>
-        <p:blipFill>
-          <a:blip r:embed="rId8">
-            <a:alphaModFix/>
-          </a:blip>
-          <a:stretch>
-            <a:fillRect/>
-          </a:stretch>
-        </p:blipFill>
-        <p:spPr>
-          <a:xfrm>
-            <a:off x="11095194" y="6280800"/>
-            <a:ext cx="1096806" cy="577200"/>
-          </a:xfrm>
-          <a:prstGeom prst="rect">
-            <a:avLst/>
-          </a:prstGeom>
-          <a:noFill/>
-          <a:ln>
-            <a:noFill/>
-          </a:ln>
-        </p:spPr>
-      </p:pic>
-      <p:pic>
-        <p:nvPicPr>
-          <p:cNvPr id="271" name="Google Shape;271;p21" title="VK colored transparent logo.png"/>
-          <p:cNvPicPr preferRelativeResize="0"/>
-          <p:nvPr/>
-        </p:nvPicPr>
-        <p:blipFill rotWithShape="1">
-          <a:blip r:embed="rId9">
             <a:alphaModFix/>
           </a:blip>
           <a:srcRect b="44466" l="14673" r="15820" t="33074"/>
